--- a/report/presentation/bean_leaf_presentation.pptx
+++ b/report/presentation/bean_leaf_presentation.pptx
@@ -2,24 +2,24 @@
 <file path=ppt/presentation.xml><?xml version="1.0" encoding="utf-8"?>
 <p:presentation xmlns:p="http://schemas.openxmlformats.org/presentationml/2006/main">
   <p:sldMasterIdLst>
-    <p:sldMasterId xmlns:r="http://schemas.openxmlformats.org/officeDocument/2006/relationships" id="2147483648" r:id="R8e4c66e5b0694023"/>
+    <p:sldMasterId xmlns:r="http://schemas.openxmlformats.org/officeDocument/2006/relationships" id="2147483648" r:id="R1fd6c3489d01442f"/>
   </p:sldMasterIdLst>
   <p:notesMasterIdLst>
-    <p:notesMasterId xmlns:r="http://schemas.openxmlformats.org/officeDocument/2006/relationships" r:id="R8e92ec5567384e42"/>
+    <p:notesMasterId xmlns:r="http://schemas.openxmlformats.org/officeDocument/2006/relationships" r:id="R829207944af348e6"/>
   </p:notesMasterIdLst>
   <p:sldIdLst>
-    <p:sldId xmlns:r="http://schemas.openxmlformats.org/officeDocument/2006/relationships" id="256" r:id="R67668c4ca5d04925"/>
-    <p:sldId xmlns:r="http://schemas.openxmlformats.org/officeDocument/2006/relationships" id="257" r:id="Ref59a83824294b18"/>
-    <p:sldId xmlns:r="http://schemas.openxmlformats.org/officeDocument/2006/relationships" id="258" r:id="R0578868492e844da"/>
-    <p:sldId xmlns:r="http://schemas.openxmlformats.org/officeDocument/2006/relationships" id="259" r:id="R9db46ed2e0994dae"/>
-    <p:sldId xmlns:r="http://schemas.openxmlformats.org/officeDocument/2006/relationships" id="260" r:id="R957345c395984a21"/>
-    <p:sldId xmlns:r="http://schemas.openxmlformats.org/officeDocument/2006/relationships" id="261" r:id="Rc9f7ab6785684d6a"/>
-    <p:sldId xmlns:r="http://schemas.openxmlformats.org/officeDocument/2006/relationships" id="262" r:id="Rd045054ff13649ed"/>
-    <p:sldId xmlns:r="http://schemas.openxmlformats.org/officeDocument/2006/relationships" id="263" r:id="R9dd53a98e50b40c5"/>
-    <p:sldId xmlns:r="http://schemas.openxmlformats.org/officeDocument/2006/relationships" id="264" r:id="R7b2cab35e06444ad"/>
-    <p:sldId xmlns:r="http://schemas.openxmlformats.org/officeDocument/2006/relationships" id="265" r:id="R554aa00205bf4bdb"/>
-    <p:sldId xmlns:r="http://schemas.openxmlformats.org/officeDocument/2006/relationships" id="266" r:id="R9ece6602a3b245ee"/>
-    <p:sldId xmlns:r="http://schemas.openxmlformats.org/officeDocument/2006/relationships" id="267" r:id="R4f416f587d0a4bba"/>
+    <p:sldId xmlns:r="http://schemas.openxmlformats.org/officeDocument/2006/relationships" id="256" r:id="Rc6b8d72aaaaa40e2"/>
+    <p:sldId xmlns:r="http://schemas.openxmlformats.org/officeDocument/2006/relationships" id="257" r:id="R57a1cabfd5ad4606"/>
+    <p:sldId xmlns:r="http://schemas.openxmlformats.org/officeDocument/2006/relationships" id="258" r:id="Re4a416ec78194903"/>
+    <p:sldId xmlns:r="http://schemas.openxmlformats.org/officeDocument/2006/relationships" id="259" r:id="Rde964652203a419d"/>
+    <p:sldId xmlns:r="http://schemas.openxmlformats.org/officeDocument/2006/relationships" id="260" r:id="R72c4c44913694afe"/>
+    <p:sldId xmlns:r="http://schemas.openxmlformats.org/officeDocument/2006/relationships" id="261" r:id="R8b97d69c6afa4ad2"/>
+    <p:sldId xmlns:r="http://schemas.openxmlformats.org/officeDocument/2006/relationships" id="262" r:id="R965f5c467e1c4cbd"/>
+    <p:sldId xmlns:r="http://schemas.openxmlformats.org/officeDocument/2006/relationships" id="263" r:id="Re468cf380919413a"/>
+    <p:sldId xmlns:r="http://schemas.openxmlformats.org/officeDocument/2006/relationships" id="264" r:id="R27f42ee924914a6a"/>
+    <p:sldId xmlns:r="http://schemas.openxmlformats.org/officeDocument/2006/relationships" id="265" r:id="R032bf380d801423a"/>
+    <p:sldId xmlns:r="http://schemas.openxmlformats.org/officeDocument/2006/relationships" id="266" r:id="R72f77382fc124b71"/>
+    <p:sldId xmlns:r="http://schemas.openxmlformats.org/officeDocument/2006/relationships" id="267" r:id="R63ebcc9daac24e52"/>
   </p:sldIdLst>
   <p:sldSz cx="12192000" cy="6858000"/>
   <p:notesSz cx="6858000" cy="9144000"/>
@@ -868,7 +868,7 @@
           <a:lstStyle xmlns:a="http://schemas.openxmlformats.org/drawingml/2006/main"/>
           <a:p xmlns:a="http://schemas.openxmlformats.org/drawingml/2006/main">
             <a:r>
-              <a:t>The task has three labels: angular leaf spot, bean rust and healthy. These are real smartphone photographs from Ugandan fields, so the backgrounds, hands and lighting vary. That makes the task useful for testing transfer learning with relatively little labelled data. The audited release contains 1,295 images. I kept the published training, validation and test split. There were no corrupt files or exact duplicates. However, there are no plant or farm identifiers, so the split cannot guarantee that every test image comes from an independent farm.</a:t>
+              <a:t>The task has three labels: angular leaf spot, bean rust and healthy. The photographs come from Ugandan fields, with varied backgrounds and lighting. The audited release contains 1,295 images. I kept the published split: 1,034 training, 133 validation and 128 test images. Every split contains all three classes. There were no corrupt files or exact duplicates. However, farm and plant identifiers are unavailable, so we cannot verify that the test images come from separate farms.</a:t>
             </a:r>
           </a:p>
           <a:p xmlns:a="http://schemas.openxmlformats.org/drawingml/2006/main">
@@ -963,7 +963,7 @@
           <a:lstStyle xmlns:a="http://schemas.openxmlformats.org/drawingml/2006/main"/>
           <a:p xmlns:a="http://schemas.openxmlformats.org/drawingml/2006/main">
             <a:r>
-              <a:t>Both models start from public pretrained weights. SigLIP 2 is a 2025 vision-language model, but this experiment uses only its image encoder. DINOv2 is the smaller 2023 comparator. Each gets a new three-class classifier. In the frozen setting, only that classifier learns. In the partial setting, the final two transformer blocks and final normalisation also learn. Both models use 224-pixel images, model-specific normalisation, and matching flips and rotations. I ran three seeds for each setting, giving twelve runs, with early stopping based on validation macro-F1. The settings compare these systems, rather than each model’s best possible performance.</a:t>
+              <a:t>Both models start from public pretrained weights. The encoder turns image pixels into numerical features. A new classifier uses those features to predict the three labels. Frozen training changes only the classifier weights. Partial fine-tuning also changes the final two encoder blocks and final normalisation. Each setting starts again from the original pretrained checkpoint. SigLIP 2 supports text, but this experiment uses only its image encoder. Both models receive 224-pixel images with matching flips and rotations. Three seeds for each model and setting give twelve runs. Validation performance selects the saved model in each run.</a:t>
             </a:r>
           </a:p>
           <a:p xmlns:a="http://schemas.openxmlformats.org/drawingml/2006/main">
@@ -1063,7 +1063,7 @@
           <a:lstStyle xmlns:a="http://schemas.openxmlformats.org/drawingml/2006/main"/>
           <a:p xmlns:a="http://schemas.openxmlformats.org/drawingml/2006/main">
             <a:r>
-              <a:t>Macro-F1 gives each class equal weight. The frozen results are where the models differ most: DINOv2 reaches 90.71 percent, while SigLIP 2 reaches 96.90 percent, a gain of 6.18 percentage points. After partial fine-tuning, both average 96.90 percent. That is a practical tie in these runs, not proof that the models are equivalent. DINOv2 also has a smaller memory footprint. The test set has only 128 images, and earlier DINOv2 test results were already known, so this is an exploratory comparison. The reference paired confidence interval includes zero. The backup table contains the seed variation and timing details.</a:t>
+              <a:t>Macro-F1 gives each class equal weight. With frozen encoders, DINOv2 reaches 90.71 percent and SigLIP 2 reaches 96.90 percent, a difference of 6.18 percentage points. After partial fine-tuning, both average 96.90 percent. The three-seed means are practically tied, although that does not prove the models are equivalent. DINOv2 uses less allocated GPU memory. There are only 128 test images, and earlier DINOv2 results on this test set were already known. The comparison is therefore exploratory. The reference confidence interval includes zero, and the backup table shows the variation across runs.</a:t>
             </a:r>
           </a:p>
           <a:p xmlns:a="http://schemas.openxmlformats.org/drawingml/2006/main">
@@ -1153,7 +1153,7 @@
           <a:lstStyle xmlns:a="http://schemas.openxmlformats.org/drawingml/2006/main"/>
           <a:p xmlns:a="http://schemas.openxmlformats.org/drawingml/2006/main">
             <a:r>
-              <a:t>I also checked overfitting. This example is the partial SigLIP run with seed seventeen. Training loss generally falls, but validation loss jumps near the end. The selected checkpoint is epoch six, before that deterioration, because validation macro-F1 determines selection. Across selected checkpoints, the average clean training-to-test F1 gap is 1.27 points for DINOv2 and 2.01 for SigLIP. Those small gaps are useful diagnostics, but they do not prove an absence of overfitting. Validation already influenced checkpoint selection, and the project has no independent farm-level evaluation. The full results retain every seed’s learning history.</a:t>
+              <a:t>I also checked for overfitting. This graph shows the partial SigLIP run with seed seventeen. Training loss generally falls, but validation loss rises sharply near the end. Validation macro-F1 selected epoch six, so that earlier version was retained. Across the selected runs, the clean training-to-test F1 gap averages 1.27 points for DINOv2 and 2.01 for SigLIP. Those gaps do not rule out overfitting, because validation already influenced model selection. Evaluation on images from independent farms would provide a stronger check.</a:t>
             </a:r>
           </a:p>
           <a:p xmlns:a="http://schemas.openxmlformats.org/drawingml/2006/main">
@@ -1243,7 +1243,7 @@
           <a:lstStyle xmlns:a="http://schemas.openxmlformats.org/drawingml/2006/main"/>
           <a:p xmlns:a="http://schemas.openxmlformats.org/drawingml/2006/main">
             <a:r>
-              <a:t>These two images show why a high average score is not enough. Both labels are angular leaf spot, but SigLIP predicts rust. One wrong prediction has 98.65 percent confidence. Confusing disease types could lead to an unsuitable intervention. Missing disease could delay advice, while false alarms could add unnecessary cost. The dataset also covers only three labels in one collection, with no evidence of equal performance across farms, devices or regions. Other damage still gets forced into those labels. A future application would need independent field testing, a validated referral policy and agricultural expert review. It should not prescribe treatment automatically.</a:t>
+              <a:t>Both photographs are labelled angular leaf spot, but SigLIP predicts rust. One wrong prediction has 98.65 percent confidence. A wrong disease label could lead to the wrong treatment. Missing disease could delay advice, while false alarms could add unnecessary cost. Other diseases or nutrient problems would still be forced into these three labels. We also lack evidence of equal performance across farms and devices. Phone quality and access to advice could affect who benefits. A future application needs independent field testing and expert review, with a validated way to refer uncertain cases rather than automatically prescribe treatment.</a:t>
             </a:r>
           </a:p>
           <a:p xmlns:a="http://schemas.openxmlformats.org/drawingml/2006/main">
@@ -1343,7 +1343,7 @@
           <a:lstStyle xmlns:a="http://schemas.openxmlformats.org/drawingml/2006/main"/>
           <a:p xmlns:a="http://schemas.openxmlformats.org/drawingml/2006/main">
             <a:r>
-              <a:t>The main finding is that SigLIP 2 supplies stronger frozen features. Partial fine-tuning brings DINOv2 to essentially the same average score in the original study, using a smaller model and less allocated memory. This supports a useful comparison, but not a deployment claim. The next step would be validation on independently collected farms, followed by tuning that uses only validation data. Codex assisted the research, code, analysis and drafting. The report, executed notebook and saved predictions document the actual experiments and their limitations.</a:t>
+              <a:t>SigLIP 2 gave stronger frozen features. Partial fine-tuning brought DINOv2 to a similar average score in the original study, with fewer parameters and less allocated memory. These results describe this dataset. The next step is to collect images from independent farms and use validation data to choose training settings. Codex helped with research, code, analysis, writing and review. The report, executed notebook and saved predictions document the experiments and their limitations.</a:t>
             </a:r>
           </a:p>
           <a:p xmlns:a="http://schemas.openxmlformats.org/drawingml/2006/main">
@@ -3981,12 +3981,12 @@
   </p:cSld>
   <p:clrMap bg1="lt1" tx1="dk1" bg2="lt2" tx2="dk2" accent1="accent1" accent2="accent2" accent3="accent3" accent4="accent4" accent5="accent5" accent6="accent6" hlink="hlink" folHlink="folHlink"/>
   <p:sldLayoutIdLst>
-    <p:sldLayoutId xmlns:r="http://schemas.openxmlformats.org/officeDocument/2006/relationships" id="2147483649" r:id="Rbd934a53105447d1"/>
-    <p:sldLayoutId xmlns:r="http://schemas.openxmlformats.org/officeDocument/2006/relationships" id="2147483650" r:id="Rb500e2a22acc425f"/>
-    <p:sldLayoutId xmlns:r="http://schemas.openxmlformats.org/officeDocument/2006/relationships" id="2147483651" r:id="Re6c410f352854988"/>
-    <p:sldLayoutId xmlns:r="http://schemas.openxmlformats.org/officeDocument/2006/relationships" id="2147483652" r:id="Rb0c13d9d625b48d0"/>
-    <p:sldLayoutId xmlns:r="http://schemas.openxmlformats.org/officeDocument/2006/relationships" id="2147483653" r:id="R0b5e42d827734ffe"/>
-    <p:sldLayoutId xmlns:r="http://schemas.openxmlformats.org/officeDocument/2006/relationships" id="2147483654" r:id="Rf08a5375311c4d38"/>
+    <p:sldLayoutId xmlns:r="http://schemas.openxmlformats.org/officeDocument/2006/relationships" id="2147483649" r:id="R75d94c2bf8c544bc"/>
+    <p:sldLayoutId xmlns:r="http://schemas.openxmlformats.org/officeDocument/2006/relationships" id="2147483650" r:id="R42b2192e5d304afa"/>
+    <p:sldLayoutId xmlns:r="http://schemas.openxmlformats.org/officeDocument/2006/relationships" id="2147483651" r:id="Rb8c9bba32ee247be"/>
+    <p:sldLayoutId xmlns:r="http://schemas.openxmlformats.org/officeDocument/2006/relationships" id="2147483652" r:id="Re88d9a3c5f4242d7"/>
+    <p:sldLayoutId xmlns:r="http://schemas.openxmlformats.org/officeDocument/2006/relationships" id="2147483653" r:id="Rc5fdaea29cec45d1"/>
+    <p:sldLayoutId xmlns:r="http://schemas.openxmlformats.org/officeDocument/2006/relationships" id="2147483654" r:id="Reae634cca9154246"/>
   </p:sldLayoutIdLst>
   <p:txStyles>
     <p:titleStyle>
@@ -5260,6 +5260,7 @@
               </a:defRPr>
             </a:defPPr>
             <a:lvl1pPr>
+              <a:buNone/>
               <a:defRPr sz="1350" b="0">
                 <a:solidFill>
                   <a:srgbClr val="5D6864"/>
@@ -5270,6 +5271,7 @@
               </a:defRPr>
             </a:lvl1pPr>
             <a:lvl2pPr>
+              <a:buNone/>
               <a:defRPr sz="1350" b="0">
                 <a:solidFill>
                   <a:srgbClr val="5D6864"/>
@@ -5280,6 +5282,7 @@
               </a:defRPr>
             </a:lvl2pPr>
             <a:lvl3pPr>
+              <a:buNone/>
               <a:defRPr sz="1350" b="0">
                 <a:solidFill>
                   <a:srgbClr val="5D6864"/>
@@ -5290,6 +5293,7 @@
               </a:defRPr>
             </a:lvl3pPr>
             <a:lvl4pPr>
+              <a:buNone/>
               <a:defRPr sz="1350" b="0">
                 <a:solidFill>
                   <a:srgbClr val="5D6864"/>
@@ -5300,6 +5304,7 @@
               </a:defRPr>
             </a:lvl4pPr>
             <a:lvl5pPr>
+              <a:buNone/>
               <a:defRPr sz="1350" b="0">
                 <a:solidFill>
                   <a:srgbClr val="5D6864"/>
@@ -5310,6 +5315,7 @@
               </a:defRPr>
             </a:lvl5pPr>
             <a:lvl6pPr>
+              <a:buNone/>
               <a:defRPr sz="1350" b="0">
                 <a:solidFill>
                   <a:srgbClr val="5D6864"/>
@@ -5320,6 +5326,7 @@
               </a:defRPr>
             </a:lvl6pPr>
             <a:lvl7pPr>
+              <a:buNone/>
               <a:defRPr sz="1350" b="0">
                 <a:solidFill>
                   <a:srgbClr val="5D6864"/>
@@ -5330,6 +5337,7 @@
               </a:defRPr>
             </a:lvl7pPr>
             <a:lvl8pPr>
+              <a:buNone/>
               <a:defRPr sz="1350" b="0">
                 <a:solidFill>
                   <a:srgbClr val="5D6864"/>
@@ -5340,6 +5348,7 @@
               </a:defRPr>
             </a:lvl8pPr>
             <a:lvl9pPr>
+              <a:buNone/>
               <a:defRPr sz="1350" b="0">
                 <a:solidFill>
                   <a:srgbClr val="5D6864"/>
@@ -5352,6 +5361,7 @@
           </a:lstStyle>
           <a:p xmlns:a="http://schemas.openxmlformats.org/drawingml/2006/main">
             <a:pPr>
+              <a:buNone/>
               <a:defRPr sz="1350" b="0">
                 <a:solidFill>
                   <a:srgbClr val="5D6864"/>
@@ -5418,6 +5428,7 @@
               </a:defRPr>
             </a:defPPr>
             <a:lvl1pPr>
+              <a:buNone/>
               <a:defRPr sz="4800" b="1">
                 <a:solidFill>
                   <a:srgbClr val="22362F"/>
@@ -5428,6 +5439,7 @@
               </a:defRPr>
             </a:lvl1pPr>
             <a:lvl2pPr>
+              <a:buNone/>
               <a:defRPr sz="4800" b="1">
                 <a:solidFill>
                   <a:srgbClr val="22362F"/>
@@ -5438,6 +5450,7 @@
               </a:defRPr>
             </a:lvl2pPr>
             <a:lvl3pPr>
+              <a:buNone/>
               <a:defRPr sz="4800" b="1">
                 <a:solidFill>
                   <a:srgbClr val="22362F"/>
@@ -5448,6 +5461,7 @@
               </a:defRPr>
             </a:lvl3pPr>
             <a:lvl4pPr>
+              <a:buNone/>
               <a:defRPr sz="4800" b="1">
                 <a:solidFill>
                   <a:srgbClr val="22362F"/>
@@ -5458,6 +5472,7 @@
               </a:defRPr>
             </a:lvl4pPr>
             <a:lvl5pPr>
+              <a:buNone/>
               <a:defRPr sz="4800" b="1">
                 <a:solidFill>
                   <a:srgbClr val="22362F"/>
@@ -5468,6 +5483,7 @@
               </a:defRPr>
             </a:lvl5pPr>
             <a:lvl6pPr>
+              <a:buNone/>
               <a:defRPr sz="4800" b="1">
                 <a:solidFill>
                   <a:srgbClr val="22362F"/>
@@ -5478,6 +5494,7 @@
               </a:defRPr>
             </a:lvl6pPr>
             <a:lvl7pPr>
+              <a:buNone/>
               <a:defRPr sz="4800" b="1">
                 <a:solidFill>
                   <a:srgbClr val="22362F"/>
@@ -5488,6 +5505,7 @@
               </a:defRPr>
             </a:lvl7pPr>
             <a:lvl8pPr>
+              <a:buNone/>
               <a:defRPr sz="4800" b="1">
                 <a:solidFill>
                   <a:srgbClr val="22362F"/>
@@ -5498,6 +5516,7 @@
               </a:defRPr>
             </a:lvl8pPr>
             <a:lvl9pPr>
+              <a:buNone/>
               <a:defRPr sz="4800" b="1">
                 <a:solidFill>
                   <a:srgbClr val="22362F"/>
@@ -5510,6 +5529,7 @@
           </a:lstStyle>
           <a:p xmlns:a="http://schemas.openxmlformats.org/drawingml/2006/main">
             <a:pPr>
+              <a:buNone/>
               <a:defRPr sz="4800" b="1">
                 <a:solidFill>
                   <a:srgbClr val="22362F"/>
@@ -5533,6 +5553,7 @@
           </a:p>
           <a:p xmlns:a="http://schemas.openxmlformats.org/drawingml/2006/main">
             <a:pPr>
+              <a:buNone/>
               <a:defRPr sz="4800" b="1">
                 <a:solidFill>
                   <a:srgbClr val="22362F"/>
@@ -5599,6 +5620,7 @@
               </a:defRPr>
             </a:defPPr>
             <a:lvl1pPr>
+              <a:buNone/>
               <a:defRPr sz="2550" b="0">
                 <a:solidFill>
                   <a:srgbClr val="245844"/>
@@ -5609,6 +5631,7 @@
               </a:defRPr>
             </a:lvl1pPr>
             <a:lvl2pPr>
+              <a:buNone/>
               <a:defRPr sz="2550" b="0">
                 <a:solidFill>
                   <a:srgbClr val="245844"/>
@@ -5619,6 +5642,7 @@
               </a:defRPr>
             </a:lvl2pPr>
             <a:lvl3pPr>
+              <a:buNone/>
               <a:defRPr sz="2550" b="0">
                 <a:solidFill>
                   <a:srgbClr val="245844"/>
@@ -5629,6 +5653,7 @@
               </a:defRPr>
             </a:lvl3pPr>
             <a:lvl4pPr>
+              <a:buNone/>
               <a:defRPr sz="2550" b="0">
                 <a:solidFill>
                   <a:srgbClr val="245844"/>
@@ -5639,6 +5664,7 @@
               </a:defRPr>
             </a:lvl4pPr>
             <a:lvl5pPr>
+              <a:buNone/>
               <a:defRPr sz="2550" b="0">
                 <a:solidFill>
                   <a:srgbClr val="245844"/>
@@ -5649,6 +5675,7 @@
               </a:defRPr>
             </a:lvl5pPr>
             <a:lvl6pPr>
+              <a:buNone/>
               <a:defRPr sz="2550" b="0">
                 <a:solidFill>
                   <a:srgbClr val="245844"/>
@@ -5659,6 +5686,7 @@
               </a:defRPr>
             </a:lvl6pPr>
             <a:lvl7pPr>
+              <a:buNone/>
               <a:defRPr sz="2550" b="0">
                 <a:solidFill>
                   <a:srgbClr val="245844"/>
@@ -5669,6 +5697,7 @@
               </a:defRPr>
             </a:lvl7pPr>
             <a:lvl8pPr>
+              <a:buNone/>
               <a:defRPr sz="2550" b="0">
                 <a:solidFill>
                   <a:srgbClr val="245844"/>
@@ -5679,6 +5708,7 @@
               </a:defRPr>
             </a:lvl8pPr>
             <a:lvl9pPr>
+              <a:buNone/>
               <a:defRPr sz="2550" b="0">
                 <a:solidFill>
                   <a:srgbClr val="245844"/>
@@ -5691,6 +5721,7 @@
           </a:lstStyle>
           <a:p xmlns:a="http://schemas.openxmlformats.org/drawingml/2006/main">
             <a:pPr>
+              <a:buNone/>
               <a:defRPr sz="2550" b="0">
                 <a:solidFill>
                   <a:srgbClr val="245844"/>
@@ -5757,6 +5788,7 @@
               </a:defRPr>
             </a:defPPr>
             <a:lvl1pPr>
+              <a:buNone/>
               <a:defRPr sz="1800" b="0">
                 <a:solidFill>
                   <a:srgbClr val="5D6864"/>
@@ -5767,6 +5799,7 @@
               </a:defRPr>
             </a:lvl1pPr>
             <a:lvl2pPr>
+              <a:buNone/>
               <a:defRPr sz="1800" b="0">
                 <a:solidFill>
                   <a:srgbClr val="5D6864"/>
@@ -5777,6 +5810,7 @@
               </a:defRPr>
             </a:lvl2pPr>
             <a:lvl3pPr>
+              <a:buNone/>
               <a:defRPr sz="1800" b="0">
                 <a:solidFill>
                   <a:srgbClr val="5D6864"/>
@@ -5787,6 +5821,7 @@
               </a:defRPr>
             </a:lvl3pPr>
             <a:lvl4pPr>
+              <a:buNone/>
               <a:defRPr sz="1800" b="0">
                 <a:solidFill>
                   <a:srgbClr val="5D6864"/>
@@ -5797,6 +5832,7 @@
               </a:defRPr>
             </a:lvl4pPr>
             <a:lvl5pPr>
+              <a:buNone/>
               <a:defRPr sz="1800" b="0">
                 <a:solidFill>
                   <a:srgbClr val="5D6864"/>
@@ -5807,6 +5843,7 @@
               </a:defRPr>
             </a:lvl5pPr>
             <a:lvl6pPr>
+              <a:buNone/>
               <a:defRPr sz="1800" b="0">
                 <a:solidFill>
                   <a:srgbClr val="5D6864"/>
@@ -5817,6 +5854,7 @@
               </a:defRPr>
             </a:lvl6pPr>
             <a:lvl7pPr>
+              <a:buNone/>
               <a:defRPr sz="1800" b="0">
                 <a:solidFill>
                   <a:srgbClr val="5D6864"/>
@@ -5827,6 +5865,7 @@
               </a:defRPr>
             </a:lvl7pPr>
             <a:lvl8pPr>
+              <a:buNone/>
               <a:defRPr sz="1800" b="0">
                 <a:solidFill>
                   <a:srgbClr val="5D6864"/>
@@ -5837,6 +5876,7 @@
               </a:defRPr>
             </a:lvl8pPr>
             <a:lvl9pPr>
+              <a:buNone/>
               <a:defRPr sz="1800" b="0">
                 <a:solidFill>
                   <a:srgbClr val="5D6864"/>
@@ -5849,6 +5889,7 @@
           </a:lstStyle>
           <a:p xmlns:a="http://schemas.openxmlformats.org/drawingml/2006/main">
             <a:pPr>
+              <a:buNone/>
               <a:defRPr sz="1800" b="0">
                 <a:solidFill>
                   <a:srgbClr val="5D6864"/>
@@ -5872,6 +5913,7 @@
           </a:p>
           <a:p xmlns:a="http://schemas.openxmlformats.org/drawingml/2006/main">
             <a:pPr>
+              <a:buNone/>
               <a:defRPr sz="1800" b="0">
                 <a:solidFill>
                   <a:srgbClr val="5D6864"/>
@@ -5900,7 +5942,7 @@
           <p:cNvPr id="5" name="">
             <a:extLst xmlns:a="http://schemas.openxmlformats.org/drawingml/2006/main">
               <a:ext uri="{FF2B5EF4-FFF2-40B4-BE49-F238E27FC236}">
-                <a16:creationId xmlns:a16="http://schemas.microsoft.com/office/drawing/2014/main" id="{921DC027-1425-41E8-B56A-18E11C9D3007}"/>
+                <a16:creationId xmlns:a16="http://schemas.microsoft.com/office/drawing/2014/main" id="{3BD2B07C-9E09-4171-A5C2-5724C98A154B}"/>
               </a:ext>
             </a:extLst>
           </p:cNvPr>
@@ -5910,7 +5952,7 @@
           <p:nvPr/>
         </p:nvPicPr>
         <p:blipFill>
-          <a:blip xmlns:r="http://schemas.openxmlformats.org/officeDocument/2006/relationships" xmlns:a="http://schemas.openxmlformats.org/drawingml/2006/main" r:embed="R6b1ba4a2dc0540c2"/>
+          <a:blip xmlns:r="http://schemas.openxmlformats.org/officeDocument/2006/relationships" xmlns:a="http://schemas.openxmlformats.org/drawingml/2006/main" r:embed="R55e9438a3c214d97"/>
           <a:stretch xmlns:a="http://schemas.openxmlformats.org/drawingml/2006/main"/>
         </p:blipFill>
         <p:spPr>
@@ -5995,6 +6037,7 @@
               </a:defRPr>
             </a:defPPr>
             <a:lvl1pPr>
+              <a:buNone/>
               <a:defRPr sz="3300" b="1">
                 <a:solidFill>
                   <a:srgbClr val="22362F"/>
@@ -6005,6 +6048,7 @@
               </a:defRPr>
             </a:lvl1pPr>
             <a:lvl2pPr>
+              <a:buNone/>
               <a:defRPr sz="3300" b="1">
                 <a:solidFill>
                   <a:srgbClr val="22362F"/>
@@ -6015,6 +6059,7 @@
               </a:defRPr>
             </a:lvl2pPr>
             <a:lvl3pPr>
+              <a:buNone/>
               <a:defRPr sz="3300" b="1">
                 <a:solidFill>
                   <a:srgbClr val="22362F"/>
@@ -6025,6 +6070,7 @@
               </a:defRPr>
             </a:lvl3pPr>
             <a:lvl4pPr>
+              <a:buNone/>
               <a:defRPr sz="3300" b="1">
                 <a:solidFill>
                   <a:srgbClr val="22362F"/>
@@ -6035,6 +6081,7 @@
               </a:defRPr>
             </a:lvl4pPr>
             <a:lvl5pPr>
+              <a:buNone/>
               <a:defRPr sz="3300" b="1">
                 <a:solidFill>
                   <a:srgbClr val="22362F"/>
@@ -6045,6 +6092,7 @@
               </a:defRPr>
             </a:lvl5pPr>
             <a:lvl6pPr>
+              <a:buNone/>
               <a:defRPr sz="3300" b="1">
                 <a:solidFill>
                   <a:srgbClr val="22362F"/>
@@ -6055,6 +6103,7 @@
               </a:defRPr>
             </a:lvl6pPr>
             <a:lvl7pPr>
+              <a:buNone/>
               <a:defRPr sz="3300" b="1">
                 <a:solidFill>
                   <a:srgbClr val="22362F"/>
@@ -6065,6 +6114,7 @@
               </a:defRPr>
             </a:lvl7pPr>
             <a:lvl8pPr>
+              <a:buNone/>
               <a:defRPr sz="3300" b="1">
                 <a:solidFill>
                   <a:srgbClr val="22362F"/>
@@ -6075,6 +6125,7 @@
               </a:defRPr>
             </a:lvl8pPr>
             <a:lvl9pPr>
+              <a:buNone/>
               <a:defRPr sz="3300" b="1">
                 <a:solidFill>
                   <a:srgbClr val="22362F"/>
@@ -6087,6 +6138,7 @@
           </a:lstStyle>
           <a:p xmlns:a="http://schemas.openxmlformats.org/drawingml/2006/main">
             <a:pPr>
+              <a:buNone/>
               <a:defRPr sz="3300" b="1">
                 <a:solidFill>
                   <a:srgbClr val="22362F"/>
@@ -6153,6 +6205,7 @@
               </a:defRPr>
             </a:defPPr>
             <a:lvl1pPr>
+              <a:buNone/>
               <a:defRPr sz="1350" b="0">
                 <a:solidFill>
                   <a:srgbClr val="5D6864"/>
@@ -6163,6 +6216,7 @@
               </a:defRPr>
             </a:lvl1pPr>
             <a:lvl2pPr>
+              <a:buNone/>
               <a:defRPr sz="1350" b="0">
                 <a:solidFill>
                   <a:srgbClr val="5D6864"/>
@@ -6173,6 +6227,7 @@
               </a:defRPr>
             </a:lvl2pPr>
             <a:lvl3pPr>
+              <a:buNone/>
               <a:defRPr sz="1350" b="0">
                 <a:solidFill>
                   <a:srgbClr val="5D6864"/>
@@ -6183,6 +6238,7 @@
               </a:defRPr>
             </a:lvl3pPr>
             <a:lvl4pPr>
+              <a:buNone/>
               <a:defRPr sz="1350" b="0">
                 <a:solidFill>
                   <a:srgbClr val="5D6864"/>
@@ -6193,6 +6249,7 @@
               </a:defRPr>
             </a:lvl4pPr>
             <a:lvl5pPr>
+              <a:buNone/>
               <a:defRPr sz="1350" b="0">
                 <a:solidFill>
                   <a:srgbClr val="5D6864"/>
@@ -6203,6 +6260,7 @@
               </a:defRPr>
             </a:lvl5pPr>
             <a:lvl6pPr>
+              <a:buNone/>
               <a:defRPr sz="1350" b="0">
                 <a:solidFill>
                   <a:srgbClr val="5D6864"/>
@@ -6213,6 +6271,7 @@
               </a:defRPr>
             </a:lvl6pPr>
             <a:lvl7pPr>
+              <a:buNone/>
               <a:defRPr sz="1350" b="0">
                 <a:solidFill>
                   <a:srgbClr val="5D6864"/>
@@ -6223,6 +6282,7 @@
               </a:defRPr>
             </a:lvl7pPr>
             <a:lvl8pPr>
+              <a:buNone/>
               <a:defRPr sz="1350" b="0">
                 <a:solidFill>
                   <a:srgbClr val="5D6864"/>
@@ -6233,6 +6293,7 @@
               </a:defRPr>
             </a:lvl8pPr>
             <a:lvl9pPr>
+              <a:buNone/>
               <a:defRPr sz="1350" b="0">
                 <a:solidFill>
                   <a:srgbClr val="5D6864"/>
@@ -6245,6 +6306,7 @@
           </a:lstStyle>
           <a:p xmlns:a="http://schemas.openxmlformats.org/drawingml/2006/main">
             <a:pPr>
+              <a:buNone/>
               <a:defRPr sz="1350" b="0">
                 <a:solidFill>
                   <a:srgbClr val="5D6864"/>
@@ -6273,7 +6335,7 @@
           <p:cNvPr id="3" name="">
             <a:extLst xmlns:a="http://schemas.openxmlformats.org/drawingml/2006/main">
               <a:ext uri="{FF2B5EF4-FFF2-40B4-BE49-F238E27FC236}">
-                <a16:creationId xmlns:a16="http://schemas.microsoft.com/office/drawing/2014/main" id="{F3A1143F-84DF-42BA-9FB6-53AB192796D1}"/>
+                <a16:creationId xmlns:a16="http://schemas.microsoft.com/office/drawing/2014/main" id="{AF5F6D5F-70D3-4E76-A2D6-F83E3D2A958A}"/>
               </a:ext>
             </a:extLst>
           </p:cNvPr>
@@ -6884,8 +6946,8 @@
         </p:nvSpPr>
         <p:spPr>
           <a:xfrm xmlns:a="http://schemas.openxmlformats.org/drawingml/2006/main">
-            <a:off x="609600" y="5514975"/>
-            <a:ext cx="10953750" cy="495300"/>
+            <a:off x="609600" y="5495925"/>
+            <a:ext cx="10953750" cy="809625"/>
           </a:xfrm>
           <a:prstGeom xmlns:a="http://schemas.openxmlformats.org/drawingml/2006/main" prst="rect">
             <a:avLst/>
@@ -6901,7 +6963,7 @@
           </a:bodyPr>
           <a:lstStyle xmlns:a="http://schemas.openxmlformats.org/drawingml/2006/main">
             <a:defPPr>
-              <a:defRPr sz="2025" b="1">
+              <a:defRPr sz="1875" b="1">
                 <a:solidFill>
                   <a:srgbClr val="245844"/>
                 </a:solidFill>
@@ -6911,6 +6973,7 @@
               </a:defRPr>
             </a:defPPr>
             <a:lvl1pPr>
+              <a:buNone/>
               <a:defRPr sz="2025" b="1">
                 <a:solidFill>
                   <a:srgbClr val="245844"/>
@@ -6921,6 +6984,7 @@
               </a:defRPr>
             </a:lvl1pPr>
             <a:lvl2pPr>
+              <a:buNone/>
               <a:defRPr sz="2025" b="1">
                 <a:solidFill>
                   <a:srgbClr val="245844"/>
@@ -6931,6 +6995,7 @@
               </a:defRPr>
             </a:lvl2pPr>
             <a:lvl3pPr>
+              <a:buNone/>
               <a:defRPr sz="2025" b="1">
                 <a:solidFill>
                   <a:srgbClr val="245844"/>
@@ -6941,6 +7006,7 @@
               </a:defRPr>
             </a:lvl3pPr>
             <a:lvl4pPr>
+              <a:buNone/>
               <a:defRPr sz="2025" b="1">
                 <a:solidFill>
                   <a:srgbClr val="245844"/>
@@ -6951,6 +7017,7 @@
               </a:defRPr>
             </a:lvl4pPr>
             <a:lvl5pPr>
+              <a:buNone/>
               <a:defRPr sz="2025" b="1">
                 <a:solidFill>
                   <a:srgbClr val="245844"/>
@@ -6961,6 +7028,7 @@
               </a:defRPr>
             </a:lvl5pPr>
             <a:lvl6pPr>
+              <a:buNone/>
               <a:defRPr sz="2025" b="1">
                 <a:solidFill>
                   <a:srgbClr val="245844"/>
@@ -6971,6 +7039,7 @@
               </a:defRPr>
             </a:lvl6pPr>
             <a:lvl7pPr>
+              <a:buNone/>
               <a:defRPr sz="2025" b="1">
                 <a:solidFill>
                   <a:srgbClr val="245844"/>
@@ -6981,6 +7050,7 @@
               </a:defRPr>
             </a:lvl7pPr>
             <a:lvl8pPr>
+              <a:buNone/>
               <a:defRPr sz="2025" b="1">
                 <a:solidFill>
                   <a:srgbClr val="245844"/>
@@ -6991,6 +7061,7 @@
               </a:defRPr>
             </a:lvl8pPr>
             <a:lvl9pPr>
+              <a:buNone/>
               <a:defRPr sz="2025" b="1">
                 <a:solidFill>
                   <a:srgbClr val="245844"/>
@@ -7003,7 +7074,8 @@
           </a:lstStyle>
           <a:p xmlns:a="http://schemas.openxmlformats.org/drawingml/2006/main">
             <a:pPr>
-              <a:defRPr sz="2025" b="1">
+              <a:buNone/>
+              <a:defRPr sz="1875" b="1">
                 <a:solidFill>
                   <a:srgbClr val="245844"/>
                 </a:solidFill>
@@ -7013,7 +7085,7 @@
               </a:defRPr>
             </a:pPr>
             <a:r>
-              <a:rPr sz="2025" b="1">
+              <a:rPr sz="1875" b="1">
                 <a:solidFill>
                   <a:srgbClr val="245844"/>
                 </a:solidFill>
@@ -7021,7 +7093,31 @@
                 <a:ea typeface="Arial"/>
                 <a:cs typeface="Arial"/>
               </a:rPr>
-              <a:t>Native normalisation differs by model. SigLIP pooling stays frozen.</a:t>
+              <a:t>DINOv2 uses a class token. SigLIP 2 uses frozen attention pooling.</a:t>
+            </a:r>
+          </a:p>
+          <a:p xmlns:a="http://schemas.openxmlformats.org/drawingml/2006/main">
+            <a:pPr>
+              <a:buNone/>
+              <a:defRPr sz="1875" b="1">
+                <a:solidFill>
+                  <a:srgbClr val="245844"/>
+                </a:solidFill>
+                <a:latin typeface="Arial"/>
+                <a:ea typeface="Arial"/>
+                <a:cs typeface="Arial"/>
+              </a:defRPr>
+            </a:pPr>
+            <a:r>
+              <a:rPr sz="1875" b="1">
+                <a:solidFill>
+                  <a:srgbClr val="245844"/>
+                </a:solidFill>
+                <a:latin typeface="Arial"/>
+                <a:ea typeface="Arial"/>
+                <a:cs typeface="Arial"/>
+              </a:rPr>
+              <a:t>Each model uses its own image normalisation.</a:t>
             </a:r>
           </a:p>
         </p:txBody>
@@ -7098,6 +7194,7 @@
               </a:defRPr>
             </a:defPPr>
             <a:lvl1pPr>
+              <a:buNone/>
               <a:defRPr sz="3300" b="1">
                 <a:solidFill>
                   <a:srgbClr val="22362F"/>
@@ -7108,6 +7205,7 @@
               </a:defRPr>
             </a:lvl1pPr>
             <a:lvl2pPr>
+              <a:buNone/>
               <a:defRPr sz="3300" b="1">
                 <a:solidFill>
                   <a:srgbClr val="22362F"/>
@@ -7118,6 +7216,7 @@
               </a:defRPr>
             </a:lvl2pPr>
             <a:lvl3pPr>
+              <a:buNone/>
               <a:defRPr sz="3300" b="1">
                 <a:solidFill>
                   <a:srgbClr val="22362F"/>
@@ -7128,6 +7227,7 @@
               </a:defRPr>
             </a:lvl3pPr>
             <a:lvl4pPr>
+              <a:buNone/>
               <a:defRPr sz="3300" b="1">
                 <a:solidFill>
                   <a:srgbClr val="22362F"/>
@@ -7138,6 +7238,7 @@
               </a:defRPr>
             </a:lvl4pPr>
             <a:lvl5pPr>
+              <a:buNone/>
               <a:defRPr sz="3300" b="1">
                 <a:solidFill>
                   <a:srgbClr val="22362F"/>
@@ -7148,6 +7249,7 @@
               </a:defRPr>
             </a:lvl5pPr>
             <a:lvl6pPr>
+              <a:buNone/>
               <a:defRPr sz="3300" b="1">
                 <a:solidFill>
                   <a:srgbClr val="22362F"/>
@@ -7158,6 +7260,7 @@
               </a:defRPr>
             </a:lvl6pPr>
             <a:lvl7pPr>
+              <a:buNone/>
               <a:defRPr sz="3300" b="1">
                 <a:solidFill>
                   <a:srgbClr val="22362F"/>
@@ -7168,6 +7271,7 @@
               </a:defRPr>
             </a:lvl7pPr>
             <a:lvl8pPr>
+              <a:buNone/>
               <a:defRPr sz="3300" b="1">
                 <a:solidFill>
                   <a:srgbClr val="22362F"/>
@@ -7178,6 +7282,7 @@
               </a:defRPr>
             </a:lvl8pPr>
             <a:lvl9pPr>
+              <a:buNone/>
               <a:defRPr sz="3300" b="1">
                 <a:solidFill>
                   <a:srgbClr val="22362F"/>
@@ -7190,6 +7295,7 @@
           </a:lstStyle>
           <a:p xmlns:a="http://schemas.openxmlformats.org/drawingml/2006/main">
             <a:pPr>
+              <a:buNone/>
               <a:defRPr sz="3300" b="1">
                 <a:solidFill>
                   <a:srgbClr val="22362F"/>
@@ -7256,6 +7362,7 @@
               </a:defRPr>
             </a:defPPr>
             <a:lvl1pPr>
+              <a:buNone/>
               <a:defRPr sz="1350" b="0">
                 <a:solidFill>
                   <a:srgbClr val="5D6864"/>
@@ -7266,6 +7373,7 @@
               </a:defRPr>
             </a:lvl1pPr>
             <a:lvl2pPr>
+              <a:buNone/>
               <a:defRPr sz="1350" b="0">
                 <a:solidFill>
                   <a:srgbClr val="5D6864"/>
@@ -7276,6 +7384,7 @@
               </a:defRPr>
             </a:lvl2pPr>
             <a:lvl3pPr>
+              <a:buNone/>
               <a:defRPr sz="1350" b="0">
                 <a:solidFill>
                   <a:srgbClr val="5D6864"/>
@@ -7286,6 +7395,7 @@
               </a:defRPr>
             </a:lvl3pPr>
             <a:lvl4pPr>
+              <a:buNone/>
               <a:defRPr sz="1350" b="0">
                 <a:solidFill>
                   <a:srgbClr val="5D6864"/>
@@ -7296,6 +7406,7 @@
               </a:defRPr>
             </a:lvl4pPr>
             <a:lvl5pPr>
+              <a:buNone/>
               <a:defRPr sz="1350" b="0">
                 <a:solidFill>
                   <a:srgbClr val="5D6864"/>
@@ -7306,6 +7417,7 @@
               </a:defRPr>
             </a:lvl5pPr>
             <a:lvl6pPr>
+              <a:buNone/>
               <a:defRPr sz="1350" b="0">
                 <a:solidFill>
                   <a:srgbClr val="5D6864"/>
@@ -7316,6 +7428,7 @@
               </a:defRPr>
             </a:lvl6pPr>
             <a:lvl7pPr>
+              <a:buNone/>
               <a:defRPr sz="1350" b="0">
                 <a:solidFill>
                   <a:srgbClr val="5D6864"/>
@@ -7326,6 +7439,7 @@
               </a:defRPr>
             </a:lvl7pPr>
             <a:lvl8pPr>
+              <a:buNone/>
               <a:defRPr sz="1350" b="0">
                 <a:solidFill>
                   <a:srgbClr val="5D6864"/>
@@ -7336,6 +7450,7 @@
               </a:defRPr>
             </a:lvl8pPr>
             <a:lvl9pPr>
+              <a:buNone/>
               <a:defRPr sz="1350" b="0">
                 <a:solidFill>
                   <a:srgbClr val="5D6864"/>
@@ -7348,6 +7463,7 @@
           </a:lstStyle>
           <a:p xmlns:a="http://schemas.openxmlformats.org/drawingml/2006/main">
             <a:pPr>
+              <a:buNone/>
               <a:defRPr sz="1350" b="0">
                 <a:solidFill>
                   <a:srgbClr val="5D6864"/>
@@ -7414,6 +7530,7 @@
               </a:defRPr>
             </a:defPPr>
             <a:lvl1pPr>
+              <a:buNone/>
               <a:defRPr sz="2850" b="1">
                 <a:solidFill>
                   <a:srgbClr val="245844"/>
@@ -7424,6 +7541,7 @@
               </a:defRPr>
             </a:lvl1pPr>
             <a:lvl2pPr>
+              <a:buNone/>
               <a:defRPr sz="2850" b="1">
                 <a:solidFill>
                   <a:srgbClr val="245844"/>
@@ -7434,6 +7552,7 @@
               </a:defRPr>
             </a:lvl2pPr>
             <a:lvl3pPr>
+              <a:buNone/>
               <a:defRPr sz="2850" b="1">
                 <a:solidFill>
                   <a:srgbClr val="245844"/>
@@ -7444,6 +7563,7 @@
               </a:defRPr>
             </a:lvl3pPr>
             <a:lvl4pPr>
+              <a:buNone/>
               <a:defRPr sz="2850" b="1">
                 <a:solidFill>
                   <a:srgbClr val="245844"/>
@@ -7454,6 +7574,7 @@
               </a:defRPr>
             </a:lvl4pPr>
             <a:lvl5pPr>
+              <a:buNone/>
               <a:defRPr sz="2850" b="1">
                 <a:solidFill>
                   <a:srgbClr val="245844"/>
@@ -7464,6 +7585,7 @@
               </a:defRPr>
             </a:lvl5pPr>
             <a:lvl6pPr>
+              <a:buNone/>
               <a:defRPr sz="2850" b="1">
                 <a:solidFill>
                   <a:srgbClr val="245844"/>
@@ -7474,6 +7596,7 @@
               </a:defRPr>
             </a:lvl6pPr>
             <a:lvl7pPr>
+              <a:buNone/>
               <a:defRPr sz="2850" b="1">
                 <a:solidFill>
                   <a:srgbClr val="245844"/>
@@ -7484,6 +7607,7 @@
               </a:defRPr>
             </a:lvl7pPr>
             <a:lvl8pPr>
+              <a:buNone/>
               <a:defRPr sz="2850" b="1">
                 <a:solidFill>
                   <a:srgbClr val="245844"/>
@@ -7494,6 +7618,7 @@
               </a:defRPr>
             </a:lvl8pPr>
             <a:lvl9pPr>
+              <a:buNone/>
               <a:defRPr sz="2850" b="1">
                 <a:solidFill>
                   <a:srgbClr val="245844"/>
@@ -7506,6 +7631,7 @@
           </a:lstStyle>
           <a:p xmlns:a="http://schemas.openxmlformats.org/drawingml/2006/main">
             <a:pPr>
+              <a:buNone/>
               <a:defRPr sz="2850" b="1">
                 <a:solidFill>
                   <a:srgbClr val="245844"/>
@@ -7524,7 +7650,7 @@
                 <a:ea typeface="Arial"/>
                 <a:cs typeface="Arial"/>
               </a:rPr>
-              <a:t>Full local notebook: 10 cells, 12 training runs, zero errors</a:t>
+              <a:t>Full local notebook: 10 code cells, 12 runs, zero errors</a:t>
             </a:r>
           </a:p>
         </p:txBody>
@@ -7534,7 +7660,7 @@
           <p:cNvPr id="4" name="">
             <a:extLst xmlns:a="http://schemas.openxmlformats.org/drawingml/2006/main">
               <a:ext uri="{FF2B5EF4-FFF2-40B4-BE49-F238E27FC236}">
-                <a16:creationId xmlns:a16="http://schemas.microsoft.com/office/drawing/2014/main" id="{5B30051C-C651-42D1-BBAC-06615F5445D5}"/>
+                <a16:creationId xmlns:a16="http://schemas.microsoft.com/office/drawing/2014/main" id="{221E64FD-7CF9-4619-9265-2C62E504B390}"/>
               </a:ext>
             </a:extLst>
           </p:cNvPr>
@@ -7967,6 +8093,7 @@
               </a:defRPr>
             </a:defPPr>
             <a:lvl1pPr>
+              <a:buNone/>
               <a:defRPr sz="2025" b="0">
                 <a:solidFill>
                   <a:srgbClr val="22362F"/>
@@ -7977,6 +8104,7 @@
               </a:defRPr>
             </a:lvl1pPr>
             <a:lvl2pPr>
+              <a:buNone/>
               <a:defRPr sz="2025" b="0">
                 <a:solidFill>
                   <a:srgbClr val="22362F"/>
@@ -7987,6 +8115,7 @@
               </a:defRPr>
             </a:lvl2pPr>
             <a:lvl3pPr>
+              <a:buNone/>
               <a:defRPr sz="2025" b="0">
                 <a:solidFill>
                   <a:srgbClr val="22362F"/>
@@ -7997,6 +8126,7 @@
               </a:defRPr>
             </a:lvl3pPr>
             <a:lvl4pPr>
+              <a:buNone/>
               <a:defRPr sz="2025" b="0">
                 <a:solidFill>
                   <a:srgbClr val="22362F"/>
@@ -8007,6 +8137,7 @@
               </a:defRPr>
             </a:lvl4pPr>
             <a:lvl5pPr>
+              <a:buNone/>
               <a:defRPr sz="2025" b="0">
                 <a:solidFill>
                   <a:srgbClr val="22362F"/>
@@ -8017,6 +8148,7 @@
               </a:defRPr>
             </a:lvl5pPr>
             <a:lvl6pPr>
+              <a:buNone/>
               <a:defRPr sz="2025" b="0">
                 <a:solidFill>
                   <a:srgbClr val="22362F"/>
@@ -8027,6 +8159,7 @@
               </a:defRPr>
             </a:lvl6pPr>
             <a:lvl7pPr>
+              <a:buNone/>
               <a:defRPr sz="2025" b="0">
                 <a:solidFill>
                   <a:srgbClr val="22362F"/>
@@ -8037,6 +8170,7 @@
               </a:defRPr>
             </a:lvl7pPr>
             <a:lvl8pPr>
+              <a:buNone/>
               <a:defRPr sz="2025" b="0">
                 <a:solidFill>
                   <a:srgbClr val="22362F"/>
@@ -8047,6 +8181,7 @@
               </a:defRPr>
             </a:lvl8pPr>
             <a:lvl9pPr>
+              <a:buNone/>
               <a:defRPr sz="2025" b="0">
                 <a:solidFill>
                   <a:srgbClr val="22362F"/>
@@ -8059,6 +8194,7 @@
           </a:lstStyle>
           <a:p xmlns:a="http://schemas.openxmlformats.org/drawingml/2006/main">
             <a:pPr>
+              <a:buNone/>
               <a:defRPr sz="2025" b="0">
                 <a:solidFill>
                   <a:srgbClr val="22362F"/>
@@ -8082,6 +8218,7 @@
           </a:p>
           <a:p xmlns:a="http://schemas.openxmlformats.org/drawingml/2006/main">
             <a:pPr>
+              <a:buNone/>
               <a:defRPr sz="2025" b="0">
                 <a:solidFill>
                   <a:srgbClr val="22362F"/>
@@ -8177,6 +8314,7 @@
               </a:defRPr>
             </a:defPPr>
             <a:lvl1pPr>
+              <a:buNone/>
               <a:defRPr sz="3300" b="1">
                 <a:solidFill>
                   <a:srgbClr val="22362F"/>
@@ -8187,6 +8325,7 @@
               </a:defRPr>
             </a:lvl1pPr>
             <a:lvl2pPr>
+              <a:buNone/>
               <a:defRPr sz="3300" b="1">
                 <a:solidFill>
                   <a:srgbClr val="22362F"/>
@@ -8197,6 +8336,7 @@
               </a:defRPr>
             </a:lvl2pPr>
             <a:lvl3pPr>
+              <a:buNone/>
               <a:defRPr sz="3300" b="1">
                 <a:solidFill>
                   <a:srgbClr val="22362F"/>
@@ -8207,6 +8347,7 @@
               </a:defRPr>
             </a:lvl3pPr>
             <a:lvl4pPr>
+              <a:buNone/>
               <a:defRPr sz="3300" b="1">
                 <a:solidFill>
                   <a:srgbClr val="22362F"/>
@@ -8217,6 +8358,7 @@
               </a:defRPr>
             </a:lvl4pPr>
             <a:lvl5pPr>
+              <a:buNone/>
               <a:defRPr sz="3300" b="1">
                 <a:solidFill>
                   <a:srgbClr val="22362F"/>
@@ -8227,6 +8369,7 @@
               </a:defRPr>
             </a:lvl5pPr>
             <a:lvl6pPr>
+              <a:buNone/>
               <a:defRPr sz="3300" b="1">
                 <a:solidFill>
                   <a:srgbClr val="22362F"/>
@@ -8237,6 +8380,7 @@
               </a:defRPr>
             </a:lvl6pPr>
             <a:lvl7pPr>
+              <a:buNone/>
               <a:defRPr sz="3300" b="1">
                 <a:solidFill>
                   <a:srgbClr val="22362F"/>
@@ -8247,6 +8391,7 @@
               </a:defRPr>
             </a:lvl7pPr>
             <a:lvl8pPr>
+              <a:buNone/>
               <a:defRPr sz="3300" b="1">
                 <a:solidFill>
                   <a:srgbClr val="22362F"/>
@@ -8257,6 +8402,7 @@
               </a:defRPr>
             </a:lvl8pPr>
             <a:lvl9pPr>
+              <a:buNone/>
               <a:defRPr sz="3300" b="1">
                 <a:solidFill>
                   <a:srgbClr val="22362F"/>
@@ -8269,6 +8415,7 @@
           </a:lstStyle>
           <a:p xmlns:a="http://schemas.openxmlformats.org/drawingml/2006/main">
             <a:pPr>
+              <a:buNone/>
               <a:defRPr sz="3300" b="1">
                 <a:solidFill>
                   <a:srgbClr val="22362F"/>
@@ -8335,6 +8482,7 @@
               </a:defRPr>
             </a:defPPr>
             <a:lvl1pPr>
+              <a:buNone/>
               <a:defRPr sz="1350" b="0">
                 <a:solidFill>
                   <a:srgbClr val="5D6864"/>
@@ -8345,6 +8493,7 @@
               </a:defRPr>
             </a:lvl1pPr>
             <a:lvl2pPr>
+              <a:buNone/>
               <a:defRPr sz="1350" b="0">
                 <a:solidFill>
                   <a:srgbClr val="5D6864"/>
@@ -8355,6 +8504,7 @@
               </a:defRPr>
             </a:lvl2pPr>
             <a:lvl3pPr>
+              <a:buNone/>
               <a:defRPr sz="1350" b="0">
                 <a:solidFill>
                   <a:srgbClr val="5D6864"/>
@@ -8365,6 +8515,7 @@
               </a:defRPr>
             </a:lvl3pPr>
             <a:lvl4pPr>
+              <a:buNone/>
               <a:defRPr sz="1350" b="0">
                 <a:solidFill>
                   <a:srgbClr val="5D6864"/>
@@ -8375,6 +8526,7 @@
               </a:defRPr>
             </a:lvl4pPr>
             <a:lvl5pPr>
+              <a:buNone/>
               <a:defRPr sz="1350" b="0">
                 <a:solidFill>
                   <a:srgbClr val="5D6864"/>
@@ -8385,6 +8537,7 @@
               </a:defRPr>
             </a:lvl5pPr>
             <a:lvl6pPr>
+              <a:buNone/>
               <a:defRPr sz="1350" b="0">
                 <a:solidFill>
                   <a:srgbClr val="5D6864"/>
@@ -8395,6 +8548,7 @@
               </a:defRPr>
             </a:lvl6pPr>
             <a:lvl7pPr>
+              <a:buNone/>
               <a:defRPr sz="1350" b="0">
                 <a:solidFill>
                   <a:srgbClr val="5D6864"/>
@@ -8405,6 +8559,7 @@
               </a:defRPr>
             </a:lvl7pPr>
             <a:lvl8pPr>
+              <a:buNone/>
               <a:defRPr sz="1350" b="0">
                 <a:solidFill>
                   <a:srgbClr val="5D6864"/>
@@ -8415,6 +8570,7 @@
               </a:defRPr>
             </a:lvl8pPr>
             <a:lvl9pPr>
+              <a:buNone/>
               <a:defRPr sz="1350" b="0">
                 <a:solidFill>
                   <a:srgbClr val="5D6864"/>
@@ -8427,6 +8583,7 @@
           </a:lstStyle>
           <a:p xmlns:a="http://schemas.openxmlformats.org/drawingml/2006/main">
             <a:pPr>
+              <a:buNone/>
               <a:defRPr sz="1350" b="0">
                 <a:solidFill>
                   <a:srgbClr val="5D6864"/>
@@ -8493,6 +8650,7 @@
               </a:defRPr>
             </a:defPPr>
             <a:lvl1pPr>
+              <a:buNone/>
               <a:defRPr sz="2250" b="1">
                 <a:solidFill>
                   <a:srgbClr val="245844"/>
@@ -8503,6 +8661,7 @@
               </a:defRPr>
             </a:lvl1pPr>
             <a:lvl2pPr>
+              <a:buNone/>
               <a:defRPr sz="2250" b="1">
                 <a:solidFill>
                   <a:srgbClr val="245844"/>
@@ -8513,6 +8672,7 @@
               </a:defRPr>
             </a:lvl2pPr>
             <a:lvl3pPr>
+              <a:buNone/>
               <a:defRPr sz="2250" b="1">
                 <a:solidFill>
                   <a:srgbClr val="245844"/>
@@ -8523,6 +8683,7 @@
               </a:defRPr>
             </a:lvl3pPr>
             <a:lvl4pPr>
+              <a:buNone/>
               <a:defRPr sz="2250" b="1">
                 <a:solidFill>
                   <a:srgbClr val="245844"/>
@@ -8533,6 +8694,7 @@
               </a:defRPr>
             </a:lvl4pPr>
             <a:lvl5pPr>
+              <a:buNone/>
               <a:defRPr sz="2250" b="1">
                 <a:solidFill>
                   <a:srgbClr val="245844"/>
@@ -8543,6 +8705,7 @@
               </a:defRPr>
             </a:lvl5pPr>
             <a:lvl6pPr>
+              <a:buNone/>
               <a:defRPr sz="2250" b="1">
                 <a:solidFill>
                   <a:srgbClr val="245844"/>
@@ -8553,6 +8716,7 @@
               </a:defRPr>
             </a:lvl6pPr>
             <a:lvl7pPr>
+              <a:buNone/>
               <a:defRPr sz="2250" b="1">
                 <a:solidFill>
                   <a:srgbClr val="245844"/>
@@ -8563,6 +8727,7 @@
               </a:defRPr>
             </a:lvl7pPr>
             <a:lvl8pPr>
+              <a:buNone/>
               <a:defRPr sz="2250" b="1">
                 <a:solidFill>
                   <a:srgbClr val="245844"/>
@@ -8573,6 +8738,7 @@
               </a:defRPr>
             </a:lvl8pPr>
             <a:lvl9pPr>
+              <a:buNone/>
               <a:defRPr sz="2250" b="1">
                 <a:solidFill>
                   <a:srgbClr val="245844"/>
@@ -8585,6 +8751,7 @@
           </a:lstStyle>
           <a:p xmlns:a="http://schemas.openxmlformats.org/drawingml/2006/main">
             <a:pPr>
+              <a:buNone/>
               <a:defRPr sz="2250" b="1">
                 <a:solidFill>
                   <a:srgbClr val="245844"/>
@@ -8651,6 +8818,7 @@
               </a:defRPr>
             </a:defPPr>
             <a:lvl1pPr>
+              <a:buNone/>
               <a:defRPr sz="1950" b="0">
                 <a:solidFill>
                   <a:srgbClr val="22362F"/>
@@ -8661,6 +8829,7 @@
               </a:defRPr>
             </a:lvl1pPr>
             <a:lvl2pPr>
+              <a:buNone/>
               <a:defRPr sz="1950" b="0">
                 <a:solidFill>
                   <a:srgbClr val="22362F"/>
@@ -8671,6 +8840,7 @@
               </a:defRPr>
             </a:lvl2pPr>
             <a:lvl3pPr>
+              <a:buNone/>
               <a:defRPr sz="1950" b="0">
                 <a:solidFill>
                   <a:srgbClr val="22362F"/>
@@ -8681,6 +8851,7 @@
               </a:defRPr>
             </a:lvl3pPr>
             <a:lvl4pPr>
+              <a:buNone/>
               <a:defRPr sz="1950" b="0">
                 <a:solidFill>
                   <a:srgbClr val="22362F"/>
@@ -8691,6 +8862,7 @@
               </a:defRPr>
             </a:lvl4pPr>
             <a:lvl5pPr>
+              <a:buNone/>
               <a:defRPr sz="1950" b="0">
                 <a:solidFill>
                   <a:srgbClr val="22362F"/>
@@ -8701,6 +8873,7 @@
               </a:defRPr>
             </a:lvl5pPr>
             <a:lvl6pPr>
+              <a:buNone/>
               <a:defRPr sz="1950" b="0">
                 <a:solidFill>
                   <a:srgbClr val="22362F"/>
@@ -8711,6 +8884,7 @@
               </a:defRPr>
             </a:lvl6pPr>
             <a:lvl7pPr>
+              <a:buNone/>
               <a:defRPr sz="1950" b="0">
                 <a:solidFill>
                   <a:srgbClr val="22362F"/>
@@ -8721,6 +8895,7 @@
               </a:defRPr>
             </a:lvl7pPr>
             <a:lvl8pPr>
+              <a:buNone/>
               <a:defRPr sz="1950" b="0">
                 <a:solidFill>
                   <a:srgbClr val="22362F"/>
@@ -8731,6 +8906,7 @@
               </a:defRPr>
             </a:lvl8pPr>
             <a:lvl9pPr>
+              <a:buNone/>
               <a:defRPr sz="1950" b="0">
                 <a:solidFill>
                   <a:srgbClr val="22362F"/>
@@ -8743,6 +8919,7 @@
           </a:lstStyle>
           <a:p xmlns:a="http://schemas.openxmlformats.org/drawingml/2006/main">
             <a:pPr>
+              <a:buNone/>
               <a:defRPr sz="1950" b="0">
                 <a:solidFill>
                   <a:srgbClr val="22362F"/>
@@ -8766,6 +8943,7 @@
           </a:p>
           <a:p xmlns:a="http://schemas.openxmlformats.org/drawingml/2006/main">
             <a:pPr>
+              <a:buNone/>
               <a:defRPr sz="1950" b="0">
                 <a:solidFill>
                   <a:srgbClr val="22362F"/>
@@ -8832,6 +9010,7 @@
               </a:defRPr>
             </a:defPPr>
             <a:lvl1pPr>
+              <a:buNone/>
               <a:defRPr sz="2250" b="1">
                 <a:solidFill>
                   <a:srgbClr val="245844"/>
@@ -8842,6 +9021,7 @@
               </a:defRPr>
             </a:lvl1pPr>
             <a:lvl2pPr>
+              <a:buNone/>
               <a:defRPr sz="2250" b="1">
                 <a:solidFill>
                   <a:srgbClr val="245844"/>
@@ -8852,6 +9032,7 @@
               </a:defRPr>
             </a:lvl2pPr>
             <a:lvl3pPr>
+              <a:buNone/>
               <a:defRPr sz="2250" b="1">
                 <a:solidFill>
                   <a:srgbClr val="245844"/>
@@ -8862,6 +9043,7 @@
               </a:defRPr>
             </a:lvl3pPr>
             <a:lvl4pPr>
+              <a:buNone/>
               <a:defRPr sz="2250" b="1">
                 <a:solidFill>
                   <a:srgbClr val="245844"/>
@@ -8872,6 +9054,7 @@
               </a:defRPr>
             </a:lvl4pPr>
             <a:lvl5pPr>
+              <a:buNone/>
               <a:defRPr sz="2250" b="1">
                 <a:solidFill>
                   <a:srgbClr val="245844"/>
@@ -8882,6 +9065,7 @@
               </a:defRPr>
             </a:lvl5pPr>
             <a:lvl6pPr>
+              <a:buNone/>
               <a:defRPr sz="2250" b="1">
                 <a:solidFill>
                   <a:srgbClr val="245844"/>
@@ -8892,6 +9076,7 @@
               </a:defRPr>
             </a:lvl6pPr>
             <a:lvl7pPr>
+              <a:buNone/>
               <a:defRPr sz="2250" b="1">
                 <a:solidFill>
                   <a:srgbClr val="245844"/>
@@ -8902,6 +9087,7 @@
               </a:defRPr>
             </a:lvl7pPr>
             <a:lvl8pPr>
+              <a:buNone/>
               <a:defRPr sz="2250" b="1">
                 <a:solidFill>
                   <a:srgbClr val="245844"/>
@@ -8912,6 +9098,7 @@
               </a:defRPr>
             </a:lvl8pPr>
             <a:lvl9pPr>
+              <a:buNone/>
               <a:defRPr sz="2250" b="1">
                 <a:solidFill>
                   <a:srgbClr val="245844"/>
@@ -8924,6 +9111,7 @@
           </a:lstStyle>
           <a:p xmlns:a="http://schemas.openxmlformats.org/drawingml/2006/main">
             <a:pPr>
+              <a:buNone/>
               <a:defRPr sz="2250" b="1">
                 <a:solidFill>
                   <a:srgbClr val="245844"/>
@@ -8990,6 +9178,7 @@
               </a:defRPr>
             </a:defPPr>
             <a:lvl1pPr>
+              <a:buNone/>
               <a:defRPr sz="1950" b="0">
                 <a:solidFill>
                   <a:srgbClr val="22362F"/>
@@ -9000,6 +9189,7 @@
               </a:defRPr>
             </a:lvl1pPr>
             <a:lvl2pPr>
+              <a:buNone/>
               <a:defRPr sz="1950" b="0">
                 <a:solidFill>
                   <a:srgbClr val="22362F"/>
@@ -9010,6 +9200,7 @@
               </a:defRPr>
             </a:lvl2pPr>
             <a:lvl3pPr>
+              <a:buNone/>
               <a:defRPr sz="1950" b="0">
                 <a:solidFill>
                   <a:srgbClr val="22362F"/>
@@ -9020,6 +9211,7 @@
               </a:defRPr>
             </a:lvl3pPr>
             <a:lvl4pPr>
+              <a:buNone/>
               <a:defRPr sz="1950" b="0">
                 <a:solidFill>
                   <a:srgbClr val="22362F"/>
@@ -9030,6 +9222,7 @@
               </a:defRPr>
             </a:lvl4pPr>
             <a:lvl5pPr>
+              <a:buNone/>
               <a:defRPr sz="1950" b="0">
                 <a:solidFill>
                   <a:srgbClr val="22362F"/>
@@ -9040,6 +9233,7 @@
               </a:defRPr>
             </a:lvl5pPr>
             <a:lvl6pPr>
+              <a:buNone/>
               <a:defRPr sz="1950" b="0">
                 <a:solidFill>
                   <a:srgbClr val="22362F"/>
@@ -9050,6 +9244,7 @@
               </a:defRPr>
             </a:lvl6pPr>
             <a:lvl7pPr>
+              <a:buNone/>
               <a:defRPr sz="1950" b="0">
                 <a:solidFill>
                   <a:srgbClr val="22362F"/>
@@ -9060,6 +9255,7 @@
               </a:defRPr>
             </a:lvl7pPr>
             <a:lvl8pPr>
+              <a:buNone/>
               <a:defRPr sz="1950" b="0">
                 <a:solidFill>
                   <a:srgbClr val="22362F"/>
@@ -9070,6 +9266,7 @@
               </a:defRPr>
             </a:lvl8pPr>
             <a:lvl9pPr>
+              <a:buNone/>
               <a:defRPr sz="1950" b="0">
                 <a:solidFill>
                   <a:srgbClr val="22362F"/>
@@ -9082,6 +9279,7 @@
           </a:lstStyle>
           <a:p xmlns:a="http://schemas.openxmlformats.org/drawingml/2006/main">
             <a:pPr>
+              <a:buNone/>
               <a:defRPr sz="1950" b="0">
                 <a:solidFill>
                   <a:srgbClr val="22362F"/>
@@ -9105,6 +9303,7 @@
           </a:p>
           <a:p xmlns:a="http://schemas.openxmlformats.org/drawingml/2006/main">
             <a:pPr>
+              <a:buNone/>
               <a:defRPr sz="1950" b="0">
                 <a:solidFill>
                   <a:srgbClr val="22362F"/>
@@ -9171,6 +9370,7 @@
               </a:defRPr>
             </a:defPPr>
             <a:lvl1pPr>
+              <a:buNone/>
               <a:defRPr sz="2250" b="1">
                 <a:solidFill>
                   <a:srgbClr val="245844"/>
@@ -9181,6 +9381,7 @@
               </a:defRPr>
             </a:lvl1pPr>
             <a:lvl2pPr>
+              <a:buNone/>
               <a:defRPr sz="2250" b="1">
                 <a:solidFill>
                   <a:srgbClr val="245844"/>
@@ -9191,6 +9392,7 @@
               </a:defRPr>
             </a:lvl2pPr>
             <a:lvl3pPr>
+              <a:buNone/>
               <a:defRPr sz="2250" b="1">
                 <a:solidFill>
                   <a:srgbClr val="245844"/>
@@ -9201,6 +9403,7 @@
               </a:defRPr>
             </a:lvl3pPr>
             <a:lvl4pPr>
+              <a:buNone/>
               <a:defRPr sz="2250" b="1">
                 <a:solidFill>
                   <a:srgbClr val="245844"/>
@@ -9211,6 +9414,7 @@
               </a:defRPr>
             </a:lvl4pPr>
             <a:lvl5pPr>
+              <a:buNone/>
               <a:defRPr sz="2250" b="1">
                 <a:solidFill>
                   <a:srgbClr val="245844"/>
@@ -9221,6 +9425,7 @@
               </a:defRPr>
             </a:lvl5pPr>
             <a:lvl6pPr>
+              <a:buNone/>
               <a:defRPr sz="2250" b="1">
                 <a:solidFill>
                   <a:srgbClr val="245844"/>
@@ -9231,6 +9436,7 @@
               </a:defRPr>
             </a:lvl6pPr>
             <a:lvl7pPr>
+              <a:buNone/>
               <a:defRPr sz="2250" b="1">
                 <a:solidFill>
                   <a:srgbClr val="245844"/>
@@ -9241,6 +9447,7 @@
               </a:defRPr>
             </a:lvl7pPr>
             <a:lvl8pPr>
+              <a:buNone/>
               <a:defRPr sz="2250" b="1">
                 <a:solidFill>
                   <a:srgbClr val="245844"/>
@@ -9251,6 +9458,7 @@
               </a:defRPr>
             </a:lvl8pPr>
             <a:lvl9pPr>
+              <a:buNone/>
               <a:defRPr sz="2250" b="1">
                 <a:solidFill>
                   <a:srgbClr val="245844"/>
@@ -9263,6 +9471,7 @@
           </a:lstStyle>
           <a:p xmlns:a="http://schemas.openxmlformats.org/drawingml/2006/main">
             <a:pPr>
+              <a:buNone/>
               <a:defRPr sz="2250" b="1">
                 <a:solidFill>
                   <a:srgbClr val="245844"/>
@@ -9329,6 +9538,7 @@
               </a:defRPr>
             </a:defPPr>
             <a:lvl1pPr>
+              <a:buNone/>
               <a:defRPr sz="1950" b="0">
                 <a:solidFill>
                   <a:srgbClr val="22362F"/>
@@ -9339,6 +9549,7 @@
               </a:defRPr>
             </a:lvl1pPr>
             <a:lvl2pPr>
+              <a:buNone/>
               <a:defRPr sz="1950" b="0">
                 <a:solidFill>
                   <a:srgbClr val="22362F"/>
@@ -9349,6 +9560,7 @@
               </a:defRPr>
             </a:lvl2pPr>
             <a:lvl3pPr>
+              <a:buNone/>
               <a:defRPr sz="1950" b="0">
                 <a:solidFill>
                   <a:srgbClr val="22362F"/>
@@ -9359,6 +9571,7 @@
               </a:defRPr>
             </a:lvl3pPr>
             <a:lvl4pPr>
+              <a:buNone/>
               <a:defRPr sz="1950" b="0">
                 <a:solidFill>
                   <a:srgbClr val="22362F"/>
@@ -9369,6 +9582,7 @@
               </a:defRPr>
             </a:lvl4pPr>
             <a:lvl5pPr>
+              <a:buNone/>
               <a:defRPr sz="1950" b="0">
                 <a:solidFill>
                   <a:srgbClr val="22362F"/>
@@ -9379,6 +9593,7 @@
               </a:defRPr>
             </a:lvl5pPr>
             <a:lvl6pPr>
+              <a:buNone/>
               <a:defRPr sz="1950" b="0">
                 <a:solidFill>
                   <a:srgbClr val="22362F"/>
@@ -9389,6 +9604,7 @@
               </a:defRPr>
             </a:lvl6pPr>
             <a:lvl7pPr>
+              <a:buNone/>
               <a:defRPr sz="1950" b="0">
                 <a:solidFill>
                   <a:srgbClr val="22362F"/>
@@ -9399,6 +9615,7 @@
               </a:defRPr>
             </a:lvl7pPr>
             <a:lvl8pPr>
+              <a:buNone/>
               <a:defRPr sz="1950" b="0">
                 <a:solidFill>
                   <a:srgbClr val="22362F"/>
@@ -9409,6 +9626,7 @@
               </a:defRPr>
             </a:lvl8pPr>
             <a:lvl9pPr>
+              <a:buNone/>
               <a:defRPr sz="1950" b="0">
                 <a:solidFill>
                   <a:srgbClr val="22362F"/>
@@ -9421,6 +9639,7 @@
           </a:lstStyle>
           <a:p xmlns:a="http://schemas.openxmlformats.org/drawingml/2006/main">
             <a:pPr>
+              <a:buNone/>
               <a:defRPr sz="1950" b="0">
                 <a:solidFill>
                   <a:srgbClr val="22362F"/>
@@ -9444,6 +9663,7 @@
           </a:p>
           <a:p xmlns:a="http://schemas.openxmlformats.org/drawingml/2006/main">
             <a:pPr>
+              <a:buNone/>
               <a:defRPr sz="1950" b="0">
                 <a:solidFill>
                   <a:srgbClr val="22362F"/>
@@ -9510,6 +9730,7 @@
               </a:defRPr>
             </a:defPPr>
             <a:lvl1pPr>
+              <a:buNone/>
               <a:defRPr sz="2250" b="1">
                 <a:solidFill>
                   <a:srgbClr val="245844"/>
@@ -9520,6 +9741,7 @@
               </a:defRPr>
             </a:lvl1pPr>
             <a:lvl2pPr>
+              <a:buNone/>
               <a:defRPr sz="2250" b="1">
                 <a:solidFill>
                   <a:srgbClr val="245844"/>
@@ -9530,6 +9752,7 @@
               </a:defRPr>
             </a:lvl2pPr>
             <a:lvl3pPr>
+              <a:buNone/>
               <a:defRPr sz="2250" b="1">
                 <a:solidFill>
                   <a:srgbClr val="245844"/>
@@ -9540,6 +9763,7 @@
               </a:defRPr>
             </a:lvl3pPr>
             <a:lvl4pPr>
+              <a:buNone/>
               <a:defRPr sz="2250" b="1">
                 <a:solidFill>
                   <a:srgbClr val="245844"/>
@@ -9550,6 +9774,7 @@
               </a:defRPr>
             </a:lvl4pPr>
             <a:lvl5pPr>
+              <a:buNone/>
               <a:defRPr sz="2250" b="1">
                 <a:solidFill>
                   <a:srgbClr val="245844"/>
@@ -9560,6 +9785,7 @@
               </a:defRPr>
             </a:lvl5pPr>
             <a:lvl6pPr>
+              <a:buNone/>
               <a:defRPr sz="2250" b="1">
                 <a:solidFill>
                   <a:srgbClr val="245844"/>
@@ -9570,6 +9796,7 @@
               </a:defRPr>
             </a:lvl6pPr>
             <a:lvl7pPr>
+              <a:buNone/>
               <a:defRPr sz="2250" b="1">
                 <a:solidFill>
                   <a:srgbClr val="245844"/>
@@ -9580,6 +9807,7 @@
               </a:defRPr>
             </a:lvl7pPr>
             <a:lvl8pPr>
+              <a:buNone/>
               <a:defRPr sz="2250" b="1">
                 <a:solidFill>
                   <a:srgbClr val="245844"/>
@@ -9590,6 +9818,7 @@
               </a:defRPr>
             </a:lvl8pPr>
             <a:lvl9pPr>
+              <a:buNone/>
               <a:defRPr sz="2250" b="1">
                 <a:solidFill>
                   <a:srgbClr val="245844"/>
@@ -9602,6 +9831,7 @@
           </a:lstStyle>
           <a:p xmlns:a="http://schemas.openxmlformats.org/drawingml/2006/main">
             <a:pPr>
+              <a:buNone/>
               <a:defRPr sz="2250" b="1">
                 <a:solidFill>
                   <a:srgbClr val="245844"/>
@@ -9668,6 +9898,7 @@
               </a:defRPr>
             </a:defPPr>
             <a:lvl1pPr>
+              <a:buNone/>
               <a:defRPr sz="1950" b="0">
                 <a:solidFill>
                   <a:srgbClr val="22362F"/>
@@ -9678,6 +9909,7 @@
               </a:defRPr>
             </a:lvl1pPr>
             <a:lvl2pPr>
+              <a:buNone/>
               <a:defRPr sz="1950" b="0">
                 <a:solidFill>
                   <a:srgbClr val="22362F"/>
@@ -9688,6 +9920,7 @@
               </a:defRPr>
             </a:lvl2pPr>
             <a:lvl3pPr>
+              <a:buNone/>
               <a:defRPr sz="1950" b="0">
                 <a:solidFill>
                   <a:srgbClr val="22362F"/>
@@ -9698,6 +9931,7 @@
               </a:defRPr>
             </a:lvl3pPr>
             <a:lvl4pPr>
+              <a:buNone/>
               <a:defRPr sz="1950" b="0">
                 <a:solidFill>
                   <a:srgbClr val="22362F"/>
@@ -9708,6 +9942,7 @@
               </a:defRPr>
             </a:lvl4pPr>
             <a:lvl5pPr>
+              <a:buNone/>
               <a:defRPr sz="1950" b="0">
                 <a:solidFill>
                   <a:srgbClr val="22362F"/>
@@ -9718,6 +9953,7 @@
               </a:defRPr>
             </a:lvl5pPr>
             <a:lvl6pPr>
+              <a:buNone/>
               <a:defRPr sz="1950" b="0">
                 <a:solidFill>
                   <a:srgbClr val="22362F"/>
@@ -9728,6 +9964,7 @@
               </a:defRPr>
             </a:lvl6pPr>
             <a:lvl7pPr>
+              <a:buNone/>
               <a:defRPr sz="1950" b="0">
                 <a:solidFill>
                   <a:srgbClr val="22362F"/>
@@ -9738,6 +9975,7 @@
               </a:defRPr>
             </a:lvl7pPr>
             <a:lvl8pPr>
+              <a:buNone/>
               <a:defRPr sz="1950" b="0">
                 <a:solidFill>
                   <a:srgbClr val="22362F"/>
@@ -9748,6 +9986,7 @@
               </a:defRPr>
             </a:lvl8pPr>
             <a:lvl9pPr>
+              <a:buNone/>
               <a:defRPr sz="1950" b="0">
                 <a:solidFill>
                   <a:srgbClr val="22362F"/>
@@ -9760,6 +9999,7 @@
           </a:lstStyle>
           <a:p xmlns:a="http://schemas.openxmlformats.org/drawingml/2006/main">
             <a:pPr>
+              <a:buNone/>
               <a:defRPr sz="1950" b="0">
                 <a:solidFill>
                   <a:srgbClr val="22362F"/>
@@ -9783,6 +10023,7 @@
           </a:p>
           <a:p xmlns:a="http://schemas.openxmlformats.org/drawingml/2006/main">
             <a:pPr>
+              <a:buNone/>
               <a:defRPr sz="1950" b="0">
                 <a:solidFill>
                   <a:srgbClr val="22362F"/>
@@ -9822,8 +10063,8 @@
         </p:nvSpPr>
         <p:spPr>
           <a:xfrm xmlns:a="http://schemas.openxmlformats.org/drawingml/2006/main">
-            <a:off x="609600" y="6115050"/>
-            <a:ext cx="10191750" cy="342900"/>
+            <a:off x="609600" y="6048375"/>
+            <a:ext cx="10287000" cy="552450"/>
           </a:xfrm>
           <a:prstGeom xmlns:a="http://schemas.openxmlformats.org/drawingml/2006/main" prst="rect">
             <a:avLst/>
@@ -9839,7 +10080,7 @@
           </a:bodyPr>
           <a:lstStyle xmlns:a="http://schemas.openxmlformats.org/drawingml/2006/main">
             <a:defPPr>
-              <a:defRPr sz="1350" b="0">
+              <a:defRPr sz="1725" b="0">
                 <a:solidFill>
                   <a:srgbClr val="5D6864"/>
                 </a:solidFill>
@@ -9849,6 +10090,7 @@
               </a:defRPr>
             </a:defPPr>
             <a:lvl1pPr>
+              <a:buNone/>
               <a:defRPr sz="1350" b="0">
                 <a:solidFill>
                   <a:srgbClr val="5D6864"/>
@@ -9859,6 +10101,7 @@
               </a:defRPr>
             </a:lvl1pPr>
             <a:lvl2pPr>
+              <a:buNone/>
               <a:defRPr sz="1350" b="0">
                 <a:solidFill>
                   <a:srgbClr val="5D6864"/>
@@ -9869,6 +10112,7 @@
               </a:defRPr>
             </a:lvl2pPr>
             <a:lvl3pPr>
+              <a:buNone/>
               <a:defRPr sz="1350" b="0">
                 <a:solidFill>
                   <a:srgbClr val="5D6864"/>
@@ -9879,6 +10123,7 @@
               </a:defRPr>
             </a:lvl3pPr>
             <a:lvl4pPr>
+              <a:buNone/>
               <a:defRPr sz="1350" b="0">
                 <a:solidFill>
                   <a:srgbClr val="5D6864"/>
@@ -9889,6 +10134,7 @@
               </a:defRPr>
             </a:lvl4pPr>
             <a:lvl5pPr>
+              <a:buNone/>
               <a:defRPr sz="1350" b="0">
                 <a:solidFill>
                   <a:srgbClr val="5D6864"/>
@@ -9899,6 +10145,7 @@
               </a:defRPr>
             </a:lvl5pPr>
             <a:lvl6pPr>
+              <a:buNone/>
               <a:defRPr sz="1350" b="0">
                 <a:solidFill>
                   <a:srgbClr val="5D6864"/>
@@ -9909,6 +10156,7 @@
               </a:defRPr>
             </a:lvl6pPr>
             <a:lvl7pPr>
+              <a:buNone/>
               <a:defRPr sz="1350" b="0">
                 <a:solidFill>
                   <a:srgbClr val="5D6864"/>
@@ -9919,6 +10167,7 @@
               </a:defRPr>
             </a:lvl7pPr>
             <a:lvl8pPr>
+              <a:buNone/>
               <a:defRPr sz="1350" b="0">
                 <a:solidFill>
                   <a:srgbClr val="5D6864"/>
@@ -9929,6 +10178,7 @@
               </a:defRPr>
             </a:lvl8pPr>
             <a:lvl9pPr>
+              <a:buNone/>
               <a:defRPr sz="1350" b="0">
                 <a:solidFill>
                   <a:srgbClr val="5D6864"/>
@@ -9941,7 +10191,8 @@
           </a:lstStyle>
           <a:p xmlns:a="http://schemas.openxmlformats.org/drawingml/2006/main">
             <a:pPr>
-              <a:defRPr sz="1350" b="0">
+              <a:buNone/>
+              <a:defRPr sz="1725" b="0">
                 <a:solidFill>
                   <a:srgbClr val="5D6864"/>
                 </a:solidFill>
@@ -9951,7 +10202,7 @@
               </a:defRPr>
             </a:pPr>
             <a:r>
-              <a:rPr sz="1350" b="0">
+              <a:rPr sz="1725" b="0">
                 <a:solidFill>
                   <a:srgbClr val="5D6864"/>
                 </a:solidFill>
@@ -9959,7 +10210,7 @@
                 <a:ea typeface="Arial"/>
                 <a:cs typeface="Arial"/>
               </a:rPr>
-              <a:t>Full references and attribution appear in the technical report and third-party notices.</a:t>
+              <a:t>Full references are in the report and third-party notices.</a:t>
             </a:r>
           </a:p>
         </p:txBody>
@@ -10036,6 +10287,7 @@
               </a:defRPr>
             </a:defPPr>
             <a:lvl1pPr>
+              <a:buNone/>
               <a:defRPr sz="3300" b="1">
                 <a:solidFill>
                   <a:srgbClr val="22362F"/>
@@ -10046,6 +10298,7 @@
               </a:defRPr>
             </a:lvl1pPr>
             <a:lvl2pPr>
+              <a:buNone/>
               <a:defRPr sz="3300" b="1">
                 <a:solidFill>
                   <a:srgbClr val="22362F"/>
@@ -10056,6 +10309,7 @@
               </a:defRPr>
             </a:lvl2pPr>
             <a:lvl3pPr>
+              <a:buNone/>
               <a:defRPr sz="3300" b="1">
                 <a:solidFill>
                   <a:srgbClr val="22362F"/>
@@ -10066,6 +10320,7 @@
               </a:defRPr>
             </a:lvl3pPr>
             <a:lvl4pPr>
+              <a:buNone/>
               <a:defRPr sz="3300" b="1">
                 <a:solidFill>
                   <a:srgbClr val="22362F"/>
@@ -10076,6 +10331,7 @@
               </a:defRPr>
             </a:lvl4pPr>
             <a:lvl5pPr>
+              <a:buNone/>
               <a:defRPr sz="3300" b="1">
                 <a:solidFill>
                   <a:srgbClr val="22362F"/>
@@ -10086,6 +10342,7 @@
               </a:defRPr>
             </a:lvl5pPr>
             <a:lvl6pPr>
+              <a:buNone/>
               <a:defRPr sz="3300" b="1">
                 <a:solidFill>
                   <a:srgbClr val="22362F"/>
@@ -10096,6 +10353,7 @@
               </a:defRPr>
             </a:lvl6pPr>
             <a:lvl7pPr>
+              <a:buNone/>
               <a:defRPr sz="3300" b="1">
                 <a:solidFill>
                   <a:srgbClr val="22362F"/>
@@ -10106,6 +10364,7 @@
               </a:defRPr>
             </a:lvl7pPr>
             <a:lvl8pPr>
+              <a:buNone/>
               <a:defRPr sz="3300" b="1">
                 <a:solidFill>
                   <a:srgbClr val="22362F"/>
@@ -10116,6 +10375,7 @@
               </a:defRPr>
             </a:lvl8pPr>
             <a:lvl9pPr>
+              <a:buNone/>
               <a:defRPr sz="3300" b="1">
                 <a:solidFill>
                   <a:srgbClr val="22362F"/>
@@ -10128,6 +10388,7 @@
           </a:lstStyle>
           <a:p xmlns:a="http://schemas.openxmlformats.org/drawingml/2006/main">
             <a:pPr>
+              <a:buNone/>
               <a:defRPr sz="3300" b="1">
                 <a:solidFill>
                   <a:srgbClr val="22362F"/>
@@ -10194,6 +10455,7 @@
               </a:defRPr>
             </a:defPPr>
             <a:lvl1pPr>
+              <a:buNone/>
               <a:defRPr sz="1350" b="0">
                 <a:solidFill>
                   <a:srgbClr val="5D6864"/>
@@ -10204,6 +10466,7 @@
               </a:defRPr>
             </a:lvl1pPr>
             <a:lvl2pPr>
+              <a:buNone/>
               <a:defRPr sz="1350" b="0">
                 <a:solidFill>
                   <a:srgbClr val="5D6864"/>
@@ -10214,6 +10477,7 @@
               </a:defRPr>
             </a:lvl2pPr>
             <a:lvl3pPr>
+              <a:buNone/>
               <a:defRPr sz="1350" b="0">
                 <a:solidFill>
                   <a:srgbClr val="5D6864"/>
@@ -10224,6 +10488,7 @@
               </a:defRPr>
             </a:lvl3pPr>
             <a:lvl4pPr>
+              <a:buNone/>
               <a:defRPr sz="1350" b="0">
                 <a:solidFill>
                   <a:srgbClr val="5D6864"/>
@@ -10234,6 +10499,7 @@
               </a:defRPr>
             </a:lvl4pPr>
             <a:lvl5pPr>
+              <a:buNone/>
               <a:defRPr sz="1350" b="0">
                 <a:solidFill>
                   <a:srgbClr val="5D6864"/>
@@ -10244,6 +10510,7 @@
               </a:defRPr>
             </a:lvl5pPr>
             <a:lvl6pPr>
+              <a:buNone/>
               <a:defRPr sz="1350" b="0">
                 <a:solidFill>
                   <a:srgbClr val="5D6864"/>
@@ -10254,6 +10521,7 @@
               </a:defRPr>
             </a:lvl6pPr>
             <a:lvl7pPr>
+              <a:buNone/>
               <a:defRPr sz="1350" b="0">
                 <a:solidFill>
                   <a:srgbClr val="5D6864"/>
@@ -10264,6 +10532,7 @@
               </a:defRPr>
             </a:lvl7pPr>
             <a:lvl8pPr>
+              <a:buNone/>
               <a:defRPr sz="1350" b="0">
                 <a:solidFill>
                   <a:srgbClr val="5D6864"/>
@@ -10274,6 +10543,7 @@
               </a:defRPr>
             </a:lvl8pPr>
             <a:lvl9pPr>
+              <a:buNone/>
               <a:defRPr sz="1350" b="0">
                 <a:solidFill>
                   <a:srgbClr val="5D6864"/>
@@ -10286,6 +10556,7 @@
           </a:lstStyle>
           <a:p xmlns:a="http://schemas.openxmlformats.org/drawingml/2006/main">
             <a:pPr>
+              <a:buNone/>
               <a:defRPr sz="1350" b="0">
                 <a:solidFill>
                   <a:srgbClr val="5D6864"/>
@@ -10314,7 +10585,7 @@
           <p:cNvPr id="3" name="">
             <a:extLst xmlns:a="http://schemas.openxmlformats.org/drawingml/2006/main">
               <a:ext uri="{FF2B5EF4-FFF2-40B4-BE49-F238E27FC236}">
-                <a16:creationId xmlns:a16="http://schemas.microsoft.com/office/drawing/2014/main" id="{C59DC130-0CEC-4014-935D-18695543F1FA}"/>
+                <a16:creationId xmlns:a16="http://schemas.microsoft.com/office/drawing/2014/main" id="{60387B6D-33B1-4FED-898B-F684C625CDBA}"/>
               </a:ext>
             </a:extLst>
           </p:cNvPr>
@@ -10324,7 +10595,7 @@
           <p:nvPr/>
         </p:nvPicPr>
         <p:blipFill>
-          <a:blip xmlns:r="http://schemas.openxmlformats.org/officeDocument/2006/relationships" xmlns:a="http://schemas.openxmlformats.org/drawingml/2006/main" r:embed="Rae5bb296501841f9"/>
+          <a:blip xmlns:r="http://schemas.openxmlformats.org/officeDocument/2006/relationships" xmlns:a="http://schemas.openxmlformats.org/drawingml/2006/main" r:embed="Rb564bdb301654255"/>
           <a:stretch xmlns:a="http://schemas.openxmlformats.org/drawingml/2006/main"/>
         </p:blipFill>
         <p:spPr>
@@ -10380,6 +10651,7 @@
               </a:defRPr>
             </a:defPPr>
             <a:lvl1pPr>
+              <a:buNone/>
               <a:defRPr sz="2100" b="1">
                 <a:solidFill>
                   <a:srgbClr val="22362F"/>
@@ -10390,6 +10662,7 @@
               </a:defRPr>
             </a:lvl1pPr>
             <a:lvl2pPr>
+              <a:buNone/>
               <a:defRPr sz="2100" b="1">
                 <a:solidFill>
                   <a:srgbClr val="22362F"/>
@@ -10400,6 +10673,7 @@
               </a:defRPr>
             </a:lvl2pPr>
             <a:lvl3pPr>
+              <a:buNone/>
               <a:defRPr sz="2100" b="1">
                 <a:solidFill>
                   <a:srgbClr val="22362F"/>
@@ -10410,6 +10684,7 @@
               </a:defRPr>
             </a:lvl3pPr>
             <a:lvl4pPr>
+              <a:buNone/>
               <a:defRPr sz="2100" b="1">
                 <a:solidFill>
                   <a:srgbClr val="22362F"/>
@@ -10420,6 +10695,7 @@
               </a:defRPr>
             </a:lvl4pPr>
             <a:lvl5pPr>
+              <a:buNone/>
               <a:defRPr sz="2100" b="1">
                 <a:solidFill>
                   <a:srgbClr val="22362F"/>
@@ -10430,6 +10706,7 @@
               </a:defRPr>
             </a:lvl5pPr>
             <a:lvl6pPr>
+              <a:buNone/>
               <a:defRPr sz="2100" b="1">
                 <a:solidFill>
                   <a:srgbClr val="22362F"/>
@@ -10440,6 +10717,7 @@
               </a:defRPr>
             </a:lvl6pPr>
             <a:lvl7pPr>
+              <a:buNone/>
               <a:defRPr sz="2100" b="1">
                 <a:solidFill>
                   <a:srgbClr val="22362F"/>
@@ -10450,6 +10728,7 @@
               </a:defRPr>
             </a:lvl7pPr>
             <a:lvl8pPr>
+              <a:buNone/>
               <a:defRPr sz="2100" b="1">
                 <a:solidFill>
                   <a:srgbClr val="22362F"/>
@@ -10460,6 +10739,7 @@
               </a:defRPr>
             </a:lvl8pPr>
             <a:lvl9pPr>
+              <a:buNone/>
               <a:defRPr sz="2100" b="1">
                 <a:solidFill>
                   <a:srgbClr val="22362F"/>
@@ -10472,6 +10752,7 @@
           </a:lstStyle>
           <a:p xmlns:a="http://schemas.openxmlformats.org/drawingml/2006/main">
             <a:pPr>
+              <a:buNone/>
               <a:defRPr sz="2100" b="1">
                 <a:solidFill>
                   <a:srgbClr val="22362F"/>
@@ -10500,7 +10781,7 @@
           <p:cNvPr id="5" name="">
             <a:extLst xmlns:a="http://schemas.openxmlformats.org/drawingml/2006/main">
               <a:ext uri="{FF2B5EF4-FFF2-40B4-BE49-F238E27FC236}">
-                <a16:creationId xmlns:a16="http://schemas.microsoft.com/office/drawing/2014/main" id="{4A7611EC-EC6D-4FBB-94C2-8E281687FA66}"/>
+                <a16:creationId xmlns:a16="http://schemas.microsoft.com/office/drawing/2014/main" id="{8D7227BC-DE61-4EE9-9689-7C229F078E8A}"/>
               </a:ext>
             </a:extLst>
           </p:cNvPr>
@@ -10510,7 +10791,7 @@
           <p:nvPr/>
         </p:nvPicPr>
         <p:blipFill>
-          <a:blip xmlns:r="http://schemas.openxmlformats.org/officeDocument/2006/relationships" xmlns:a="http://schemas.openxmlformats.org/drawingml/2006/main" r:embed="R2617f8a0ad934b7d"/>
+          <a:blip xmlns:r="http://schemas.openxmlformats.org/officeDocument/2006/relationships" xmlns:a="http://schemas.openxmlformats.org/drawingml/2006/main" r:embed="R3488bdc89575479b"/>
           <a:stretch xmlns:a="http://schemas.openxmlformats.org/drawingml/2006/main"/>
         </p:blipFill>
         <p:spPr>
@@ -10566,6 +10847,7 @@
               </a:defRPr>
             </a:defPPr>
             <a:lvl1pPr>
+              <a:buNone/>
               <a:defRPr sz="2100" b="1">
                 <a:solidFill>
                   <a:srgbClr val="22362F"/>
@@ -10576,6 +10858,7 @@
               </a:defRPr>
             </a:lvl1pPr>
             <a:lvl2pPr>
+              <a:buNone/>
               <a:defRPr sz="2100" b="1">
                 <a:solidFill>
                   <a:srgbClr val="22362F"/>
@@ -10586,6 +10869,7 @@
               </a:defRPr>
             </a:lvl2pPr>
             <a:lvl3pPr>
+              <a:buNone/>
               <a:defRPr sz="2100" b="1">
                 <a:solidFill>
                   <a:srgbClr val="22362F"/>
@@ -10596,6 +10880,7 @@
               </a:defRPr>
             </a:lvl3pPr>
             <a:lvl4pPr>
+              <a:buNone/>
               <a:defRPr sz="2100" b="1">
                 <a:solidFill>
                   <a:srgbClr val="22362F"/>
@@ -10606,6 +10891,7 @@
               </a:defRPr>
             </a:lvl4pPr>
             <a:lvl5pPr>
+              <a:buNone/>
               <a:defRPr sz="2100" b="1">
                 <a:solidFill>
                   <a:srgbClr val="22362F"/>
@@ -10616,6 +10902,7 @@
               </a:defRPr>
             </a:lvl5pPr>
             <a:lvl6pPr>
+              <a:buNone/>
               <a:defRPr sz="2100" b="1">
                 <a:solidFill>
                   <a:srgbClr val="22362F"/>
@@ -10626,6 +10913,7 @@
               </a:defRPr>
             </a:lvl6pPr>
             <a:lvl7pPr>
+              <a:buNone/>
               <a:defRPr sz="2100" b="1">
                 <a:solidFill>
                   <a:srgbClr val="22362F"/>
@@ -10636,6 +10924,7 @@
               </a:defRPr>
             </a:lvl7pPr>
             <a:lvl8pPr>
+              <a:buNone/>
               <a:defRPr sz="2100" b="1">
                 <a:solidFill>
                   <a:srgbClr val="22362F"/>
@@ -10646,6 +10935,7 @@
               </a:defRPr>
             </a:lvl8pPr>
             <a:lvl9pPr>
+              <a:buNone/>
               <a:defRPr sz="2100" b="1">
                 <a:solidFill>
                   <a:srgbClr val="22362F"/>
@@ -10658,6 +10948,7 @@
           </a:lstStyle>
           <a:p xmlns:a="http://schemas.openxmlformats.org/drawingml/2006/main">
             <a:pPr>
+              <a:buNone/>
               <a:defRPr sz="2100" b="1">
                 <a:solidFill>
                   <a:srgbClr val="22362F"/>
@@ -10686,7 +10977,7 @@
           <p:cNvPr id="7" name="">
             <a:extLst xmlns:a="http://schemas.openxmlformats.org/drawingml/2006/main">
               <a:ext uri="{FF2B5EF4-FFF2-40B4-BE49-F238E27FC236}">
-                <a16:creationId xmlns:a16="http://schemas.microsoft.com/office/drawing/2014/main" id="{54849734-20ED-4E80-8BD4-AF71C02D389C}"/>
+                <a16:creationId xmlns:a16="http://schemas.microsoft.com/office/drawing/2014/main" id="{03024481-2EEC-4782-A7BA-D4DDB00D275E}"/>
               </a:ext>
             </a:extLst>
           </p:cNvPr>
@@ -10696,7 +10987,7 @@
           <p:nvPr/>
         </p:nvPicPr>
         <p:blipFill>
-          <a:blip xmlns:r="http://schemas.openxmlformats.org/officeDocument/2006/relationships" xmlns:a="http://schemas.openxmlformats.org/drawingml/2006/main" r:embed="R8d3916fc7586408a"/>
+          <a:blip xmlns:r="http://schemas.openxmlformats.org/officeDocument/2006/relationships" xmlns:a="http://schemas.openxmlformats.org/drawingml/2006/main" r:embed="R22edbfc17ae84613"/>
           <a:stretch xmlns:a="http://schemas.openxmlformats.org/drawingml/2006/main"/>
         </p:blipFill>
         <p:spPr>
@@ -10752,6 +11043,7 @@
               </a:defRPr>
             </a:defPPr>
             <a:lvl1pPr>
+              <a:buNone/>
               <a:defRPr sz="2100" b="1">
                 <a:solidFill>
                   <a:srgbClr val="22362F"/>
@@ -10762,6 +11054,7 @@
               </a:defRPr>
             </a:lvl1pPr>
             <a:lvl2pPr>
+              <a:buNone/>
               <a:defRPr sz="2100" b="1">
                 <a:solidFill>
                   <a:srgbClr val="22362F"/>
@@ -10772,6 +11065,7 @@
               </a:defRPr>
             </a:lvl2pPr>
             <a:lvl3pPr>
+              <a:buNone/>
               <a:defRPr sz="2100" b="1">
                 <a:solidFill>
                   <a:srgbClr val="22362F"/>
@@ -10782,6 +11076,7 @@
               </a:defRPr>
             </a:lvl3pPr>
             <a:lvl4pPr>
+              <a:buNone/>
               <a:defRPr sz="2100" b="1">
                 <a:solidFill>
                   <a:srgbClr val="22362F"/>
@@ -10792,6 +11087,7 @@
               </a:defRPr>
             </a:lvl4pPr>
             <a:lvl5pPr>
+              <a:buNone/>
               <a:defRPr sz="2100" b="1">
                 <a:solidFill>
                   <a:srgbClr val="22362F"/>
@@ -10802,6 +11098,7 @@
               </a:defRPr>
             </a:lvl5pPr>
             <a:lvl6pPr>
+              <a:buNone/>
               <a:defRPr sz="2100" b="1">
                 <a:solidFill>
                   <a:srgbClr val="22362F"/>
@@ -10812,6 +11109,7 @@
               </a:defRPr>
             </a:lvl6pPr>
             <a:lvl7pPr>
+              <a:buNone/>
               <a:defRPr sz="2100" b="1">
                 <a:solidFill>
                   <a:srgbClr val="22362F"/>
@@ -10822,6 +11120,7 @@
               </a:defRPr>
             </a:lvl7pPr>
             <a:lvl8pPr>
+              <a:buNone/>
               <a:defRPr sz="2100" b="1">
                 <a:solidFill>
                   <a:srgbClr val="22362F"/>
@@ -10832,6 +11131,7 @@
               </a:defRPr>
             </a:lvl8pPr>
             <a:lvl9pPr>
+              <a:buNone/>
               <a:defRPr sz="2100" b="1">
                 <a:solidFill>
                   <a:srgbClr val="22362F"/>
@@ -10844,6 +11144,7 @@
           </a:lstStyle>
           <a:p xmlns:a="http://schemas.openxmlformats.org/drawingml/2006/main">
             <a:pPr>
+              <a:buNone/>
               <a:defRPr sz="2100" b="1">
                 <a:solidFill>
                   <a:srgbClr val="22362F"/>
@@ -10883,8 +11184,8 @@
         </p:nvSpPr>
         <p:spPr>
           <a:xfrm xmlns:a="http://schemas.openxmlformats.org/drawingml/2006/main">
-            <a:off x="609600" y="5495925"/>
-            <a:ext cx="3333750" cy="438150"/>
+            <a:off x="609600" y="5667375"/>
+            <a:ext cx="3333750" cy="323850"/>
           </a:xfrm>
           <a:prstGeom xmlns:a="http://schemas.openxmlformats.org/drawingml/2006/main" prst="rect">
             <a:avLst/>
@@ -10900,7 +11201,7 @@
           </a:bodyPr>
           <a:lstStyle xmlns:a="http://schemas.openxmlformats.org/drawingml/2006/main">
             <a:defPPr>
-              <a:defRPr sz="2250" b="1">
+              <a:defRPr sz="2100" b="1">
                 <a:solidFill>
                   <a:srgbClr val="245844"/>
                 </a:solidFill>
@@ -10910,6 +11211,7 @@
               </a:defRPr>
             </a:defPPr>
             <a:lvl1pPr>
+              <a:buNone/>
               <a:defRPr sz="2250" b="1">
                 <a:solidFill>
                   <a:srgbClr val="245844"/>
@@ -10920,6 +11222,7 @@
               </a:defRPr>
             </a:lvl1pPr>
             <a:lvl2pPr>
+              <a:buNone/>
               <a:defRPr sz="2250" b="1">
                 <a:solidFill>
                   <a:srgbClr val="245844"/>
@@ -10930,6 +11233,7 @@
               </a:defRPr>
             </a:lvl2pPr>
             <a:lvl3pPr>
+              <a:buNone/>
               <a:defRPr sz="2250" b="1">
                 <a:solidFill>
                   <a:srgbClr val="245844"/>
@@ -10940,6 +11244,7 @@
               </a:defRPr>
             </a:lvl3pPr>
             <a:lvl4pPr>
+              <a:buNone/>
               <a:defRPr sz="2250" b="1">
                 <a:solidFill>
                   <a:srgbClr val="245844"/>
@@ -10950,6 +11255,7 @@
               </a:defRPr>
             </a:lvl4pPr>
             <a:lvl5pPr>
+              <a:buNone/>
               <a:defRPr sz="2250" b="1">
                 <a:solidFill>
                   <a:srgbClr val="245844"/>
@@ -10960,6 +11266,7 @@
               </a:defRPr>
             </a:lvl5pPr>
             <a:lvl6pPr>
+              <a:buNone/>
               <a:defRPr sz="2250" b="1">
                 <a:solidFill>
                   <a:srgbClr val="245844"/>
@@ -10970,6 +11277,7 @@
               </a:defRPr>
             </a:lvl6pPr>
             <a:lvl7pPr>
+              <a:buNone/>
               <a:defRPr sz="2250" b="1">
                 <a:solidFill>
                   <a:srgbClr val="245844"/>
@@ -10980,6 +11288,7 @@
               </a:defRPr>
             </a:lvl7pPr>
             <a:lvl8pPr>
+              <a:buNone/>
               <a:defRPr sz="2250" b="1">
                 <a:solidFill>
                   <a:srgbClr val="245844"/>
@@ -10990,6 +11299,7 @@
               </a:defRPr>
             </a:lvl8pPr>
             <a:lvl9pPr>
+              <a:buNone/>
               <a:defRPr sz="2250" b="1">
                 <a:solidFill>
                   <a:srgbClr val="245844"/>
@@ -11002,7 +11312,8 @@
           </a:lstStyle>
           <a:p xmlns:a="http://schemas.openxmlformats.org/drawingml/2006/main">
             <a:pPr>
-              <a:defRPr sz="2250" b="1">
+              <a:buNone/>
+              <a:defRPr sz="2100" b="1">
                 <a:solidFill>
                   <a:srgbClr val="245844"/>
                 </a:solidFill>
@@ -11012,7 +11323,7 @@
               </a:defRPr>
             </a:pPr>
             <a:r>
-              <a:rPr sz="2250" b="1">
+              <a:rPr sz="2100" b="1">
                 <a:solidFill>
                   <a:srgbClr val="245844"/>
                 </a:solidFill>
@@ -11041,8 +11352,8 @@
         </p:nvSpPr>
         <p:spPr>
           <a:xfrm xmlns:a="http://schemas.openxmlformats.org/drawingml/2006/main">
-            <a:off x="4324350" y="5495925"/>
-            <a:ext cx="3333750" cy="438150"/>
+            <a:off x="4324350" y="5667375"/>
+            <a:ext cx="3333750" cy="323850"/>
           </a:xfrm>
           <a:prstGeom xmlns:a="http://schemas.openxmlformats.org/drawingml/2006/main" prst="rect">
             <a:avLst/>
@@ -11058,7 +11369,7 @@
           </a:bodyPr>
           <a:lstStyle xmlns:a="http://schemas.openxmlformats.org/drawingml/2006/main">
             <a:defPPr>
-              <a:defRPr sz="2250" b="1">
+              <a:defRPr sz="2100" b="1">
                 <a:solidFill>
                   <a:srgbClr val="245844"/>
                 </a:solidFill>
@@ -11068,6 +11379,7 @@
               </a:defRPr>
             </a:defPPr>
             <a:lvl1pPr>
+              <a:buNone/>
               <a:defRPr sz="2250" b="1">
                 <a:solidFill>
                   <a:srgbClr val="245844"/>
@@ -11078,6 +11390,7 @@
               </a:defRPr>
             </a:lvl1pPr>
             <a:lvl2pPr>
+              <a:buNone/>
               <a:defRPr sz="2250" b="1">
                 <a:solidFill>
                   <a:srgbClr val="245844"/>
@@ -11088,6 +11401,7 @@
               </a:defRPr>
             </a:lvl2pPr>
             <a:lvl3pPr>
+              <a:buNone/>
               <a:defRPr sz="2250" b="1">
                 <a:solidFill>
                   <a:srgbClr val="245844"/>
@@ -11098,6 +11412,7 @@
               </a:defRPr>
             </a:lvl3pPr>
             <a:lvl4pPr>
+              <a:buNone/>
               <a:defRPr sz="2250" b="1">
                 <a:solidFill>
                   <a:srgbClr val="245844"/>
@@ -11108,6 +11423,7 @@
               </a:defRPr>
             </a:lvl4pPr>
             <a:lvl5pPr>
+              <a:buNone/>
               <a:defRPr sz="2250" b="1">
                 <a:solidFill>
                   <a:srgbClr val="245844"/>
@@ -11118,6 +11434,7 @@
               </a:defRPr>
             </a:lvl5pPr>
             <a:lvl6pPr>
+              <a:buNone/>
               <a:defRPr sz="2250" b="1">
                 <a:solidFill>
                   <a:srgbClr val="245844"/>
@@ -11128,6 +11445,7 @@
               </a:defRPr>
             </a:lvl6pPr>
             <a:lvl7pPr>
+              <a:buNone/>
               <a:defRPr sz="2250" b="1">
                 <a:solidFill>
                   <a:srgbClr val="245844"/>
@@ -11138,6 +11456,7 @@
               </a:defRPr>
             </a:lvl7pPr>
             <a:lvl8pPr>
+              <a:buNone/>
               <a:defRPr sz="2250" b="1">
                 <a:solidFill>
                   <a:srgbClr val="245844"/>
@@ -11148,6 +11467,7 @@
               </a:defRPr>
             </a:lvl8pPr>
             <a:lvl9pPr>
+              <a:buNone/>
               <a:defRPr sz="2250" b="1">
                 <a:solidFill>
                   <a:srgbClr val="245844"/>
@@ -11160,7 +11480,8 @@
           </a:lstStyle>
           <a:p xmlns:a="http://schemas.openxmlformats.org/drawingml/2006/main">
             <a:pPr>
-              <a:defRPr sz="2250" b="1">
+              <a:buNone/>
+              <a:defRPr sz="2100" b="1">
                 <a:solidFill>
                   <a:srgbClr val="245844"/>
                 </a:solidFill>
@@ -11170,7 +11491,7 @@
               </a:defRPr>
             </a:pPr>
             <a:r>
-              <a:rPr sz="2250" b="1">
+              <a:rPr sz="2100" b="1">
                 <a:solidFill>
                   <a:srgbClr val="245844"/>
                 </a:solidFill>
@@ -11199,8 +11520,8 @@
         </p:nvSpPr>
         <p:spPr>
           <a:xfrm xmlns:a="http://schemas.openxmlformats.org/drawingml/2006/main">
-            <a:off x="8039100" y="5495925"/>
-            <a:ext cx="3333750" cy="438150"/>
+            <a:off x="8039100" y="5667375"/>
+            <a:ext cx="3333750" cy="323850"/>
           </a:xfrm>
           <a:prstGeom xmlns:a="http://schemas.openxmlformats.org/drawingml/2006/main" prst="rect">
             <a:avLst/>
@@ -11216,7 +11537,7 @@
           </a:bodyPr>
           <a:lstStyle xmlns:a="http://schemas.openxmlformats.org/drawingml/2006/main">
             <a:defPPr>
-              <a:defRPr sz="2250" b="1">
+              <a:defRPr sz="2100" b="1">
                 <a:solidFill>
                   <a:srgbClr val="245844"/>
                 </a:solidFill>
@@ -11226,6 +11547,7 @@
               </a:defRPr>
             </a:defPPr>
             <a:lvl1pPr>
+              <a:buNone/>
               <a:defRPr sz="2250" b="1">
                 <a:solidFill>
                   <a:srgbClr val="245844"/>
@@ -11236,6 +11558,7 @@
               </a:defRPr>
             </a:lvl1pPr>
             <a:lvl2pPr>
+              <a:buNone/>
               <a:defRPr sz="2250" b="1">
                 <a:solidFill>
                   <a:srgbClr val="245844"/>
@@ -11246,6 +11569,7 @@
               </a:defRPr>
             </a:lvl2pPr>
             <a:lvl3pPr>
+              <a:buNone/>
               <a:defRPr sz="2250" b="1">
                 <a:solidFill>
                   <a:srgbClr val="245844"/>
@@ -11256,6 +11580,7 @@
               </a:defRPr>
             </a:lvl3pPr>
             <a:lvl4pPr>
+              <a:buNone/>
               <a:defRPr sz="2250" b="1">
                 <a:solidFill>
                   <a:srgbClr val="245844"/>
@@ -11266,6 +11591,7 @@
               </a:defRPr>
             </a:lvl4pPr>
             <a:lvl5pPr>
+              <a:buNone/>
               <a:defRPr sz="2250" b="1">
                 <a:solidFill>
                   <a:srgbClr val="245844"/>
@@ -11276,6 +11602,7 @@
               </a:defRPr>
             </a:lvl5pPr>
             <a:lvl6pPr>
+              <a:buNone/>
               <a:defRPr sz="2250" b="1">
                 <a:solidFill>
                   <a:srgbClr val="245844"/>
@@ -11286,6 +11613,7 @@
               </a:defRPr>
             </a:lvl6pPr>
             <a:lvl7pPr>
+              <a:buNone/>
               <a:defRPr sz="2250" b="1">
                 <a:solidFill>
                   <a:srgbClr val="245844"/>
@@ -11296,6 +11624,7 @@
               </a:defRPr>
             </a:lvl7pPr>
             <a:lvl8pPr>
+              <a:buNone/>
               <a:defRPr sz="2250" b="1">
                 <a:solidFill>
                   <a:srgbClr val="245844"/>
@@ -11306,6 +11635,7 @@
               </a:defRPr>
             </a:lvl8pPr>
             <a:lvl9pPr>
+              <a:buNone/>
               <a:defRPr sz="2250" b="1">
                 <a:solidFill>
                   <a:srgbClr val="245844"/>
@@ -11318,7 +11648,8 @@
           </a:lstStyle>
           <a:p xmlns:a="http://schemas.openxmlformats.org/drawingml/2006/main">
             <a:pPr>
-              <a:defRPr sz="2250" b="1">
+              <a:buNone/>
+              <a:defRPr sz="2100" b="1">
                 <a:solidFill>
                   <a:srgbClr val="245844"/>
                 </a:solidFill>
@@ -11328,7 +11659,7 @@
               </a:defRPr>
             </a:pPr>
             <a:r>
-              <a:rPr sz="2250" b="1">
+              <a:rPr sz="2100" b="1">
                 <a:solidFill>
                   <a:srgbClr val="245844"/>
                 </a:solidFill>
@@ -11357,8 +11688,8 @@
         </p:nvSpPr>
         <p:spPr>
           <a:xfrm xmlns:a="http://schemas.openxmlformats.org/drawingml/2006/main">
-            <a:off x="609600" y="6115050"/>
-            <a:ext cx="10191750" cy="342900"/>
+            <a:off x="609600" y="6048375"/>
+            <a:ext cx="10287000" cy="552450"/>
           </a:xfrm>
           <a:prstGeom xmlns:a="http://schemas.openxmlformats.org/drawingml/2006/main" prst="rect">
             <a:avLst/>
@@ -11374,7 +11705,7 @@
           </a:bodyPr>
           <a:lstStyle xmlns:a="http://schemas.openxmlformats.org/drawingml/2006/main">
             <a:defPPr>
-              <a:defRPr sz="1350" b="0">
+              <a:defRPr sz="1725" b="0">
                 <a:solidFill>
                   <a:srgbClr val="5D6864"/>
                 </a:solidFill>
@@ -11384,6 +11715,7 @@
               </a:defRPr>
             </a:defPPr>
             <a:lvl1pPr>
+              <a:buNone/>
               <a:defRPr sz="1350" b="0">
                 <a:solidFill>
                   <a:srgbClr val="5D6864"/>
@@ -11394,6 +11726,7 @@
               </a:defRPr>
             </a:lvl1pPr>
             <a:lvl2pPr>
+              <a:buNone/>
               <a:defRPr sz="1350" b="0">
                 <a:solidFill>
                   <a:srgbClr val="5D6864"/>
@@ -11404,6 +11737,7 @@
               </a:defRPr>
             </a:lvl2pPr>
             <a:lvl3pPr>
+              <a:buNone/>
               <a:defRPr sz="1350" b="0">
                 <a:solidFill>
                   <a:srgbClr val="5D6864"/>
@@ -11414,6 +11748,7 @@
               </a:defRPr>
             </a:lvl3pPr>
             <a:lvl4pPr>
+              <a:buNone/>
               <a:defRPr sz="1350" b="0">
                 <a:solidFill>
                   <a:srgbClr val="5D6864"/>
@@ -11424,6 +11759,7 @@
               </a:defRPr>
             </a:lvl4pPr>
             <a:lvl5pPr>
+              <a:buNone/>
               <a:defRPr sz="1350" b="0">
                 <a:solidFill>
                   <a:srgbClr val="5D6864"/>
@@ -11434,6 +11770,7 @@
               </a:defRPr>
             </a:lvl5pPr>
             <a:lvl6pPr>
+              <a:buNone/>
               <a:defRPr sz="1350" b="0">
                 <a:solidFill>
                   <a:srgbClr val="5D6864"/>
@@ -11444,6 +11781,7 @@
               </a:defRPr>
             </a:lvl6pPr>
             <a:lvl7pPr>
+              <a:buNone/>
               <a:defRPr sz="1350" b="0">
                 <a:solidFill>
                   <a:srgbClr val="5D6864"/>
@@ -11454,6 +11792,7 @@
               </a:defRPr>
             </a:lvl7pPr>
             <a:lvl8pPr>
+              <a:buNone/>
               <a:defRPr sz="1350" b="0">
                 <a:solidFill>
                   <a:srgbClr val="5D6864"/>
@@ -11464,6 +11803,7 @@
               </a:defRPr>
             </a:lvl8pPr>
             <a:lvl9pPr>
+              <a:buNone/>
               <a:defRPr sz="1350" b="0">
                 <a:solidFill>
                   <a:srgbClr val="5D6864"/>
@@ -11476,7 +11816,8 @@
           </a:lstStyle>
           <a:p xmlns:a="http://schemas.openxmlformats.org/drawingml/2006/main">
             <a:pPr>
-              <a:defRPr sz="1350" b="0">
+              <a:buNone/>
+              <a:defRPr sz="1725" b="0">
                 <a:solidFill>
                   <a:srgbClr val="5D6864"/>
                 </a:solidFill>
@@ -11486,7 +11827,7 @@
               </a:defRPr>
             </a:pPr>
             <a:r>
-              <a:rPr sz="1350" b="0">
+              <a:rPr sz="1725" b="0">
                 <a:solidFill>
                   <a:srgbClr val="5D6864"/>
                 </a:solidFill>
@@ -11494,7 +11835,165 @@
                 <a:ea typeface="Arial"/>
                 <a:cs typeface="Arial"/>
               </a:rPr>
-              <a:t>Makerere Beans, Uganda. The published split does not identify individual farms or plants.</a:t>
+              <a:t>Makerere AI Lab, Uganda. Farm and plant IDs are unavailable.</a:t>
+            </a:r>
+          </a:p>
+        </p:txBody>
+      </p:sp>
+      <p:sp>
+        <p:nvSpPr>
+          <p:cNvPr id="14" name="">
+            <a:extLst xmlns:a="http://schemas.openxmlformats.org/drawingml/2006/main">
+              <a:ext uri="{FF2B5EF4-FFF2-40B4-BE49-F238E27FC236}">
+                <a16:creationId xmlns:a16="http://schemas.microsoft.com/office/drawing/2014/main" id="{2308D590-CCD4-4D23-80C8-145BF72072A2}"/>
+              </a:ext>
+            </a:extLst>
+          </p:cNvPr>
+          <p:cNvSpPr>
+            <a:spLocks xmlns:a="http://schemas.openxmlformats.org/drawingml/2006/main" noGrp="1"/>
+          </p:cNvSpPr>
+          <p:nvPr/>
+        </p:nvSpPr>
+        <p:spPr>
+          <a:xfrm xmlns:a="http://schemas.openxmlformats.org/drawingml/2006/main">
+            <a:off x="609600" y="5305425"/>
+            <a:ext cx="10972800" cy="285750"/>
+          </a:xfrm>
+          <a:prstGeom xmlns:a="http://schemas.openxmlformats.org/drawingml/2006/main" prst="rect">
+            <a:avLst/>
+          </a:prstGeom>
+          <a:noFill xmlns:a="http://schemas.openxmlformats.org/drawingml/2006/main"/>
+          <a:ln xmlns:a="http://schemas.openxmlformats.org/drawingml/2006/main" w="0">
+            <a:noFill/>
+          </a:ln>
+        </p:spPr>
+        <p:txBody>
+          <a:bodyPr xmlns:a="http://schemas.openxmlformats.org/drawingml/2006/main" wrap="square" lIns="0" tIns="0" rIns="0" bIns="0" anchor="t">
+            <a:noAutofit/>
+          </a:bodyPr>
+          <a:lstStyle xmlns:a="http://schemas.openxmlformats.org/drawingml/2006/main">
+            <a:defPPr>
+              <a:defRPr sz="1725" b="0">
+                <a:solidFill>
+                  <a:srgbClr val="5D6864"/>
+                </a:solidFill>
+                <a:latin typeface="Arial"/>
+                <a:ea typeface="Arial"/>
+                <a:cs typeface="Arial"/>
+              </a:defRPr>
+            </a:defPPr>
+            <a:lvl1pPr>
+              <a:defRPr sz="1725" b="0">
+                <a:solidFill>
+                  <a:srgbClr val="5D6864"/>
+                </a:solidFill>
+                <a:latin typeface="Arial"/>
+                <a:ea typeface="Arial"/>
+                <a:cs typeface="Arial"/>
+              </a:defRPr>
+            </a:lvl1pPr>
+            <a:lvl2pPr>
+              <a:defRPr sz="1725" b="0">
+                <a:solidFill>
+                  <a:srgbClr val="5D6864"/>
+                </a:solidFill>
+                <a:latin typeface="Arial"/>
+                <a:ea typeface="Arial"/>
+                <a:cs typeface="Arial"/>
+              </a:defRPr>
+            </a:lvl2pPr>
+            <a:lvl3pPr>
+              <a:defRPr sz="1725" b="0">
+                <a:solidFill>
+                  <a:srgbClr val="5D6864"/>
+                </a:solidFill>
+                <a:latin typeface="Arial"/>
+                <a:ea typeface="Arial"/>
+                <a:cs typeface="Arial"/>
+              </a:defRPr>
+            </a:lvl3pPr>
+            <a:lvl4pPr>
+              <a:defRPr sz="1725" b="0">
+                <a:solidFill>
+                  <a:srgbClr val="5D6864"/>
+                </a:solidFill>
+                <a:latin typeface="Arial"/>
+                <a:ea typeface="Arial"/>
+                <a:cs typeface="Arial"/>
+              </a:defRPr>
+            </a:lvl4pPr>
+            <a:lvl5pPr>
+              <a:defRPr sz="1725" b="0">
+                <a:solidFill>
+                  <a:srgbClr val="5D6864"/>
+                </a:solidFill>
+                <a:latin typeface="Arial"/>
+                <a:ea typeface="Arial"/>
+                <a:cs typeface="Arial"/>
+              </a:defRPr>
+            </a:lvl5pPr>
+            <a:lvl6pPr>
+              <a:defRPr sz="1725" b="0">
+                <a:solidFill>
+                  <a:srgbClr val="5D6864"/>
+                </a:solidFill>
+                <a:latin typeface="Arial"/>
+                <a:ea typeface="Arial"/>
+                <a:cs typeface="Arial"/>
+              </a:defRPr>
+            </a:lvl6pPr>
+            <a:lvl7pPr>
+              <a:defRPr sz="1725" b="0">
+                <a:solidFill>
+                  <a:srgbClr val="5D6864"/>
+                </a:solidFill>
+                <a:latin typeface="Arial"/>
+                <a:ea typeface="Arial"/>
+                <a:cs typeface="Arial"/>
+              </a:defRPr>
+            </a:lvl7pPr>
+            <a:lvl8pPr>
+              <a:defRPr sz="1725" b="0">
+                <a:solidFill>
+                  <a:srgbClr val="5D6864"/>
+                </a:solidFill>
+                <a:latin typeface="Arial"/>
+                <a:ea typeface="Arial"/>
+                <a:cs typeface="Arial"/>
+              </a:defRPr>
+            </a:lvl8pPr>
+            <a:lvl9pPr>
+              <a:defRPr sz="1725" b="0">
+                <a:solidFill>
+                  <a:srgbClr val="5D6864"/>
+                </a:solidFill>
+                <a:latin typeface="Arial"/>
+                <a:ea typeface="Arial"/>
+                <a:cs typeface="Arial"/>
+              </a:defRPr>
+            </a:lvl9pPr>
+          </a:lstStyle>
+          <a:p xmlns:a="http://schemas.openxmlformats.org/drawingml/2006/main">
+            <a:pPr>
+              <a:defRPr sz="1725" b="0">
+                <a:solidFill>
+                  <a:srgbClr val="5D6864"/>
+                </a:solidFill>
+                <a:latin typeface="Arial"/>
+                <a:ea typeface="Arial"/>
+                <a:cs typeface="Arial"/>
+              </a:defRPr>
+            </a:pPr>
+            <a:r>
+              <a:rPr sz="1725" b="0">
+                <a:solidFill>
+                  <a:srgbClr val="5D6864"/>
+                </a:solidFill>
+                <a:latin typeface="Arial"/>
+                <a:ea typeface="Arial"/>
+                <a:cs typeface="Arial"/>
+              </a:rPr>
+              <a:t>Dataset split: every split includes all three classes</a:t>
             </a:r>
           </a:p>
         </p:txBody>
@@ -11571,6 +12070,7 @@
               </a:defRPr>
             </a:defPPr>
             <a:lvl1pPr>
+              <a:buNone/>
               <a:defRPr sz="3300" b="1">
                 <a:solidFill>
                   <a:srgbClr val="22362F"/>
@@ -11581,6 +12081,7 @@
               </a:defRPr>
             </a:lvl1pPr>
             <a:lvl2pPr>
+              <a:buNone/>
               <a:defRPr sz="3300" b="1">
                 <a:solidFill>
                   <a:srgbClr val="22362F"/>
@@ -11591,6 +12092,7 @@
               </a:defRPr>
             </a:lvl2pPr>
             <a:lvl3pPr>
+              <a:buNone/>
               <a:defRPr sz="3300" b="1">
                 <a:solidFill>
                   <a:srgbClr val="22362F"/>
@@ -11601,6 +12103,7 @@
               </a:defRPr>
             </a:lvl3pPr>
             <a:lvl4pPr>
+              <a:buNone/>
               <a:defRPr sz="3300" b="1">
                 <a:solidFill>
                   <a:srgbClr val="22362F"/>
@@ -11611,6 +12114,7 @@
               </a:defRPr>
             </a:lvl4pPr>
             <a:lvl5pPr>
+              <a:buNone/>
               <a:defRPr sz="3300" b="1">
                 <a:solidFill>
                   <a:srgbClr val="22362F"/>
@@ -11621,6 +12125,7 @@
               </a:defRPr>
             </a:lvl5pPr>
             <a:lvl6pPr>
+              <a:buNone/>
               <a:defRPr sz="3300" b="1">
                 <a:solidFill>
                   <a:srgbClr val="22362F"/>
@@ -11631,6 +12136,7 @@
               </a:defRPr>
             </a:lvl6pPr>
             <a:lvl7pPr>
+              <a:buNone/>
               <a:defRPr sz="3300" b="1">
                 <a:solidFill>
                   <a:srgbClr val="22362F"/>
@@ -11641,6 +12147,7 @@
               </a:defRPr>
             </a:lvl7pPr>
             <a:lvl8pPr>
+              <a:buNone/>
               <a:defRPr sz="3300" b="1">
                 <a:solidFill>
                   <a:srgbClr val="22362F"/>
@@ -11651,6 +12158,7 @@
               </a:defRPr>
             </a:lvl8pPr>
             <a:lvl9pPr>
+              <a:buNone/>
               <a:defRPr sz="3300" b="1">
                 <a:solidFill>
                   <a:srgbClr val="22362F"/>
@@ -11663,6 +12171,7 @@
           </a:lstStyle>
           <a:p xmlns:a="http://schemas.openxmlformats.org/drawingml/2006/main">
             <a:pPr>
+              <a:buNone/>
               <a:defRPr sz="3300" b="1">
                 <a:solidFill>
                   <a:srgbClr val="22362F"/>
@@ -11681,7 +12190,7 @@
                 <a:ea typeface="Arial"/>
                 <a:cs typeface="Arial"/>
               </a:rPr>
-              <a:t>Two encoders, two adaptation settings</a:t>
+              <a:t>Models and training settings</a:t>
             </a:r>
           </a:p>
         </p:txBody>
@@ -11729,6 +12238,7 @@
               </a:defRPr>
             </a:defPPr>
             <a:lvl1pPr>
+              <a:buNone/>
               <a:defRPr sz="1350" b="0">
                 <a:solidFill>
                   <a:srgbClr val="5D6864"/>
@@ -11739,6 +12249,7 @@
               </a:defRPr>
             </a:lvl1pPr>
             <a:lvl2pPr>
+              <a:buNone/>
               <a:defRPr sz="1350" b="0">
                 <a:solidFill>
                   <a:srgbClr val="5D6864"/>
@@ -11749,6 +12260,7 @@
               </a:defRPr>
             </a:lvl2pPr>
             <a:lvl3pPr>
+              <a:buNone/>
               <a:defRPr sz="1350" b="0">
                 <a:solidFill>
                   <a:srgbClr val="5D6864"/>
@@ -11759,6 +12271,7 @@
               </a:defRPr>
             </a:lvl3pPr>
             <a:lvl4pPr>
+              <a:buNone/>
               <a:defRPr sz="1350" b="0">
                 <a:solidFill>
                   <a:srgbClr val="5D6864"/>
@@ -11769,6 +12282,7 @@
               </a:defRPr>
             </a:lvl4pPr>
             <a:lvl5pPr>
+              <a:buNone/>
               <a:defRPr sz="1350" b="0">
                 <a:solidFill>
                   <a:srgbClr val="5D6864"/>
@@ -11779,6 +12293,7 @@
               </a:defRPr>
             </a:lvl5pPr>
             <a:lvl6pPr>
+              <a:buNone/>
               <a:defRPr sz="1350" b="0">
                 <a:solidFill>
                   <a:srgbClr val="5D6864"/>
@@ -11789,6 +12304,7 @@
               </a:defRPr>
             </a:lvl6pPr>
             <a:lvl7pPr>
+              <a:buNone/>
               <a:defRPr sz="1350" b="0">
                 <a:solidFill>
                   <a:srgbClr val="5D6864"/>
@@ -11799,6 +12315,7 @@
               </a:defRPr>
             </a:lvl7pPr>
             <a:lvl8pPr>
+              <a:buNone/>
               <a:defRPr sz="1350" b="0">
                 <a:solidFill>
                   <a:srgbClr val="5D6864"/>
@@ -11809,6 +12326,7 @@
               </a:defRPr>
             </a:lvl8pPr>
             <a:lvl9pPr>
+              <a:buNone/>
               <a:defRPr sz="1350" b="0">
                 <a:solidFill>
                   <a:srgbClr val="5D6864"/>
@@ -11821,6 +12339,7 @@
           </a:lstStyle>
           <a:p xmlns:a="http://schemas.openxmlformats.org/drawingml/2006/main">
             <a:pPr>
+              <a:buNone/>
               <a:defRPr sz="1350" b="0">
                 <a:solidFill>
                   <a:srgbClr val="5D6864"/>
@@ -11849,7 +12368,7 @@
           <p:cNvPr id="3" name="">
             <a:extLst xmlns:a="http://schemas.openxmlformats.org/drawingml/2006/main">
               <a:ext uri="{FF2B5EF4-FFF2-40B4-BE49-F238E27FC236}">
-                <a16:creationId xmlns:a16="http://schemas.microsoft.com/office/drawing/2014/main" id="{F237DADC-EE9A-49F2-A100-8343189F5A65}"/>
+                <a16:creationId xmlns:a16="http://schemas.microsoft.com/office/drawing/2014/main" id="{ED48927E-5E93-4FD7-B539-82169634C83E}"/>
               </a:ext>
             </a:extLst>
           </p:cNvPr>
@@ -11857,8 +12376,8 @@
           <p:nvPr/>
         </p:nvGraphicFramePr>
         <p:xfrm>
-          <a:off xmlns:a="http://schemas.openxmlformats.org/drawingml/2006/main" x="609600" y="1476375"/>
-          <a:ext xmlns:a="http://schemas.openxmlformats.org/drawingml/2006/main" cx="10972800" cy="2286000"/>
+          <a:off xmlns:a="http://schemas.openxmlformats.org/drawingml/2006/main" x="609600" y="1314450"/>
+          <a:ext xmlns:a="http://schemas.openxmlformats.org/drawingml/2006/main" cx="10972800" cy="1714500"/>
         </p:xfrm>
         <a:graphic xmlns:a="http://schemas.openxmlformats.org/drawingml/2006/main">
           <a:graphicData uri="http://schemas.openxmlformats.org/drawingml/2006/table">
@@ -11869,10 +12388,10 @@
                 <a:gridCol w="3676650"/>
                 <a:gridCol w="3676650"/>
               </a:tblGrid>
-              <a:tr h="571500">
+              <a:tr h="428625">
                 <a:tc>
                   <a:txBody>
-                    <a:bodyPr lIns="114300" tIns="114300" rIns="114300" bIns="114300"/>
+                    <a:bodyPr lIns="95250" tIns="95250" rIns="95250" bIns="95250"/>
                     <a:lstStyle/>
                     <a:p>
                       <a:r>
@@ -11920,11 +12439,11 @@
                 </a:tc>
                 <a:tc>
                   <a:txBody>
-                    <a:bodyPr lIns="114300" tIns="114300" rIns="114300" bIns="114300"/>
+                    <a:bodyPr lIns="95250" tIns="95250" rIns="95250" bIns="95250"/>
                     <a:lstStyle/>
                     <a:p>
                       <a:r>
-                        <a:rPr sz="1950" b="1">
+                        <a:rPr sz="1725" b="1">
                           <a:solidFill>
                             <a:srgbClr val="22362F"/>
                           </a:solidFill>
@@ -11962,11 +12481,11 @@
                 </a:tc>
                 <a:tc>
                   <a:txBody>
-                    <a:bodyPr lIns="114300" tIns="114300" rIns="114300" bIns="114300"/>
+                    <a:bodyPr lIns="95250" tIns="95250" rIns="95250" bIns="95250"/>
                     <a:lstStyle/>
                     <a:p>
                       <a:r>
-                        <a:rPr sz="1950" b="1">
+                        <a:rPr sz="1725" b="1">
                           <a:solidFill>
                             <a:srgbClr val="22362F"/>
                           </a:solidFill>
@@ -12003,14 +12522,14 @@
                   </a:tcPr>
                 </a:tc>
               </a:tr>
-              <a:tr h="571500">
+              <a:tr h="428625">
                 <a:tc>
                   <a:txBody>
-                    <a:bodyPr lIns="114300" tIns="114300" rIns="114300" bIns="114300"/>
+                    <a:bodyPr lIns="95250" tIns="95250" rIns="95250" bIns="95250"/>
                     <a:lstStyle/>
                     <a:p>
                       <a:r>
-                        <a:rPr sz="1950" b="0">
+                        <a:rPr sz="1725" b="0">
                           <a:solidFill>
                             <a:srgbClr val="22362F"/>
                           </a:solidFill>
@@ -12048,11 +12567,11 @@
                 </a:tc>
                 <a:tc>
                   <a:txBody>
-                    <a:bodyPr lIns="114300" tIns="114300" rIns="114300" bIns="114300"/>
+                    <a:bodyPr lIns="95250" tIns="95250" rIns="95250" bIns="95250"/>
                     <a:lstStyle/>
                     <a:p>
                       <a:r>
-                        <a:rPr sz="1950" b="0">
+                        <a:rPr sz="1725" b="0">
                           <a:solidFill>
                             <a:srgbClr val="22362F"/>
                           </a:solidFill>
@@ -12084,11 +12603,11 @@
                 </a:tc>
                 <a:tc>
                   <a:txBody>
-                    <a:bodyPr lIns="114300" tIns="114300" rIns="114300" bIns="114300"/>
+                    <a:bodyPr lIns="95250" tIns="95250" rIns="95250" bIns="95250"/>
                     <a:lstStyle/>
                     <a:p>
                       <a:r>
-                        <a:rPr sz="1950" b="0">
+                        <a:rPr sz="1725" b="0">
                           <a:solidFill>
                             <a:srgbClr val="22362F"/>
                           </a:solidFill>
@@ -12119,14 +12638,14 @@
                   </a:tcPr>
                 </a:tc>
               </a:tr>
-              <a:tr h="571500">
+              <a:tr h="428625">
                 <a:tc>
                   <a:txBody>
-                    <a:bodyPr lIns="114300" tIns="114300" rIns="114300" bIns="114300"/>
+                    <a:bodyPr lIns="95250" tIns="95250" rIns="95250" bIns="95250"/>
                     <a:lstStyle/>
                     <a:p>
                       <a:r>
-                        <a:rPr sz="1950" b="0">
+                        <a:rPr sz="1725" b="0">
                           <a:solidFill>
                             <a:srgbClr val="22362F"/>
                           </a:solidFill>
@@ -12164,11 +12683,11 @@
                 </a:tc>
                 <a:tc>
                   <a:txBody>
-                    <a:bodyPr lIns="114300" tIns="114300" rIns="114300" bIns="114300"/>
+                    <a:bodyPr lIns="95250" tIns="95250" rIns="95250" bIns="95250"/>
                     <a:lstStyle/>
                     <a:p>
                       <a:r>
-                        <a:rPr sz="1950" b="0">
+                        <a:rPr sz="1725" b="0">
                           <a:solidFill>
                             <a:srgbClr val="22362F"/>
                           </a:solidFill>
@@ -12200,11 +12719,11 @@
                 </a:tc>
                 <a:tc>
                   <a:txBody>
-                    <a:bodyPr lIns="114300" tIns="114300" rIns="114300" bIns="114300"/>
+                    <a:bodyPr lIns="95250" tIns="95250" rIns="95250" bIns="95250"/>
                     <a:lstStyle/>
                     <a:p>
                       <a:r>
-                        <a:rPr sz="1950" b="0">
+                        <a:rPr sz="1725" b="0">
                           <a:solidFill>
                             <a:srgbClr val="22362F"/>
                           </a:solidFill>
@@ -12235,14 +12754,14 @@
                   </a:tcPr>
                 </a:tc>
               </a:tr>
-              <a:tr h="571500">
+              <a:tr h="428625">
                 <a:tc>
                   <a:txBody>
-                    <a:bodyPr lIns="114300" tIns="114300" rIns="114300" bIns="114300"/>
+                    <a:bodyPr lIns="95250" tIns="95250" rIns="95250" bIns="95250"/>
                     <a:lstStyle/>
                     <a:p>
                       <a:r>
-                        <a:rPr sz="1950" b="0">
+                        <a:rPr sz="1725" b="0">
                           <a:solidFill>
                             <a:srgbClr val="22362F"/>
                           </a:solidFill>
@@ -12250,7 +12769,7 @@
                           <a:ea typeface="Arial"/>
                           <a:cs typeface="Arial"/>
                         </a:rPr>
-                        <a:t>Image representation</a:t>
+                        <a:t>Feature vector</a:t>
                       </a:r>
                     </a:p>
                   </a:txBody>
@@ -12280,11 +12799,11 @@
                 </a:tc>
                 <a:tc>
                   <a:txBody>
-                    <a:bodyPr lIns="114300" tIns="114300" rIns="114300" bIns="114300"/>
+                    <a:bodyPr lIns="95250" tIns="95250" rIns="95250" bIns="95250"/>
                     <a:lstStyle/>
                     <a:p>
                       <a:r>
-                        <a:rPr sz="1950" b="0">
+                        <a:rPr sz="1725" b="0">
                           <a:solidFill>
                             <a:srgbClr val="22362F"/>
                           </a:solidFill>
@@ -12292,7 +12811,7 @@
                           <a:ea typeface="Arial"/>
                           <a:cs typeface="Arial"/>
                         </a:rPr>
-                        <a:t>Class token</a:t>
+                        <a:t>384 values</a:t>
                       </a:r>
                     </a:p>
                   </a:txBody>
@@ -12316,11 +12835,11 @@
                 </a:tc>
                 <a:tc>
                   <a:txBody>
-                    <a:bodyPr lIns="114300" tIns="114300" rIns="114300" bIns="114300"/>
+                    <a:bodyPr lIns="95250" tIns="95250" rIns="95250" bIns="95250"/>
                     <a:lstStyle/>
                     <a:p>
                       <a:r>
-                        <a:rPr sz="1950" b="0">
+                        <a:rPr sz="1725" b="0">
                           <a:solidFill>
                             <a:srgbClr val="22362F"/>
                           </a:solidFill>
@@ -12328,7 +12847,7 @@
                           <a:ea typeface="Arial"/>
                           <a:cs typeface="Arial"/>
                         </a:rPr>
-                        <a:t>Attention pooling</a:t>
+                        <a:t>768 values</a:t>
                       </a:r>
                     </a:p>
                   </a:txBody>
@@ -12371,8 +12890,8 @@
         </p:nvSpPr>
         <p:spPr>
           <a:xfrm xmlns:a="http://schemas.openxmlformats.org/drawingml/2006/main">
-            <a:off x="609600" y="4095750"/>
-            <a:ext cx="4762500" cy="381000"/>
+            <a:off x="609600" y="4219575"/>
+            <a:ext cx="4953000" cy="381000"/>
           </a:xfrm>
           <a:prstGeom xmlns:a="http://schemas.openxmlformats.org/drawingml/2006/main" prst="rect">
             <a:avLst/>
@@ -12398,6 +12917,7 @@
               </a:defRPr>
             </a:defPPr>
             <a:lvl1pPr>
+              <a:buNone/>
               <a:defRPr sz="2250" b="1">
                 <a:solidFill>
                   <a:srgbClr val="34667C"/>
@@ -12408,6 +12928,7 @@
               </a:defRPr>
             </a:lvl1pPr>
             <a:lvl2pPr>
+              <a:buNone/>
               <a:defRPr sz="2250" b="1">
                 <a:solidFill>
                   <a:srgbClr val="34667C"/>
@@ -12418,6 +12939,7 @@
               </a:defRPr>
             </a:lvl2pPr>
             <a:lvl3pPr>
+              <a:buNone/>
               <a:defRPr sz="2250" b="1">
                 <a:solidFill>
                   <a:srgbClr val="34667C"/>
@@ -12428,6 +12950,7 @@
               </a:defRPr>
             </a:lvl3pPr>
             <a:lvl4pPr>
+              <a:buNone/>
               <a:defRPr sz="2250" b="1">
                 <a:solidFill>
                   <a:srgbClr val="34667C"/>
@@ -12438,6 +12961,7 @@
               </a:defRPr>
             </a:lvl4pPr>
             <a:lvl5pPr>
+              <a:buNone/>
               <a:defRPr sz="2250" b="1">
                 <a:solidFill>
                   <a:srgbClr val="34667C"/>
@@ -12448,6 +12972,7 @@
               </a:defRPr>
             </a:lvl5pPr>
             <a:lvl6pPr>
+              <a:buNone/>
               <a:defRPr sz="2250" b="1">
                 <a:solidFill>
                   <a:srgbClr val="34667C"/>
@@ -12458,6 +12983,7 @@
               </a:defRPr>
             </a:lvl6pPr>
             <a:lvl7pPr>
+              <a:buNone/>
               <a:defRPr sz="2250" b="1">
                 <a:solidFill>
                   <a:srgbClr val="34667C"/>
@@ -12468,6 +12994,7 @@
               </a:defRPr>
             </a:lvl7pPr>
             <a:lvl8pPr>
+              <a:buNone/>
               <a:defRPr sz="2250" b="1">
                 <a:solidFill>
                   <a:srgbClr val="34667C"/>
@@ -12478,6 +13005,7 @@
               </a:defRPr>
             </a:lvl8pPr>
             <a:lvl9pPr>
+              <a:buNone/>
               <a:defRPr sz="2250" b="1">
                 <a:solidFill>
                   <a:srgbClr val="34667C"/>
@@ -12490,6 +13018,7 @@
           </a:lstStyle>
           <a:p xmlns:a="http://schemas.openxmlformats.org/drawingml/2006/main">
             <a:pPr>
+              <a:buNone/>
               <a:defRPr sz="2250" b="1">
                 <a:solidFill>
                   <a:srgbClr val="34667C"/>
@@ -12508,7 +13037,7 @@
                 <a:ea typeface="Arial"/>
                 <a:cs typeface="Arial"/>
               </a:rPr>
-              <a:t>Frozen</a:t>
+              <a:t>Frozen encoder</a:t>
             </a:r>
           </a:p>
         </p:txBody>
@@ -12529,8 +13058,8 @@
         </p:nvSpPr>
         <p:spPr>
           <a:xfrm xmlns:a="http://schemas.openxmlformats.org/drawingml/2006/main">
-            <a:off x="609600" y="4562475"/>
-            <a:ext cx="4953000" cy="762000"/>
+            <a:off x="609600" y="4657725"/>
+            <a:ext cx="4953000" cy="952500"/>
           </a:xfrm>
           <a:prstGeom xmlns:a="http://schemas.openxmlformats.org/drawingml/2006/main" prst="rect">
             <a:avLst/>
@@ -12546,7 +13075,7 @@
           </a:bodyPr>
           <a:lstStyle xmlns:a="http://schemas.openxmlformats.org/drawingml/2006/main">
             <a:defPPr>
-              <a:defRPr sz="2100" b="0">
+              <a:defRPr sz="2025" b="0">
                 <a:solidFill>
                   <a:srgbClr val="22362F"/>
                 </a:solidFill>
@@ -12556,6 +13085,7 @@
               </a:defRPr>
             </a:defPPr>
             <a:lvl1pPr>
+              <a:buNone/>
               <a:defRPr sz="2100" b="0">
                 <a:solidFill>
                   <a:srgbClr val="22362F"/>
@@ -12566,6 +13096,7 @@
               </a:defRPr>
             </a:lvl1pPr>
             <a:lvl2pPr>
+              <a:buNone/>
               <a:defRPr sz="2100" b="0">
                 <a:solidFill>
                   <a:srgbClr val="22362F"/>
@@ -12576,6 +13107,7 @@
               </a:defRPr>
             </a:lvl2pPr>
             <a:lvl3pPr>
+              <a:buNone/>
               <a:defRPr sz="2100" b="0">
                 <a:solidFill>
                   <a:srgbClr val="22362F"/>
@@ -12586,6 +13118,7 @@
               </a:defRPr>
             </a:lvl3pPr>
             <a:lvl4pPr>
+              <a:buNone/>
               <a:defRPr sz="2100" b="0">
                 <a:solidFill>
                   <a:srgbClr val="22362F"/>
@@ -12596,6 +13129,7 @@
               </a:defRPr>
             </a:lvl4pPr>
             <a:lvl5pPr>
+              <a:buNone/>
               <a:defRPr sz="2100" b="0">
                 <a:solidFill>
                   <a:srgbClr val="22362F"/>
@@ -12606,6 +13140,7 @@
               </a:defRPr>
             </a:lvl5pPr>
             <a:lvl6pPr>
+              <a:buNone/>
               <a:defRPr sz="2100" b="0">
                 <a:solidFill>
                   <a:srgbClr val="22362F"/>
@@ -12616,6 +13151,7 @@
               </a:defRPr>
             </a:lvl6pPr>
             <a:lvl7pPr>
+              <a:buNone/>
               <a:defRPr sz="2100" b="0">
                 <a:solidFill>
                   <a:srgbClr val="22362F"/>
@@ -12626,6 +13162,7 @@
               </a:defRPr>
             </a:lvl7pPr>
             <a:lvl8pPr>
+              <a:buNone/>
               <a:defRPr sz="2100" b="0">
                 <a:solidFill>
                   <a:srgbClr val="22362F"/>
@@ -12636,6 +13173,7 @@
               </a:defRPr>
             </a:lvl8pPr>
             <a:lvl9pPr>
+              <a:buNone/>
               <a:defRPr sz="2100" b="0">
                 <a:solidFill>
                   <a:srgbClr val="22362F"/>
@@ -12648,7 +13186,8 @@
           </a:lstStyle>
           <a:p xmlns:a="http://schemas.openxmlformats.org/drawingml/2006/main">
             <a:pPr>
-              <a:defRPr sz="2100" b="0">
+              <a:buNone/>
+              <a:defRPr sz="2025" b="0">
                 <a:solidFill>
                   <a:srgbClr val="22362F"/>
                 </a:solidFill>
@@ -12658,7 +13197,7 @@
               </a:defRPr>
             </a:pPr>
             <a:r>
-              <a:rPr sz="2100" b="0">
+              <a:rPr sz="2025" b="0">
                 <a:solidFill>
                   <a:srgbClr val="22362F"/>
                 </a:solidFill>
@@ -12666,7 +13205,31 @@
                 <a:ea typeface="Arial"/>
                 <a:cs typeface="Arial"/>
               </a:rPr>
-              <a:t>Train the new classifier</a:t>
+              <a:t>Keep all encoder weights fixed.</a:t>
+            </a:r>
+          </a:p>
+          <a:p xmlns:a="http://schemas.openxmlformats.org/drawingml/2006/main">
+            <a:pPr>
+              <a:buNone/>
+              <a:defRPr sz="2025" b="0">
+                <a:solidFill>
+                  <a:srgbClr val="22362F"/>
+                </a:solidFill>
+                <a:latin typeface="Arial"/>
+                <a:ea typeface="Arial"/>
+                <a:cs typeface="Arial"/>
+              </a:defRPr>
+            </a:pPr>
+            <a:r>
+              <a:rPr sz="2025" b="0">
+                <a:solidFill>
+                  <a:srgbClr val="22362F"/>
+                </a:solidFill>
+                <a:latin typeface="Arial"/>
+                <a:ea typeface="Arial"/>
+                <a:cs typeface="Arial"/>
+              </a:rPr>
+              <a:t>Train only the new classifier.</a:t>
             </a:r>
           </a:p>
         </p:txBody>
@@ -12687,7 +13250,7 @@
         </p:nvSpPr>
         <p:spPr>
           <a:xfrm xmlns:a="http://schemas.openxmlformats.org/drawingml/2006/main">
-            <a:off x="6286500" y="4095750"/>
+            <a:off x="6286500" y="4219575"/>
             <a:ext cx="5238750" cy="381000"/>
           </a:xfrm>
           <a:prstGeom xmlns:a="http://schemas.openxmlformats.org/drawingml/2006/main" prst="rect">
@@ -12714,6 +13277,7 @@
               </a:defRPr>
             </a:defPPr>
             <a:lvl1pPr>
+              <a:buNone/>
               <a:defRPr sz="2250" b="1">
                 <a:solidFill>
                   <a:srgbClr val="B35B38"/>
@@ -12724,6 +13288,7 @@
               </a:defRPr>
             </a:lvl1pPr>
             <a:lvl2pPr>
+              <a:buNone/>
               <a:defRPr sz="2250" b="1">
                 <a:solidFill>
                   <a:srgbClr val="B35B38"/>
@@ -12734,6 +13299,7 @@
               </a:defRPr>
             </a:lvl2pPr>
             <a:lvl3pPr>
+              <a:buNone/>
               <a:defRPr sz="2250" b="1">
                 <a:solidFill>
                   <a:srgbClr val="B35B38"/>
@@ -12744,6 +13310,7 @@
               </a:defRPr>
             </a:lvl3pPr>
             <a:lvl4pPr>
+              <a:buNone/>
               <a:defRPr sz="2250" b="1">
                 <a:solidFill>
                   <a:srgbClr val="B35B38"/>
@@ -12754,6 +13321,7 @@
               </a:defRPr>
             </a:lvl4pPr>
             <a:lvl5pPr>
+              <a:buNone/>
               <a:defRPr sz="2250" b="1">
                 <a:solidFill>
                   <a:srgbClr val="B35B38"/>
@@ -12764,6 +13332,7 @@
               </a:defRPr>
             </a:lvl5pPr>
             <a:lvl6pPr>
+              <a:buNone/>
               <a:defRPr sz="2250" b="1">
                 <a:solidFill>
                   <a:srgbClr val="B35B38"/>
@@ -12774,6 +13343,7 @@
               </a:defRPr>
             </a:lvl6pPr>
             <a:lvl7pPr>
+              <a:buNone/>
               <a:defRPr sz="2250" b="1">
                 <a:solidFill>
                   <a:srgbClr val="B35B38"/>
@@ -12784,6 +13354,7 @@
               </a:defRPr>
             </a:lvl7pPr>
             <a:lvl8pPr>
+              <a:buNone/>
               <a:defRPr sz="2250" b="1">
                 <a:solidFill>
                   <a:srgbClr val="B35B38"/>
@@ -12794,6 +13365,7 @@
               </a:defRPr>
             </a:lvl8pPr>
             <a:lvl9pPr>
+              <a:buNone/>
               <a:defRPr sz="2250" b="1">
                 <a:solidFill>
                   <a:srgbClr val="B35B38"/>
@@ -12806,6 +13378,7 @@
           </a:lstStyle>
           <a:p xmlns:a="http://schemas.openxmlformats.org/drawingml/2006/main">
             <a:pPr>
+              <a:buNone/>
               <a:defRPr sz="2250" b="1">
                 <a:solidFill>
                   <a:srgbClr val="B35B38"/>
@@ -12845,8 +13418,8 @@
         </p:nvSpPr>
         <p:spPr>
           <a:xfrm xmlns:a="http://schemas.openxmlformats.org/drawingml/2006/main">
-            <a:off x="6286500" y="4562475"/>
-            <a:ext cx="5238750" cy="838200"/>
+            <a:off x="6286500" y="4657725"/>
+            <a:ext cx="5238750" cy="952500"/>
           </a:xfrm>
           <a:prstGeom xmlns:a="http://schemas.openxmlformats.org/drawingml/2006/main" prst="rect">
             <a:avLst/>
@@ -12862,7 +13435,7 @@
           </a:bodyPr>
           <a:lstStyle xmlns:a="http://schemas.openxmlformats.org/drawingml/2006/main">
             <a:defPPr>
-              <a:defRPr sz="2100" b="0">
+              <a:defRPr sz="2025" b="0">
                 <a:solidFill>
                   <a:srgbClr val="22362F"/>
                 </a:solidFill>
@@ -12872,6 +13445,7 @@
               </a:defRPr>
             </a:defPPr>
             <a:lvl1pPr>
+              <a:buNone/>
               <a:defRPr sz="2100" b="0">
                 <a:solidFill>
                   <a:srgbClr val="22362F"/>
@@ -12882,6 +13456,7 @@
               </a:defRPr>
             </a:lvl1pPr>
             <a:lvl2pPr>
+              <a:buNone/>
               <a:defRPr sz="2100" b="0">
                 <a:solidFill>
                   <a:srgbClr val="22362F"/>
@@ -12892,6 +13467,7 @@
               </a:defRPr>
             </a:lvl2pPr>
             <a:lvl3pPr>
+              <a:buNone/>
               <a:defRPr sz="2100" b="0">
                 <a:solidFill>
                   <a:srgbClr val="22362F"/>
@@ -12902,6 +13478,7 @@
               </a:defRPr>
             </a:lvl3pPr>
             <a:lvl4pPr>
+              <a:buNone/>
               <a:defRPr sz="2100" b="0">
                 <a:solidFill>
                   <a:srgbClr val="22362F"/>
@@ -12912,6 +13489,7 @@
               </a:defRPr>
             </a:lvl4pPr>
             <a:lvl5pPr>
+              <a:buNone/>
               <a:defRPr sz="2100" b="0">
                 <a:solidFill>
                   <a:srgbClr val="22362F"/>
@@ -12922,6 +13500,7 @@
               </a:defRPr>
             </a:lvl5pPr>
             <a:lvl6pPr>
+              <a:buNone/>
               <a:defRPr sz="2100" b="0">
                 <a:solidFill>
                   <a:srgbClr val="22362F"/>
@@ -12932,6 +13511,7 @@
               </a:defRPr>
             </a:lvl6pPr>
             <a:lvl7pPr>
+              <a:buNone/>
               <a:defRPr sz="2100" b="0">
                 <a:solidFill>
                   <a:srgbClr val="22362F"/>
@@ -12942,6 +13522,7 @@
               </a:defRPr>
             </a:lvl7pPr>
             <a:lvl8pPr>
+              <a:buNone/>
               <a:defRPr sz="2100" b="0">
                 <a:solidFill>
                   <a:srgbClr val="22362F"/>
@@ -12952,6 +13533,7 @@
               </a:defRPr>
             </a:lvl8pPr>
             <a:lvl9pPr>
+              <a:buNone/>
               <a:defRPr sz="2100" b="0">
                 <a:solidFill>
                   <a:srgbClr val="22362F"/>
@@ -12964,7 +13546,8 @@
           </a:lstStyle>
           <a:p xmlns:a="http://schemas.openxmlformats.org/drawingml/2006/main">
             <a:pPr>
-              <a:defRPr sz="2100" b="0">
+              <a:buNone/>
+              <a:defRPr sz="2025" b="0">
                 <a:solidFill>
                   <a:srgbClr val="22362F"/>
                 </a:solidFill>
@@ -12974,7 +13557,7 @@
               </a:defRPr>
             </a:pPr>
             <a:r>
-              <a:rPr sz="2100" b="0">
+              <a:rPr sz="2025" b="0">
                 <a:solidFill>
                   <a:srgbClr val="22362F"/>
                 </a:solidFill>
@@ -12982,12 +13565,13 @@
                 <a:ea typeface="Arial"/>
                 <a:cs typeface="Arial"/>
               </a:rPr>
-              <a:t>Also train the final two blocks</a:t>
+              <a:t>Train the classifier, final two encoder</a:t>
             </a:r>
           </a:p>
           <a:p xmlns:a="http://schemas.openxmlformats.org/drawingml/2006/main">
             <a:pPr>
-              <a:defRPr sz="2100" b="0">
+              <a:buNone/>
+              <a:defRPr sz="2025" b="0">
                 <a:solidFill>
                   <a:srgbClr val="22362F"/>
                 </a:solidFill>
@@ -12997,7 +13581,7 @@
               </a:defRPr>
             </a:pPr>
             <a:r>
-              <a:rPr sz="2100" b="0">
+              <a:rPr sz="2025" b="0">
                 <a:solidFill>
                   <a:srgbClr val="22362F"/>
                 </a:solidFill>
@@ -13005,7 +13589,7 @@
                 <a:ea typeface="Arial"/>
                 <a:cs typeface="Arial"/>
               </a:rPr>
-              <a:t>and final normalisation</a:t>
+              <a:t>blocks and final normalisation.</a:t>
             </a:r>
           </a:p>
         </p:txBody>
@@ -13026,8 +13610,8 @@
         </p:nvSpPr>
         <p:spPr>
           <a:xfrm xmlns:a="http://schemas.openxmlformats.org/drawingml/2006/main">
-            <a:off x="609600" y="6115050"/>
-            <a:ext cx="10191750" cy="342900"/>
+            <a:off x="609600" y="6048375"/>
+            <a:ext cx="10287000" cy="552450"/>
           </a:xfrm>
           <a:prstGeom xmlns:a="http://schemas.openxmlformats.org/drawingml/2006/main" prst="rect">
             <a:avLst/>
@@ -13043,7 +13627,7 @@
           </a:bodyPr>
           <a:lstStyle xmlns:a="http://schemas.openxmlformats.org/drawingml/2006/main">
             <a:defPPr>
-              <a:defRPr sz="1350" b="0">
+              <a:defRPr sz="1725" b="0">
                 <a:solidFill>
                   <a:srgbClr val="5D6864"/>
                 </a:solidFill>
@@ -13053,6 +13637,7 @@
               </a:defRPr>
             </a:defPPr>
             <a:lvl1pPr>
+              <a:buNone/>
               <a:defRPr sz="1350" b="0">
                 <a:solidFill>
                   <a:srgbClr val="5D6864"/>
@@ -13063,6 +13648,7 @@
               </a:defRPr>
             </a:lvl1pPr>
             <a:lvl2pPr>
+              <a:buNone/>
               <a:defRPr sz="1350" b="0">
                 <a:solidFill>
                   <a:srgbClr val="5D6864"/>
@@ -13073,6 +13659,7 @@
               </a:defRPr>
             </a:lvl2pPr>
             <a:lvl3pPr>
+              <a:buNone/>
               <a:defRPr sz="1350" b="0">
                 <a:solidFill>
                   <a:srgbClr val="5D6864"/>
@@ -13083,6 +13670,7 @@
               </a:defRPr>
             </a:lvl3pPr>
             <a:lvl4pPr>
+              <a:buNone/>
               <a:defRPr sz="1350" b="0">
                 <a:solidFill>
                   <a:srgbClr val="5D6864"/>
@@ -13093,6 +13681,7 @@
               </a:defRPr>
             </a:lvl4pPr>
             <a:lvl5pPr>
+              <a:buNone/>
               <a:defRPr sz="1350" b="0">
                 <a:solidFill>
                   <a:srgbClr val="5D6864"/>
@@ -13103,6 +13692,7 @@
               </a:defRPr>
             </a:lvl5pPr>
             <a:lvl6pPr>
+              <a:buNone/>
               <a:defRPr sz="1350" b="0">
                 <a:solidFill>
                   <a:srgbClr val="5D6864"/>
@@ -13113,6 +13703,7 @@
               </a:defRPr>
             </a:lvl6pPr>
             <a:lvl7pPr>
+              <a:buNone/>
               <a:defRPr sz="1350" b="0">
                 <a:solidFill>
                   <a:srgbClr val="5D6864"/>
@@ -13123,6 +13714,7 @@
               </a:defRPr>
             </a:lvl7pPr>
             <a:lvl8pPr>
+              <a:buNone/>
               <a:defRPr sz="1350" b="0">
                 <a:solidFill>
                   <a:srgbClr val="5D6864"/>
@@ -13133,6 +13725,7 @@
               </a:defRPr>
             </a:lvl8pPr>
             <a:lvl9pPr>
+              <a:buNone/>
               <a:defRPr sz="1350" b="0">
                 <a:solidFill>
                   <a:srgbClr val="5D6864"/>
@@ -13145,7 +13738,8 @@
           </a:lstStyle>
           <a:p xmlns:a="http://schemas.openxmlformats.org/drawingml/2006/main">
             <a:pPr>
-              <a:defRPr sz="1350" b="0">
+              <a:buNone/>
+              <a:defRPr sz="1725" b="0">
                 <a:solidFill>
                   <a:srgbClr val="5D6864"/>
                 </a:solidFill>
@@ -13155,7 +13749,7 @@
               </a:defRPr>
             </a:pPr>
             <a:r>
-              <a:rPr sz="1350" b="0">
+              <a:rPr sz="1725" b="0">
                 <a:solidFill>
                   <a:srgbClr val="5D6864"/>
                 </a:solidFill>
@@ -13163,7 +13757,347 @@
                 <a:ea typeface="Arial"/>
                 <a:cs typeface="Arial"/>
               </a:rPr>
-              <a:t>3 seeds per setting. Maximum 10 epochs. Validation selects the checkpoint. All runs fit a 4 GB GPU.</a:t>
+              <a:t>Two models × two settings × three seeds = 12 runs.</a:t>
+            </a:r>
+          </a:p>
+          <a:p xmlns:a="http://schemas.openxmlformats.org/drawingml/2006/main">
+            <a:pPr>
+              <a:buNone/>
+              <a:defRPr sz="1725" b="0">
+                <a:solidFill>
+                  <a:srgbClr val="5D6864"/>
+                </a:solidFill>
+                <a:latin typeface="Arial"/>
+                <a:ea typeface="Arial"/>
+                <a:cs typeface="Arial"/>
+              </a:defRPr>
+            </a:pPr>
+            <a:r>
+              <a:rPr sz="1725" b="0">
+                <a:solidFill>
+                  <a:srgbClr val="5D6864"/>
+                </a:solidFill>
+                <a:latin typeface="Arial"/>
+                <a:ea typeface="Arial"/>
+                <a:cs typeface="Arial"/>
+              </a:rPr>
+              <a:t>Validation selected each checkpoint. All runs fit a 4 GB GPU.</a:t>
+            </a:r>
+          </a:p>
+        </p:txBody>
+      </p:sp>
+      <p:sp>
+        <p:nvSpPr>
+          <p:cNvPr id="10" name="">
+            <a:extLst xmlns:a="http://schemas.openxmlformats.org/drawingml/2006/main">
+              <a:ext uri="{FF2B5EF4-FFF2-40B4-BE49-F238E27FC236}">
+                <a16:creationId xmlns:a16="http://schemas.microsoft.com/office/drawing/2014/main" id="{0008C149-5936-4A57-96B9-B3687580D044}"/>
+              </a:ext>
+            </a:extLst>
+          </p:cNvPr>
+          <p:cNvSpPr>
+            <a:spLocks xmlns:a="http://schemas.openxmlformats.org/drawingml/2006/main" noGrp="1"/>
+          </p:cNvSpPr>
+          <p:nvPr/>
+        </p:nvSpPr>
+        <p:spPr>
+          <a:xfrm xmlns:a="http://schemas.openxmlformats.org/drawingml/2006/main">
+            <a:off x="609600" y="3200400"/>
+            <a:ext cx="10972800" cy="361950"/>
+          </a:xfrm>
+          <a:prstGeom xmlns:a="http://schemas.openxmlformats.org/drawingml/2006/main" prst="rect">
+            <a:avLst/>
+          </a:prstGeom>
+          <a:noFill xmlns:a="http://schemas.openxmlformats.org/drawingml/2006/main"/>
+          <a:ln xmlns:a="http://schemas.openxmlformats.org/drawingml/2006/main" w="0">
+            <a:noFill/>
+          </a:ln>
+        </p:spPr>
+        <p:txBody>
+          <a:bodyPr xmlns:a="http://schemas.openxmlformats.org/drawingml/2006/main" wrap="square" lIns="0" tIns="0" rIns="0" bIns="0" anchor="t">
+            <a:noAutofit/>
+          </a:bodyPr>
+          <a:lstStyle xmlns:a="http://schemas.openxmlformats.org/drawingml/2006/main">
+            <a:defPPr>
+              <a:defRPr sz="2025" b="0">
+                <a:solidFill>
+                  <a:srgbClr val="22362F"/>
+                </a:solidFill>
+                <a:latin typeface="Arial"/>
+                <a:ea typeface="Arial"/>
+                <a:cs typeface="Arial"/>
+              </a:defRPr>
+            </a:defPPr>
+            <a:lvl1pPr>
+              <a:defRPr sz="2025" b="0">
+                <a:solidFill>
+                  <a:srgbClr val="22362F"/>
+                </a:solidFill>
+                <a:latin typeface="Arial"/>
+                <a:ea typeface="Arial"/>
+                <a:cs typeface="Arial"/>
+              </a:defRPr>
+            </a:lvl1pPr>
+            <a:lvl2pPr>
+              <a:defRPr sz="2025" b="0">
+                <a:solidFill>
+                  <a:srgbClr val="22362F"/>
+                </a:solidFill>
+                <a:latin typeface="Arial"/>
+                <a:ea typeface="Arial"/>
+                <a:cs typeface="Arial"/>
+              </a:defRPr>
+            </a:lvl2pPr>
+            <a:lvl3pPr>
+              <a:defRPr sz="2025" b="0">
+                <a:solidFill>
+                  <a:srgbClr val="22362F"/>
+                </a:solidFill>
+                <a:latin typeface="Arial"/>
+                <a:ea typeface="Arial"/>
+                <a:cs typeface="Arial"/>
+              </a:defRPr>
+            </a:lvl3pPr>
+            <a:lvl4pPr>
+              <a:defRPr sz="2025" b="0">
+                <a:solidFill>
+                  <a:srgbClr val="22362F"/>
+                </a:solidFill>
+                <a:latin typeface="Arial"/>
+                <a:ea typeface="Arial"/>
+                <a:cs typeface="Arial"/>
+              </a:defRPr>
+            </a:lvl4pPr>
+            <a:lvl5pPr>
+              <a:defRPr sz="2025" b="0">
+                <a:solidFill>
+                  <a:srgbClr val="22362F"/>
+                </a:solidFill>
+                <a:latin typeface="Arial"/>
+                <a:ea typeface="Arial"/>
+                <a:cs typeface="Arial"/>
+              </a:defRPr>
+            </a:lvl5pPr>
+            <a:lvl6pPr>
+              <a:defRPr sz="2025" b="0">
+                <a:solidFill>
+                  <a:srgbClr val="22362F"/>
+                </a:solidFill>
+                <a:latin typeface="Arial"/>
+                <a:ea typeface="Arial"/>
+                <a:cs typeface="Arial"/>
+              </a:defRPr>
+            </a:lvl6pPr>
+            <a:lvl7pPr>
+              <a:defRPr sz="2025" b="0">
+                <a:solidFill>
+                  <a:srgbClr val="22362F"/>
+                </a:solidFill>
+                <a:latin typeface="Arial"/>
+                <a:ea typeface="Arial"/>
+                <a:cs typeface="Arial"/>
+              </a:defRPr>
+            </a:lvl7pPr>
+            <a:lvl8pPr>
+              <a:defRPr sz="2025" b="0">
+                <a:solidFill>
+                  <a:srgbClr val="22362F"/>
+                </a:solidFill>
+                <a:latin typeface="Arial"/>
+                <a:ea typeface="Arial"/>
+                <a:cs typeface="Arial"/>
+              </a:defRPr>
+            </a:lvl8pPr>
+            <a:lvl9pPr>
+              <a:defRPr sz="2025" b="0">
+                <a:solidFill>
+                  <a:srgbClr val="22362F"/>
+                </a:solidFill>
+                <a:latin typeface="Arial"/>
+                <a:ea typeface="Arial"/>
+                <a:cs typeface="Arial"/>
+              </a:defRPr>
+            </a:lvl9pPr>
+          </a:lstStyle>
+          <a:p xmlns:a="http://schemas.openxmlformats.org/drawingml/2006/main">
+            <a:pPr>
+              <a:defRPr sz="2025" b="0">
+                <a:solidFill>
+                  <a:srgbClr val="22362F"/>
+                </a:solidFill>
+                <a:latin typeface="Arial"/>
+                <a:ea typeface="Arial"/>
+                <a:cs typeface="Arial"/>
+              </a:defRPr>
+            </a:pPr>
+            <a:r>
+              <a:rPr sz="2025" b="0">
+                <a:solidFill>
+                  <a:srgbClr val="22362F"/>
+                </a:solidFill>
+                <a:latin typeface="Arial"/>
+                <a:ea typeface="Arial"/>
+                <a:cs typeface="Arial"/>
+              </a:rPr>
+              <a:t>Encoder: turns image pixels into feature values.</a:t>
+            </a:r>
+          </a:p>
+        </p:txBody>
+      </p:sp>
+      <p:sp>
+        <p:nvSpPr>
+          <p:cNvPr id="11" name="">
+            <a:extLst xmlns:a="http://schemas.openxmlformats.org/drawingml/2006/main">
+              <a:ext uri="{FF2B5EF4-FFF2-40B4-BE49-F238E27FC236}">
+                <a16:creationId xmlns:a16="http://schemas.microsoft.com/office/drawing/2014/main" id="{B21ACCF6-D72A-4956-873B-E6721C153BBD}"/>
+              </a:ext>
+            </a:extLst>
+          </p:cNvPr>
+          <p:cNvSpPr>
+            <a:spLocks xmlns:a="http://schemas.openxmlformats.org/drawingml/2006/main" noGrp="1"/>
+          </p:cNvSpPr>
+          <p:nvPr/>
+        </p:nvSpPr>
+        <p:spPr>
+          <a:xfrm xmlns:a="http://schemas.openxmlformats.org/drawingml/2006/main">
+            <a:off x="609600" y="3619500"/>
+            <a:ext cx="10972800" cy="361950"/>
+          </a:xfrm>
+          <a:prstGeom xmlns:a="http://schemas.openxmlformats.org/drawingml/2006/main" prst="rect">
+            <a:avLst/>
+          </a:prstGeom>
+          <a:noFill xmlns:a="http://schemas.openxmlformats.org/drawingml/2006/main"/>
+          <a:ln xmlns:a="http://schemas.openxmlformats.org/drawingml/2006/main" w="0">
+            <a:noFill/>
+          </a:ln>
+        </p:spPr>
+        <p:txBody>
+          <a:bodyPr xmlns:a="http://schemas.openxmlformats.org/drawingml/2006/main" wrap="square" lIns="0" tIns="0" rIns="0" bIns="0" anchor="t">
+            <a:noAutofit/>
+          </a:bodyPr>
+          <a:lstStyle xmlns:a="http://schemas.openxmlformats.org/drawingml/2006/main">
+            <a:defPPr>
+              <a:defRPr sz="2025" b="0">
+                <a:solidFill>
+                  <a:srgbClr val="22362F"/>
+                </a:solidFill>
+                <a:latin typeface="Arial"/>
+                <a:ea typeface="Arial"/>
+                <a:cs typeface="Arial"/>
+              </a:defRPr>
+            </a:defPPr>
+            <a:lvl1pPr>
+              <a:defRPr sz="2025" b="0">
+                <a:solidFill>
+                  <a:srgbClr val="22362F"/>
+                </a:solidFill>
+                <a:latin typeface="Arial"/>
+                <a:ea typeface="Arial"/>
+                <a:cs typeface="Arial"/>
+              </a:defRPr>
+            </a:lvl1pPr>
+            <a:lvl2pPr>
+              <a:defRPr sz="2025" b="0">
+                <a:solidFill>
+                  <a:srgbClr val="22362F"/>
+                </a:solidFill>
+                <a:latin typeface="Arial"/>
+                <a:ea typeface="Arial"/>
+                <a:cs typeface="Arial"/>
+              </a:defRPr>
+            </a:lvl2pPr>
+            <a:lvl3pPr>
+              <a:defRPr sz="2025" b="0">
+                <a:solidFill>
+                  <a:srgbClr val="22362F"/>
+                </a:solidFill>
+                <a:latin typeface="Arial"/>
+                <a:ea typeface="Arial"/>
+                <a:cs typeface="Arial"/>
+              </a:defRPr>
+            </a:lvl3pPr>
+            <a:lvl4pPr>
+              <a:defRPr sz="2025" b="0">
+                <a:solidFill>
+                  <a:srgbClr val="22362F"/>
+                </a:solidFill>
+                <a:latin typeface="Arial"/>
+                <a:ea typeface="Arial"/>
+                <a:cs typeface="Arial"/>
+              </a:defRPr>
+            </a:lvl4pPr>
+            <a:lvl5pPr>
+              <a:defRPr sz="2025" b="0">
+                <a:solidFill>
+                  <a:srgbClr val="22362F"/>
+                </a:solidFill>
+                <a:latin typeface="Arial"/>
+                <a:ea typeface="Arial"/>
+                <a:cs typeface="Arial"/>
+              </a:defRPr>
+            </a:lvl5pPr>
+            <a:lvl6pPr>
+              <a:defRPr sz="2025" b="0">
+                <a:solidFill>
+                  <a:srgbClr val="22362F"/>
+                </a:solidFill>
+                <a:latin typeface="Arial"/>
+                <a:ea typeface="Arial"/>
+                <a:cs typeface="Arial"/>
+              </a:defRPr>
+            </a:lvl6pPr>
+            <a:lvl7pPr>
+              <a:defRPr sz="2025" b="0">
+                <a:solidFill>
+                  <a:srgbClr val="22362F"/>
+                </a:solidFill>
+                <a:latin typeface="Arial"/>
+                <a:ea typeface="Arial"/>
+                <a:cs typeface="Arial"/>
+              </a:defRPr>
+            </a:lvl7pPr>
+            <a:lvl8pPr>
+              <a:defRPr sz="2025" b="0">
+                <a:solidFill>
+                  <a:srgbClr val="22362F"/>
+                </a:solidFill>
+                <a:latin typeface="Arial"/>
+                <a:ea typeface="Arial"/>
+                <a:cs typeface="Arial"/>
+              </a:defRPr>
+            </a:lvl8pPr>
+            <a:lvl9pPr>
+              <a:defRPr sz="2025" b="0">
+                <a:solidFill>
+                  <a:srgbClr val="22362F"/>
+                </a:solidFill>
+                <a:latin typeface="Arial"/>
+                <a:ea typeface="Arial"/>
+                <a:cs typeface="Arial"/>
+              </a:defRPr>
+            </a:lvl9pPr>
+          </a:lstStyle>
+          <a:p xmlns:a="http://schemas.openxmlformats.org/drawingml/2006/main">
+            <a:pPr>
+              <a:defRPr sz="2025" b="0">
+                <a:solidFill>
+                  <a:srgbClr val="22362F"/>
+                </a:solidFill>
+                <a:latin typeface="Arial"/>
+                <a:ea typeface="Arial"/>
+                <a:cs typeface="Arial"/>
+              </a:defRPr>
+            </a:pPr>
+            <a:r>
+              <a:rPr sz="2025" b="0">
+                <a:solidFill>
+                  <a:srgbClr val="22362F"/>
+                </a:solidFill>
+                <a:latin typeface="Arial"/>
+                <a:ea typeface="Arial"/>
+                <a:cs typeface="Arial"/>
+              </a:rPr>
+              <a:t>Classifier: uses those values to predict one of three labels.</a:t>
             </a:r>
           </a:p>
         </p:txBody>
@@ -13240,6 +14174,7 @@
               </a:defRPr>
             </a:defPPr>
             <a:lvl1pPr>
+              <a:buNone/>
               <a:defRPr sz="3300" b="1">
                 <a:solidFill>
                   <a:srgbClr val="22362F"/>
@@ -13250,6 +14185,7 @@
               </a:defRPr>
             </a:lvl1pPr>
             <a:lvl2pPr>
+              <a:buNone/>
               <a:defRPr sz="3300" b="1">
                 <a:solidFill>
                   <a:srgbClr val="22362F"/>
@@ -13260,6 +14196,7 @@
               </a:defRPr>
             </a:lvl2pPr>
             <a:lvl3pPr>
+              <a:buNone/>
               <a:defRPr sz="3300" b="1">
                 <a:solidFill>
                   <a:srgbClr val="22362F"/>
@@ -13270,6 +14207,7 @@
               </a:defRPr>
             </a:lvl3pPr>
             <a:lvl4pPr>
+              <a:buNone/>
               <a:defRPr sz="3300" b="1">
                 <a:solidFill>
                   <a:srgbClr val="22362F"/>
@@ -13280,6 +14218,7 @@
               </a:defRPr>
             </a:lvl4pPr>
             <a:lvl5pPr>
+              <a:buNone/>
               <a:defRPr sz="3300" b="1">
                 <a:solidFill>
                   <a:srgbClr val="22362F"/>
@@ -13290,6 +14229,7 @@
               </a:defRPr>
             </a:lvl5pPr>
             <a:lvl6pPr>
+              <a:buNone/>
               <a:defRPr sz="3300" b="1">
                 <a:solidFill>
                   <a:srgbClr val="22362F"/>
@@ -13300,6 +14240,7 @@
               </a:defRPr>
             </a:lvl6pPr>
             <a:lvl7pPr>
+              <a:buNone/>
               <a:defRPr sz="3300" b="1">
                 <a:solidFill>
                   <a:srgbClr val="22362F"/>
@@ -13310,6 +14251,7 @@
               </a:defRPr>
             </a:lvl7pPr>
             <a:lvl8pPr>
+              <a:buNone/>
               <a:defRPr sz="3300" b="1">
                 <a:solidFill>
                   <a:srgbClr val="22362F"/>
@@ -13320,6 +14262,7 @@
               </a:defRPr>
             </a:lvl8pPr>
             <a:lvl9pPr>
+              <a:buNone/>
               <a:defRPr sz="3300" b="1">
                 <a:solidFill>
                   <a:srgbClr val="22362F"/>
@@ -13332,6 +14275,7 @@
           </a:lstStyle>
           <a:p xmlns:a="http://schemas.openxmlformats.org/drawingml/2006/main">
             <a:pPr>
+              <a:buNone/>
               <a:defRPr sz="3300" b="1">
                 <a:solidFill>
                   <a:srgbClr val="22362F"/>
@@ -13398,6 +14342,7 @@
               </a:defRPr>
             </a:defPPr>
             <a:lvl1pPr>
+              <a:buNone/>
               <a:defRPr sz="1350" b="0">
                 <a:solidFill>
                   <a:srgbClr val="5D6864"/>
@@ -13408,6 +14353,7 @@
               </a:defRPr>
             </a:lvl1pPr>
             <a:lvl2pPr>
+              <a:buNone/>
               <a:defRPr sz="1350" b="0">
                 <a:solidFill>
                   <a:srgbClr val="5D6864"/>
@@ -13418,6 +14364,7 @@
               </a:defRPr>
             </a:lvl2pPr>
             <a:lvl3pPr>
+              <a:buNone/>
               <a:defRPr sz="1350" b="0">
                 <a:solidFill>
                   <a:srgbClr val="5D6864"/>
@@ -13428,6 +14375,7 @@
               </a:defRPr>
             </a:lvl3pPr>
             <a:lvl4pPr>
+              <a:buNone/>
               <a:defRPr sz="1350" b="0">
                 <a:solidFill>
                   <a:srgbClr val="5D6864"/>
@@ -13438,6 +14386,7 @@
               </a:defRPr>
             </a:lvl4pPr>
             <a:lvl5pPr>
+              <a:buNone/>
               <a:defRPr sz="1350" b="0">
                 <a:solidFill>
                   <a:srgbClr val="5D6864"/>
@@ -13448,6 +14397,7 @@
               </a:defRPr>
             </a:lvl5pPr>
             <a:lvl6pPr>
+              <a:buNone/>
               <a:defRPr sz="1350" b="0">
                 <a:solidFill>
                   <a:srgbClr val="5D6864"/>
@@ -13458,6 +14408,7 @@
               </a:defRPr>
             </a:lvl6pPr>
             <a:lvl7pPr>
+              <a:buNone/>
               <a:defRPr sz="1350" b="0">
                 <a:solidFill>
                   <a:srgbClr val="5D6864"/>
@@ -13468,6 +14419,7 @@
               </a:defRPr>
             </a:lvl7pPr>
             <a:lvl8pPr>
+              <a:buNone/>
               <a:defRPr sz="1350" b="0">
                 <a:solidFill>
                   <a:srgbClr val="5D6864"/>
@@ -13478,6 +14430,7 @@
               </a:defRPr>
             </a:lvl8pPr>
             <a:lvl9pPr>
+              <a:buNone/>
               <a:defRPr sz="1350" b="0">
                 <a:solidFill>
                   <a:srgbClr val="5D6864"/>
@@ -13490,6 +14443,7 @@
           </a:lstStyle>
           <a:p xmlns:a="http://schemas.openxmlformats.org/drawingml/2006/main">
             <a:pPr>
+              <a:buNone/>
               <a:defRPr sz="1350" b="0">
                 <a:solidFill>
                   <a:srgbClr val="5D6864"/>
@@ -13518,7 +14472,7 @@
           <p:cNvPr id="3" name="Chart">
             <a:extLst xmlns:a="http://schemas.openxmlformats.org/drawingml/2006/main">
               <a:ext uri="{FF2B5EF4-FFF2-40B4-BE49-F238E27FC236}">
-                <a16:creationId xmlns:a16="http://schemas.microsoft.com/office/drawing/2014/main" id="{B3B29507-0730-47ED-97B2-23D4E8EF163F}"/>
+                <a16:creationId xmlns:a16="http://schemas.microsoft.com/office/drawing/2014/main" id="{1E3F439C-A12B-4224-8E3B-33F56A8A587A}"/>
               </a:ext>
             </a:extLst>
           </p:cNvPr>
@@ -13531,7 +14485,7 @@
         </p:xfrm>
         <a:graphic xmlns:a="http://schemas.openxmlformats.org/drawingml/2006/main">
           <a:graphicData uri="http://schemas.openxmlformats.org/drawingml/2006/chart">
-            <c:chart xmlns:r="http://schemas.openxmlformats.org/officeDocument/2006/relationships" xmlns:c="http://schemas.openxmlformats.org/drawingml/2006/chart" r:id="R7558f46b26674ec4"/>
+            <c:chart xmlns:r="http://schemas.openxmlformats.org/officeDocument/2006/relationships" xmlns:c="http://schemas.openxmlformats.org/drawingml/2006/chart" r:id="Rc0620e2b9c4a42a0"/>
           </a:graphicData>
         </a:graphic>
       </p:graphicFrame>
@@ -13578,6 +14532,7 @@
               </a:defRPr>
             </a:defPPr>
             <a:lvl1pPr>
+              <a:buNone/>
               <a:defRPr sz="4200" b="1">
                 <a:solidFill>
                   <a:srgbClr val="245844"/>
@@ -13588,6 +14543,7 @@
               </a:defRPr>
             </a:lvl1pPr>
             <a:lvl2pPr>
+              <a:buNone/>
               <a:defRPr sz="4200" b="1">
                 <a:solidFill>
                   <a:srgbClr val="245844"/>
@@ -13598,6 +14554,7 @@
               </a:defRPr>
             </a:lvl2pPr>
             <a:lvl3pPr>
+              <a:buNone/>
               <a:defRPr sz="4200" b="1">
                 <a:solidFill>
                   <a:srgbClr val="245844"/>
@@ -13608,6 +14565,7 @@
               </a:defRPr>
             </a:lvl3pPr>
             <a:lvl4pPr>
+              <a:buNone/>
               <a:defRPr sz="4200" b="1">
                 <a:solidFill>
                   <a:srgbClr val="245844"/>
@@ -13618,6 +14576,7 @@
               </a:defRPr>
             </a:lvl4pPr>
             <a:lvl5pPr>
+              <a:buNone/>
               <a:defRPr sz="4200" b="1">
                 <a:solidFill>
                   <a:srgbClr val="245844"/>
@@ -13628,6 +14587,7 @@
               </a:defRPr>
             </a:lvl5pPr>
             <a:lvl6pPr>
+              <a:buNone/>
               <a:defRPr sz="4200" b="1">
                 <a:solidFill>
                   <a:srgbClr val="245844"/>
@@ -13638,6 +14598,7 @@
               </a:defRPr>
             </a:lvl6pPr>
             <a:lvl7pPr>
+              <a:buNone/>
               <a:defRPr sz="4200" b="1">
                 <a:solidFill>
                   <a:srgbClr val="245844"/>
@@ -13648,6 +14609,7 @@
               </a:defRPr>
             </a:lvl7pPr>
             <a:lvl8pPr>
+              <a:buNone/>
               <a:defRPr sz="4200" b="1">
                 <a:solidFill>
                   <a:srgbClr val="245844"/>
@@ -13658,6 +14620,7 @@
               </a:defRPr>
             </a:lvl8pPr>
             <a:lvl9pPr>
+              <a:buNone/>
               <a:defRPr sz="4200" b="1">
                 <a:solidFill>
                   <a:srgbClr val="245844"/>
@@ -13670,6 +14633,7 @@
           </a:lstStyle>
           <a:p xmlns:a="http://schemas.openxmlformats.org/drawingml/2006/main">
             <a:pPr>
+              <a:buNone/>
               <a:defRPr sz="4200" b="1">
                 <a:solidFill>
                   <a:srgbClr val="245844"/>
@@ -13736,6 +14700,7 @@
               </a:defRPr>
             </a:defPPr>
             <a:lvl1pPr>
+              <a:buNone/>
               <a:defRPr sz="1950" b="0">
                 <a:solidFill>
                   <a:srgbClr val="22362F"/>
@@ -13746,6 +14711,7 @@
               </a:defRPr>
             </a:lvl1pPr>
             <a:lvl2pPr>
+              <a:buNone/>
               <a:defRPr sz="1950" b="0">
                 <a:solidFill>
                   <a:srgbClr val="22362F"/>
@@ -13756,6 +14722,7 @@
               </a:defRPr>
             </a:lvl2pPr>
             <a:lvl3pPr>
+              <a:buNone/>
               <a:defRPr sz="1950" b="0">
                 <a:solidFill>
                   <a:srgbClr val="22362F"/>
@@ -13766,6 +14733,7 @@
               </a:defRPr>
             </a:lvl3pPr>
             <a:lvl4pPr>
+              <a:buNone/>
               <a:defRPr sz="1950" b="0">
                 <a:solidFill>
                   <a:srgbClr val="22362F"/>
@@ -13776,6 +14744,7 @@
               </a:defRPr>
             </a:lvl4pPr>
             <a:lvl5pPr>
+              <a:buNone/>
               <a:defRPr sz="1950" b="0">
                 <a:solidFill>
                   <a:srgbClr val="22362F"/>
@@ -13786,6 +14755,7 @@
               </a:defRPr>
             </a:lvl5pPr>
             <a:lvl6pPr>
+              <a:buNone/>
               <a:defRPr sz="1950" b="0">
                 <a:solidFill>
                   <a:srgbClr val="22362F"/>
@@ -13796,6 +14766,7 @@
               </a:defRPr>
             </a:lvl6pPr>
             <a:lvl7pPr>
+              <a:buNone/>
               <a:defRPr sz="1950" b="0">
                 <a:solidFill>
                   <a:srgbClr val="22362F"/>
@@ -13806,6 +14777,7 @@
               </a:defRPr>
             </a:lvl7pPr>
             <a:lvl8pPr>
+              <a:buNone/>
               <a:defRPr sz="1950" b="0">
                 <a:solidFill>
                   <a:srgbClr val="22362F"/>
@@ -13816,6 +14788,7 @@
               </a:defRPr>
             </a:lvl8pPr>
             <a:lvl9pPr>
+              <a:buNone/>
               <a:defRPr sz="1950" b="0">
                 <a:solidFill>
                   <a:srgbClr val="22362F"/>
@@ -13828,6 +14801,7 @@
           </a:lstStyle>
           <a:p xmlns:a="http://schemas.openxmlformats.org/drawingml/2006/main">
             <a:pPr>
+              <a:buNone/>
               <a:defRPr sz="1950" b="0">
                 <a:solidFill>
                   <a:srgbClr val="22362F"/>
@@ -13851,6 +14825,7 @@
           </a:p>
           <a:p xmlns:a="http://schemas.openxmlformats.org/drawingml/2006/main">
             <a:pPr>
+              <a:buNone/>
               <a:defRPr sz="1950" b="0">
                 <a:solidFill>
                   <a:srgbClr val="22362F"/>
@@ -13917,6 +14892,7 @@
               </a:defRPr>
             </a:defPPr>
             <a:lvl1pPr>
+              <a:buNone/>
               <a:defRPr sz="1800" b="0">
                 <a:solidFill>
                   <a:srgbClr val="5D6864"/>
@@ -13927,6 +14903,7 @@
               </a:defRPr>
             </a:lvl1pPr>
             <a:lvl2pPr>
+              <a:buNone/>
               <a:defRPr sz="1800" b="0">
                 <a:solidFill>
                   <a:srgbClr val="5D6864"/>
@@ -13937,6 +14914,7 @@
               </a:defRPr>
             </a:lvl2pPr>
             <a:lvl3pPr>
+              <a:buNone/>
               <a:defRPr sz="1800" b="0">
                 <a:solidFill>
                   <a:srgbClr val="5D6864"/>
@@ -13947,6 +14925,7 @@
               </a:defRPr>
             </a:lvl3pPr>
             <a:lvl4pPr>
+              <a:buNone/>
               <a:defRPr sz="1800" b="0">
                 <a:solidFill>
                   <a:srgbClr val="5D6864"/>
@@ -13957,6 +14936,7 @@
               </a:defRPr>
             </a:lvl4pPr>
             <a:lvl5pPr>
+              <a:buNone/>
               <a:defRPr sz="1800" b="0">
                 <a:solidFill>
                   <a:srgbClr val="5D6864"/>
@@ -13967,6 +14947,7 @@
               </a:defRPr>
             </a:lvl5pPr>
             <a:lvl6pPr>
+              <a:buNone/>
               <a:defRPr sz="1800" b="0">
                 <a:solidFill>
                   <a:srgbClr val="5D6864"/>
@@ -13977,6 +14958,7 @@
               </a:defRPr>
             </a:lvl6pPr>
             <a:lvl7pPr>
+              <a:buNone/>
               <a:defRPr sz="1800" b="0">
                 <a:solidFill>
                   <a:srgbClr val="5D6864"/>
@@ -13987,6 +14969,7 @@
               </a:defRPr>
             </a:lvl7pPr>
             <a:lvl8pPr>
+              <a:buNone/>
               <a:defRPr sz="1800" b="0">
                 <a:solidFill>
                   <a:srgbClr val="5D6864"/>
@@ -13997,6 +14980,7 @@
               </a:defRPr>
             </a:lvl8pPr>
             <a:lvl9pPr>
+              <a:buNone/>
               <a:defRPr sz="1800" b="0">
                 <a:solidFill>
                   <a:srgbClr val="5D6864"/>
@@ -14009,6 +14993,7 @@
           </a:lstStyle>
           <a:p xmlns:a="http://schemas.openxmlformats.org/drawingml/2006/main">
             <a:pPr>
+              <a:buNone/>
               <a:defRPr sz="1800" b="0">
                 <a:solidFill>
                   <a:srgbClr val="5D6864"/>
@@ -14075,6 +15060,7 @@
               </a:defRPr>
             </a:defPPr>
             <a:lvl1pPr>
+              <a:buNone/>
               <a:defRPr sz="1950" b="0">
                 <a:solidFill>
                   <a:srgbClr val="22362F"/>
@@ -14085,6 +15071,7 @@
               </a:defRPr>
             </a:lvl1pPr>
             <a:lvl2pPr>
+              <a:buNone/>
               <a:defRPr sz="1950" b="0">
                 <a:solidFill>
                   <a:srgbClr val="22362F"/>
@@ -14095,6 +15082,7 @@
               </a:defRPr>
             </a:lvl2pPr>
             <a:lvl3pPr>
+              <a:buNone/>
               <a:defRPr sz="1950" b="0">
                 <a:solidFill>
                   <a:srgbClr val="22362F"/>
@@ -14105,6 +15093,7 @@
               </a:defRPr>
             </a:lvl3pPr>
             <a:lvl4pPr>
+              <a:buNone/>
               <a:defRPr sz="1950" b="0">
                 <a:solidFill>
                   <a:srgbClr val="22362F"/>
@@ -14115,6 +15104,7 @@
               </a:defRPr>
             </a:lvl4pPr>
             <a:lvl5pPr>
+              <a:buNone/>
               <a:defRPr sz="1950" b="0">
                 <a:solidFill>
                   <a:srgbClr val="22362F"/>
@@ -14125,6 +15115,7 @@
               </a:defRPr>
             </a:lvl5pPr>
             <a:lvl6pPr>
+              <a:buNone/>
               <a:defRPr sz="1950" b="0">
                 <a:solidFill>
                   <a:srgbClr val="22362F"/>
@@ -14135,6 +15126,7 @@
               </a:defRPr>
             </a:lvl6pPr>
             <a:lvl7pPr>
+              <a:buNone/>
               <a:defRPr sz="1950" b="0">
                 <a:solidFill>
                   <a:srgbClr val="22362F"/>
@@ -14145,6 +15137,7 @@
               </a:defRPr>
             </a:lvl7pPr>
             <a:lvl8pPr>
+              <a:buNone/>
               <a:defRPr sz="1950" b="0">
                 <a:solidFill>
                   <a:srgbClr val="22362F"/>
@@ -14155,6 +15148,7 @@
               </a:defRPr>
             </a:lvl8pPr>
             <a:lvl9pPr>
+              <a:buNone/>
               <a:defRPr sz="1950" b="0">
                 <a:solidFill>
                   <a:srgbClr val="22362F"/>
@@ -14167,6 +15161,7 @@
           </a:lstStyle>
           <a:p xmlns:a="http://schemas.openxmlformats.org/drawingml/2006/main">
             <a:pPr>
+              <a:buNone/>
               <a:defRPr sz="1950" b="0">
                 <a:solidFill>
                   <a:srgbClr val="22362F"/>
@@ -14190,6 +15185,7 @@
           </a:p>
           <a:p xmlns:a="http://schemas.openxmlformats.org/drawingml/2006/main">
             <a:pPr>
+              <a:buNone/>
               <a:defRPr sz="1950" b="0">
                 <a:solidFill>
                   <a:srgbClr val="22362F"/>
@@ -14229,8 +15225,8 @@
         </p:nvSpPr>
         <p:spPr>
           <a:xfrm xmlns:a="http://schemas.openxmlformats.org/drawingml/2006/main">
-            <a:off x="609600" y="6115050"/>
-            <a:ext cx="10191750" cy="342900"/>
+            <a:off x="609600" y="6048375"/>
+            <a:ext cx="10287000" cy="552450"/>
           </a:xfrm>
           <a:prstGeom xmlns:a="http://schemas.openxmlformats.org/drawingml/2006/main" prst="rect">
             <a:avLst/>
@@ -14246,7 +15242,7 @@
           </a:bodyPr>
           <a:lstStyle xmlns:a="http://schemas.openxmlformats.org/drawingml/2006/main">
             <a:defPPr>
-              <a:defRPr sz="1350" b="0">
+              <a:defRPr sz="1725" b="0">
                 <a:solidFill>
                   <a:srgbClr val="5D6864"/>
                 </a:solidFill>
@@ -14256,6 +15252,7 @@
               </a:defRPr>
             </a:defPPr>
             <a:lvl1pPr>
+              <a:buNone/>
               <a:defRPr sz="1350" b="0">
                 <a:solidFill>
                   <a:srgbClr val="5D6864"/>
@@ -14266,6 +15263,7 @@
               </a:defRPr>
             </a:lvl1pPr>
             <a:lvl2pPr>
+              <a:buNone/>
               <a:defRPr sz="1350" b="0">
                 <a:solidFill>
                   <a:srgbClr val="5D6864"/>
@@ -14276,6 +15274,7 @@
               </a:defRPr>
             </a:lvl2pPr>
             <a:lvl3pPr>
+              <a:buNone/>
               <a:defRPr sz="1350" b="0">
                 <a:solidFill>
                   <a:srgbClr val="5D6864"/>
@@ -14286,6 +15285,7 @@
               </a:defRPr>
             </a:lvl3pPr>
             <a:lvl4pPr>
+              <a:buNone/>
               <a:defRPr sz="1350" b="0">
                 <a:solidFill>
                   <a:srgbClr val="5D6864"/>
@@ -14296,6 +15296,7 @@
               </a:defRPr>
             </a:lvl4pPr>
             <a:lvl5pPr>
+              <a:buNone/>
               <a:defRPr sz="1350" b="0">
                 <a:solidFill>
                   <a:srgbClr val="5D6864"/>
@@ -14306,6 +15307,7 @@
               </a:defRPr>
             </a:lvl5pPr>
             <a:lvl6pPr>
+              <a:buNone/>
               <a:defRPr sz="1350" b="0">
                 <a:solidFill>
                   <a:srgbClr val="5D6864"/>
@@ -14316,6 +15318,7 @@
               </a:defRPr>
             </a:lvl6pPr>
             <a:lvl7pPr>
+              <a:buNone/>
               <a:defRPr sz="1350" b="0">
                 <a:solidFill>
                   <a:srgbClr val="5D6864"/>
@@ -14326,6 +15329,7 @@
               </a:defRPr>
             </a:lvl7pPr>
             <a:lvl8pPr>
+              <a:buNone/>
               <a:defRPr sz="1350" b="0">
                 <a:solidFill>
                   <a:srgbClr val="5D6864"/>
@@ -14336,6 +15340,7 @@
               </a:defRPr>
             </a:lvl8pPr>
             <a:lvl9pPr>
+              <a:buNone/>
               <a:defRPr sz="1350" b="0">
                 <a:solidFill>
                   <a:srgbClr val="5D6864"/>
@@ -14348,7 +15353,8 @@
           </a:lstStyle>
           <a:p xmlns:a="http://schemas.openxmlformats.org/drawingml/2006/main">
             <a:pPr>
-              <a:defRPr sz="1350" b="0">
+              <a:buNone/>
+              <a:defRPr sz="1725" b="0">
                 <a:solidFill>
                   <a:srgbClr val="5D6864"/>
                 </a:solidFill>
@@ -14358,7 +15364,7 @@
               </a:defRPr>
             </a:pPr>
             <a:r>
-              <a:rPr sz="1350" b="0">
+              <a:rPr sz="1725" b="0">
                 <a:solidFill>
                   <a:srgbClr val="5D6864"/>
                 </a:solidFill>
@@ -14366,7 +15372,7 @@
                 <a:ea typeface="Arial"/>
                 <a:cs typeface="Arial"/>
               </a:rPr>
-              <a:t>Original comparison. Three-seed means. Seed SDs appear in the backup table. Reused test set, n = 128.</a:t>
+              <a:t>Mean of three runs per setting. The 128-image test set was reused from earlier work.</a:t>
             </a:r>
           </a:p>
         </p:txBody>
@@ -14443,6 +15449,7 @@
               </a:defRPr>
             </a:defPPr>
             <a:lvl1pPr>
+              <a:buNone/>
               <a:defRPr sz="3300" b="1">
                 <a:solidFill>
                   <a:srgbClr val="22362F"/>
@@ -14453,6 +15460,7 @@
               </a:defRPr>
             </a:lvl1pPr>
             <a:lvl2pPr>
+              <a:buNone/>
               <a:defRPr sz="3300" b="1">
                 <a:solidFill>
                   <a:srgbClr val="22362F"/>
@@ -14463,6 +15471,7 @@
               </a:defRPr>
             </a:lvl2pPr>
             <a:lvl3pPr>
+              <a:buNone/>
               <a:defRPr sz="3300" b="1">
                 <a:solidFill>
                   <a:srgbClr val="22362F"/>
@@ -14473,6 +15482,7 @@
               </a:defRPr>
             </a:lvl3pPr>
             <a:lvl4pPr>
+              <a:buNone/>
               <a:defRPr sz="3300" b="1">
                 <a:solidFill>
                   <a:srgbClr val="22362F"/>
@@ -14483,6 +15493,7 @@
               </a:defRPr>
             </a:lvl4pPr>
             <a:lvl5pPr>
+              <a:buNone/>
               <a:defRPr sz="3300" b="1">
                 <a:solidFill>
                   <a:srgbClr val="22362F"/>
@@ -14493,6 +15504,7 @@
               </a:defRPr>
             </a:lvl5pPr>
             <a:lvl6pPr>
+              <a:buNone/>
               <a:defRPr sz="3300" b="1">
                 <a:solidFill>
                   <a:srgbClr val="22362F"/>
@@ -14503,6 +15515,7 @@
               </a:defRPr>
             </a:lvl6pPr>
             <a:lvl7pPr>
+              <a:buNone/>
               <a:defRPr sz="3300" b="1">
                 <a:solidFill>
                   <a:srgbClr val="22362F"/>
@@ -14513,6 +15526,7 @@
               </a:defRPr>
             </a:lvl7pPr>
             <a:lvl8pPr>
+              <a:buNone/>
               <a:defRPr sz="3300" b="1">
                 <a:solidFill>
                   <a:srgbClr val="22362F"/>
@@ -14523,6 +15537,7 @@
               </a:defRPr>
             </a:lvl8pPr>
             <a:lvl9pPr>
+              <a:buNone/>
               <a:defRPr sz="3300" b="1">
                 <a:solidFill>
                   <a:srgbClr val="22362F"/>
@@ -14535,6 +15550,7 @@
           </a:lstStyle>
           <a:p xmlns:a="http://schemas.openxmlformats.org/drawingml/2006/main">
             <a:pPr>
+              <a:buNone/>
               <a:defRPr sz="3300" b="1">
                 <a:solidFill>
                   <a:srgbClr val="22362F"/>
@@ -14601,6 +15617,7 @@
               </a:defRPr>
             </a:defPPr>
             <a:lvl1pPr>
+              <a:buNone/>
               <a:defRPr sz="1350" b="0">
                 <a:solidFill>
                   <a:srgbClr val="5D6864"/>
@@ -14611,6 +15628,7 @@
               </a:defRPr>
             </a:lvl1pPr>
             <a:lvl2pPr>
+              <a:buNone/>
               <a:defRPr sz="1350" b="0">
                 <a:solidFill>
                   <a:srgbClr val="5D6864"/>
@@ -14621,6 +15639,7 @@
               </a:defRPr>
             </a:lvl2pPr>
             <a:lvl3pPr>
+              <a:buNone/>
               <a:defRPr sz="1350" b="0">
                 <a:solidFill>
                   <a:srgbClr val="5D6864"/>
@@ -14631,6 +15650,7 @@
               </a:defRPr>
             </a:lvl3pPr>
             <a:lvl4pPr>
+              <a:buNone/>
               <a:defRPr sz="1350" b="0">
                 <a:solidFill>
                   <a:srgbClr val="5D6864"/>
@@ -14641,6 +15661,7 @@
               </a:defRPr>
             </a:lvl4pPr>
             <a:lvl5pPr>
+              <a:buNone/>
               <a:defRPr sz="1350" b="0">
                 <a:solidFill>
                   <a:srgbClr val="5D6864"/>
@@ -14651,6 +15672,7 @@
               </a:defRPr>
             </a:lvl5pPr>
             <a:lvl6pPr>
+              <a:buNone/>
               <a:defRPr sz="1350" b="0">
                 <a:solidFill>
                   <a:srgbClr val="5D6864"/>
@@ -14661,6 +15683,7 @@
               </a:defRPr>
             </a:lvl6pPr>
             <a:lvl7pPr>
+              <a:buNone/>
               <a:defRPr sz="1350" b="0">
                 <a:solidFill>
                   <a:srgbClr val="5D6864"/>
@@ -14671,6 +15694,7 @@
               </a:defRPr>
             </a:lvl7pPr>
             <a:lvl8pPr>
+              <a:buNone/>
               <a:defRPr sz="1350" b="0">
                 <a:solidFill>
                   <a:srgbClr val="5D6864"/>
@@ -14681,6 +15705,7 @@
               </a:defRPr>
             </a:lvl8pPr>
             <a:lvl9pPr>
+              <a:buNone/>
               <a:defRPr sz="1350" b="0">
                 <a:solidFill>
                   <a:srgbClr val="5D6864"/>
@@ -14693,6 +15718,7 @@
           </a:lstStyle>
           <a:p xmlns:a="http://schemas.openxmlformats.org/drawingml/2006/main">
             <a:pPr>
+              <a:buNone/>
               <a:defRPr sz="1350" b="0">
                 <a:solidFill>
                   <a:srgbClr val="5D6864"/>
@@ -14721,7 +15747,7 @@
           <p:cNvPr id="3" name="Chart">
             <a:extLst xmlns:a="http://schemas.openxmlformats.org/drawingml/2006/main">
               <a:ext uri="{FF2B5EF4-FFF2-40B4-BE49-F238E27FC236}">
-                <a16:creationId xmlns:a16="http://schemas.microsoft.com/office/drawing/2014/main" id="{8BC66105-23A8-406C-9C3D-D15EFC240FC2}"/>
+                <a16:creationId xmlns:a16="http://schemas.microsoft.com/office/drawing/2014/main" id="{ADCAD6F9-ECD9-426F-8FE4-1277F9294A35}"/>
               </a:ext>
             </a:extLst>
           </p:cNvPr>
@@ -14734,7 +15760,7 @@
         </p:xfrm>
         <a:graphic xmlns:a="http://schemas.openxmlformats.org/drawingml/2006/main">
           <a:graphicData uri="http://schemas.openxmlformats.org/drawingml/2006/chart">
-            <c:chart xmlns:r="http://schemas.openxmlformats.org/officeDocument/2006/relationships" xmlns:c="http://schemas.openxmlformats.org/drawingml/2006/chart" r:id="Re9bd612a0c4544e6"/>
+            <c:chart xmlns:r="http://schemas.openxmlformats.org/officeDocument/2006/relationships" xmlns:c="http://schemas.openxmlformats.org/drawingml/2006/chart" r:id="Rffc8289360ef4249"/>
           </a:graphicData>
         </a:graphic>
       </p:graphicFrame>
@@ -14781,6 +15807,7 @@
               </a:defRPr>
             </a:defPPr>
             <a:lvl1pPr>
+              <a:buNone/>
               <a:defRPr sz="2400" b="1">
                 <a:solidFill>
                   <a:srgbClr val="245844"/>
@@ -14791,6 +15818,7 @@
               </a:defRPr>
             </a:lvl1pPr>
             <a:lvl2pPr>
+              <a:buNone/>
               <a:defRPr sz="2400" b="1">
                 <a:solidFill>
                   <a:srgbClr val="245844"/>
@@ -14801,6 +15829,7 @@
               </a:defRPr>
             </a:lvl2pPr>
             <a:lvl3pPr>
+              <a:buNone/>
               <a:defRPr sz="2400" b="1">
                 <a:solidFill>
                   <a:srgbClr val="245844"/>
@@ -14811,6 +15840,7 @@
               </a:defRPr>
             </a:lvl3pPr>
             <a:lvl4pPr>
+              <a:buNone/>
               <a:defRPr sz="2400" b="1">
                 <a:solidFill>
                   <a:srgbClr val="245844"/>
@@ -14821,6 +15851,7 @@
               </a:defRPr>
             </a:lvl4pPr>
             <a:lvl5pPr>
+              <a:buNone/>
               <a:defRPr sz="2400" b="1">
                 <a:solidFill>
                   <a:srgbClr val="245844"/>
@@ -14831,6 +15862,7 @@
               </a:defRPr>
             </a:lvl5pPr>
             <a:lvl6pPr>
+              <a:buNone/>
               <a:defRPr sz="2400" b="1">
                 <a:solidFill>
                   <a:srgbClr val="245844"/>
@@ -14841,6 +15873,7 @@
               </a:defRPr>
             </a:lvl6pPr>
             <a:lvl7pPr>
+              <a:buNone/>
               <a:defRPr sz="2400" b="1">
                 <a:solidFill>
                   <a:srgbClr val="245844"/>
@@ -14851,6 +15884,7 @@
               </a:defRPr>
             </a:lvl7pPr>
             <a:lvl8pPr>
+              <a:buNone/>
               <a:defRPr sz="2400" b="1">
                 <a:solidFill>
                   <a:srgbClr val="245844"/>
@@ -14861,6 +15895,7 @@
               </a:defRPr>
             </a:lvl8pPr>
             <a:lvl9pPr>
+              <a:buNone/>
               <a:defRPr sz="2400" b="1">
                 <a:solidFill>
                   <a:srgbClr val="245844"/>
@@ -14873,6 +15908,7 @@
           </a:lstStyle>
           <a:p xmlns:a="http://schemas.openxmlformats.org/drawingml/2006/main">
             <a:pPr>
+              <a:buNone/>
               <a:defRPr sz="2400" b="1">
                 <a:solidFill>
                   <a:srgbClr val="245844"/>
@@ -14939,6 +15975,7 @@
               </a:defRPr>
             </a:defPPr>
             <a:lvl1pPr>
+              <a:buNone/>
               <a:defRPr sz="1950" b="0">
                 <a:solidFill>
                   <a:srgbClr val="22362F"/>
@@ -14949,6 +15986,7 @@
               </a:defRPr>
             </a:lvl1pPr>
             <a:lvl2pPr>
+              <a:buNone/>
               <a:defRPr sz="1950" b="0">
                 <a:solidFill>
                   <a:srgbClr val="22362F"/>
@@ -14959,6 +15997,7 @@
               </a:defRPr>
             </a:lvl2pPr>
             <a:lvl3pPr>
+              <a:buNone/>
               <a:defRPr sz="1950" b="0">
                 <a:solidFill>
                   <a:srgbClr val="22362F"/>
@@ -14969,6 +16008,7 @@
               </a:defRPr>
             </a:lvl3pPr>
             <a:lvl4pPr>
+              <a:buNone/>
               <a:defRPr sz="1950" b="0">
                 <a:solidFill>
                   <a:srgbClr val="22362F"/>
@@ -14979,6 +16019,7 @@
               </a:defRPr>
             </a:lvl4pPr>
             <a:lvl5pPr>
+              <a:buNone/>
               <a:defRPr sz="1950" b="0">
                 <a:solidFill>
                   <a:srgbClr val="22362F"/>
@@ -14989,6 +16030,7 @@
               </a:defRPr>
             </a:lvl5pPr>
             <a:lvl6pPr>
+              <a:buNone/>
               <a:defRPr sz="1950" b="0">
                 <a:solidFill>
                   <a:srgbClr val="22362F"/>
@@ -14999,6 +16041,7 @@
               </a:defRPr>
             </a:lvl6pPr>
             <a:lvl7pPr>
+              <a:buNone/>
               <a:defRPr sz="1950" b="0">
                 <a:solidFill>
                   <a:srgbClr val="22362F"/>
@@ -15009,6 +16052,7 @@
               </a:defRPr>
             </a:lvl7pPr>
             <a:lvl8pPr>
+              <a:buNone/>
               <a:defRPr sz="1950" b="0">
                 <a:solidFill>
                   <a:srgbClr val="22362F"/>
@@ -15019,6 +16063,7 @@
               </a:defRPr>
             </a:lvl8pPr>
             <a:lvl9pPr>
+              <a:buNone/>
               <a:defRPr sz="1950" b="0">
                 <a:solidFill>
                   <a:srgbClr val="22362F"/>
@@ -15031,6 +16076,7 @@
           </a:lstStyle>
           <a:p xmlns:a="http://schemas.openxmlformats.org/drawingml/2006/main">
             <a:pPr>
+              <a:buNone/>
               <a:defRPr sz="1950" b="0">
                 <a:solidFill>
                   <a:srgbClr val="22362F"/>
@@ -15054,6 +16100,7 @@
           </a:p>
           <a:p xmlns:a="http://schemas.openxmlformats.org/drawingml/2006/main">
             <a:pPr>
+              <a:buNone/>
               <a:defRPr sz="1950" b="0">
                 <a:solidFill>
                   <a:srgbClr val="22362F"/>
@@ -15077,6 +16124,7 @@
           </a:p>
           <a:p xmlns:a="http://schemas.openxmlformats.org/drawingml/2006/main">
             <a:pPr>
+              <a:buNone/>
               <a:defRPr sz="1950" b="0">
                 <a:solidFill>
                   <a:srgbClr val="22362F"/>
@@ -15143,6 +16191,7 @@
               </a:defRPr>
             </a:defPPr>
             <a:lvl1pPr>
+              <a:buNone/>
               <a:defRPr sz="1875" b="0">
                 <a:solidFill>
                   <a:srgbClr val="22362F"/>
@@ -15153,6 +16202,7 @@
               </a:defRPr>
             </a:lvl1pPr>
             <a:lvl2pPr>
+              <a:buNone/>
               <a:defRPr sz="1875" b="0">
                 <a:solidFill>
                   <a:srgbClr val="22362F"/>
@@ -15163,6 +16213,7 @@
               </a:defRPr>
             </a:lvl2pPr>
             <a:lvl3pPr>
+              <a:buNone/>
               <a:defRPr sz="1875" b="0">
                 <a:solidFill>
                   <a:srgbClr val="22362F"/>
@@ -15173,6 +16224,7 @@
               </a:defRPr>
             </a:lvl3pPr>
             <a:lvl4pPr>
+              <a:buNone/>
               <a:defRPr sz="1875" b="0">
                 <a:solidFill>
                   <a:srgbClr val="22362F"/>
@@ -15183,6 +16235,7 @@
               </a:defRPr>
             </a:lvl4pPr>
             <a:lvl5pPr>
+              <a:buNone/>
               <a:defRPr sz="1875" b="0">
                 <a:solidFill>
                   <a:srgbClr val="22362F"/>
@@ -15193,6 +16246,7 @@
               </a:defRPr>
             </a:lvl5pPr>
             <a:lvl6pPr>
+              <a:buNone/>
               <a:defRPr sz="1875" b="0">
                 <a:solidFill>
                   <a:srgbClr val="22362F"/>
@@ -15203,6 +16257,7 @@
               </a:defRPr>
             </a:lvl6pPr>
             <a:lvl7pPr>
+              <a:buNone/>
               <a:defRPr sz="1875" b="0">
                 <a:solidFill>
                   <a:srgbClr val="22362F"/>
@@ -15213,6 +16268,7 @@
               </a:defRPr>
             </a:lvl7pPr>
             <a:lvl8pPr>
+              <a:buNone/>
               <a:defRPr sz="1875" b="0">
                 <a:solidFill>
                   <a:srgbClr val="22362F"/>
@@ -15223,6 +16279,7 @@
               </a:defRPr>
             </a:lvl8pPr>
             <a:lvl9pPr>
+              <a:buNone/>
               <a:defRPr sz="1875" b="0">
                 <a:solidFill>
                   <a:srgbClr val="22362F"/>
@@ -15235,6 +16292,7 @@
           </a:lstStyle>
           <a:p xmlns:a="http://schemas.openxmlformats.org/drawingml/2006/main">
             <a:pPr>
+              <a:buNone/>
               <a:defRPr sz="1875" b="0">
                 <a:solidFill>
                   <a:srgbClr val="22362F"/>
@@ -15258,6 +16316,7 @@
           </a:p>
           <a:p xmlns:a="http://schemas.openxmlformats.org/drawingml/2006/main">
             <a:pPr>
+              <a:buNone/>
               <a:defRPr sz="1875" b="0">
                 <a:solidFill>
                   <a:srgbClr val="22362F"/>
@@ -15281,6 +16340,7 @@
           </a:p>
           <a:p xmlns:a="http://schemas.openxmlformats.org/drawingml/2006/main">
             <a:pPr>
+              <a:buNone/>
               <a:defRPr sz="1875" b="0">
                 <a:solidFill>
                   <a:srgbClr val="22362F"/>
@@ -15320,8 +16380,8 @@
         </p:nvSpPr>
         <p:spPr>
           <a:xfrm xmlns:a="http://schemas.openxmlformats.org/drawingml/2006/main">
-            <a:off x="609600" y="6115050"/>
-            <a:ext cx="10191750" cy="342900"/>
+            <a:off x="609600" y="6048375"/>
+            <a:ext cx="10287000" cy="552450"/>
           </a:xfrm>
           <a:prstGeom xmlns:a="http://schemas.openxmlformats.org/drawingml/2006/main" prst="rect">
             <a:avLst/>
@@ -15337,7 +16397,7 @@
           </a:bodyPr>
           <a:lstStyle xmlns:a="http://schemas.openxmlformats.org/drawingml/2006/main">
             <a:defPPr>
-              <a:defRPr sz="1350" b="0">
+              <a:defRPr sz="1725" b="0">
                 <a:solidFill>
                   <a:srgbClr val="5D6864"/>
                 </a:solidFill>
@@ -15347,6 +16407,7 @@
               </a:defRPr>
             </a:defPPr>
             <a:lvl1pPr>
+              <a:buNone/>
               <a:defRPr sz="1350" b="0">
                 <a:solidFill>
                   <a:srgbClr val="5D6864"/>
@@ -15357,6 +16418,7 @@
               </a:defRPr>
             </a:lvl1pPr>
             <a:lvl2pPr>
+              <a:buNone/>
               <a:defRPr sz="1350" b="0">
                 <a:solidFill>
                   <a:srgbClr val="5D6864"/>
@@ -15367,6 +16429,7 @@
               </a:defRPr>
             </a:lvl2pPr>
             <a:lvl3pPr>
+              <a:buNone/>
               <a:defRPr sz="1350" b="0">
                 <a:solidFill>
                   <a:srgbClr val="5D6864"/>
@@ -15377,6 +16440,7 @@
               </a:defRPr>
             </a:lvl3pPr>
             <a:lvl4pPr>
+              <a:buNone/>
               <a:defRPr sz="1350" b="0">
                 <a:solidFill>
                   <a:srgbClr val="5D6864"/>
@@ -15387,6 +16451,7 @@
               </a:defRPr>
             </a:lvl4pPr>
             <a:lvl5pPr>
+              <a:buNone/>
               <a:defRPr sz="1350" b="0">
                 <a:solidFill>
                   <a:srgbClr val="5D6864"/>
@@ -15397,6 +16462,7 @@
               </a:defRPr>
             </a:lvl5pPr>
             <a:lvl6pPr>
+              <a:buNone/>
               <a:defRPr sz="1350" b="0">
                 <a:solidFill>
                   <a:srgbClr val="5D6864"/>
@@ -15407,6 +16473,7 @@
               </a:defRPr>
             </a:lvl6pPr>
             <a:lvl7pPr>
+              <a:buNone/>
               <a:defRPr sz="1350" b="0">
                 <a:solidFill>
                   <a:srgbClr val="5D6864"/>
@@ -15417,6 +16484,7 @@
               </a:defRPr>
             </a:lvl7pPr>
             <a:lvl8pPr>
+              <a:buNone/>
               <a:defRPr sz="1350" b="0">
                 <a:solidFill>
                   <a:srgbClr val="5D6864"/>
@@ -15427,6 +16495,7 @@
               </a:defRPr>
             </a:lvl8pPr>
             <a:lvl9pPr>
+              <a:buNone/>
               <a:defRPr sz="1350" b="0">
                 <a:solidFill>
                   <a:srgbClr val="5D6864"/>
@@ -15439,7 +16508,8 @@
           </a:lstStyle>
           <a:p xmlns:a="http://schemas.openxmlformats.org/drawingml/2006/main">
             <a:pPr>
-              <a:defRPr sz="1350" b="0">
+              <a:buNone/>
+              <a:defRPr sz="1725" b="0">
                 <a:solidFill>
                   <a:srgbClr val="5D6864"/>
                 </a:solidFill>
@@ -15449,7 +16519,7 @@
               </a:defRPr>
             </a:pPr>
             <a:r>
-              <a:rPr sz="1350" b="0">
+              <a:rPr sz="1725" b="0">
                 <a:solidFill>
                   <a:srgbClr val="5D6864"/>
                 </a:solidFill>
@@ -15457,7 +16527,7 @@
                 <a:ea typeface="Arial"/>
                 <a:cs typeface="Arial"/>
               </a:rPr>
-              <a:t>Example curve: SigLIP 2 partial, seed 17. Gap figures average selected checkpoints over all three seeds.</a:t>
+              <a:t>Curve: SigLIP 2 partial, seed 17. F1 gaps average the three selected runs.</a:t>
             </a:r>
           </a:p>
         </p:txBody>
@@ -15534,6 +16604,7 @@
               </a:defRPr>
             </a:defPPr>
             <a:lvl1pPr>
+              <a:buNone/>
               <a:defRPr sz="3300" b="1">
                 <a:solidFill>
                   <a:srgbClr val="22362F"/>
@@ -15544,6 +16615,7 @@
               </a:defRPr>
             </a:lvl1pPr>
             <a:lvl2pPr>
+              <a:buNone/>
               <a:defRPr sz="3300" b="1">
                 <a:solidFill>
                   <a:srgbClr val="22362F"/>
@@ -15554,6 +16626,7 @@
               </a:defRPr>
             </a:lvl2pPr>
             <a:lvl3pPr>
+              <a:buNone/>
               <a:defRPr sz="3300" b="1">
                 <a:solidFill>
                   <a:srgbClr val="22362F"/>
@@ -15564,6 +16637,7 @@
               </a:defRPr>
             </a:lvl3pPr>
             <a:lvl4pPr>
+              <a:buNone/>
               <a:defRPr sz="3300" b="1">
                 <a:solidFill>
                   <a:srgbClr val="22362F"/>
@@ -15574,6 +16648,7 @@
               </a:defRPr>
             </a:lvl4pPr>
             <a:lvl5pPr>
+              <a:buNone/>
               <a:defRPr sz="3300" b="1">
                 <a:solidFill>
                   <a:srgbClr val="22362F"/>
@@ -15584,6 +16659,7 @@
               </a:defRPr>
             </a:lvl5pPr>
             <a:lvl6pPr>
+              <a:buNone/>
               <a:defRPr sz="3300" b="1">
                 <a:solidFill>
                   <a:srgbClr val="22362F"/>
@@ -15594,6 +16670,7 @@
               </a:defRPr>
             </a:lvl6pPr>
             <a:lvl7pPr>
+              <a:buNone/>
               <a:defRPr sz="3300" b="1">
                 <a:solidFill>
                   <a:srgbClr val="22362F"/>
@@ -15604,6 +16681,7 @@
               </a:defRPr>
             </a:lvl7pPr>
             <a:lvl8pPr>
+              <a:buNone/>
               <a:defRPr sz="3300" b="1">
                 <a:solidFill>
                   <a:srgbClr val="22362F"/>
@@ -15614,6 +16692,7 @@
               </a:defRPr>
             </a:lvl8pPr>
             <a:lvl9pPr>
+              <a:buNone/>
               <a:defRPr sz="3300" b="1">
                 <a:solidFill>
                   <a:srgbClr val="22362F"/>
@@ -15626,6 +16705,7 @@
           </a:lstStyle>
           <a:p xmlns:a="http://schemas.openxmlformats.org/drawingml/2006/main">
             <a:pPr>
+              <a:buNone/>
               <a:defRPr sz="3300" b="1">
                 <a:solidFill>
                   <a:srgbClr val="22362F"/>
@@ -15692,6 +16772,7 @@
               </a:defRPr>
             </a:defPPr>
             <a:lvl1pPr>
+              <a:buNone/>
               <a:defRPr sz="1350" b="0">
                 <a:solidFill>
                   <a:srgbClr val="5D6864"/>
@@ -15702,6 +16783,7 @@
               </a:defRPr>
             </a:lvl1pPr>
             <a:lvl2pPr>
+              <a:buNone/>
               <a:defRPr sz="1350" b="0">
                 <a:solidFill>
                   <a:srgbClr val="5D6864"/>
@@ -15712,6 +16794,7 @@
               </a:defRPr>
             </a:lvl2pPr>
             <a:lvl3pPr>
+              <a:buNone/>
               <a:defRPr sz="1350" b="0">
                 <a:solidFill>
                   <a:srgbClr val="5D6864"/>
@@ -15722,6 +16805,7 @@
               </a:defRPr>
             </a:lvl3pPr>
             <a:lvl4pPr>
+              <a:buNone/>
               <a:defRPr sz="1350" b="0">
                 <a:solidFill>
                   <a:srgbClr val="5D6864"/>
@@ -15732,6 +16816,7 @@
               </a:defRPr>
             </a:lvl4pPr>
             <a:lvl5pPr>
+              <a:buNone/>
               <a:defRPr sz="1350" b="0">
                 <a:solidFill>
                   <a:srgbClr val="5D6864"/>
@@ -15742,6 +16827,7 @@
               </a:defRPr>
             </a:lvl5pPr>
             <a:lvl6pPr>
+              <a:buNone/>
               <a:defRPr sz="1350" b="0">
                 <a:solidFill>
                   <a:srgbClr val="5D6864"/>
@@ -15752,6 +16838,7 @@
               </a:defRPr>
             </a:lvl6pPr>
             <a:lvl7pPr>
+              <a:buNone/>
               <a:defRPr sz="1350" b="0">
                 <a:solidFill>
                   <a:srgbClr val="5D6864"/>
@@ -15762,6 +16849,7 @@
               </a:defRPr>
             </a:lvl7pPr>
             <a:lvl8pPr>
+              <a:buNone/>
               <a:defRPr sz="1350" b="0">
                 <a:solidFill>
                   <a:srgbClr val="5D6864"/>
@@ -15772,6 +16860,7 @@
               </a:defRPr>
             </a:lvl8pPr>
             <a:lvl9pPr>
+              <a:buNone/>
               <a:defRPr sz="1350" b="0">
                 <a:solidFill>
                   <a:srgbClr val="5D6864"/>
@@ -15784,6 +16873,7 @@
           </a:lstStyle>
           <a:p xmlns:a="http://schemas.openxmlformats.org/drawingml/2006/main">
             <a:pPr>
+              <a:buNone/>
               <a:defRPr sz="1350" b="0">
                 <a:solidFill>
                   <a:srgbClr val="5D6864"/>
@@ -15812,7 +16902,7 @@
           <p:cNvPr id="3" name="">
             <a:extLst xmlns:a="http://schemas.openxmlformats.org/drawingml/2006/main">
               <a:ext uri="{FF2B5EF4-FFF2-40B4-BE49-F238E27FC236}">
-                <a16:creationId xmlns:a16="http://schemas.microsoft.com/office/drawing/2014/main" id="{BF1AEDEC-E177-4369-9E61-D4EA4661F426}"/>
+                <a16:creationId xmlns:a16="http://schemas.microsoft.com/office/drawing/2014/main" id="{5BB12D8E-FA0D-4920-9420-0F01ED63FBC1}"/>
               </a:ext>
             </a:extLst>
           </p:cNvPr>
@@ -15822,7 +16912,7 @@
           <p:nvPr/>
         </p:nvPicPr>
         <p:blipFill>
-          <a:blip xmlns:r="http://schemas.openxmlformats.org/officeDocument/2006/relationships" xmlns:a="http://schemas.openxmlformats.org/drawingml/2006/main" r:embed="R8b41d9db688c4656"/>
+          <a:blip xmlns:r="http://schemas.openxmlformats.org/officeDocument/2006/relationships" xmlns:a="http://schemas.openxmlformats.org/drawingml/2006/main" r:embed="Rfe56c96202484e8a"/>
           <a:stretch xmlns:a="http://schemas.openxmlformats.org/drawingml/2006/main"/>
         </p:blipFill>
         <p:spPr>
@@ -15840,7 +16930,7 @@
           <p:cNvPr id="4" name="">
             <a:extLst xmlns:a="http://schemas.openxmlformats.org/drawingml/2006/main">
               <a:ext uri="{FF2B5EF4-FFF2-40B4-BE49-F238E27FC236}">
-                <a16:creationId xmlns:a16="http://schemas.microsoft.com/office/drawing/2014/main" id="{75274DC5-B782-44FF-8422-F050D1DC273D}"/>
+                <a16:creationId xmlns:a16="http://schemas.microsoft.com/office/drawing/2014/main" id="{08FC78DC-8F87-448A-B640-559CDA0865ED}"/>
               </a:ext>
             </a:extLst>
           </p:cNvPr>
@@ -15850,7 +16940,7 @@
           <p:nvPr/>
         </p:nvPicPr>
         <p:blipFill>
-          <a:blip xmlns:r="http://schemas.openxmlformats.org/officeDocument/2006/relationships" xmlns:a="http://schemas.openxmlformats.org/drawingml/2006/main" r:embed="R068925f12d3540c4"/>
+          <a:blip xmlns:r="http://schemas.openxmlformats.org/officeDocument/2006/relationships" xmlns:a="http://schemas.openxmlformats.org/drawingml/2006/main" r:embed="R1a4ccddae10d43c0"/>
           <a:stretch xmlns:a="http://schemas.openxmlformats.org/drawingml/2006/main"/>
         </p:blipFill>
         <p:spPr>
@@ -15906,6 +16996,7 @@
               </a:defRPr>
             </a:defPPr>
             <a:lvl1pPr>
+              <a:buNone/>
               <a:defRPr sz="2025" b="1">
                 <a:solidFill>
                   <a:srgbClr val="22362F"/>
@@ -15916,6 +17007,7 @@
               </a:defRPr>
             </a:lvl1pPr>
             <a:lvl2pPr>
+              <a:buNone/>
               <a:defRPr sz="2025" b="1">
                 <a:solidFill>
                   <a:srgbClr val="22362F"/>
@@ -15926,6 +17018,7 @@
               </a:defRPr>
             </a:lvl2pPr>
             <a:lvl3pPr>
+              <a:buNone/>
               <a:defRPr sz="2025" b="1">
                 <a:solidFill>
                   <a:srgbClr val="22362F"/>
@@ -15936,6 +17029,7 @@
               </a:defRPr>
             </a:lvl3pPr>
             <a:lvl4pPr>
+              <a:buNone/>
               <a:defRPr sz="2025" b="1">
                 <a:solidFill>
                   <a:srgbClr val="22362F"/>
@@ -15946,6 +17040,7 @@
               </a:defRPr>
             </a:lvl4pPr>
             <a:lvl5pPr>
+              <a:buNone/>
               <a:defRPr sz="2025" b="1">
                 <a:solidFill>
                   <a:srgbClr val="22362F"/>
@@ -15956,6 +17051,7 @@
               </a:defRPr>
             </a:lvl5pPr>
             <a:lvl6pPr>
+              <a:buNone/>
               <a:defRPr sz="2025" b="1">
                 <a:solidFill>
                   <a:srgbClr val="22362F"/>
@@ -15966,6 +17062,7 @@
               </a:defRPr>
             </a:lvl6pPr>
             <a:lvl7pPr>
+              <a:buNone/>
               <a:defRPr sz="2025" b="1">
                 <a:solidFill>
                   <a:srgbClr val="22362F"/>
@@ -15976,6 +17073,7 @@
               </a:defRPr>
             </a:lvl7pPr>
             <a:lvl8pPr>
+              <a:buNone/>
               <a:defRPr sz="2025" b="1">
                 <a:solidFill>
                   <a:srgbClr val="22362F"/>
@@ -15986,6 +17084,7 @@
               </a:defRPr>
             </a:lvl8pPr>
             <a:lvl9pPr>
+              <a:buNone/>
               <a:defRPr sz="2025" b="1">
                 <a:solidFill>
                   <a:srgbClr val="22362F"/>
@@ -15998,6 +17097,7 @@
           </a:lstStyle>
           <a:p xmlns:a="http://schemas.openxmlformats.org/drawingml/2006/main">
             <a:pPr>
+              <a:buNone/>
               <a:defRPr sz="2025" b="1">
                 <a:solidFill>
                   <a:srgbClr val="22362F"/>
@@ -16064,6 +17164,7 @@
               </a:defRPr>
             </a:defPPr>
             <a:lvl1pPr>
+              <a:buNone/>
               <a:defRPr sz="1875" b="0">
                 <a:solidFill>
                   <a:srgbClr val="B35B38"/>
@@ -16074,6 +17175,7 @@
               </a:defRPr>
             </a:lvl1pPr>
             <a:lvl2pPr>
+              <a:buNone/>
               <a:defRPr sz="1875" b="0">
                 <a:solidFill>
                   <a:srgbClr val="B35B38"/>
@@ -16084,6 +17186,7 @@
               </a:defRPr>
             </a:lvl2pPr>
             <a:lvl3pPr>
+              <a:buNone/>
               <a:defRPr sz="1875" b="0">
                 <a:solidFill>
                   <a:srgbClr val="B35B38"/>
@@ -16094,6 +17197,7 @@
               </a:defRPr>
             </a:lvl3pPr>
             <a:lvl4pPr>
+              <a:buNone/>
               <a:defRPr sz="1875" b="0">
                 <a:solidFill>
                   <a:srgbClr val="B35B38"/>
@@ -16104,6 +17208,7 @@
               </a:defRPr>
             </a:lvl4pPr>
             <a:lvl5pPr>
+              <a:buNone/>
               <a:defRPr sz="1875" b="0">
                 <a:solidFill>
                   <a:srgbClr val="B35B38"/>
@@ -16114,6 +17219,7 @@
               </a:defRPr>
             </a:lvl5pPr>
             <a:lvl6pPr>
+              <a:buNone/>
               <a:defRPr sz="1875" b="0">
                 <a:solidFill>
                   <a:srgbClr val="B35B38"/>
@@ -16124,6 +17230,7 @@
               </a:defRPr>
             </a:lvl6pPr>
             <a:lvl7pPr>
+              <a:buNone/>
               <a:defRPr sz="1875" b="0">
                 <a:solidFill>
                   <a:srgbClr val="B35B38"/>
@@ -16134,6 +17241,7 @@
               </a:defRPr>
             </a:lvl7pPr>
             <a:lvl8pPr>
+              <a:buNone/>
               <a:defRPr sz="1875" b="0">
                 <a:solidFill>
                   <a:srgbClr val="B35B38"/>
@@ -16144,6 +17252,7 @@
               </a:defRPr>
             </a:lvl8pPr>
             <a:lvl9pPr>
+              <a:buNone/>
               <a:defRPr sz="1875" b="0">
                 <a:solidFill>
                   <a:srgbClr val="B35B38"/>
@@ -16156,6 +17265,7 @@
           </a:lstStyle>
           <a:p xmlns:a="http://schemas.openxmlformats.org/drawingml/2006/main">
             <a:pPr>
+              <a:buNone/>
               <a:defRPr sz="1875" b="0">
                 <a:solidFill>
                   <a:srgbClr val="B35B38"/>
@@ -16179,6 +17289,7 @@
           </a:p>
           <a:p xmlns:a="http://schemas.openxmlformats.org/drawingml/2006/main">
             <a:pPr>
+              <a:buNone/>
               <a:defRPr sz="1875" b="0">
                 <a:solidFill>
                   <a:srgbClr val="B35B38"/>
@@ -16245,6 +17356,7 @@
               </a:defRPr>
             </a:defPPr>
             <a:lvl1pPr>
+              <a:buNone/>
               <a:defRPr sz="1875" b="0">
                 <a:solidFill>
                   <a:srgbClr val="B35B38"/>
@@ -16255,6 +17367,7 @@
               </a:defRPr>
             </a:lvl1pPr>
             <a:lvl2pPr>
+              <a:buNone/>
               <a:defRPr sz="1875" b="0">
                 <a:solidFill>
                   <a:srgbClr val="B35B38"/>
@@ -16265,6 +17378,7 @@
               </a:defRPr>
             </a:lvl2pPr>
             <a:lvl3pPr>
+              <a:buNone/>
               <a:defRPr sz="1875" b="0">
                 <a:solidFill>
                   <a:srgbClr val="B35B38"/>
@@ -16275,6 +17389,7 @@
               </a:defRPr>
             </a:lvl3pPr>
             <a:lvl4pPr>
+              <a:buNone/>
               <a:defRPr sz="1875" b="0">
                 <a:solidFill>
                   <a:srgbClr val="B35B38"/>
@@ -16285,6 +17400,7 @@
               </a:defRPr>
             </a:lvl4pPr>
             <a:lvl5pPr>
+              <a:buNone/>
               <a:defRPr sz="1875" b="0">
                 <a:solidFill>
                   <a:srgbClr val="B35B38"/>
@@ -16295,6 +17411,7 @@
               </a:defRPr>
             </a:lvl5pPr>
             <a:lvl6pPr>
+              <a:buNone/>
               <a:defRPr sz="1875" b="0">
                 <a:solidFill>
                   <a:srgbClr val="B35B38"/>
@@ -16305,6 +17422,7 @@
               </a:defRPr>
             </a:lvl6pPr>
             <a:lvl7pPr>
+              <a:buNone/>
               <a:defRPr sz="1875" b="0">
                 <a:solidFill>
                   <a:srgbClr val="B35B38"/>
@@ -16315,6 +17433,7 @@
               </a:defRPr>
             </a:lvl7pPr>
             <a:lvl8pPr>
+              <a:buNone/>
               <a:defRPr sz="1875" b="0">
                 <a:solidFill>
                   <a:srgbClr val="B35B38"/>
@@ -16325,6 +17444,7 @@
               </a:defRPr>
             </a:lvl8pPr>
             <a:lvl9pPr>
+              <a:buNone/>
               <a:defRPr sz="1875" b="0">
                 <a:solidFill>
                   <a:srgbClr val="B35B38"/>
@@ -16337,6 +17457,7 @@
           </a:lstStyle>
           <a:p xmlns:a="http://schemas.openxmlformats.org/drawingml/2006/main">
             <a:pPr>
+              <a:buNone/>
               <a:defRPr sz="1875" b="0">
                 <a:solidFill>
                   <a:srgbClr val="B35B38"/>
@@ -16360,6 +17481,7 @@
           </a:p>
           <a:p xmlns:a="http://schemas.openxmlformats.org/drawingml/2006/main">
             <a:pPr>
+              <a:buNone/>
               <a:defRPr sz="1875" b="0">
                 <a:solidFill>
                   <a:srgbClr val="B35B38"/>
@@ -16426,6 +17548,7 @@
               </a:defRPr>
             </a:defPPr>
             <a:lvl1pPr>
+              <a:buNone/>
               <a:defRPr sz="2175" b="1">
                 <a:solidFill>
                   <a:srgbClr val="22362F"/>
@@ -16436,6 +17559,7 @@
               </a:defRPr>
             </a:lvl1pPr>
             <a:lvl2pPr>
+              <a:buNone/>
               <a:defRPr sz="2175" b="1">
                 <a:solidFill>
                   <a:srgbClr val="22362F"/>
@@ -16446,6 +17570,7 @@
               </a:defRPr>
             </a:lvl2pPr>
             <a:lvl3pPr>
+              <a:buNone/>
               <a:defRPr sz="2175" b="1">
                 <a:solidFill>
                   <a:srgbClr val="22362F"/>
@@ -16456,6 +17581,7 @@
               </a:defRPr>
             </a:lvl3pPr>
             <a:lvl4pPr>
+              <a:buNone/>
               <a:defRPr sz="2175" b="1">
                 <a:solidFill>
                   <a:srgbClr val="22362F"/>
@@ -16466,6 +17592,7 @@
               </a:defRPr>
             </a:lvl4pPr>
             <a:lvl5pPr>
+              <a:buNone/>
               <a:defRPr sz="2175" b="1">
                 <a:solidFill>
                   <a:srgbClr val="22362F"/>
@@ -16476,6 +17603,7 @@
               </a:defRPr>
             </a:lvl5pPr>
             <a:lvl6pPr>
+              <a:buNone/>
               <a:defRPr sz="2175" b="1">
                 <a:solidFill>
                   <a:srgbClr val="22362F"/>
@@ -16486,6 +17614,7 @@
               </a:defRPr>
             </a:lvl6pPr>
             <a:lvl7pPr>
+              <a:buNone/>
               <a:defRPr sz="2175" b="1">
                 <a:solidFill>
                   <a:srgbClr val="22362F"/>
@@ -16496,6 +17625,7 @@
               </a:defRPr>
             </a:lvl7pPr>
             <a:lvl8pPr>
+              <a:buNone/>
               <a:defRPr sz="2175" b="1">
                 <a:solidFill>
                   <a:srgbClr val="22362F"/>
@@ -16506,6 +17636,7 @@
               </a:defRPr>
             </a:lvl8pPr>
             <a:lvl9pPr>
+              <a:buNone/>
               <a:defRPr sz="2175" b="1">
                 <a:solidFill>
                   <a:srgbClr val="22362F"/>
@@ -16518,6 +17649,7 @@
           </a:lstStyle>
           <a:p xmlns:a="http://schemas.openxmlformats.org/drawingml/2006/main">
             <a:pPr>
+              <a:buNone/>
               <a:defRPr sz="2175" b="1">
                 <a:solidFill>
                   <a:srgbClr val="22362F"/>
@@ -16536,11 +17668,12 @@
                 <a:ea typeface="Arial"/>
                 <a:cs typeface="Arial"/>
               </a:rPr>
-              <a:t>Wrong disease labels can lead</a:t>
+              <a:t>A wrong disease label could</a:t>
             </a:r>
           </a:p>
           <a:p xmlns:a="http://schemas.openxmlformats.org/drawingml/2006/main">
             <a:pPr>
+              <a:buNone/>
               <a:defRPr sz="2175" b="1">
                 <a:solidFill>
                   <a:srgbClr val="22362F"/>
@@ -16559,7 +17692,7 @@
                 <a:ea typeface="Arial"/>
                 <a:cs typeface="Arial"/>
               </a:rPr>
-              <a:t>to unsuitable intervention.</a:t>
+              <a:t>lead to the wrong treatment.</a:t>
             </a:r>
           </a:p>
         </p:txBody>
@@ -16607,6 +17740,7 @@
               </a:defRPr>
             </a:defPPr>
             <a:lvl1pPr>
+              <a:buNone/>
               <a:defRPr sz="2025" b="0">
                 <a:solidFill>
                   <a:srgbClr val="22362F"/>
@@ -16617,6 +17751,7 @@
               </a:defRPr>
             </a:lvl1pPr>
             <a:lvl2pPr>
+              <a:buNone/>
               <a:defRPr sz="2025" b="0">
                 <a:solidFill>
                   <a:srgbClr val="22362F"/>
@@ -16627,6 +17762,7 @@
               </a:defRPr>
             </a:lvl2pPr>
             <a:lvl3pPr>
+              <a:buNone/>
               <a:defRPr sz="2025" b="0">
                 <a:solidFill>
                   <a:srgbClr val="22362F"/>
@@ -16637,6 +17773,7 @@
               </a:defRPr>
             </a:lvl3pPr>
             <a:lvl4pPr>
+              <a:buNone/>
               <a:defRPr sz="2025" b="0">
                 <a:solidFill>
                   <a:srgbClr val="22362F"/>
@@ -16647,6 +17784,7 @@
               </a:defRPr>
             </a:lvl4pPr>
             <a:lvl5pPr>
+              <a:buNone/>
               <a:defRPr sz="2025" b="0">
                 <a:solidFill>
                   <a:srgbClr val="22362F"/>
@@ -16657,6 +17795,7 @@
               </a:defRPr>
             </a:lvl5pPr>
             <a:lvl6pPr>
+              <a:buNone/>
               <a:defRPr sz="2025" b="0">
                 <a:solidFill>
                   <a:srgbClr val="22362F"/>
@@ -16667,6 +17806,7 @@
               </a:defRPr>
             </a:lvl6pPr>
             <a:lvl7pPr>
+              <a:buNone/>
               <a:defRPr sz="2025" b="0">
                 <a:solidFill>
                   <a:srgbClr val="22362F"/>
@@ -16677,6 +17817,7 @@
               </a:defRPr>
             </a:lvl7pPr>
             <a:lvl8pPr>
+              <a:buNone/>
               <a:defRPr sz="2025" b="0">
                 <a:solidFill>
                   <a:srgbClr val="22362F"/>
@@ -16687,6 +17828,7 @@
               </a:defRPr>
             </a:lvl8pPr>
             <a:lvl9pPr>
+              <a:buNone/>
               <a:defRPr sz="2025" b="0">
                 <a:solidFill>
                   <a:srgbClr val="22362F"/>
@@ -16699,6 +17841,7 @@
           </a:lstStyle>
           <a:p xmlns:a="http://schemas.openxmlformats.org/drawingml/2006/main">
             <a:pPr>
+              <a:buNone/>
               <a:defRPr sz="2025" b="0">
                 <a:solidFill>
                   <a:srgbClr val="22362F"/>
@@ -16722,6 +17865,7 @@
           </a:p>
           <a:p xmlns:a="http://schemas.openxmlformats.org/drawingml/2006/main">
             <a:pPr>
+              <a:buNone/>
               <a:defRPr sz="2025" b="0">
                 <a:solidFill>
                   <a:srgbClr val="22362F"/>
@@ -16788,6 +17932,7 @@
               </a:defRPr>
             </a:defPPr>
             <a:lvl1pPr>
+              <a:buNone/>
               <a:defRPr sz="2025" b="1">
                 <a:solidFill>
                   <a:srgbClr val="245844"/>
@@ -16798,6 +17943,7 @@
               </a:defRPr>
             </a:lvl1pPr>
             <a:lvl2pPr>
+              <a:buNone/>
               <a:defRPr sz="2025" b="1">
                 <a:solidFill>
                   <a:srgbClr val="245844"/>
@@ -16808,6 +17954,7 @@
               </a:defRPr>
             </a:lvl2pPr>
             <a:lvl3pPr>
+              <a:buNone/>
               <a:defRPr sz="2025" b="1">
                 <a:solidFill>
                   <a:srgbClr val="245844"/>
@@ -16818,6 +17965,7 @@
               </a:defRPr>
             </a:lvl3pPr>
             <a:lvl4pPr>
+              <a:buNone/>
               <a:defRPr sz="2025" b="1">
                 <a:solidFill>
                   <a:srgbClr val="245844"/>
@@ -16828,6 +17976,7 @@
               </a:defRPr>
             </a:lvl4pPr>
             <a:lvl5pPr>
+              <a:buNone/>
               <a:defRPr sz="2025" b="1">
                 <a:solidFill>
                   <a:srgbClr val="245844"/>
@@ -16838,6 +17987,7 @@
               </a:defRPr>
             </a:lvl5pPr>
             <a:lvl6pPr>
+              <a:buNone/>
               <a:defRPr sz="2025" b="1">
                 <a:solidFill>
                   <a:srgbClr val="245844"/>
@@ -16848,6 +17998,7 @@
               </a:defRPr>
             </a:lvl6pPr>
             <a:lvl7pPr>
+              <a:buNone/>
               <a:defRPr sz="2025" b="1">
                 <a:solidFill>
                   <a:srgbClr val="245844"/>
@@ -16858,6 +18009,7 @@
               </a:defRPr>
             </a:lvl7pPr>
             <a:lvl8pPr>
+              <a:buNone/>
               <a:defRPr sz="2025" b="1">
                 <a:solidFill>
                   <a:srgbClr val="245844"/>
@@ -16868,6 +18020,7 @@
               </a:defRPr>
             </a:lvl8pPr>
             <a:lvl9pPr>
+              <a:buNone/>
               <a:defRPr sz="2025" b="1">
                 <a:solidFill>
                   <a:srgbClr val="245844"/>
@@ -16880,6 +18033,7 @@
           </a:lstStyle>
           <a:p xmlns:a="http://schemas.openxmlformats.org/drawingml/2006/main">
             <a:pPr>
+              <a:buNone/>
               <a:defRPr sz="2025" b="1">
                 <a:solidFill>
                   <a:srgbClr val="245844"/>
@@ -16903,6 +18057,7 @@
           </a:p>
           <a:p xmlns:a="http://schemas.openxmlformats.org/drawingml/2006/main">
             <a:pPr>
+              <a:buNone/>
               <a:defRPr sz="2025" b="1">
                 <a:solidFill>
                   <a:srgbClr val="245844"/>
@@ -16942,8 +18097,8 @@
         </p:nvSpPr>
         <p:spPr>
           <a:xfrm xmlns:a="http://schemas.openxmlformats.org/drawingml/2006/main">
-            <a:off x="609600" y="6115050"/>
-            <a:ext cx="10191750" cy="342900"/>
+            <a:off x="609600" y="6048375"/>
+            <a:ext cx="10287000" cy="552450"/>
           </a:xfrm>
           <a:prstGeom xmlns:a="http://schemas.openxmlformats.org/drawingml/2006/main" prst="rect">
             <a:avLst/>
@@ -16959,7 +18114,7 @@
           </a:bodyPr>
           <a:lstStyle xmlns:a="http://schemas.openxmlformats.org/drawingml/2006/main">
             <a:defPPr>
-              <a:defRPr sz="1350" b="0">
+              <a:defRPr sz="1725" b="0">
                 <a:solidFill>
                   <a:srgbClr val="5D6864"/>
                 </a:solidFill>
@@ -16969,6 +18124,7 @@
               </a:defRPr>
             </a:defPPr>
             <a:lvl1pPr>
+              <a:buNone/>
               <a:defRPr sz="1350" b="0">
                 <a:solidFill>
                   <a:srgbClr val="5D6864"/>
@@ -16979,6 +18135,7 @@
               </a:defRPr>
             </a:lvl1pPr>
             <a:lvl2pPr>
+              <a:buNone/>
               <a:defRPr sz="1350" b="0">
                 <a:solidFill>
                   <a:srgbClr val="5D6864"/>
@@ -16989,6 +18146,7 @@
               </a:defRPr>
             </a:lvl2pPr>
             <a:lvl3pPr>
+              <a:buNone/>
               <a:defRPr sz="1350" b="0">
                 <a:solidFill>
                   <a:srgbClr val="5D6864"/>
@@ -16999,6 +18157,7 @@
               </a:defRPr>
             </a:lvl3pPr>
             <a:lvl4pPr>
+              <a:buNone/>
               <a:defRPr sz="1350" b="0">
                 <a:solidFill>
                   <a:srgbClr val="5D6864"/>
@@ -17009,6 +18168,7 @@
               </a:defRPr>
             </a:lvl4pPr>
             <a:lvl5pPr>
+              <a:buNone/>
               <a:defRPr sz="1350" b="0">
                 <a:solidFill>
                   <a:srgbClr val="5D6864"/>
@@ -17019,6 +18179,7 @@
               </a:defRPr>
             </a:lvl5pPr>
             <a:lvl6pPr>
+              <a:buNone/>
               <a:defRPr sz="1350" b="0">
                 <a:solidFill>
                   <a:srgbClr val="5D6864"/>
@@ -17029,6 +18190,7 @@
               </a:defRPr>
             </a:lvl6pPr>
             <a:lvl7pPr>
+              <a:buNone/>
               <a:defRPr sz="1350" b="0">
                 <a:solidFill>
                   <a:srgbClr val="5D6864"/>
@@ -17039,6 +18201,7 @@
               </a:defRPr>
             </a:lvl7pPr>
             <a:lvl8pPr>
+              <a:buNone/>
               <a:defRPr sz="1350" b="0">
                 <a:solidFill>
                   <a:srgbClr val="5D6864"/>
@@ -17049,6 +18212,7 @@
               </a:defRPr>
             </a:lvl8pPr>
             <a:lvl9pPr>
+              <a:buNone/>
               <a:defRPr sz="1350" b="0">
                 <a:solidFill>
                   <a:srgbClr val="5D6864"/>
@@ -17061,7 +18225,8 @@
           </a:lstStyle>
           <a:p xmlns:a="http://schemas.openxmlformats.org/drawingml/2006/main">
             <a:pPr>
-              <a:defRPr sz="1350" b="0">
+              <a:buNone/>
+              <a:defRPr sz="1725" b="0">
                 <a:solidFill>
                   <a:srgbClr val="5D6864"/>
                 </a:solidFill>
@@ -17071,7 +18236,7 @@
               </a:defRPr>
             </a:pPr>
             <a:r>
-              <a:rPr sz="1350" b="0">
+              <a:rPr sz="1725" b="0">
                 <a:solidFill>
                   <a:srgbClr val="5D6864"/>
                 </a:solidFill>
@@ -17079,7 +18244,7 @@
                 <a:ea typeface="Arial"/>
                 <a:cs typeface="Arial"/>
               </a:rPr>
-              <a:t>Softmax confidence is uncalibrated. Geography, phone quality and access to advice may affect who benefits.</a:t>
+              <a:t>Confidence scores are uncalibrated. Performance across farms and devices is unknown.</a:t>
             </a:r>
           </a:p>
         </p:txBody>
@@ -17156,6 +18321,7 @@
               </a:defRPr>
             </a:defPPr>
             <a:lvl1pPr>
+              <a:buNone/>
               <a:defRPr sz="3300" b="1">
                 <a:solidFill>
                   <a:srgbClr val="22362F"/>
@@ -17166,6 +18332,7 @@
               </a:defRPr>
             </a:lvl1pPr>
             <a:lvl2pPr>
+              <a:buNone/>
               <a:defRPr sz="3300" b="1">
                 <a:solidFill>
                   <a:srgbClr val="22362F"/>
@@ -17176,6 +18343,7 @@
               </a:defRPr>
             </a:lvl2pPr>
             <a:lvl3pPr>
+              <a:buNone/>
               <a:defRPr sz="3300" b="1">
                 <a:solidFill>
                   <a:srgbClr val="22362F"/>
@@ -17186,6 +18354,7 @@
               </a:defRPr>
             </a:lvl3pPr>
             <a:lvl4pPr>
+              <a:buNone/>
               <a:defRPr sz="3300" b="1">
                 <a:solidFill>
                   <a:srgbClr val="22362F"/>
@@ -17196,6 +18365,7 @@
               </a:defRPr>
             </a:lvl4pPr>
             <a:lvl5pPr>
+              <a:buNone/>
               <a:defRPr sz="3300" b="1">
                 <a:solidFill>
                   <a:srgbClr val="22362F"/>
@@ -17206,6 +18376,7 @@
               </a:defRPr>
             </a:lvl5pPr>
             <a:lvl6pPr>
+              <a:buNone/>
               <a:defRPr sz="3300" b="1">
                 <a:solidFill>
                   <a:srgbClr val="22362F"/>
@@ -17216,6 +18387,7 @@
               </a:defRPr>
             </a:lvl6pPr>
             <a:lvl7pPr>
+              <a:buNone/>
               <a:defRPr sz="3300" b="1">
                 <a:solidFill>
                   <a:srgbClr val="22362F"/>
@@ -17226,6 +18398,7 @@
               </a:defRPr>
             </a:lvl7pPr>
             <a:lvl8pPr>
+              <a:buNone/>
               <a:defRPr sz="3300" b="1">
                 <a:solidFill>
                   <a:srgbClr val="22362F"/>
@@ -17236,6 +18409,7 @@
               </a:defRPr>
             </a:lvl8pPr>
             <a:lvl9pPr>
+              <a:buNone/>
               <a:defRPr sz="3300" b="1">
                 <a:solidFill>
                   <a:srgbClr val="22362F"/>
@@ -17248,6 +18422,7 @@
           </a:lstStyle>
           <a:p xmlns:a="http://schemas.openxmlformats.org/drawingml/2006/main">
             <a:pPr>
+              <a:buNone/>
               <a:defRPr sz="3300" b="1">
                 <a:solidFill>
                   <a:srgbClr val="22362F"/>
@@ -17314,6 +18489,7 @@
               </a:defRPr>
             </a:defPPr>
             <a:lvl1pPr>
+              <a:buNone/>
               <a:defRPr sz="1350" b="0">
                 <a:solidFill>
                   <a:srgbClr val="5D6864"/>
@@ -17324,6 +18500,7 @@
               </a:defRPr>
             </a:lvl1pPr>
             <a:lvl2pPr>
+              <a:buNone/>
               <a:defRPr sz="1350" b="0">
                 <a:solidFill>
                   <a:srgbClr val="5D6864"/>
@@ -17334,6 +18511,7 @@
               </a:defRPr>
             </a:lvl2pPr>
             <a:lvl3pPr>
+              <a:buNone/>
               <a:defRPr sz="1350" b="0">
                 <a:solidFill>
                   <a:srgbClr val="5D6864"/>
@@ -17344,6 +18522,7 @@
               </a:defRPr>
             </a:lvl3pPr>
             <a:lvl4pPr>
+              <a:buNone/>
               <a:defRPr sz="1350" b="0">
                 <a:solidFill>
                   <a:srgbClr val="5D6864"/>
@@ -17354,6 +18533,7 @@
               </a:defRPr>
             </a:lvl4pPr>
             <a:lvl5pPr>
+              <a:buNone/>
               <a:defRPr sz="1350" b="0">
                 <a:solidFill>
                   <a:srgbClr val="5D6864"/>
@@ -17364,6 +18544,7 @@
               </a:defRPr>
             </a:lvl5pPr>
             <a:lvl6pPr>
+              <a:buNone/>
               <a:defRPr sz="1350" b="0">
                 <a:solidFill>
                   <a:srgbClr val="5D6864"/>
@@ -17374,6 +18555,7 @@
               </a:defRPr>
             </a:lvl6pPr>
             <a:lvl7pPr>
+              <a:buNone/>
               <a:defRPr sz="1350" b="0">
                 <a:solidFill>
                   <a:srgbClr val="5D6864"/>
@@ -17384,6 +18566,7 @@
               </a:defRPr>
             </a:lvl7pPr>
             <a:lvl8pPr>
+              <a:buNone/>
               <a:defRPr sz="1350" b="0">
                 <a:solidFill>
                   <a:srgbClr val="5D6864"/>
@@ -17394,6 +18577,7 @@
               </a:defRPr>
             </a:lvl8pPr>
             <a:lvl9pPr>
+              <a:buNone/>
               <a:defRPr sz="1350" b="0">
                 <a:solidFill>
                   <a:srgbClr val="5D6864"/>
@@ -17406,6 +18590,7 @@
           </a:lstStyle>
           <a:p xmlns:a="http://schemas.openxmlformats.org/drawingml/2006/main">
             <a:pPr>
+              <a:buNone/>
               <a:defRPr sz="1350" b="0">
                 <a:solidFill>
                   <a:srgbClr val="5D6864"/>
@@ -17472,6 +18657,7 @@
               </a:defRPr>
             </a:defPPr>
             <a:lvl1pPr>
+              <a:buNone/>
               <a:defRPr sz="2850" b="1">
                 <a:solidFill>
                   <a:srgbClr val="245844"/>
@@ -17482,6 +18668,7 @@
               </a:defRPr>
             </a:lvl1pPr>
             <a:lvl2pPr>
+              <a:buNone/>
               <a:defRPr sz="2850" b="1">
                 <a:solidFill>
                   <a:srgbClr val="245844"/>
@@ -17492,6 +18679,7 @@
               </a:defRPr>
             </a:lvl2pPr>
             <a:lvl3pPr>
+              <a:buNone/>
               <a:defRPr sz="2850" b="1">
                 <a:solidFill>
                   <a:srgbClr val="245844"/>
@@ -17502,6 +18690,7 @@
               </a:defRPr>
             </a:lvl3pPr>
             <a:lvl4pPr>
+              <a:buNone/>
               <a:defRPr sz="2850" b="1">
                 <a:solidFill>
                   <a:srgbClr val="245844"/>
@@ -17512,6 +18701,7 @@
               </a:defRPr>
             </a:lvl4pPr>
             <a:lvl5pPr>
+              <a:buNone/>
               <a:defRPr sz="2850" b="1">
                 <a:solidFill>
                   <a:srgbClr val="245844"/>
@@ -17522,6 +18712,7 @@
               </a:defRPr>
             </a:lvl5pPr>
             <a:lvl6pPr>
+              <a:buNone/>
               <a:defRPr sz="2850" b="1">
                 <a:solidFill>
                   <a:srgbClr val="245844"/>
@@ -17532,6 +18723,7 @@
               </a:defRPr>
             </a:lvl6pPr>
             <a:lvl7pPr>
+              <a:buNone/>
               <a:defRPr sz="2850" b="1">
                 <a:solidFill>
                   <a:srgbClr val="245844"/>
@@ -17542,6 +18734,7 @@
               </a:defRPr>
             </a:lvl7pPr>
             <a:lvl8pPr>
+              <a:buNone/>
               <a:defRPr sz="2850" b="1">
                 <a:solidFill>
                   <a:srgbClr val="245844"/>
@@ -17552,6 +18745,7 @@
               </a:defRPr>
             </a:lvl8pPr>
             <a:lvl9pPr>
+              <a:buNone/>
               <a:defRPr sz="2850" b="1">
                 <a:solidFill>
                   <a:srgbClr val="245844"/>
@@ -17564,6 +18758,7 @@
           </a:lstStyle>
           <a:p xmlns:a="http://schemas.openxmlformats.org/drawingml/2006/main">
             <a:pPr>
+              <a:buNone/>
               <a:defRPr sz="2850" b="1">
                 <a:solidFill>
                   <a:srgbClr val="245844"/>
@@ -17630,6 +18825,7 @@
               </a:defRPr>
             </a:defPPr>
             <a:lvl1pPr>
+              <a:buNone/>
               <a:defRPr sz="2850" b="1">
                 <a:solidFill>
                   <a:srgbClr val="22362F"/>
@@ -17640,6 +18836,7 @@
               </a:defRPr>
             </a:lvl1pPr>
             <a:lvl2pPr>
+              <a:buNone/>
               <a:defRPr sz="2850" b="1">
                 <a:solidFill>
                   <a:srgbClr val="22362F"/>
@@ -17650,6 +18847,7 @@
               </a:defRPr>
             </a:lvl2pPr>
             <a:lvl3pPr>
+              <a:buNone/>
               <a:defRPr sz="2850" b="1">
                 <a:solidFill>
                   <a:srgbClr val="22362F"/>
@@ -17660,6 +18858,7 @@
               </a:defRPr>
             </a:lvl3pPr>
             <a:lvl4pPr>
+              <a:buNone/>
               <a:defRPr sz="2850" b="1">
                 <a:solidFill>
                   <a:srgbClr val="22362F"/>
@@ -17670,6 +18869,7 @@
               </a:defRPr>
             </a:lvl4pPr>
             <a:lvl5pPr>
+              <a:buNone/>
               <a:defRPr sz="2850" b="1">
                 <a:solidFill>
                   <a:srgbClr val="22362F"/>
@@ -17680,6 +18880,7 @@
               </a:defRPr>
             </a:lvl5pPr>
             <a:lvl6pPr>
+              <a:buNone/>
               <a:defRPr sz="2850" b="1">
                 <a:solidFill>
                   <a:srgbClr val="22362F"/>
@@ -17690,6 +18891,7 @@
               </a:defRPr>
             </a:lvl6pPr>
             <a:lvl7pPr>
+              <a:buNone/>
               <a:defRPr sz="2850" b="1">
                 <a:solidFill>
                   <a:srgbClr val="22362F"/>
@@ -17700,6 +18902,7 @@
               </a:defRPr>
             </a:lvl7pPr>
             <a:lvl8pPr>
+              <a:buNone/>
               <a:defRPr sz="2850" b="1">
                 <a:solidFill>
                   <a:srgbClr val="22362F"/>
@@ -17710,6 +18913,7 @@
               </a:defRPr>
             </a:lvl8pPr>
             <a:lvl9pPr>
+              <a:buNone/>
               <a:defRPr sz="2850" b="1">
                 <a:solidFill>
                   <a:srgbClr val="22362F"/>
@@ -17722,6 +18926,7 @@
           </a:lstStyle>
           <a:p xmlns:a="http://schemas.openxmlformats.org/drawingml/2006/main">
             <a:pPr>
+              <a:buNone/>
               <a:defRPr sz="2850" b="1">
                 <a:solidFill>
                   <a:srgbClr val="22362F"/>
@@ -17745,6 +18950,7 @@
           </a:p>
           <a:p xmlns:a="http://schemas.openxmlformats.org/drawingml/2006/main">
             <a:pPr>
+              <a:buNone/>
               <a:defRPr sz="2850" b="1">
                 <a:solidFill>
                   <a:srgbClr val="22362F"/>
@@ -17785,7 +18991,7 @@
         <p:spPr>
           <a:xfrm xmlns:a="http://schemas.openxmlformats.org/drawingml/2006/main">
             <a:off x="609600" y="4762500"/>
-            <a:ext cx="10572750" cy="781050"/>
+            <a:ext cx="10572750" cy="904875"/>
           </a:xfrm>
           <a:prstGeom xmlns:a="http://schemas.openxmlformats.org/drawingml/2006/main" prst="rect">
             <a:avLst/>
@@ -17811,6 +19017,7 @@
               </a:defRPr>
             </a:defPPr>
             <a:lvl1pPr>
+              <a:buNone/>
               <a:defRPr sz="2250" b="0">
                 <a:solidFill>
                   <a:srgbClr val="5D6864"/>
@@ -17821,6 +19028,7 @@
               </a:defRPr>
             </a:lvl1pPr>
             <a:lvl2pPr>
+              <a:buNone/>
               <a:defRPr sz="2250" b="0">
                 <a:solidFill>
                   <a:srgbClr val="5D6864"/>
@@ -17831,6 +19039,7 @@
               </a:defRPr>
             </a:lvl2pPr>
             <a:lvl3pPr>
+              <a:buNone/>
               <a:defRPr sz="2250" b="0">
                 <a:solidFill>
                   <a:srgbClr val="5D6864"/>
@@ -17841,6 +19050,7 @@
               </a:defRPr>
             </a:lvl3pPr>
             <a:lvl4pPr>
+              <a:buNone/>
               <a:defRPr sz="2250" b="0">
                 <a:solidFill>
                   <a:srgbClr val="5D6864"/>
@@ -17851,6 +19061,7 @@
               </a:defRPr>
             </a:lvl4pPr>
             <a:lvl5pPr>
+              <a:buNone/>
               <a:defRPr sz="2250" b="0">
                 <a:solidFill>
                   <a:srgbClr val="5D6864"/>
@@ -17861,6 +19072,7 @@
               </a:defRPr>
             </a:lvl5pPr>
             <a:lvl6pPr>
+              <a:buNone/>
               <a:defRPr sz="2250" b="0">
                 <a:solidFill>
                   <a:srgbClr val="5D6864"/>
@@ -17871,6 +19083,7 @@
               </a:defRPr>
             </a:lvl6pPr>
             <a:lvl7pPr>
+              <a:buNone/>
               <a:defRPr sz="2250" b="0">
                 <a:solidFill>
                   <a:srgbClr val="5D6864"/>
@@ -17881,6 +19094,7 @@
               </a:defRPr>
             </a:lvl7pPr>
             <a:lvl8pPr>
+              <a:buNone/>
               <a:defRPr sz="2250" b="0">
                 <a:solidFill>
                   <a:srgbClr val="5D6864"/>
@@ -17891,6 +19105,7 @@
               </a:defRPr>
             </a:lvl8pPr>
             <a:lvl9pPr>
+              <a:buNone/>
               <a:defRPr sz="2250" b="0">
                 <a:solidFill>
                   <a:srgbClr val="5D6864"/>
@@ -17903,6 +19118,7 @@
           </a:lstStyle>
           <a:p xmlns:a="http://schemas.openxmlformats.org/drawingml/2006/main">
             <a:pPr>
+              <a:buNone/>
               <a:defRPr sz="2250" b="0">
                 <a:solidFill>
                   <a:srgbClr val="5D6864"/>
@@ -17921,7 +19137,31 @@
                 <a:ea typeface="Arial"/>
                 <a:cs typeface="Arial"/>
               </a:rPr>
-              <a:t>Next: independently collected farms and validation-only tuning</a:t>
+              <a:t>Next: collect images from independent farms.</a:t>
+            </a:r>
+          </a:p>
+          <a:p xmlns:a="http://schemas.openxmlformats.org/drawingml/2006/main">
+            <a:pPr>
+              <a:buNone/>
+              <a:defRPr sz="2250" b="0">
+                <a:solidFill>
+                  <a:srgbClr val="5D6864"/>
+                </a:solidFill>
+                <a:latin typeface="Arial"/>
+                <a:ea typeface="Arial"/>
+                <a:cs typeface="Arial"/>
+              </a:defRPr>
+            </a:pPr>
+            <a:r>
+              <a:rPr sz="2250" b="0">
+                <a:solidFill>
+                  <a:srgbClr val="5D6864"/>
+                </a:solidFill>
+                <a:latin typeface="Arial"/>
+                <a:ea typeface="Arial"/>
+                <a:cs typeface="Arial"/>
+              </a:rPr>
+              <a:t>Use validation data to choose training settings.</a:t>
             </a:r>
           </a:p>
         </p:txBody>
@@ -17942,8 +19182,8 @@
         </p:nvSpPr>
         <p:spPr>
           <a:xfrm xmlns:a="http://schemas.openxmlformats.org/drawingml/2006/main">
-            <a:off x="609600" y="6115050"/>
-            <a:ext cx="10191750" cy="342900"/>
+            <a:off x="609600" y="6048375"/>
+            <a:ext cx="10287000" cy="552450"/>
           </a:xfrm>
           <a:prstGeom xmlns:a="http://schemas.openxmlformats.org/drawingml/2006/main" prst="rect">
             <a:avLst/>
@@ -17959,7 +19199,7 @@
           </a:bodyPr>
           <a:lstStyle xmlns:a="http://schemas.openxmlformats.org/drawingml/2006/main">
             <a:defPPr>
-              <a:defRPr sz="1350" b="0">
+              <a:defRPr sz="1725" b="0">
                 <a:solidFill>
                   <a:srgbClr val="5D6864"/>
                 </a:solidFill>
@@ -17969,6 +19209,7 @@
               </a:defRPr>
             </a:defPPr>
             <a:lvl1pPr>
+              <a:buNone/>
               <a:defRPr sz="1350" b="0">
                 <a:solidFill>
                   <a:srgbClr val="5D6864"/>
@@ -17979,6 +19220,7 @@
               </a:defRPr>
             </a:lvl1pPr>
             <a:lvl2pPr>
+              <a:buNone/>
               <a:defRPr sz="1350" b="0">
                 <a:solidFill>
                   <a:srgbClr val="5D6864"/>
@@ -17989,6 +19231,7 @@
               </a:defRPr>
             </a:lvl2pPr>
             <a:lvl3pPr>
+              <a:buNone/>
               <a:defRPr sz="1350" b="0">
                 <a:solidFill>
                   <a:srgbClr val="5D6864"/>
@@ -17999,6 +19242,7 @@
               </a:defRPr>
             </a:lvl3pPr>
             <a:lvl4pPr>
+              <a:buNone/>
               <a:defRPr sz="1350" b="0">
                 <a:solidFill>
                   <a:srgbClr val="5D6864"/>
@@ -18009,6 +19253,7 @@
               </a:defRPr>
             </a:lvl4pPr>
             <a:lvl5pPr>
+              <a:buNone/>
               <a:defRPr sz="1350" b="0">
                 <a:solidFill>
                   <a:srgbClr val="5D6864"/>
@@ -18019,6 +19264,7 @@
               </a:defRPr>
             </a:lvl5pPr>
             <a:lvl6pPr>
+              <a:buNone/>
               <a:defRPr sz="1350" b="0">
                 <a:solidFill>
                   <a:srgbClr val="5D6864"/>
@@ -18029,6 +19275,7 @@
               </a:defRPr>
             </a:lvl6pPr>
             <a:lvl7pPr>
+              <a:buNone/>
               <a:defRPr sz="1350" b="0">
                 <a:solidFill>
                   <a:srgbClr val="5D6864"/>
@@ -18039,6 +19286,7 @@
               </a:defRPr>
             </a:lvl7pPr>
             <a:lvl8pPr>
+              <a:buNone/>
               <a:defRPr sz="1350" b="0">
                 <a:solidFill>
                   <a:srgbClr val="5D6864"/>
@@ -18049,6 +19297,7 @@
               </a:defRPr>
             </a:lvl8pPr>
             <a:lvl9pPr>
+              <a:buNone/>
               <a:defRPr sz="1350" b="0">
                 <a:solidFill>
                   <a:srgbClr val="5D6864"/>
@@ -18061,7 +19310,8 @@
           </a:lstStyle>
           <a:p xmlns:a="http://schemas.openxmlformats.org/drawingml/2006/main">
             <a:pPr>
-              <a:defRPr sz="1350" b="0">
+              <a:buNone/>
+              <a:defRPr sz="1725" b="0">
                 <a:solidFill>
                   <a:srgbClr val="5D6864"/>
                 </a:solidFill>
@@ -18071,7 +19321,7 @@
               </a:defRPr>
             </a:pPr>
             <a:r>
-              <a:rPr sz="1350" b="0">
+              <a:rPr sz="1725" b="0">
                 <a:solidFill>
                   <a:srgbClr val="5D6864"/>
                 </a:solidFill>
@@ -18079,7 +19329,7 @@
                 <a:ea typeface="Arial"/>
                 <a:cs typeface="Arial"/>
               </a:rPr>
-              <a:t>AI assistance: Codex supported research, implementation, analysis, drafting and review.</a:t>
+              <a:t>AI assistance: Codex helped with research, code, analysis, writing and review.</a:t>
             </a:r>
           </a:p>
         </p:txBody>
@@ -18156,6 +19406,7 @@
               </a:defRPr>
             </a:defPPr>
             <a:lvl1pPr>
+              <a:buNone/>
               <a:defRPr sz="3300" b="1">
                 <a:solidFill>
                   <a:srgbClr val="22362F"/>
@@ -18166,6 +19417,7 @@
               </a:defRPr>
             </a:lvl1pPr>
             <a:lvl2pPr>
+              <a:buNone/>
               <a:defRPr sz="3300" b="1">
                 <a:solidFill>
                   <a:srgbClr val="22362F"/>
@@ -18176,6 +19428,7 @@
               </a:defRPr>
             </a:lvl2pPr>
             <a:lvl3pPr>
+              <a:buNone/>
               <a:defRPr sz="3300" b="1">
                 <a:solidFill>
                   <a:srgbClr val="22362F"/>
@@ -18186,6 +19439,7 @@
               </a:defRPr>
             </a:lvl3pPr>
             <a:lvl4pPr>
+              <a:buNone/>
               <a:defRPr sz="3300" b="1">
                 <a:solidFill>
                   <a:srgbClr val="22362F"/>
@@ -18196,6 +19450,7 @@
               </a:defRPr>
             </a:lvl4pPr>
             <a:lvl5pPr>
+              <a:buNone/>
               <a:defRPr sz="3300" b="1">
                 <a:solidFill>
                   <a:srgbClr val="22362F"/>
@@ -18206,6 +19461,7 @@
               </a:defRPr>
             </a:lvl5pPr>
             <a:lvl6pPr>
+              <a:buNone/>
               <a:defRPr sz="3300" b="1">
                 <a:solidFill>
                   <a:srgbClr val="22362F"/>
@@ -18216,6 +19472,7 @@
               </a:defRPr>
             </a:lvl6pPr>
             <a:lvl7pPr>
+              <a:buNone/>
               <a:defRPr sz="3300" b="1">
                 <a:solidFill>
                   <a:srgbClr val="22362F"/>
@@ -18226,6 +19483,7 @@
               </a:defRPr>
             </a:lvl7pPr>
             <a:lvl8pPr>
+              <a:buNone/>
               <a:defRPr sz="3300" b="1">
                 <a:solidFill>
                   <a:srgbClr val="22362F"/>
@@ -18236,6 +19494,7 @@
               </a:defRPr>
             </a:lvl8pPr>
             <a:lvl9pPr>
+              <a:buNone/>
               <a:defRPr sz="3300" b="1">
                 <a:solidFill>
                   <a:srgbClr val="22362F"/>
@@ -18248,6 +19507,7 @@
           </a:lstStyle>
           <a:p xmlns:a="http://schemas.openxmlformats.org/drawingml/2006/main">
             <a:pPr>
+              <a:buNone/>
               <a:defRPr sz="3300" b="1">
                 <a:solidFill>
                   <a:srgbClr val="22362F"/>
@@ -18314,6 +19574,7 @@
               </a:defRPr>
             </a:defPPr>
             <a:lvl1pPr>
+              <a:buNone/>
               <a:defRPr sz="1350" b="0">
                 <a:solidFill>
                   <a:srgbClr val="5D6864"/>
@@ -18324,6 +19585,7 @@
               </a:defRPr>
             </a:lvl1pPr>
             <a:lvl2pPr>
+              <a:buNone/>
               <a:defRPr sz="1350" b="0">
                 <a:solidFill>
                   <a:srgbClr val="5D6864"/>
@@ -18334,6 +19596,7 @@
               </a:defRPr>
             </a:lvl2pPr>
             <a:lvl3pPr>
+              <a:buNone/>
               <a:defRPr sz="1350" b="0">
                 <a:solidFill>
                   <a:srgbClr val="5D6864"/>
@@ -18344,6 +19607,7 @@
               </a:defRPr>
             </a:lvl3pPr>
             <a:lvl4pPr>
+              <a:buNone/>
               <a:defRPr sz="1350" b="0">
                 <a:solidFill>
                   <a:srgbClr val="5D6864"/>
@@ -18354,6 +19618,7 @@
               </a:defRPr>
             </a:lvl4pPr>
             <a:lvl5pPr>
+              <a:buNone/>
               <a:defRPr sz="1350" b="0">
                 <a:solidFill>
                   <a:srgbClr val="5D6864"/>
@@ -18364,6 +19629,7 @@
               </a:defRPr>
             </a:lvl5pPr>
             <a:lvl6pPr>
+              <a:buNone/>
               <a:defRPr sz="1350" b="0">
                 <a:solidFill>
                   <a:srgbClr val="5D6864"/>
@@ -18374,6 +19640,7 @@
               </a:defRPr>
             </a:lvl6pPr>
             <a:lvl7pPr>
+              <a:buNone/>
               <a:defRPr sz="1350" b="0">
                 <a:solidFill>
                   <a:srgbClr val="5D6864"/>
@@ -18384,6 +19651,7 @@
               </a:defRPr>
             </a:lvl7pPr>
             <a:lvl8pPr>
+              <a:buNone/>
               <a:defRPr sz="1350" b="0">
                 <a:solidFill>
                   <a:srgbClr val="5D6864"/>
@@ -18394,6 +19662,7 @@
               </a:defRPr>
             </a:lvl8pPr>
             <a:lvl9pPr>
+              <a:buNone/>
               <a:defRPr sz="1350" b="0">
                 <a:solidFill>
                   <a:srgbClr val="5D6864"/>
@@ -18406,6 +19675,7 @@
           </a:lstStyle>
           <a:p xmlns:a="http://schemas.openxmlformats.org/drawingml/2006/main">
             <a:pPr>
+              <a:buNone/>
               <a:defRPr sz="1350" b="0">
                 <a:solidFill>
                   <a:srgbClr val="5D6864"/>
@@ -18434,7 +19704,7 @@
           <p:cNvPr id="3" name="">
             <a:extLst xmlns:a="http://schemas.openxmlformats.org/drawingml/2006/main">
               <a:ext uri="{FF2B5EF4-FFF2-40B4-BE49-F238E27FC236}">
-                <a16:creationId xmlns:a16="http://schemas.microsoft.com/office/drawing/2014/main" id="{766508CD-0B70-4A9C-B5EB-65DDEB83C9FC}"/>
+                <a16:creationId xmlns:a16="http://schemas.microsoft.com/office/drawing/2014/main" id="{2D06B13C-F5AE-4062-893F-CAE3D9EF0318}"/>
               </a:ext>
             </a:extLst>
           </p:cNvPr>
@@ -19286,6 +20556,7 @@
               </a:defRPr>
             </a:defPPr>
             <a:lvl1pPr>
+              <a:buNone/>
               <a:defRPr sz="2100" b="1">
                 <a:solidFill>
                   <a:srgbClr val="245844"/>
@@ -19296,6 +20567,7 @@
               </a:defRPr>
             </a:lvl1pPr>
             <a:lvl2pPr>
+              <a:buNone/>
               <a:defRPr sz="2100" b="1">
                 <a:solidFill>
                   <a:srgbClr val="245844"/>
@@ -19306,6 +20578,7 @@
               </a:defRPr>
             </a:lvl2pPr>
             <a:lvl3pPr>
+              <a:buNone/>
               <a:defRPr sz="2100" b="1">
                 <a:solidFill>
                   <a:srgbClr val="245844"/>
@@ -19316,6 +20589,7 @@
               </a:defRPr>
             </a:lvl3pPr>
             <a:lvl4pPr>
+              <a:buNone/>
               <a:defRPr sz="2100" b="1">
                 <a:solidFill>
                   <a:srgbClr val="245844"/>
@@ -19326,6 +20600,7 @@
               </a:defRPr>
             </a:lvl4pPr>
             <a:lvl5pPr>
+              <a:buNone/>
               <a:defRPr sz="2100" b="1">
                 <a:solidFill>
                   <a:srgbClr val="245844"/>
@@ -19336,6 +20611,7 @@
               </a:defRPr>
             </a:lvl5pPr>
             <a:lvl6pPr>
+              <a:buNone/>
               <a:defRPr sz="2100" b="1">
                 <a:solidFill>
                   <a:srgbClr val="245844"/>
@@ -19346,6 +20622,7 @@
               </a:defRPr>
             </a:lvl6pPr>
             <a:lvl7pPr>
+              <a:buNone/>
               <a:defRPr sz="2100" b="1">
                 <a:solidFill>
                   <a:srgbClr val="245844"/>
@@ -19356,6 +20633,7 @@
               </a:defRPr>
             </a:lvl7pPr>
             <a:lvl8pPr>
+              <a:buNone/>
               <a:defRPr sz="2100" b="1">
                 <a:solidFill>
                   <a:srgbClr val="245844"/>
@@ -19366,6 +20644,7 @@
               </a:defRPr>
             </a:lvl8pPr>
             <a:lvl9pPr>
+              <a:buNone/>
               <a:defRPr sz="2100" b="1">
                 <a:solidFill>
                   <a:srgbClr val="245844"/>
@@ -19378,6 +20657,7 @@
           </a:lstStyle>
           <a:p xmlns:a="http://schemas.openxmlformats.org/drawingml/2006/main">
             <a:pPr>
+              <a:buNone/>
               <a:defRPr sz="2100" b="1">
                 <a:solidFill>
                   <a:srgbClr val="245844"/>
@@ -19401,6 +20681,7 @@
           </a:p>
           <a:p xmlns:a="http://schemas.openxmlformats.org/drawingml/2006/main">
             <a:pPr>
+              <a:buNone/>
               <a:defRPr sz="2100" b="1">
                 <a:solidFill>
                   <a:srgbClr val="245844"/>
@@ -19440,8 +20721,8 @@
         </p:nvSpPr>
         <p:spPr>
           <a:xfrm xmlns:a="http://schemas.openxmlformats.org/drawingml/2006/main">
-            <a:off x="609600" y="6115050"/>
-            <a:ext cx="10191750" cy="342900"/>
+            <a:off x="609600" y="6048375"/>
+            <a:ext cx="10287000" cy="552450"/>
           </a:xfrm>
           <a:prstGeom xmlns:a="http://schemas.openxmlformats.org/drawingml/2006/main" prst="rect">
             <a:avLst/>
@@ -19457,7 +20738,7 @@
           </a:bodyPr>
           <a:lstStyle xmlns:a="http://schemas.openxmlformats.org/drawingml/2006/main">
             <a:defPPr>
-              <a:defRPr sz="1350" b="0">
+              <a:defRPr sz="1725" b="0">
                 <a:solidFill>
                   <a:srgbClr val="5D6864"/>
                 </a:solidFill>
@@ -19467,6 +20748,7 @@
               </a:defRPr>
             </a:defPPr>
             <a:lvl1pPr>
+              <a:buNone/>
               <a:defRPr sz="1350" b="0">
                 <a:solidFill>
                   <a:srgbClr val="5D6864"/>
@@ -19477,6 +20759,7 @@
               </a:defRPr>
             </a:lvl1pPr>
             <a:lvl2pPr>
+              <a:buNone/>
               <a:defRPr sz="1350" b="0">
                 <a:solidFill>
                   <a:srgbClr val="5D6864"/>
@@ -19487,6 +20770,7 @@
               </a:defRPr>
             </a:lvl2pPr>
             <a:lvl3pPr>
+              <a:buNone/>
               <a:defRPr sz="1350" b="0">
                 <a:solidFill>
                   <a:srgbClr val="5D6864"/>
@@ -19497,6 +20781,7 @@
               </a:defRPr>
             </a:lvl3pPr>
             <a:lvl4pPr>
+              <a:buNone/>
               <a:defRPr sz="1350" b="0">
                 <a:solidFill>
                   <a:srgbClr val="5D6864"/>
@@ -19507,6 +20792,7 @@
               </a:defRPr>
             </a:lvl4pPr>
             <a:lvl5pPr>
+              <a:buNone/>
               <a:defRPr sz="1350" b="0">
                 <a:solidFill>
                   <a:srgbClr val="5D6864"/>
@@ -19517,6 +20803,7 @@
               </a:defRPr>
             </a:lvl5pPr>
             <a:lvl6pPr>
+              <a:buNone/>
               <a:defRPr sz="1350" b="0">
                 <a:solidFill>
                   <a:srgbClr val="5D6864"/>
@@ -19527,6 +20814,7 @@
               </a:defRPr>
             </a:lvl6pPr>
             <a:lvl7pPr>
+              <a:buNone/>
               <a:defRPr sz="1350" b="0">
                 <a:solidFill>
                   <a:srgbClr val="5D6864"/>
@@ -19537,6 +20825,7 @@
               </a:defRPr>
             </a:lvl7pPr>
             <a:lvl8pPr>
+              <a:buNone/>
               <a:defRPr sz="1350" b="0">
                 <a:solidFill>
                   <a:srgbClr val="5D6864"/>
@@ -19547,6 +20836,7 @@
               </a:defRPr>
             </a:lvl8pPr>
             <a:lvl9pPr>
+              <a:buNone/>
               <a:defRPr sz="1350" b="0">
                 <a:solidFill>
                   <a:srgbClr val="5D6864"/>
@@ -19559,7 +20849,8 @@
           </a:lstStyle>
           <a:p xmlns:a="http://schemas.openxmlformats.org/drawingml/2006/main">
             <a:pPr>
-              <a:defRPr sz="1350" b="0">
+              <a:buNone/>
+              <a:defRPr sz="1725" b="0">
                 <a:solidFill>
                   <a:srgbClr val="5D6864"/>
                 </a:solidFill>
@@ -19569,7 +20860,7 @@
               </a:defRPr>
             </a:pPr>
             <a:r>
-              <a:rPr sz="1350" b="0">
+              <a:rPr sz="1725" b="0">
                 <a:solidFill>
                   <a:srgbClr val="5D6864"/>
                 </a:solidFill>
@@ -19577,7 +20868,31 @@
                 <a:ea typeface="Arial"/>
                 <a:cs typeface="Arial"/>
               </a:rPr>
-              <a:t>Mean ± sample SD, 3 seeds. Bootstrap applies to seed 17 only. Timing includes unexplained long epochs.</a:t>
+              <a:t>Mean ± sample SD over three runs. The interval applies to seed 17.</a:t>
+            </a:r>
+          </a:p>
+          <a:p xmlns:a="http://schemas.openxmlformats.org/drawingml/2006/main">
+            <a:pPr>
+              <a:buNone/>
+              <a:defRPr sz="1725" b="0">
+                <a:solidFill>
+                  <a:srgbClr val="5D6864"/>
+                </a:solidFill>
+                <a:latin typeface="Arial"/>
+                <a:ea typeface="Arial"/>
+                <a:cs typeface="Arial"/>
+              </a:defRPr>
+            </a:pPr>
+            <a:r>
+              <a:rPr sz="1725" b="0">
+                <a:solidFill>
+                  <a:srgbClr val="5D6864"/>
+                </a:solidFill>
+                <a:latin typeface="Arial"/>
+                <a:ea typeface="Arial"/>
+                <a:cs typeface="Arial"/>
+              </a:rPr>
+              <a:t>Timing retains all observed epochs, including unusually long ones.</a:t>
             </a:r>
           </a:p>
         </p:txBody>
@@ -19654,6 +20969,7 @@
               </a:defRPr>
             </a:defPPr>
             <a:lvl1pPr>
+              <a:buNone/>
               <a:defRPr sz="3300" b="1">
                 <a:solidFill>
                   <a:srgbClr val="22362F"/>
@@ -19664,6 +20980,7 @@
               </a:defRPr>
             </a:lvl1pPr>
             <a:lvl2pPr>
+              <a:buNone/>
               <a:defRPr sz="3300" b="1">
                 <a:solidFill>
                   <a:srgbClr val="22362F"/>
@@ -19674,6 +20991,7 @@
               </a:defRPr>
             </a:lvl2pPr>
             <a:lvl3pPr>
+              <a:buNone/>
               <a:defRPr sz="3300" b="1">
                 <a:solidFill>
                   <a:srgbClr val="22362F"/>
@@ -19684,6 +21002,7 @@
               </a:defRPr>
             </a:lvl3pPr>
             <a:lvl4pPr>
+              <a:buNone/>
               <a:defRPr sz="3300" b="1">
                 <a:solidFill>
                   <a:srgbClr val="22362F"/>
@@ -19694,6 +21013,7 @@
               </a:defRPr>
             </a:lvl4pPr>
             <a:lvl5pPr>
+              <a:buNone/>
               <a:defRPr sz="3300" b="1">
                 <a:solidFill>
                   <a:srgbClr val="22362F"/>
@@ -19704,6 +21024,7 @@
               </a:defRPr>
             </a:lvl5pPr>
             <a:lvl6pPr>
+              <a:buNone/>
               <a:defRPr sz="3300" b="1">
                 <a:solidFill>
                   <a:srgbClr val="22362F"/>
@@ -19714,6 +21035,7 @@
               </a:defRPr>
             </a:lvl6pPr>
             <a:lvl7pPr>
+              <a:buNone/>
               <a:defRPr sz="3300" b="1">
                 <a:solidFill>
                   <a:srgbClr val="22362F"/>
@@ -19724,6 +21046,7 @@
               </a:defRPr>
             </a:lvl7pPr>
             <a:lvl8pPr>
+              <a:buNone/>
               <a:defRPr sz="3300" b="1">
                 <a:solidFill>
                   <a:srgbClr val="22362F"/>
@@ -19734,6 +21057,7 @@
               </a:defRPr>
             </a:lvl8pPr>
             <a:lvl9pPr>
+              <a:buNone/>
               <a:defRPr sz="3300" b="1">
                 <a:solidFill>
                   <a:srgbClr val="22362F"/>
@@ -19746,6 +21070,7 @@
           </a:lstStyle>
           <a:p xmlns:a="http://schemas.openxmlformats.org/drawingml/2006/main">
             <a:pPr>
+              <a:buNone/>
               <a:defRPr sz="3300" b="1">
                 <a:solidFill>
                   <a:srgbClr val="22362F"/>
@@ -19812,6 +21137,7 @@
               </a:defRPr>
             </a:defPPr>
             <a:lvl1pPr>
+              <a:buNone/>
               <a:defRPr sz="1350" b="0">
                 <a:solidFill>
                   <a:srgbClr val="5D6864"/>
@@ -19822,6 +21148,7 @@
               </a:defRPr>
             </a:lvl1pPr>
             <a:lvl2pPr>
+              <a:buNone/>
               <a:defRPr sz="1350" b="0">
                 <a:solidFill>
                   <a:srgbClr val="5D6864"/>
@@ -19832,6 +21159,7 @@
               </a:defRPr>
             </a:lvl2pPr>
             <a:lvl3pPr>
+              <a:buNone/>
               <a:defRPr sz="1350" b="0">
                 <a:solidFill>
                   <a:srgbClr val="5D6864"/>
@@ -19842,6 +21170,7 @@
               </a:defRPr>
             </a:lvl3pPr>
             <a:lvl4pPr>
+              <a:buNone/>
               <a:defRPr sz="1350" b="0">
                 <a:solidFill>
                   <a:srgbClr val="5D6864"/>
@@ -19852,6 +21181,7 @@
               </a:defRPr>
             </a:lvl4pPr>
             <a:lvl5pPr>
+              <a:buNone/>
               <a:defRPr sz="1350" b="0">
                 <a:solidFill>
                   <a:srgbClr val="5D6864"/>
@@ -19862,6 +21192,7 @@
               </a:defRPr>
             </a:lvl5pPr>
             <a:lvl6pPr>
+              <a:buNone/>
               <a:defRPr sz="1350" b="0">
                 <a:solidFill>
                   <a:srgbClr val="5D6864"/>
@@ -19872,6 +21203,7 @@
               </a:defRPr>
             </a:lvl6pPr>
             <a:lvl7pPr>
+              <a:buNone/>
               <a:defRPr sz="1350" b="0">
                 <a:solidFill>
                   <a:srgbClr val="5D6864"/>
@@ -19882,6 +21214,7 @@
               </a:defRPr>
             </a:lvl7pPr>
             <a:lvl8pPr>
+              <a:buNone/>
               <a:defRPr sz="1350" b="0">
                 <a:solidFill>
                   <a:srgbClr val="5D6864"/>
@@ -19892,6 +21225,7 @@
               </a:defRPr>
             </a:lvl8pPr>
             <a:lvl9pPr>
+              <a:buNone/>
               <a:defRPr sz="1350" b="0">
                 <a:solidFill>
                   <a:srgbClr val="5D6864"/>
@@ -19904,6 +21238,7 @@
           </a:lstStyle>
           <a:p xmlns:a="http://schemas.openxmlformats.org/drawingml/2006/main">
             <a:pPr>
+              <a:buNone/>
               <a:defRPr sz="1350" b="0">
                 <a:solidFill>
                   <a:srgbClr val="5D6864"/>
@@ -19970,6 +21305,7 @@
               </a:defRPr>
             </a:defPPr>
             <a:lvl1pPr>
+              <a:buNone/>
               <a:defRPr sz="2250" b="1">
                 <a:solidFill>
                   <a:srgbClr val="34667C"/>
@@ -19980,6 +21316,7 @@
               </a:defRPr>
             </a:lvl1pPr>
             <a:lvl2pPr>
+              <a:buNone/>
               <a:defRPr sz="2250" b="1">
                 <a:solidFill>
                   <a:srgbClr val="34667C"/>
@@ -19990,6 +21327,7 @@
               </a:defRPr>
             </a:lvl2pPr>
             <a:lvl3pPr>
+              <a:buNone/>
               <a:defRPr sz="2250" b="1">
                 <a:solidFill>
                   <a:srgbClr val="34667C"/>
@@ -20000,6 +21338,7 @@
               </a:defRPr>
             </a:lvl3pPr>
             <a:lvl4pPr>
+              <a:buNone/>
               <a:defRPr sz="2250" b="1">
                 <a:solidFill>
                   <a:srgbClr val="34667C"/>
@@ -20010,6 +21349,7 @@
               </a:defRPr>
             </a:lvl4pPr>
             <a:lvl5pPr>
+              <a:buNone/>
               <a:defRPr sz="2250" b="1">
                 <a:solidFill>
                   <a:srgbClr val="34667C"/>
@@ -20020,6 +21360,7 @@
               </a:defRPr>
             </a:lvl5pPr>
             <a:lvl6pPr>
+              <a:buNone/>
               <a:defRPr sz="2250" b="1">
                 <a:solidFill>
                   <a:srgbClr val="34667C"/>
@@ -20030,6 +21371,7 @@
               </a:defRPr>
             </a:lvl6pPr>
             <a:lvl7pPr>
+              <a:buNone/>
               <a:defRPr sz="2250" b="1">
                 <a:solidFill>
                   <a:srgbClr val="34667C"/>
@@ -20040,6 +21382,7 @@
               </a:defRPr>
             </a:lvl7pPr>
             <a:lvl8pPr>
+              <a:buNone/>
               <a:defRPr sz="2250" b="1">
                 <a:solidFill>
                   <a:srgbClr val="34667C"/>
@@ -20050,6 +21393,7 @@
               </a:defRPr>
             </a:lvl8pPr>
             <a:lvl9pPr>
+              <a:buNone/>
               <a:defRPr sz="2250" b="1">
                 <a:solidFill>
                   <a:srgbClr val="34667C"/>
@@ -20062,6 +21406,7 @@
           </a:lstStyle>
           <a:p xmlns:a="http://schemas.openxmlformats.org/drawingml/2006/main">
             <a:pPr>
+              <a:buNone/>
               <a:defRPr sz="2250" b="1">
                 <a:solidFill>
                   <a:srgbClr val="34667C"/>
@@ -20090,7 +21435,7 @@
           <p:cNvPr id="4" name="">
             <a:extLst xmlns:a="http://schemas.openxmlformats.org/drawingml/2006/main">
               <a:ext uri="{FF2B5EF4-FFF2-40B4-BE49-F238E27FC236}">
-                <a16:creationId xmlns:a16="http://schemas.microsoft.com/office/drawing/2014/main" id="{26483E00-690C-426F-A82B-33CB847BF8A8}"/>
+                <a16:creationId xmlns:a16="http://schemas.microsoft.com/office/drawing/2014/main" id="{4564C09F-4BA4-406D-A719-9721A31D3718}"/>
               </a:ext>
             </a:extLst>
           </p:cNvPr>
@@ -20790,6 +22135,7 @@
               </a:defRPr>
             </a:defPPr>
             <a:lvl1pPr>
+              <a:buNone/>
               <a:defRPr sz="2250" b="1">
                 <a:solidFill>
                   <a:srgbClr val="B35B38"/>
@@ -20800,6 +22146,7 @@
               </a:defRPr>
             </a:lvl1pPr>
             <a:lvl2pPr>
+              <a:buNone/>
               <a:defRPr sz="2250" b="1">
                 <a:solidFill>
                   <a:srgbClr val="B35B38"/>
@@ -20810,6 +22157,7 @@
               </a:defRPr>
             </a:lvl2pPr>
             <a:lvl3pPr>
+              <a:buNone/>
               <a:defRPr sz="2250" b="1">
                 <a:solidFill>
                   <a:srgbClr val="B35B38"/>
@@ -20820,6 +22168,7 @@
               </a:defRPr>
             </a:lvl3pPr>
             <a:lvl4pPr>
+              <a:buNone/>
               <a:defRPr sz="2250" b="1">
                 <a:solidFill>
                   <a:srgbClr val="B35B38"/>
@@ -20830,6 +22179,7 @@
               </a:defRPr>
             </a:lvl4pPr>
             <a:lvl5pPr>
+              <a:buNone/>
               <a:defRPr sz="2250" b="1">
                 <a:solidFill>
                   <a:srgbClr val="B35B38"/>
@@ -20840,6 +22190,7 @@
               </a:defRPr>
             </a:lvl5pPr>
             <a:lvl6pPr>
+              <a:buNone/>
               <a:defRPr sz="2250" b="1">
                 <a:solidFill>
                   <a:srgbClr val="B35B38"/>
@@ -20850,6 +22201,7 @@
               </a:defRPr>
             </a:lvl6pPr>
             <a:lvl7pPr>
+              <a:buNone/>
               <a:defRPr sz="2250" b="1">
                 <a:solidFill>
                   <a:srgbClr val="B35B38"/>
@@ -20860,6 +22212,7 @@
               </a:defRPr>
             </a:lvl7pPr>
             <a:lvl8pPr>
+              <a:buNone/>
               <a:defRPr sz="2250" b="1">
                 <a:solidFill>
                   <a:srgbClr val="B35B38"/>
@@ -20870,6 +22223,7 @@
               </a:defRPr>
             </a:lvl8pPr>
             <a:lvl9pPr>
+              <a:buNone/>
               <a:defRPr sz="2250" b="1">
                 <a:solidFill>
                   <a:srgbClr val="B35B38"/>
@@ -20882,6 +22236,7 @@
           </a:lstStyle>
           <a:p xmlns:a="http://schemas.openxmlformats.org/drawingml/2006/main">
             <a:pPr>
+              <a:buNone/>
               <a:defRPr sz="2250" b="1">
                 <a:solidFill>
                   <a:srgbClr val="B35B38"/>
@@ -20910,7 +22265,7 @@
           <p:cNvPr id="6" name="">
             <a:extLst xmlns:a="http://schemas.openxmlformats.org/drawingml/2006/main">
               <a:ext uri="{FF2B5EF4-FFF2-40B4-BE49-F238E27FC236}">
-                <a16:creationId xmlns:a16="http://schemas.microsoft.com/office/drawing/2014/main" id="{93A2A81E-39E6-44EB-81AE-B63DD2294CFA}"/>
+                <a16:creationId xmlns:a16="http://schemas.microsoft.com/office/drawing/2014/main" id="{E2F897FE-BD4D-42A7-B1D2-0FD0250452C5}"/>
               </a:ext>
             </a:extLst>
           </p:cNvPr>
@@ -21610,6 +22965,7 @@
               </a:defRPr>
             </a:defPPr>
             <a:lvl1pPr>
+              <a:buNone/>
               <a:defRPr sz="2250" b="1">
                 <a:solidFill>
                   <a:srgbClr val="245844"/>
@@ -21620,6 +22976,7 @@
               </a:defRPr>
             </a:lvl1pPr>
             <a:lvl2pPr>
+              <a:buNone/>
               <a:defRPr sz="2250" b="1">
                 <a:solidFill>
                   <a:srgbClr val="245844"/>
@@ -21630,6 +22987,7 @@
               </a:defRPr>
             </a:lvl2pPr>
             <a:lvl3pPr>
+              <a:buNone/>
               <a:defRPr sz="2250" b="1">
                 <a:solidFill>
                   <a:srgbClr val="245844"/>
@@ -21640,6 +22998,7 @@
               </a:defRPr>
             </a:lvl3pPr>
             <a:lvl4pPr>
+              <a:buNone/>
               <a:defRPr sz="2250" b="1">
                 <a:solidFill>
                   <a:srgbClr val="245844"/>
@@ -21650,6 +23009,7 @@
               </a:defRPr>
             </a:lvl4pPr>
             <a:lvl5pPr>
+              <a:buNone/>
               <a:defRPr sz="2250" b="1">
                 <a:solidFill>
                   <a:srgbClr val="245844"/>
@@ -21660,6 +23020,7 @@
               </a:defRPr>
             </a:lvl5pPr>
             <a:lvl6pPr>
+              <a:buNone/>
               <a:defRPr sz="2250" b="1">
                 <a:solidFill>
                   <a:srgbClr val="245844"/>
@@ -21670,6 +23031,7 @@
               </a:defRPr>
             </a:lvl6pPr>
             <a:lvl7pPr>
+              <a:buNone/>
               <a:defRPr sz="2250" b="1">
                 <a:solidFill>
                   <a:srgbClr val="245844"/>
@@ -21680,6 +23042,7 @@
               </a:defRPr>
             </a:lvl7pPr>
             <a:lvl8pPr>
+              <a:buNone/>
               <a:defRPr sz="2250" b="1">
                 <a:solidFill>
                   <a:srgbClr val="245844"/>
@@ -21690,6 +23053,7 @@
               </a:defRPr>
             </a:lvl8pPr>
             <a:lvl9pPr>
+              <a:buNone/>
               <a:defRPr sz="2250" b="1">
                 <a:solidFill>
                   <a:srgbClr val="245844"/>
@@ -21702,6 +23066,7 @@
           </a:lstStyle>
           <a:p xmlns:a="http://schemas.openxmlformats.org/drawingml/2006/main">
             <a:pPr>
+              <a:buNone/>
               <a:defRPr sz="2250" b="1">
                 <a:solidFill>
                   <a:srgbClr val="245844"/>
@@ -21741,8 +23106,8 @@
         </p:nvSpPr>
         <p:spPr>
           <a:xfrm xmlns:a="http://schemas.openxmlformats.org/drawingml/2006/main">
-            <a:off x="609600" y="6115050"/>
-            <a:ext cx="10191750" cy="342900"/>
+            <a:off x="609600" y="6048375"/>
+            <a:ext cx="10287000" cy="552450"/>
           </a:xfrm>
           <a:prstGeom xmlns:a="http://schemas.openxmlformats.org/drawingml/2006/main" prst="rect">
             <a:avLst/>
@@ -21758,7 +23123,7 @@
           </a:bodyPr>
           <a:lstStyle xmlns:a="http://schemas.openxmlformats.org/drawingml/2006/main">
             <a:defPPr>
-              <a:defRPr sz="1350" b="0">
+              <a:defRPr sz="1725" b="0">
                 <a:solidFill>
                   <a:srgbClr val="5D6864"/>
                 </a:solidFill>
@@ -21768,6 +23133,7 @@
               </a:defRPr>
             </a:defPPr>
             <a:lvl1pPr>
+              <a:buNone/>
               <a:defRPr sz="1350" b="0">
                 <a:solidFill>
                   <a:srgbClr val="5D6864"/>
@@ -21778,6 +23144,7 @@
               </a:defRPr>
             </a:lvl1pPr>
             <a:lvl2pPr>
+              <a:buNone/>
               <a:defRPr sz="1350" b="0">
                 <a:solidFill>
                   <a:srgbClr val="5D6864"/>
@@ -21788,6 +23155,7 @@
               </a:defRPr>
             </a:lvl2pPr>
             <a:lvl3pPr>
+              <a:buNone/>
               <a:defRPr sz="1350" b="0">
                 <a:solidFill>
                   <a:srgbClr val="5D6864"/>
@@ -21798,6 +23166,7 @@
               </a:defRPr>
             </a:lvl3pPr>
             <a:lvl4pPr>
+              <a:buNone/>
               <a:defRPr sz="1350" b="0">
                 <a:solidFill>
                   <a:srgbClr val="5D6864"/>
@@ -21808,6 +23177,7 @@
               </a:defRPr>
             </a:lvl4pPr>
             <a:lvl5pPr>
+              <a:buNone/>
               <a:defRPr sz="1350" b="0">
                 <a:solidFill>
                   <a:srgbClr val="5D6864"/>
@@ -21818,6 +23188,7 @@
               </a:defRPr>
             </a:lvl5pPr>
             <a:lvl6pPr>
+              <a:buNone/>
               <a:defRPr sz="1350" b="0">
                 <a:solidFill>
                   <a:srgbClr val="5D6864"/>
@@ -21828,6 +23199,7 @@
               </a:defRPr>
             </a:lvl6pPr>
             <a:lvl7pPr>
+              <a:buNone/>
               <a:defRPr sz="1350" b="0">
                 <a:solidFill>
                   <a:srgbClr val="5D6864"/>
@@ -21838,6 +23210,7 @@
               </a:defRPr>
             </a:lvl7pPr>
             <a:lvl8pPr>
+              <a:buNone/>
               <a:defRPr sz="1350" b="0">
                 <a:solidFill>
                   <a:srgbClr val="5D6864"/>
@@ -21848,6 +23221,7 @@
               </a:defRPr>
             </a:lvl8pPr>
             <a:lvl9pPr>
+              <a:buNone/>
               <a:defRPr sz="1350" b="0">
                 <a:solidFill>
                   <a:srgbClr val="5D6864"/>
@@ -21860,7 +23234,8 @@
           </a:lstStyle>
           <a:p xmlns:a="http://schemas.openxmlformats.org/drawingml/2006/main">
             <a:pPr>
-              <a:defRPr sz="1350" b="0">
+              <a:buNone/>
+              <a:defRPr sz="1725" b="0">
                 <a:solidFill>
                   <a:srgbClr val="5D6864"/>
                 </a:solidFill>
@@ -21870,7 +23245,7 @@
               </a:defRPr>
             </a:pPr>
             <a:r>
-              <a:rPr sz="1350" b="0">
+              <a:rPr sz="1725" b="0">
                 <a:solidFill>
                   <a:srgbClr val="5D6864"/>
                 </a:solidFill>
@@ -21878,7 +23253,7 @@
                 <a:ea typeface="Arial"/>
                 <a:cs typeface="Arial"/>
               </a:rPr>
-              <a:t>Seed 17, 128 test images. Counts describe this sample and cannot establish safety in new fields.</a:t>
+              <a:t>Seed 17, 128 test images. Field reliability needs separate testing.</a:t>
             </a:r>
           </a:p>
         </p:txBody>

--- a/report/presentation/bean_leaf_presentation.pptx
+++ b/report/presentation/bean_leaf_presentation.pptx
@@ -2,24 +2,26 @@
 <file path=ppt/presentation.xml><?xml version="1.0" encoding="utf-8"?>
 <p:presentation xmlns:p="http://schemas.openxmlformats.org/presentationml/2006/main">
   <p:sldMasterIdLst>
-    <p:sldMasterId xmlns:r="http://schemas.openxmlformats.org/officeDocument/2006/relationships" id="2147483648" r:id="R1fd6c3489d01442f"/>
+    <p:sldMasterId xmlns:r="http://schemas.openxmlformats.org/officeDocument/2006/relationships" id="2147483648" r:id="R8d1e29fb2610412a"/>
   </p:sldMasterIdLst>
   <p:notesMasterIdLst>
-    <p:notesMasterId xmlns:r="http://schemas.openxmlformats.org/officeDocument/2006/relationships" r:id="R829207944af348e6"/>
+    <p:notesMasterId xmlns:r="http://schemas.openxmlformats.org/officeDocument/2006/relationships" r:id="Raeed584cf18a40c8"/>
   </p:notesMasterIdLst>
   <p:sldIdLst>
-    <p:sldId xmlns:r="http://schemas.openxmlformats.org/officeDocument/2006/relationships" id="256" r:id="Rc6b8d72aaaaa40e2"/>
-    <p:sldId xmlns:r="http://schemas.openxmlformats.org/officeDocument/2006/relationships" id="257" r:id="R57a1cabfd5ad4606"/>
-    <p:sldId xmlns:r="http://schemas.openxmlformats.org/officeDocument/2006/relationships" id="258" r:id="Re4a416ec78194903"/>
-    <p:sldId xmlns:r="http://schemas.openxmlformats.org/officeDocument/2006/relationships" id="259" r:id="Rde964652203a419d"/>
-    <p:sldId xmlns:r="http://schemas.openxmlformats.org/officeDocument/2006/relationships" id="260" r:id="R72c4c44913694afe"/>
-    <p:sldId xmlns:r="http://schemas.openxmlformats.org/officeDocument/2006/relationships" id="261" r:id="R8b97d69c6afa4ad2"/>
-    <p:sldId xmlns:r="http://schemas.openxmlformats.org/officeDocument/2006/relationships" id="262" r:id="R965f5c467e1c4cbd"/>
-    <p:sldId xmlns:r="http://schemas.openxmlformats.org/officeDocument/2006/relationships" id="263" r:id="Re468cf380919413a"/>
-    <p:sldId xmlns:r="http://schemas.openxmlformats.org/officeDocument/2006/relationships" id="264" r:id="R27f42ee924914a6a"/>
-    <p:sldId xmlns:r="http://schemas.openxmlformats.org/officeDocument/2006/relationships" id="265" r:id="R032bf380d801423a"/>
-    <p:sldId xmlns:r="http://schemas.openxmlformats.org/officeDocument/2006/relationships" id="266" r:id="R72f77382fc124b71"/>
-    <p:sldId xmlns:r="http://schemas.openxmlformats.org/officeDocument/2006/relationships" id="267" r:id="R63ebcc9daac24e52"/>
+    <p:sldId xmlns:r="http://schemas.openxmlformats.org/officeDocument/2006/relationships" id="256" r:id="R8c6761a122064e61"/>
+    <p:sldId xmlns:r="http://schemas.openxmlformats.org/officeDocument/2006/relationships" id="257" r:id="R20b70ea2929f4f6a"/>
+    <p:sldId xmlns:r="http://schemas.openxmlformats.org/officeDocument/2006/relationships" id="258" r:id="Rfc47d71c478c472a"/>
+    <p:sldId xmlns:r="http://schemas.openxmlformats.org/officeDocument/2006/relationships" id="259" r:id="R516643924a0c4969"/>
+    <p:sldId xmlns:r="http://schemas.openxmlformats.org/officeDocument/2006/relationships" id="260" r:id="R3c38a85682f54675"/>
+    <p:sldId xmlns:r="http://schemas.openxmlformats.org/officeDocument/2006/relationships" id="261" r:id="R461f2e87ed83426e"/>
+    <p:sldId xmlns:r="http://schemas.openxmlformats.org/officeDocument/2006/relationships" id="262" r:id="Rbc92ec54a8f14f89"/>
+    <p:sldId xmlns:r="http://schemas.openxmlformats.org/officeDocument/2006/relationships" id="263" r:id="Rdc2415126a0640d9"/>
+    <p:sldId xmlns:r="http://schemas.openxmlformats.org/officeDocument/2006/relationships" id="264" r:id="R2e368fee74a24384"/>
+    <p:sldId xmlns:r="http://schemas.openxmlformats.org/officeDocument/2006/relationships" id="265" r:id="Rc3791ca9d4364217"/>
+    <p:sldId xmlns:r="http://schemas.openxmlformats.org/officeDocument/2006/relationships" id="266" r:id="R2cb639a7cdcf425d"/>
+    <p:sldId xmlns:r="http://schemas.openxmlformats.org/officeDocument/2006/relationships" id="267" r:id="R33d6c93197dd41be"/>
+    <p:sldId xmlns:r="http://schemas.openxmlformats.org/officeDocument/2006/relationships" id="268" r:id="Rbb972cc46b4a4a49"/>
+    <p:sldId xmlns:r="http://schemas.openxmlformats.org/officeDocument/2006/relationships" id="269" r:id="Rcae02aa00ffe4546"/>
   </p:sldIdLst>
   <p:sldSz cx="12192000" cy="6858000"/>
   <p:notesSz cx="6858000" cy="9144000"/>
@@ -758,6 +760,211 @@
           <a:lstStyle xmlns:a="http://schemas.openxmlformats.org/drawingml/2006/main"/>
           <a:p xmlns:a="http://schemas.openxmlformats.org/drawingml/2006/main">
             <a:r>
+              <a:t>These are the partial-model results for reference seed seventeen. Precision measures how often a predicted class is correct. Recall measures how many true examples of that class were found. F1 combines both. Leaf-spot recall is 97.67 percent for DINOv2 and 93.02 for SigLIP 2. The training-majority baseline always predicts rust, achieving 33.59 percent accuracy and 16.76 percent macro-F1. These class results describe one seed on this small test set.</a:t>
+            </a:r>
+          </a:p>
+          <a:p xmlns:a="http://schemas.openxmlformats.org/drawingml/2006/main">
+            <a:r>
+              <a:t/>
+            </a:r>
+          </a:p>
+          <a:p xmlns:a="http://schemas.openxmlformats.org/drawingml/2006/main">
+            <a:r>
+              <a:t>Sources</a:t>
+            </a:r>
+          </a:p>
+          <a:p xmlns:a="http://schemas.openxmlformats.org/drawingml/2006/main">
+            <a:r>
+              <a:t>results/model_comparison/comparison_analysis.json</a:t>
+            </a:r>
+          </a:p>
+          <a:p xmlns:a="http://schemas.openxmlformats.org/drawingml/2006/main">
+            <a:r>
+              <a:t>results/model_comparison/dinov2/runs/partial/seed_17/metrics_test.json</a:t>
+            </a:r>
+          </a:p>
+          <a:p xmlns:a="http://schemas.openxmlformats.org/drawingml/2006/main">
+            <a:r>
+              <a:t>results/model_comparison/siglip2/runs/partial/seed_17/metrics_test.json</a:t>
+            </a:r>
+          </a:p>
+        </p:txBody>
+      </p:sp>
+      <p:sp>
+        <p:nvSpPr>
+          <p:cNvPr id="4" name="Slide Number Placeholder 3"/>
+          <p:cNvSpPr>
+            <a:spLocks xmlns:a="http://schemas.openxmlformats.org/drawingml/2006/main" noGrp="1"/>
+          </p:cNvSpPr>
+          <p:nvPr>
+            <p:ph type="sldNum" idx="5"/>
+          </p:nvPr>
+        </p:nvSpPr>
+        <p:spPr/>
+        <p:txBody>
+          <a:bodyPr xmlns:a="http://schemas.openxmlformats.org/drawingml/2006/main"/>
+          <a:lstStyle xmlns:a="http://schemas.openxmlformats.org/drawingml/2006/main"/>
+          <a:p xmlns:a="http://schemas.openxmlformats.org/drawingml/2006/main"/>
+        </p:txBody>
+      </p:sp>
+    </p:spTree>
+  </p:cSld>
+  <p:clrMapOvr>
+    <a:masterClrMapping xmlns:a="http://schemas.openxmlformats.org/drawingml/2006/main"/>
+  </p:clrMapOvr>
+</p:notes>
+</file>
+
+<file path=ppt/notesSlides/notesSlide13.xml><?xml version="1.0" encoding="utf-8"?>
+<p:notes xmlns:p="http://schemas.openxmlformats.org/presentationml/2006/main">
+  <p:cSld>
+    <p:spTree>
+      <p:nvGrpSpPr>
+        <p:cNvPr id="1" name=""/>
+        <p:cNvGrpSpPr/>
+        <p:nvPr/>
+      </p:nvGrpSpPr>
+      <p:grpSpPr>
+        <a:xfrm xmlns:a="http://schemas.openxmlformats.org/drawingml/2006/main"/>
+      </p:grpSpPr>
+      <p:sp>
+        <p:nvSpPr>
+          <p:cNvPr id="2" name="Slide Image Placeholder 1"/>
+          <p:cNvSpPr>
+            <a:spLocks xmlns:a="http://schemas.openxmlformats.org/drawingml/2006/main" noGrp="1"/>
+          </p:cNvSpPr>
+          <p:nvPr>
+            <p:ph type="sldImg" idx="0"/>
+          </p:nvPr>
+        </p:nvSpPr>
+        <p:spPr/>
+      </p:sp>
+      <p:sp>
+        <p:nvSpPr>
+          <p:cNvPr id="3" name="Notes Placeholder 2"/>
+          <p:cNvSpPr>
+            <a:spLocks xmlns:a="http://schemas.openxmlformats.org/drawingml/2006/main" noGrp="1"/>
+          </p:cNvSpPr>
+          <p:nvPr>
+            <p:ph type="body" idx="1"/>
+          </p:nvPr>
+        </p:nvSpPr>
+        <p:spPr/>
+        <p:txBody>
+          <a:bodyPr xmlns:a="http://schemas.openxmlformats.org/drawingml/2006/main"/>
+          <a:lstStyle xmlns:a="http://schemas.openxmlformats.org/drawingml/2006/main"/>
+          <a:p xmlns:a="http://schemas.openxmlformats.org/drawingml/2006/main">
+            <a:r>
+              <a:t>For the reference seed-seventeen partial models, DINOv2 macro-F1 is 98.45 percent on clean images, 97.67 under Gaussian blur of radius one, and 98.45 after brightness is multiplied by 0.7. SigLIP 2 scores 97.67, 96.07 and 97.67 percent. These changes use the same 128 test images at one synthetic severity each. They do not establish performance across independent farms, devices, seasons or other image changes.</a:t>
+            </a:r>
+          </a:p>
+          <a:p xmlns:a="http://schemas.openxmlformats.org/drawingml/2006/main">
+            <a:r>
+              <a:t/>
+            </a:r>
+          </a:p>
+          <a:p xmlns:a="http://schemas.openxmlformats.org/drawingml/2006/main">
+            <a:r>
+              <a:t>Sources</a:t>
+            </a:r>
+          </a:p>
+          <a:p xmlns:a="http://schemas.openxmlformats.org/drawingml/2006/main">
+            <a:r>
+              <a:t>results/model_comparison/dinov2/runs/partial/seed_17/metrics_test.json</a:t>
+            </a:r>
+          </a:p>
+          <a:p xmlns:a="http://schemas.openxmlformats.org/drawingml/2006/main">
+            <a:r>
+              <a:t>results/model_comparison/dinov2/runs/partial/seed_17/metrics_test_blur.json</a:t>
+            </a:r>
+          </a:p>
+          <a:p xmlns:a="http://schemas.openxmlformats.org/drawingml/2006/main">
+            <a:r>
+              <a:t>results/model_comparison/dinov2/runs/partial/seed_17/metrics_test_brightness.json</a:t>
+            </a:r>
+          </a:p>
+          <a:p xmlns:a="http://schemas.openxmlformats.org/drawingml/2006/main">
+            <a:r>
+              <a:t>results/model_comparison/siglip2/runs/partial/seed_17/metrics_test.json</a:t>
+            </a:r>
+          </a:p>
+          <a:p xmlns:a="http://schemas.openxmlformats.org/drawingml/2006/main">
+            <a:r>
+              <a:t>results/model_comparison/siglip2/runs/partial/seed_17/metrics_test_blur.json</a:t>
+            </a:r>
+          </a:p>
+          <a:p xmlns:a="http://schemas.openxmlformats.org/drawingml/2006/main">
+            <a:r>
+              <a:t>results/model_comparison/siglip2/runs/partial/seed_17/metrics_test_brightness.json</a:t>
+            </a:r>
+          </a:p>
+        </p:txBody>
+      </p:sp>
+      <p:sp>
+        <p:nvSpPr>
+          <p:cNvPr id="4" name="Slide Number Placeholder 3"/>
+          <p:cNvSpPr>
+            <a:spLocks xmlns:a="http://schemas.openxmlformats.org/drawingml/2006/main" noGrp="1"/>
+          </p:cNvSpPr>
+          <p:nvPr>
+            <p:ph type="sldNum" idx="5"/>
+          </p:nvPr>
+        </p:nvSpPr>
+        <p:spPr/>
+        <p:txBody>
+          <a:bodyPr xmlns:a="http://schemas.openxmlformats.org/drawingml/2006/main"/>
+          <a:lstStyle xmlns:a="http://schemas.openxmlformats.org/drawingml/2006/main"/>
+          <a:p xmlns:a="http://schemas.openxmlformats.org/drawingml/2006/main"/>
+        </p:txBody>
+      </p:sp>
+    </p:spTree>
+  </p:cSld>
+  <p:clrMapOvr>
+    <a:masterClrMapping xmlns:a="http://schemas.openxmlformats.org/drawingml/2006/main"/>
+  </p:clrMapOvr>
+</p:notes>
+</file>
+
+<file path=ppt/notesSlides/notesSlide14.xml><?xml version="1.0" encoding="utf-8"?>
+<p:notes xmlns:p="http://schemas.openxmlformats.org/presentationml/2006/main">
+  <p:cSld>
+    <p:spTree>
+      <p:nvGrpSpPr>
+        <p:cNvPr id="1" name=""/>
+        <p:cNvGrpSpPr/>
+        <p:nvPr/>
+      </p:nvGrpSpPr>
+      <p:grpSpPr>
+        <a:xfrm xmlns:a="http://schemas.openxmlformats.org/drawingml/2006/main"/>
+      </p:grpSpPr>
+      <p:sp>
+        <p:nvSpPr>
+          <p:cNvPr id="2" name="Slide Image Placeholder 1"/>
+          <p:cNvSpPr>
+            <a:spLocks xmlns:a="http://schemas.openxmlformats.org/drawingml/2006/main" noGrp="1"/>
+          </p:cNvSpPr>
+          <p:nvPr>
+            <p:ph type="sldImg" idx="0"/>
+          </p:nvPr>
+        </p:nvSpPr>
+        <p:spPr/>
+      </p:sp>
+      <p:sp>
+        <p:nvSpPr>
+          <p:cNvPr id="3" name="Notes Placeholder 2"/>
+          <p:cNvSpPr>
+            <a:spLocks xmlns:a="http://schemas.openxmlformats.org/drawingml/2006/main" noGrp="1"/>
+          </p:cNvSpPr>
+          <p:nvPr>
+            <p:ph type="body" idx="1"/>
+          </p:nvPr>
+        </p:nvSpPr>
+        <p:spPr/>
+        <p:txBody>
+          <a:bodyPr xmlns:a="http://schemas.openxmlformats.org/drawingml/2006/main"/>
+          <a:lstStyle xmlns:a="http://schemas.openxmlformats.org/drawingml/2006/main"/>
+          <a:p xmlns:a="http://schemas.openxmlformats.org/drawingml/2006/main">
+            <a:r>
               <a:t>Selected primary references for the presentation. The technical report contains the complete bibliography and pinned processor/implementation sources. Photograph attribution: Makerere AI Lab and dataset contributors. Dataset MIT and model Apache 2.0 notices accompany the project. AI-assisted implementation and drafting are disclosed in ASSISTANCE.md. No claim is made that the project used the latest available October 2026 model or established state-of-the-art Beans performance.</a:t>
             </a:r>
           </a:p>
@@ -868,7 +1075,7 @@
           <a:lstStyle xmlns:a="http://schemas.openxmlformats.org/drawingml/2006/main"/>
           <a:p xmlns:a="http://schemas.openxmlformats.org/drawingml/2006/main">
             <a:r>
-              <a:t>The task has three labels: angular leaf spot, bean rust and healthy. The photographs come from Ugandan fields, with varied backgrounds and lighting. The audited release contains 1,295 images. I kept the published split: 1,034 training, 133 validation and 128 test images. Every split contains all three classes. There were no corrupt files or exact duplicates. However, farm and plant identifiers are unavailable, so we cannot verify that the test images come from separate farms.</a:t>
+              <a:t>The task has three labels: angular leaf spot, bean rust and healthy. I chose this small, expert-labelled dataset because field photographs have varied backgrounds and lighting, and transfer learning is feasible with limited computing. The audited release contains 1,295 images. I kept the published split: 1,034 training, 133 validation and 128 test images. Every split contains all three classes. There were no corrupt files or exact duplicates. However, farm and plant identifiers are unavailable, so we cannot verify that test images come from separate farms.</a:t>
             </a:r>
           </a:p>
           <a:p xmlns:a="http://schemas.openxmlformats.org/drawingml/2006/main">
@@ -963,7 +1170,7 @@
           <a:lstStyle xmlns:a="http://schemas.openxmlformats.org/drawingml/2006/main"/>
           <a:p xmlns:a="http://schemas.openxmlformats.org/drawingml/2006/main">
             <a:r>
-              <a:t>Both models start from public pretrained weights. The encoder turns image pixels into numerical features. A new classifier uses those features to predict the three labels. Frozen training changes only the classifier weights. Partial fine-tuning also changes the final two encoder blocks and final normalisation. Each setting starts again from the original pretrained checkpoint. SigLIP 2 supports text, but this experiment uses only its image encoder. Both models receive 224-pixel images with matching flips and rotations. Three seeds for each model and setting give twelve runs. Validation performance selects the saved model in each run.</a:t>
+              <a:t>SigLIP 2 is a public advanced model from 2025. DINOv2 is an established comparison. The SigLIP 2 paper reports 78.2 percent ImageNet zero-shot accuracy against 76.2 for the same-size original SigLIP. That motivated selection, without claiming the latest 2026 model. All runs fit four gigabytes. The encoder converts pixels into features. A new classifier predicts three labels. Frozen training changes only classifier weights. Partial training also updates the final two encoder blocks and normalisation. Each starts from original pretrained weights. We use only images, not text prompts. Both receive 224-pixel images with matching flips and rotations. Two models, two settings and three seeds give twelve runs. Validation selects each checkpoint.</a:t>
             </a:r>
           </a:p>
           <a:p xmlns:a="http://schemas.openxmlformats.org/drawingml/2006/main">
@@ -994,6 +1201,11 @@
           <a:p xmlns:a="http://schemas.openxmlformats.org/drawingml/2006/main">
             <a:r>
               <a:t>src/followup_experiment.py and study_plan.json. SigLIP attention pooling remains frozen with gradient flow.</a:t>
+            </a:r>
+          </a:p>
+          <a:p xmlns:a="http://schemas.openxmlformats.org/drawingml/2006/main">
+            <a:r>
+              <a:t>Selection rationale: Tschannen et al. (2025), Table 1, B/16-224 ImageNet zero-shot SigLIP 2 78.2 vs SigLIP 76.2. This is a published model-selection benchmark, not a Beans result or a latest-2026 claim.</a:t>
             </a:r>
           </a:p>
         </p:txBody>
@@ -3981,12 +4193,12 @@
   </p:cSld>
   <p:clrMap bg1="lt1" tx1="dk1" bg2="lt2" tx2="dk2" accent1="accent1" accent2="accent2" accent3="accent3" accent4="accent4" accent5="accent5" accent6="accent6" hlink="hlink" folHlink="folHlink"/>
   <p:sldLayoutIdLst>
-    <p:sldLayoutId xmlns:r="http://schemas.openxmlformats.org/officeDocument/2006/relationships" id="2147483649" r:id="R75d94c2bf8c544bc"/>
-    <p:sldLayoutId xmlns:r="http://schemas.openxmlformats.org/officeDocument/2006/relationships" id="2147483650" r:id="R42b2192e5d304afa"/>
-    <p:sldLayoutId xmlns:r="http://schemas.openxmlformats.org/officeDocument/2006/relationships" id="2147483651" r:id="Rb8c9bba32ee247be"/>
-    <p:sldLayoutId xmlns:r="http://schemas.openxmlformats.org/officeDocument/2006/relationships" id="2147483652" r:id="Re88d9a3c5f4242d7"/>
-    <p:sldLayoutId xmlns:r="http://schemas.openxmlformats.org/officeDocument/2006/relationships" id="2147483653" r:id="Rc5fdaea29cec45d1"/>
-    <p:sldLayoutId xmlns:r="http://schemas.openxmlformats.org/officeDocument/2006/relationships" id="2147483654" r:id="Reae634cca9154246"/>
+    <p:sldLayoutId xmlns:r="http://schemas.openxmlformats.org/officeDocument/2006/relationships" id="2147483649" r:id="R35feaef3b8c54b62"/>
+    <p:sldLayoutId xmlns:r="http://schemas.openxmlformats.org/officeDocument/2006/relationships" id="2147483650" r:id="R4999c9226dfb404c"/>
+    <p:sldLayoutId xmlns:r="http://schemas.openxmlformats.org/officeDocument/2006/relationships" id="2147483651" r:id="Rb9ee7d21a73f4d79"/>
+    <p:sldLayoutId xmlns:r="http://schemas.openxmlformats.org/officeDocument/2006/relationships" id="2147483652" r:id="Rfeb6ecbb9d1f4b1b"/>
+    <p:sldLayoutId xmlns:r="http://schemas.openxmlformats.org/officeDocument/2006/relationships" id="2147483653" r:id="Rea90fc43e5d24edb"/>
+    <p:sldLayoutId xmlns:r="http://schemas.openxmlformats.org/officeDocument/2006/relationships" id="2147483654" r:id="R3c01e0ca5bb0469f"/>
   </p:sldLayoutIdLst>
   <p:txStyles>
     <p:titleStyle>
@@ -5761,8 +5973,8 @@
         </p:nvSpPr>
         <p:spPr>
           <a:xfrm xmlns:a="http://schemas.openxmlformats.org/drawingml/2006/main">
-            <a:off x="609600" y="4886325"/>
-            <a:ext cx="5619750" cy="723900"/>
+            <a:off x="609600" y="4429125"/>
+            <a:ext cx="6572250" cy="1333500"/>
           </a:xfrm>
           <a:prstGeom xmlns:a="http://schemas.openxmlformats.org/drawingml/2006/main" prst="rect">
             <a:avLst/>
@@ -5778,7 +5990,7 @@
           </a:bodyPr>
           <a:lstStyle xmlns:a="http://schemas.openxmlformats.org/drawingml/2006/main">
             <a:defPPr>
-              <a:defRPr sz="1800" b="0">
+              <a:defRPr sz="1875" b="0">
                 <a:solidFill>
                   <a:srgbClr val="5D6864"/>
                 </a:solidFill>
@@ -5890,7 +6102,7 @@
           <a:p xmlns:a="http://schemas.openxmlformats.org/drawingml/2006/main">
             <a:pPr>
               <a:buNone/>
-              <a:defRPr sz="1800" b="0">
+              <a:defRPr sz="1875" b="0">
                 <a:solidFill>
                   <a:srgbClr val="5D6864"/>
                 </a:solidFill>
@@ -5900,7 +6112,55 @@
               </a:defRPr>
             </a:pPr>
             <a:r>
-              <a:rPr sz="1800" b="0">
+              <a:rPr sz="1875" b="0">
+                <a:solidFill>
+                  <a:srgbClr val="5D6864"/>
+                </a:solidFill>
+                <a:latin typeface="Arial"/>
+                <a:ea typeface="Arial"/>
+                <a:cs typeface="Arial"/>
+              </a:rPr>
+              <a:t>Omar Ahmad Obaid, Student ID 7309429</a:t>
+            </a:r>
+          </a:p>
+          <a:p xmlns:a="http://schemas.openxmlformats.org/drawingml/2006/main">
+            <a:pPr>
+              <a:buNone/>
+              <a:defRPr sz="1875" b="0">
+                <a:solidFill>
+                  <a:srgbClr val="5D6864"/>
+                </a:solidFill>
+                <a:latin typeface="Arial"/>
+                <a:ea typeface="Arial"/>
+                <a:cs typeface="Arial"/>
+              </a:defRPr>
+            </a:pPr>
+            <a:r>
+              <a:rPr sz="1875" b="0">
+                <a:solidFill>
+                  <a:srgbClr val="5D6864"/>
+                </a:solidFill>
+                <a:latin typeface="Arial"/>
+                <a:ea typeface="Arial"/>
+                <a:cs typeface="Arial"/>
+              </a:rPr>
+              <a:t>MAAI901 Deep Learning for Visual Data</a:t>
+            </a:r>
+          </a:p>
+          <a:p xmlns:a="http://schemas.openxmlformats.org/drawingml/2006/main">
+            <a:pPr>
+              <a:buNone/>
+              <a:defRPr sz="1875" b="0">
+                <a:solidFill>
+                  <a:srgbClr val="5D6864"/>
+                </a:solidFill>
+                <a:latin typeface="Arial"/>
+                <a:ea typeface="Arial"/>
+                <a:cs typeface="Arial"/>
+              </a:defRPr>
+            </a:pPr>
+            <a:r>
+              <a:rPr sz="1875" b="0">
                 <a:solidFill>
                   <a:srgbClr val="5D6864"/>
                 </a:solidFill>
@@ -5914,7 +6174,7 @@
           <a:p xmlns:a="http://schemas.openxmlformats.org/drawingml/2006/main">
             <a:pPr>
               <a:buNone/>
-              <a:defRPr sz="1800" b="0">
+              <a:defRPr sz="1875" b="0">
                 <a:solidFill>
                   <a:srgbClr val="5D6864"/>
                 </a:solidFill>
@@ -5924,7 +6184,7 @@
               </a:defRPr>
             </a:pPr>
             <a:r>
-              <a:rPr sz="1800" b="0">
+              <a:rPr sz="1875" b="0">
                 <a:solidFill>
                   <a:srgbClr val="5D6864"/>
                 </a:solidFill>
@@ -5942,7 +6202,7 @@
           <p:cNvPr id="5" name="">
             <a:extLst xmlns:a="http://schemas.openxmlformats.org/drawingml/2006/main">
               <a:ext uri="{FF2B5EF4-FFF2-40B4-BE49-F238E27FC236}">
-                <a16:creationId xmlns:a16="http://schemas.microsoft.com/office/drawing/2014/main" id="{3BD2B07C-9E09-4171-A5C2-5724C98A154B}"/>
+                <a16:creationId xmlns:a16="http://schemas.microsoft.com/office/drawing/2014/main" id="{734E4BF4-AC9D-4DB1-8F2D-2473F7C1C95D}"/>
               </a:ext>
             </a:extLst>
           </p:cNvPr>
@@ -5952,7 +6212,7 @@
           <p:nvPr/>
         </p:nvPicPr>
         <p:blipFill>
-          <a:blip xmlns:r="http://schemas.openxmlformats.org/officeDocument/2006/relationships" xmlns:a="http://schemas.openxmlformats.org/drawingml/2006/main" r:embed="R55e9438a3c214d97"/>
+          <a:blip xmlns:r="http://schemas.openxmlformats.org/officeDocument/2006/relationships" xmlns:a="http://schemas.openxmlformats.org/drawingml/2006/main" r:embed="R88b03ed734aa4387"/>
           <a:stretch xmlns:a="http://schemas.openxmlformats.org/drawingml/2006/main"/>
         </p:blipFill>
         <p:spPr>
@@ -6335,7 +6595,7 @@
           <p:cNvPr id="3" name="">
             <a:extLst xmlns:a="http://schemas.openxmlformats.org/drawingml/2006/main">
               <a:ext uri="{FF2B5EF4-FFF2-40B4-BE49-F238E27FC236}">
-                <a16:creationId xmlns:a16="http://schemas.microsoft.com/office/drawing/2014/main" id="{AF5F6D5F-70D3-4E76-A2D6-F83E3D2A958A}"/>
+                <a16:creationId xmlns:a16="http://schemas.microsoft.com/office/drawing/2014/main" id="{82AE6E38-F717-4D36-9010-5413F978DA0F}"/>
               </a:ext>
             </a:extLst>
           </p:cNvPr>
@@ -7660,7 +7920,7 @@
           <p:cNvPr id="4" name="">
             <a:extLst xmlns:a="http://schemas.openxmlformats.org/drawingml/2006/main">
               <a:ext uri="{FF2B5EF4-FFF2-40B4-BE49-F238E27FC236}">
-                <a16:creationId xmlns:a16="http://schemas.microsoft.com/office/drawing/2014/main" id="{221E64FD-7CF9-4619-9265-2C62E504B390}"/>
+                <a16:creationId xmlns:a16="http://schemas.microsoft.com/office/drawing/2014/main" id="{D917F129-307F-4B79-B1C2-D497BA2ED3C2}"/>
               </a:ext>
             </a:extLst>
           </p:cNvPr>
@@ -8273,6 +8533,2809 @@
       </p:grpSpPr>
       <p:sp>
         <p:nvSpPr>
+          <p:cNvPr id="7" name="">
+            <a:extLst xmlns:a="http://schemas.openxmlformats.org/drawingml/2006/main">
+              <a:ext uri="{FF2B5EF4-FFF2-40B4-BE49-F238E27FC236}">
+                <a16:creationId xmlns:a16="http://schemas.microsoft.com/office/drawing/2014/main" id="{BE9503E9-54C1-4010-814D-72CC7490AC73}"/>
+              </a:ext>
+            </a:extLst>
+          </p:cNvPr>
+          <p:cNvSpPr>
+            <a:spLocks xmlns:a="http://schemas.openxmlformats.org/drawingml/2006/main" noGrp="1"/>
+          </p:cNvSpPr>
+          <p:nvPr/>
+        </p:nvSpPr>
+        <p:spPr>
+          <a:xfrm xmlns:a="http://schemas.openxmlformats.org/drawingml/2006/main">
+            <a:off x="609600" y="400050"/>
+            <a:ext cx="10810875" cy="1028700"/>
+          </a:xfrm>
+          <a:prstGeom xmlns:a="http://schemas.openxmlformats.org/drawingml/2006/main" prst="rect">
+            <a:avLst/>
+          </a:prstGeom>
+          <a:noFill xmlns:a="http://schemas.openxmlformats.org/drawingml/2006/main"/>
+          <a:ln xmlns:a="http://schemas.openxmlformats.org/drawingml/2006/main" w="0">
+            <a:noFill/>
+          </a:ln>
+        </p:spPr>
+        <p:txBody>
+          <a:bodyPr xmlns:a="http://schemas.openxmlformats.org/drawingml/2006/main" wrap="square" lIns="0" tIns="0" rIns="0" bIns="0" anchor="t">
+            <a:noAutofit/>
+          </a:bodyPr>
+          <a:lstStyle xmlns:a="http://schemas.openxmlformats.org/drawingml/2006/main">
+            <a:defPPr>
+              <a:defRPr sz="3300" b="1">
+                <a:solidFill>
+                  <a:srgbClr val="22362F"/>
+                </a:solidFill>
+                <a:latin typeface="Arial"/>
+                <a:ea typeface="Arial"/>
+                <a:cs typeface="Arial"/>
+              </a:defRPr>
+            </a:defPPr>
+            <a:lvl1pPr>
+              <a:buNone/>
+              <a:defRPr sz="3300" b="1">
+                <a:solidFill>
+                  <a:srgbClr val="22362F"/>
+                </a:solidFill>
+                <a:latin typeface="Arial"/>
+                <a:ea typeface="Arial"/>
+                <a:cs typeface="Arial"/>
+              </a:defRPr>
+            </a:lvl1pPr>
+            <a:lvl2pPr>
+              <a:buNone/>
+              <a:defRPr sz="3300" b="1">
+                <a:solidFill>
+                  <a:srgbClr val="22362F"/>
+                </a:solidFill>
+                <a:latin typeface="Arial"/>
+                <a:ea typeface="Arial"/>
+                <a:cs typeface="Arial"/>
+              </a:defRPr>
+            </a:lvl2pPr>
+            <a:lvl3pPr>
+              <a:buNone/>
+              <a:defRPr sz="3300" b="1">
+                <a:solidFill>
+                  <a:srgbClr val="22362F"/>
+                </a:solidFill>
+                <a:latin typeface="Arial"/>
+                <a:ea typeface="Arial"/>
+                <a:cs typeface="Arial"/>
+              </a:defRPr>
+            </a:lvl3pPr>
+            <a:lvl4pPr>
+              <a:buNone/>
+              <a:defRPr sz="3300" b="1">
+                <a:solidFill>
+                  <a:srgbClr val="22362F"/>
+                </a:solidFill>
+                <a:latin typeface="Arial"/>
+                <a:ea typeface="Arial"/>
+                <a:cs typeface="Arial"/>
+              </a:defRPr>
+            </a:lvl4pPr>
+            <a:lvl5pPr>
+              <a:buNone/>
+              <a:defRPr sz="3300" b="1">
+                <a:solidFill>
+                  <a:srgbClr val="22362F"/>
+                </a:solidFill>
+                <a:latin typeface="Arial"/>
+                <a:ea typeface="Arial"/>
+                <a:cs typeface="Arial"/>
+              </a:defRPr>
+            </a:lvl5pPr>
+            <a:lvl6pPr>
+              <a:buNone/>
+              <a:defRPr sz="3300" b="1">
+                <a:solidFill>
+                  <a:srgbClr val="22362F"/>
+                </a:solidFill>
+                <a:latin typeface="Arial"/>
+                <a:ea typeface="Arial"/>
+                <a:cs typeface="Arial"/>
+              </a:defRPr>
+            </a:lvl6pPr>
+            <a:lvl7pPr>
+              <a:buNone/>
+              <a:defRPr sz="3300" b="1">
+                <a:solidFill>
+                  <a:srgbClr val="22362F"/>
+                </a:solidFill>
+                <a:latin typeface="Arial"/>
+                <a:ea typeface="Arial"/>
+                <a:cs typeface="Arial"/>
+              </a:defRPr>
+            </a:lvl7pPr>
+            <a:lvl8pPr>
+              <a:buNone/>
+              <a:defRPr sz="3300" b="1">
+                <a:solidFill>
+                  <a:srgbClr val="22362F"/>
+                </a:solidFill>
+                <a:latin typeface="Arial"/>
+                <a:ea typeface="Arial"/>
+                <a:cs typeface="Arial"/>
+              </a:defRPr>
+            </a:lvl8pPr>
+            <a:lvl9pPr>
+              <a:buNone/>
+              <a:defRPr sz="3300" b="1">
+                <a:solidFill>
+                  <a:srgbClr val="22362F"/>
+                </a:solidFill>
+                <a:latin typeface="Arial"/>
+                <a:ea typeface="Arial"/>
+                <a:cs typeface="Arial"/>
+              </a:defRPr>
+            </a:lvl9pPr>
+          </a:lstStyle>
+          <a:p xmlns:a="http://schemas.openxmlformats.org/drawingml/2006/main">
+            <a:pPr>
+              <a:buNone/>
+              <a:defRPr sz="3300" b="1">
+                <a:solidFill>
+                  <a:srgbClr val="22362F"/>
+                </a:solidFill>
+                <a:latin typeface="Arial"/>
+                <a:ea typeface="Arial"/>
+                <a:cs typeface="Arial"/>
+              </a:defRPr>
+            </a:pPr>
+            <a:r>
+              <a:rPr sz="3300" b="1">
+                <a:solidFill>
+                  <a:srgbClr val="22362F"/>
+                </a:solidFill>
+                <a:latin typeface="Arial"/>
+                <a:ea typeface="Arial"/>
+                <a:cs typeface="Arial"/>
+              </a:rPr>
+              <a:t>Class results and a simple baseline</a:t>
+            </a:r>
+          </a:p>
+        </p:txBody>
+      </p:sp>
+      <p:sp>
+        <p:nvSpPr>
+          <p:cNvPr id="2" name="">
+            <a:extLst xmlns:a="http://schemas.openxmlformats.org/drawingml/2006/main">
+              <a:ext uri="{FF2B5EF4-FFF2-40B4-BE49-F238E27FC236}">
+                <a16:creationId xmlns:a16="http://schemas.microsoft.com/office/drawing/2014/main" id="{BA10B516-B255-4688-BDF8-0749A6486AEC}"/>
+              </a:ext>
+            </a:extLst>
+          </p:cNvPr>
+          <p:cNvSpPr>
+            <a:spLocks xmlns:a="http://schemas.openxmlformats.org/drawingml/2006/main" noGrp="1"/>
+          </p:cNvSpPr>
+          <p:nvPr/>
+        </p:nvSpPr>
+        <p:spPr>
+          <a:xfrm xmlns:a="http://schemas.openxmlformats.org/drawingml/2006/main">
+            <a:off x="11144250" y="6381750"/>
+            <a:ext cx="438150" cy="228600"/>
+          </a:xfrm>
+          <a:prstGeom xmlns:a="http://schemas.openxmlformats.org/drawingml/2006/main" prst="rect">
+            <a:avLst/>
+          </a:prstGeom>
+          <a:noFill xmlns:a="http://schemas.openxmlformats.org/drawingml/2006/main"/>
+          <a:ln xmlns:a="http://schemas.openxmlformats.org/drawingml/2006/main" w="0">
+            <a:noFill/>
+          </a:ln>
+        </p:spPr>
+        <p:txBody>
+          <a:bodyPr xmlns:a="http://schemas.openxmlformats.org/drawingml/2006/main" wrap="square" lIns="0" tIns="0" rIns="0" bIns="0" anchor="t">
+            <a:noAutofit/>
+          </a:bodyPr>
+          <a:lstStyle xmlns:a="http://schemas.openxmlformats.org/drawingml/2006/main">
+            <a:defPPr>
+              <a:defRPr sz="1350" b="0">
+                <a:solidFill>
+                  <a:srgbClr val="5D6864"/>
+                </a:solidFill>
+                <a:latin typeface="Arial"/>
+                <a:ea typeface="Arial"/>
+                <a:cs typeface="Arial"/>
+              </a:defRPr>
+            </a:defPPr>
+            <a:lvl1pPr>
+              <a:buNone/>
+              <a:defRPr sz="1350" b="0">
+                <a:solidFill>
+                  <a:srgbClr val="5D6864"/>
+                </a:solidFill>
+                <a:latin typeface="Arial"/>
+                <a:ea typeface="Arial"/>
+                <a:cs typeface="Arial"/>
+              </a:defRPr>
+            </a:lvl1pPr>
+            <a:lvl2pPr>
+              <a:buNone/>
+              <a:defRPr sz="1350" b="0">
+                <a:solidFill>
+                  <a:srgbClr val="5D6864"/>
+                </a:solidFill>
+                <a:latin typeface="Arial"/>
+                <a:ea typeface="Arial"/>
+                <a:cs typeface="Arial"/>
+              </a:defRPr>
+            </a:lvl2pPr>
+            <a:lvl3pPr>
+              <a:buNone/>
+              <a:defRPr sz="1350" b="0">
+                <a:solidFill>
+                  <a:srgbClr val="5D6864"/>
+                </a:solidFill>
+                <a:latin typeface="Arial"/>
+                <a:ea typeface="Arial"/>
+                <a:cs typeface="Arial"/>
+              </a:defRPr>
+            </a:lvl3pPr>
+            <a:lvl4pPr>
+              <a:buNone/>
+              <a:defRPr sz="1350" b="0">
+                <a:solidFill>
+                  <a:srgbClr val="5D6864"/>
+                </a:solidFill>
+                <a:latin typeface="Arial"/>
+                <a:ea typeface="Arial"/>
+                <a:cs typeface="Arial"/>
+              </a:defRPr>
+            </a:lvl4pPr>
+            <a:lvl5pPr>
+              <a:buNone/>
+              <a:defRPr sz="1350" b="0">
+                <a:solidFill>
+                  <a:srgbClr val="5D6864"/>
+                </a:solidFill>
+                <a:latin typeface="Arial"/>
+                <a:ea typeface="Arial"/>
+                <a:cs typeface="Arial"/>
+              </a:defRPr>
+            </a:lvl5pPr>
+            <a:lvl6pPr>
+              <a:buNone/>
+              <a:defRPr sz="1350" b="0">
+                <a:solidFill>
+                  <a:srgbClr val="5D6864"/>
+                </a:solidFill>
+                <a:latin typeface="Arial"/>
+                <a:ea typeface="Arial"/>
+                <a:cs typeface="Arial"/>
+              </a:defRPr>
+            </a:lvl6pPr>
+            <a:lvl7pPr>
+              <a:buNone/>
+              <a:defRPr sz="1350" b="0">
+                <a:solidFill>
+                  <a:srgbClr val="5D6864"/>
+                </a:solidFill>
+                <a:latin typeface="Arial"/>
+                <a:ea typeface="Arial"/>
+                <a:cs typeface="Arial"/>
+              </a:defRPr>
+            </a:lvl7pPr>
+            <a:lvl8pPr>
+              <a:buNone/>
+              <a:defRPr sz="1350" b="0">
+                <a:solidFill>
+                  <a:srgbClr val="5D6864"/>
+                </a:solidFill>
+                <a:latin typeface="Arial"/>
+                <a:ea typeface="Arial"/>
+                <a:cs typeface="Arial"/>
+              </a:defRPr>
+            </a:lvl8pPr>
+            <a:lvl9pPr>
+              <a:buNone/>
+              <a:defRPr sz="1350" b="0">
+                <a:solidFill>
+                  <a:srgbClr val="5D6864"/>
+                </a:solidFill>
+                <a:latin typeface="Arial"/>
+                <a:ea typeface="Arial"/>
+                <a:cs typeface="Arial"/>
+              </a:defRPr>
+            </a:lvl9pPr>
+          </a:lstStyle>
+          <a:p xmlns:a="http://schemas.openxmlformats.org/drawingml/2006/main">
+            <a:pPr>
+              <a:buNone/>
+              <a:defRPr sz="1350" b="0">
+                <a:solidFill>
+                  <a:srgbClr val="5D6864"/>
+                </a:solidFill>
+                <a:latin typeface="Arial"/>
+                <a:ea typeface="Arial"/>
+                <a:cs typeface="Arial"/>
+              </a:defRPr>
+            </a:pPr>
+            <a:r>
+              <a:rPr sz="1350" b="0">
+                <a:solidFill>
+                  <a:srgbClr val="5D6864"/>
+                </a:solidFill>
+                <a:latin typeface="Arial"/>
+                <a:ea typeface="Arial"/>
+                <a:cs typeface="Arial"/>
+              </a:rPr>
+              <a:t>12</a:t>
+            </a:r>
+          </a:p>
+        </p:txBody>
+      </p:sp>
+      <p:sp>
+        <p:nvSpPr>
+          <p:cNvPr id="3" name="">
+            <a:extLst xmlns:a="http://schemas.openxmlformats.org/drawingml/2006/main">
+              <a:ext uri="{FF2B5EF4-FFF2-40B4-BE49-F238E27FC236}">
+                <a16:creationId xmlns:a16="http://schemas.microsoft.com/office/drawing/2014/main" id="{CF70DC2E-1A14-45C4-B977-F39FF2D83546}"/>
+              </a:ext>
+            </a:extLst>
+          </p:cNvPr>
+          <p:cNvSpPr>
+            <a:spLocks xmlns:a="http://schemas.openxmlformats.org/drawingml/2006/main" noGrp="1"/>
+          </p:cNvSpPr>
+          <p:nvPr/>
+        </p:nvSpPr>
+        <p:spPr>
+          <a:xfrm xmlns:a="http://schemas.openxmlformats.org/drawingml/2006/main">
+            <a:off x="609600" y="1066800"/>
+            <a:ext cx="10972800" cy="323850"/>
+          </a:xfrm>
+          <a:prstGeom xmlns:a="http://schemas.openxmlformats.org/drawingml/2006/main" prst="rect">
+            <a:avLst/>
+          </a:prstGeom>
+          <a:noFill xmlns:a="http://schemas.openxmlformats.org/drawingml/2006/main"/>
+          <a:ln xmlns:a="http://schemas.openxmlformats.org/drawingml/2006/main" w="0">
+            <a:noFill/>
+          </a:ln>
+        </p:spPr>
+        <p:txBody>
+          <a:bodyPr xmlns:a="http://schemas.openxmlformats.org/drawingml/2006/main" wrap="square" lIns="0" tIns="0" rIns="0" bIns="0" anchor="t">
+            <a:noAutofit/>
+          </a:bodyPr>
+          <a:lstStyle xmlns:a="http://schemas.openxmlformats.org/drawingml/2006/main">
+            <a:defPPr>
+              <a:defRPr sz="1875" b="0">
+                <a:solidFill>
+                  <a:srgbClr val="5D6864"/>
+                </a:solidFill>
+                <a:latin typeface="Arial"/>
+                <a:ea typeface="Arial"/>
+                <a:cs typeface="Arial"/>
+              </a:defRPr>
+            </a:defPPr>
+            <a:lvl1pPr>
+              <a:buNone/>
+              <a:defRPr sz="1875" b="0">
+                <a:solidFill>
+                  <a:srgbClr val="5D6864"/>
+                </a:solidFill>
+                <a:latin typeface="Arial"/>
+                <a:ea typeface="Arial"/>
+                <a:cs typeface="Arial"/>
+              </a:defRPr>
+            </a:lvl1pPr>
+            <a:lvl2pPr>
+              <a:buNone/>
+              <a:defRPr sz="1875" b="0">
+                <a:solidFill>
+                  <a:srgbClr val="5D6864"/>
+                </a:solidFill>
+                <a:latin typeface="Arial"/>
+                <a:ea typeface="Arial"/>
+                <a:cs typeface="Arial"/>
+              </a:defRPr>
+            </a:lvl2pPr>
+            <a:lvl3pPr>
+              <a:buNone/>
+              <a:defRPr sz="1875" b="0">
+                <a:solidFill>
+                  <a:srgbClr val="5D6864"/>
+                </a:solidFill>
+                <a:latin typeface="Arial"/>
+                <a:ea typeface="Arial"/>
+                <a:cs typeface="Arial"/>
+              </a:defRPr>
+            </a:lvl3pPr>
+            <a:lvl4pPr>
+              <a:buNone/>
+              <a:defRPr sz="1875" b="0">
+                <a:solidFill>
+                  <a:srgbClr val="5D6864"/>
+                </a:solidFill>
+                <a:latin typeface="Arial"/>
+                <a:ea typeface="Arial"/>
+                <a:cs typeface="Arial"/>
+              </a:defRPr>
+            </a:lvl4pPr>
+            <a:lvl5pPr>
+              <a:buNone/>
+              <a:defRPr sz="1875" b="0">
+                <a:solidFill>
+                  <a:srgbClr val="5D6864"/>
+                </a:solidFill>
+                <a:latin typeface="Arial"/>
+                <a:ea typeface="Arial"/>
+                <a:cs typeface="Arial"/>
+              </a:defRPr>
+            </a:lvl5pPr>
+            <a:lvl6pPr>
+              <a:buNone/>
+              <a:defRPr sz="1875" b="0">
+                <a:solidFill>
+                  <a:srgbClr val="5D6864"/>
+                </a:solidFill>
+                <a:latin typeface="Arial"/>
+                <a:ea typeface="Arial"/>
+                <a:cs typeface="Arial"/>
+              </a:defRPr>
+            </a:lvl6pPr>
+            <a:lvl7pPr>
+              <a:buNone/>
+              <a:defRPr sz="1875" b="0">
+                <a:solidFill>
+                  <a:srgbClr val="5D6864"/>
+                </a:solidFill>
+                <a:latin typeface="Arial"/>
+                <a:ea typeface="Arial"/>
+                <a:cs typeface="Arial"/>
+              </a:defRPr>
+            </a:lvl7pPr>
+            <a:lvl8pPr>
+              <a:buNone/>
+              <a:defRPr sz="1875" b="0">
+                <a:solidFill>
+                  <a:srgbClr val="5D6864"/>
+                </a:solidFill>
+                <a:latin typeface="Arial"/>
+                <a:ea typeface="Arial"/>
+                <a:cs typeface="Arial"/>
+              </a:defRPr>
+            </a:lvl8pPr>
+            <a:lvl9pPr>
+              <a:buNone/>
+              <a:defRPr sz="1875" b="0">
+                <a:solidFill>
+                  <a:srgbClr val="5D6864"/>
+                </a:solidFill>
+                <a:latin typeface="Arial"/>
+                <a:ea typeface="Arial"/>
+                <a:cs typeface="Arial"/>
+              </a:defRPr>
+            </a:lvl9pPr>
+          </a:lstStyle>
+          <a:p xmlns:a="http://schemas.openxmlformats.org/drawingml/2006/main">
+            <a:pPr>
+              <a:buNone/>
+              <a:defRPr sz="1875" b="0">
+                <a:solidFill>
+                  <a:srgbClr val="5D6864"/>
+                </a:solidFill>
+                <a:latin typeface="Arial"/>
+                <a:ea typeface="Arial"/>
+                <a:cs typeface="Arial"/>
+              </a:defRPr>
+            </a:pPr>
+            <a:r>
+              <a:rPr sz="1875" b="0">
+                <a:solidFill>
+                  <a:srgbClr val="5D6864"/>
+                </a:solidFill>
+                <a:latin typeface="Arial"/>
+                <a:ea typeface="Arial"/>
+                <a:cs typeface="Arial"/>
+              </a:rPr>
+              <a:t>Partial fine-tuning, reference seed 17, 128 test images</a:t>
+            </a:r>
+          </a:p>
+        </p:txBody>
+      </p:sp>
+      <p:graphicFrame>
+        <p:nvGraphicFramePr>
+          <p:cNvPr id="4" name="">
+            <a:extLst xmlns:a="http://schemas.openxmlformats.org/drawingml/2006/main">
+              <a:ext uri="{FF2B5EF4-FFF2-40B4-BE49-F238E27FC236}">
+                <a16:creationId xmlns:a16="http://schemas.microsoft.com/office/drawing/2014/main" id="{B61C1CC7-DB51-4984-A754-7866FAA2EF29}"/>
+              </a:ext>
+            </a:extLst>
+          </p:cNvPr>
+          <p:cNvGraphicFramePr/>
+          <p:nvPr/>
+        </p:nvGraphicFramePr>
+        <p:xfrm>
+          <a:off xmlns:a="http://schemas.openxmlformats.org/drawingml/2006/main" x="609600" y="1571625"/>
+          <a:ext xmlns:a="http://schemas.openxmlformats.org/drawingml/2006/main" cx="10972800" cy="3600450"/>
+        </p:xfrm>
+        <a:graphic xmlns:a="http://schemas.openxmlformats.org/drawingml/2006/main">
+          <a:graphicData uri="http://schemas.openxmlformats.org/drawingml/2006/table">
+            <a:tbl>
+              <a:tblPr/>
+              <a:tblGrid>
+                <a:gridCol w="4572000"/>
+                <a:gridCol w="2133600"/>
+                <a:gridCol w="2133600"/>
+                <a:gridCol w="2133600"/>
+              </a:tblGrid>
+              <a:tr h="514350">
+                <a:tc>
+                  <a:txBody>
+                    <a:bodyPr lIns="114300" tIns="114300" rIns="114300" bIns="114300"/>
+                    <a:lstStyle/>
+                    <a:p>
+                      <a:r>
+                        <a:rPr sz="1800" b="1">
+                          <a:solidFill>
+                            <a:srgbClr val="22362F"/>
+                          </a:solidFill>
+                          <a:latin typeface="Arial"/>
+                          <a:ea typeface="Arial"/>
+                          <a:cs typeface="Arial"/>
+                        </a:rPr>
+                        <a:t>Model / class</a:t>
+                      </a:r>
+                    </a:p>
+                  </a:txBody>
+                  <a:tcPr marL="91440" marR="91440" marT="45720" marB="45720" anchor="ctr">
+                    <a:solidFill>
+                      <a:srgbClr val="E8EEEB"/>
+                    </a:solidFill>
+                  </a:tcPr>
+                </a:tc>
+                <a:tc>
+                  <a:txBody>
+                    <a:bodyPr lIns="114300" tIns="114300" rIns="114300" bIns="114300"/>
+                    <a:lstStyle/>
+                    <a:p>
+                      <a:r>
+                        <a:rPr sz="1800" b="1">
+                          <a:solidFill>
+                            <a:srgbClr val="22362F"/>
+                          </a:solidFill>
+                          <a:latin typeface="Arial"/>
+                          <a:ea typeface="Arial"/>
+                          <a:cs typeface="Arial"/>
+                        </a:rPr>
+                        <a:t>Precision (%)</a:t>
+                      </a:r>
+                    </a:p>
+                  </a:txBody>
+                  <a:tcPr marL="91440" marR="91440" marT="45720" marB="45720" anchor="ctr">
+                    <a:solidFill>
+                      <a:srgbClr val="E8EEEB"/>
+                    </a:solidFill>
+                  </a:tcPr>
+                </a:tc>
+                <a:tc>
+                  <a:txBody>
+                    <a:bodyPr lIns="114300" tIns="114300" rIns="114300" bIns="114300"/>
+                    <a:lstStyle/>
+                    <a:p>
+                      <a:r>
+                        <a:rPr sz="1800" b="1">
+                          <a:solidFill>
+                            <a:srgbClr val="22362F"/>
+                          </a:solidFill>
+                          <a:latin typeface="Arial"/>
+                          <a:ea typeface="Arial"/>
+                          <a:cs typeface="Arial"/>
+                        </a:rPr>
+                        <a:t>Recall (%)</a:t>
+                      </a:r>
+                    </a:p>
+                  </a:txBody>
+                  <a:tcPr marL="91440" marR="91440" marT="45720" marB="45720" anchor="ctr">
+                    <a:solidFill>
+                      <a:srgbClr val="E8EEEB"/>
+                    </a:solidFill>
+                  </a:tcPr>
+                </a:tc>
+                <a:tc>
+                  <a:txBody>
+                    <a:bodyPr lIns="114300" tIns="114300" rIns="114300" bIns="114300"/>
+                    <a:lstStyle/>
+                    <a:p>
+                      <a:r>
+                        <a:rPr sz="1800" b="1">
+                          <a:solidFill>
+                            <a:srgbClr val="22362F"/>
+                          </a:solidFill>
+                          <a:latin typeface="Arial"/>
+                          <a:ea typeface="Arial"/>
+                          <a:cs typeface="Arial"/>
+                        </a:rPr>
+                        <a:t>F1 (%)</a:t>
+                      </a:r>
+                    </a:p>
+                  </a:txBody>
+                  <a:tcPr marL="91440" marR="91440" marT="45720" marB="45720" anchor="ctr">
+                    <a:solidFill>
+                      <a:srgbClr val="E8EEEB"/>
+                    </a:solidFill>
+                  </a:tcPr>
+                </a:tc>
+              </a:tr>
+              <a:tr h="514350">
+                <a:tc>
+                  <a:txBody>
+                    <a:bodyPr lIns="114300" tIns="114300" rIns="114300" bIns="114300"/>
+                    <a:lstStyle/>
+                    <a:p>
+                      <a:r>
+                        <a:rPr sz="1800" b="0">
+                          <a:solidFill>
+                            <a:srgbClr val="22362F"/>
+                          </a:solidFill>
+                          <a:latin typeface="Arial"/>
+                          <a:ea typeface="Arial"/>
+                          <a:cs typeface="Arial"/>
+                        </a:rPr>
+                        <a:t>DINOv2: Angular leaf spot</a:t>
+                      </a:r>
+                    </a:p>
+                  </a:txBody>
+                  <a:tcPr marL="91440" marR="91440" marT="45720" marB="45720" anchor="ctr">
+                    <a:solidFill>
+                      <a:srgbClr val="FFFFFF"/>
+                    </a:solidFill>
+                  </a:tcPr>
+                </a:tc>
+                <a:tc>
+                  <a:txBody>
+                    <a:bodyPr lIns="114300" tIns="114300" rIns="114300" bIns="114300"/>
+                    <a:lstStyle/>
+                    <a:p>
+                      <a:r>
+                        <a:rPr sz="1800" b="0">
+                          <a:solidFill>
+                            <a:srgbClr val="22362F"/>
+                          </a:solidFill>
+                          <a:latin typeface="Arial"/>
+                          <a:ea typeface="Arial"/>
+                          <a:cs typeface="Arial"/>
+                        </a:rPr>
+                        <a:t>100.00</a:t>
+                      </a:r>
+                    </a:p>
+                  </a:txBody>
+                  <a:tcPr marL="91440" marR="91440" marT="45720" marB="45720" anchor="ctr">
+                    <a:solidFill>
+                      <a:srgbClr val="FFFFFF"/>
+                    </a:solidFill>
+                  </a:tcPr>
+                </a:tc>
+                <a:tc>
+                  <a:txBody>
+                    <a:bodyPr lIns="114300" tIns="114300" rIns="114300" bIns="114300"/>
+                    <a:lstStyle/>
+                    <a:p>
+                      <a:r>
+                        <a:rPr sz="1800" b="0">
+                          <a:solidFill>
+                            <a:srgbClr val="22362F"/>
+                          </a:solidFill>
+                          <a:latin typeface="Arial"/>
+                          <a:ea typeface="Arial"/>
+                          <a:cs typeface="Arial"/>
+                        </a:rPr>
+                        <a:t>97.67</a:t>
+                      </a:r>
+                    </a:p>
+                  </a:txBody>
+                  <a:tcPr marL="91440" marR="91440" marT="45720" marB="45720" anchor="ctr">
+                    <a:solidFill>
+                      <a:srgbClr val="FFFFFF"/>
+                    </a:solidFill>
+                  </a:tcPr>
+                </a:tc>
+                <a:tc>
+                  <a:txBody>
+                    <a:bodyPr lIns="114300" tIns="114300" rIns="114300" bIns="114300"/>
+                    <a:lstStyle/>
+                    <a:p>
+                      <a:r>
+                        <a:rPr sz="1800" b="0">
+                          <a:solidFill>
+                            <a:srgbClr val="22362F"/>
+                          </a:solidFill>
+                          <a:latin typeface="Arial"/>
+                          <a:ea typeface="Arial"/>
+                          <a:cs typeface="Arial"/>
+                        </a:rPr>
+                        <a:t>98.82</a:t>
+                      </a:r>
+                    </a:p>
+                  </a:txBody>
+                  <a:tcPr marL="91440" marR="91440" marT="45720" marB="45720" anchor="ctr">
+                    <a:solidFill>
+                      <a:srgbClr val="FFFFFF"/>
+                    </a:solidFill>
+                  </a:tcPr>
+                </a:tc>
+              </a:tr>
+              <a:tr h="514350">
+                <a:tc>
+                  <a:txBody>
+                    <a:bodyPr lIns="114300" tIns="114300" rIns="114300" bIns="114300"/>
+                    <a:lstStyle/>
+                    <a:p>
+                      <a:r>
+                        <a:rPr sz="1800" b="0">
+                          <a:solidFill>
+                            <a:srgbClr val="22362F"/>
+                          </a:solidFill>
+                          <a:latin typeface="Arial"/>
+                          <a:ea typeface="Arial"/>
+                          <a:cs typeface="Arial"/>
+                        </a:rPr>
+                        <a:t>DINOv2: Bean rust</a:t>
+                      </a:r>
+                    </a:p>
+                  </a:txBody>
+                  <a:tcPr marL="91440" marR="91440" marT="45720" marB="45720" anchor="ctr">
+                    <a:solidFill>
+                      <a:srgbClr val="FFFFFF"/>
+                    </a:solidFill>
+                  </a:tcPr>
+                </a:tc>
+                <a:tc>
+                  <a:txBody>
+                    <a:bodyPr lIns="114300" tIns="114300" rIns="114300" bIns="114300"/>
+                    <a:lstStyle/>
+                    <a:p>
+                      <a:r>
+                        <a:rPr sz="1800" b="0">
+                          <a:solidFill>
+                            <a:srgbClr val="22362F"/>
+                          </a:solidFill>
+                          <a:latin typeface="Arial"/>
+                          <a:ea typeface="Arial"/>
+                          <a:cs typeface="Arial"/>
+                        </a:rPr>
+                        <a:t>95.56</a:t>
+                      </a:r>
+                    </a:p>
+                  </a:txBody>
+                  <a:tcPr marL="91440" marR="91440" marT="45720" marB="45720" anchor="ctr">
+                    <a:solidFill>
+                      <a:srgbClr val="FFFFFF"/>
+                    </a:solidFill>
+                  </a:tcPr>
+                </a:tc>
+                <a:tc>
+                  <a:txBody>
+                    <a:bodyPr lIns="114300" tIns="114300" rIns="114300" bIns="114300"/>
+                    <a:lstStyle/>
+                    <a:p>
+                      <a:r>
+                        <a:rPr sz="1800" b="0">
+                          <a:solidFill>
+                            <a:srgbClr val="22362F"/>
+                          </a:solidFill>
+                          <a:latin typeface="Arial"/>
+                          <a:ea typeface="Arial"/>
+                          <a:cs typeface="Arial"/>
+                        </a:rPr>
+                        <a:t>100.00</a:t>
+                      </a:r>
+                    </a:p>
+                  </a:txBody>
+                  <a:tcPr marL="91440" marR="91440" marT="45720" marB="45720" anchor="ctr">
+                    <a:solidFill>
+                      <a:srgbClr val="FFFFFF"/>
+                    </a:solidFill>
+                  </a:tcPr>
+                </a:tc>
+                <a:tc>
+                  <a:txBody>
+                    <a:bodyPr lIns="114300" tIns="114300" rIns="114300" bIns="114300"/>
+                    <a:lstStyle/>
+                    <a:p>
+                      <a:r>
+                        <a:rPr sz="1800" b="0">
+                          <a:solidFill>
+                            <a:srgbClr val="22362F"/>
+                          </a:solidFill>
+                          <a:latin typeface="Arial"/>
+                          <a:ea typeface="Arial"/>
+                          <a:cs typeface="Arial"/>
+                        </a:rPr>
+                        <a:t>97.73</a:t>
+                      </a:r>
+                    </a:p>
+                  </a:txBody>
+                  <a:tcPr marL="91440" marR="91440" marT="45720" marB="45720" anchor="ctr">
+                    <a:solidFill>
+                      <a:srgbClr val="FFFFFF"/>
+                    </a:solidFill>
+                  </a:tcPr>
+                </a:tc>
+              </a:tr>
+              <a:tr h="514350">
+                <a:tc>
+                  <a:txBody>
+                    <a:bodyPr lIns="114300" tIns="114300" rIns="114300" bIns="114300"/>
+                    <a:lstStyle/>
+                    <a:p>
+                      <a:r>
+                        <a:rPr sz="1800" b="0">
+                          <a:solidFill>
+                            <a:srgbClr val="22362F"/>
+                          </a:solidFill>
+                          <a:latin typeface="Arial"/>
+                          <a:ea typeface="Arial"/>
+                          <a:cs typeface="Arial"/>
+                        </a:rPr>
+                        <a:t>DINOv2: Healthy</a:t>
+                      </a:r>
+                    </a:p>
+                  </a:txBody>
+                  <a:tcPr marL="91440" marR="91440" marT="45720" marB="45720" anchor="ctr">
+                    <a:solidFill>
+                      <a:srgbClr val="FFFFFF"/>
+                    </a:solidFill>
+                  </a:tcPr>
+                </a:tc>
+                <a:tc>
+                  <a:txBody>
+                    <a:bodyPr lIns="114300" tIns="114300" rIns="114300" bIns="114300"/>
+                    <a:lstStyle/>
+                    <a:p>
+                      <a:r>
+                        <a:rPr sz="1800" b="0">
+                          <a:solidFill>
+                            <a:srgbClr val="22362F"/>
+                          </a:solidFill>
+                          <a:latin typeface="Arial"/>
+                          <a:ea typeface="Arial"/>
+                          <a:cs typeface="Arial"/>
+                        </a:rPr>
+                        <a:t>100.00</a:t>
+                      </a:r>
+                    </a:p>
+                  </a:txBody>
+                  <a:tcPr marL="91440" marR="91440" marT="45720" marB="45720" anchor="ctr">
+                    <a:solidFill>
+                      <a:srgbClr val="FFFFFF"/>
+                    </a:solidFill>
+                  </a:tcPr>
+                </a:tc>
+                <a:tc>
+                  <a:txBody>
+                    <a:bodyPr lIns="114300" tIns="114300" rIns="114300" bIns="114300"/>
+                    <a:lstStyle/>
+                    <a:p>
+                      <a:r>
+                        <a:rPr sz="1800" b="0">
+                          <a:solidFill>
+                            <a:srgbClr val="22362F"/>
+                          </a:solidFill>
+                          <a:latin typeface="Arial"/>
+                          <a:ea typeface="Arial"/>
+                          <a:cs typeface="Arial"/>
+                        </a:rPr>
+                        <a:t>97.62</a:t>
+                      </a:r>
+                    </a:p>
+                  </a:txBody>
+                  <a:tcPr marL="91440" marR="91440" marT="45720" marB="45720" anchor="ctr">
+                    <a:solidFill>
+                      <a:srgbClr val="FFFFFF"/>
+                    </a:solidFill>
+                  </a:tcPr>
+                </a:tc>
+                <a:tc>
+                  <a:txBody>
+                    <a:bodyPr lIns="114300" tIns="114300" rIns="114300" bIns="114300"/>
+                    <a:lstStyle/>
+                    <a:p>
+                      <a:r>
+                        <a:rPr sz="1800" b="0">
+                          <a:solidFill>
+                            <a:srgbClr val="22362F"/>
+                          </a:solidFill>
+                          <a:latin typeface="Arial"/>
+                          <a:ea typeface="Arial"/>
+                          <a:cs typeface="Arial"/>
+                        </a:rPr>
+                        <a:t>98.80</a:t>
+                      </a:r>
+                    </a:p>
+                  </a:txBody>
+                  <a:tcPr marL="91440" marR="91440" marT="45720" marB="45720" anchor="ctr">
+                    <a:solidFill>
+                      <a:srgbClr val="FFFFFF"/>
+                    </a:solidFill>
+                  </a:tcPr>
+                </a:tc>
+              </a:tr>
+              <a:tr h="514350">
+                <a:tc>
+                  <a:txBody>
+                    <a:bodyPr lIns="114300" tIns="114300" rIns="114300" bIns="114300"/>
+                    <a:lstStyle/>
+                    <a:p>
+                      <a:r>
+                        <a:rPr sz="1800" b="0">
+                          <a:solidFill>
+                            <a:srgbClr val="22362F"/>
+                          </a:solidFill>
+                          <a:latin typeface="Arial"/>
+                          <a:ea typeface="Arial"/>
+                          <a:cs typeface="Arial"/>
+                        </a:rPr>
+                        <a:t>SigLIP 2: Angular leaf spot</a:t>
+                      </a:r>
+                    </a:p>
+                  </a:txBody>
+                  <a:tcPr marL="91440" marR="91440" marT="45720" marB="45720" anchor="ctr">
+                    <a:solidFill>
+                      <a:srgbClr val="FFFFFF"/>
+                    </a:solidFill>
+                  </a:tcPr>
+                </a:tc>
+                <a:tc>
+                  <a:txBody>
+                    <a:bodyPr lIns="114300" tIns="114300" rIns="114300" bIns="114300"/>
+                    <a:lstStyle/>
+                    <a:p>
+                      <a:r>
+                        <a:rPr sz="1800" b="0">
+                          <a:solidFill>
+                            <a:srgbClr val="22362F"/>
+                          </a:solidFill>
+                          <a:latin typeface="Arial"/>
+                          <a:ea typeface="Arial"/>
+                          <a:cs typeface="Arial"/>
+                        </a:rPr>
+                        <a:t>100.00</a:t>
+                      </a:r>
+                    </a:p>
+                  </a:txBody>
+                  <a:tcPr marL="91440" marR="91440" marT="45720" marB="45720" anchor="ctr">
+                    <a:solidFill>
+                      <a:srgbClr val="FFFFFF"/>
+                    </a:solidFill>
+                  </a:tcPr>
+                </a:tc>
+                <a:tc>
+                  <a:txBody>
+                    <a:bodyPr lIns="114300" tIns="114300" rIns="114300" bIns="114300"/>
+                    <a:lstStyle/>
+                    <a:p>
+                      <a:r>
+                        <a:rPr sz="1800" b="0">
+                          <a:solidFill>
+                            <a:srgbClr val="22362F"/>
+                          </a:solidFill>
+                          <a:latin typeface="Arial"/>
+                          <a:ea typeface="Arial"/>
+                          <a:cs typeface="Arial"/>
+                        </a:rPr>
+                        <a:t>93.02</a:t>
+                      </a:r>
+                    </a:p>
+                  </a:txBody>
+                  <a:tcPr marL="91440" marR="91440" marT="45720" marB="45720" anchor="ctr">
+                    <a:solidFill>
+                      <a:srgbClr val="FFFFFF"/>
+                    </a:solidFill>
+                  </a:tcPr>
+                </a:tc>
+                <a:tc>
+                  <a:txBody>
+                    <a:bodyPr lIns="114300" tIns="114300" rIns="114300" bIns="114300"/>
+                    <a:lstStyle/>
+                    <a:p>
+                      <a:r>
+                        <a:rPr sz="1800" b="0">
+                          <a:solidFill>
+                            <a:srgbClr val="22362F"/>
+                          </a:solidFill>
+                          <a:latin typeface="Arial"/>
+                          <a:ea typeface="Arial"/>
+                          <a:cs typeface="Arial"/>
+                        </a:rPr>
+                        <a:t>96.39</a:t>
+                      </a:r>
+                    </a:p>
+                  </a:txBody>
+                  <a:tcPr marL="91440" marR="91440" marT="45720" marB="45720" anchor="ctr">
+                    <a:solidFill>
+                      <a:srgbClr val="FFFFFF"/>
+                    </a:solidFill>
+                  </a:tcPr>
+                </a:tc>
+              </a:tr>
+              <a:tr h="514350">
+                <a:tc>
+                  <a:txBody>
+                    <a:bodyPr lIns="114300" tIns="114300" rIns="114300" bIns="114300"/>
+                    <a:lstStyle/>
+                    <a:p>
+                      <a:r>
+                        <a:rPr sz="1800" b="0">
+                          <a:solidFill>
+                            <a:srgbClr val="22362F"/>
+                          </a:solidFill>
+                          <a:latin typeface="Arial"/>
+                          <a:ea typeface="Arial"/>
+                          <a:cs typeface="Arial"/>
+                        </a:rPr>
+                        <a:t>SigLIP 2: Bean rust</a:t>
+                      </a:r>
+                    </a:p>
+                  </a:txBody>
+                  <a:tcPr marL="91440" marR="91440" marT="45720" marB="45720" anchor="ctr">
+                    <a:solidFill>
+                      <a:srgbClr val="FFFFFF"/>
+                    </a:solidFill>
+                  </a:tcPr>
+                </a:tc>
+                <a:tc>
+                  <a:txBody>
+                    <a:bodyPr lIns="114300" tIns="114300" rIns="114300" bIns="114300"/>
+                    <a:lstStyle/>
+                    <a:p>
+                      <a:r>
+                        <a:rPr sz="1800" b="0">
+                          <a:solidFill>
+                            <a:srgbClr val="22362F"/>
+                          </a:solidFill>
+                          <a:latin typeface="Arial"/>
+                          <a:ea typeface="Arial"/>
+                          <a:cs typeface="Arial"/>
+                        </a:rPr>
+                        <a:t>93.48</a:t>
+                      </a:r>
+                    </a:p>
+                  </a:txBody>
+                  <a:tcPr marL="91440" marR="91440" marT="45720" marB="45720" anchor="ctr">
+                    <a:solidFill>
+                      <a:srgbClr val="FFFFFF"/>
+                    </a:solidFill>
+                  </a:tcPr>
+                </a:tc>
+                <a:tc>
+                  <a:txBody>
+                    <a:bodyPr lIns="114300" tIns="114300" rIns="114300" bIns="114300"/>
+                    <a:lstStyle/>
+                    <a:p>
+                      <a:r>
+                        <a:rPr sz="1800" b="0">
+                          <a:solidFill>
+                            <a:srgbClr val="22362F"/>
+                          </a:solidFill>
+                          <a:latin typeface="Arial"/>
+                          <a:ea typeface="Arial"/>
+                          <a:cs typeface="Arial"/>
+                        </a:rPr>
+                        <a:t>100.00</a:t>
+                      </a:r>
+                    </a:p>
+                  </a:txBody>
+                  <a:tcPr marL="91440" marR="91440" marT="45720" marB="45720" anchor="ctr">
+                    <a:solidFill>
+                      <a:srgbClr val="FFFFFF"/>
+                    </a:solidFill>
+                  </a:tcPr>
+                </a:tc>
+                <a:tc>
+                  <a:txBody>
+                    <a:bodyPr lIns="114300" tIns="114300" rIns="114300" bIns="114300"/>
+                    <a:lstStyle/>
+                    <a:p>
+                      <a:r>
+                        <a:rPr sz="1800" b="0">
+                          <a:solidFill>
+                            <a:srgbClr val="22362F"/>
+                          </a:solidFill>
+                          <a:latin typeface="Arial"/>
+                          <a:ea typeface="Arial"/>
+                          <a:cs typeface="Arial"/>
+                        </a:rPr>
+                        <a:t>96.63</a:t>
+                      </a:r>
+                    </a:p>
+                  </a:txBody>
+                  <a:tcPr marL="91440" marR="91440" marT="45720" marB="45720" anchor="ctr">
+                    <a:solidFill>
+                      <a:srgbClr val="FFFFFF"/>
+                    </a:solidFill>
+                  </a:tcPr>
+                </a:tc>
+              </a:tr>
+              <a:tr h="514350">
+                <a:tc>
+                  <a:txBody>
+                    <a:bodyPr lIns="114300" tIns="114300" rIns="114300" bIns="114300"/>
+                    <a:lstStyle/>
+                    <a:p>
+                      <a:r>
+                        <a:rPr sz="1800" b="0">
+                          <a:solidFill>
+                            <a:srgbClr val="22362F"/>
+                          </a:solidFill>
+                          <a:latin typeface="Arial"/>
+                          <a:ea typeface="Arial"/>
+                          <a:cs typeface="Arial"/>
+                        </a:rPr>
+                        <a:t>SigLIP 2: Healthy</a:t>
+                      </a:r>
+                    </a:p>
+                  </a:txBody>
+                  <a:tcPr marL="91440" marR="91440" marT="45720" marB="45720" anchor="ctr">
+                    <a:solidFill>
+                      <a:srgbClr val="FFFFFF"/>
+                    </a:solidFill>
+                  </a:tcPr>
+                </a:tc>
+                <a:tc>
+                  <a:txBody>
+                    <a:bodyPr lIns="114300" tIns="114300" rIns="114300" bIns="114300"/>
+                    <a:lstStyle/>
+                    <a:p>
+                      <a:r>
+                        <a:rPr sz="1800" b="0">
+                          <a:solidFill>
+                            <a:srgbClr val="22362F"/>
+                          </a:solidFill>
+                          <a:latin typeface="Arial"/>
+                          <a:ea typeface="Arial"/>
+                          <a:cs typeface="Arial"/>
+                        </a:rPr>
+                        <a:t>100.00</a:t>
+                      </a:r>
+                    </a:p>
+                  </a:txBody>
+                  <a:tcPr marL="91440" marR="91440" marT="45720" marB="45720" anchor="ctr">
+                    <a:solidFill>
+                      <a:srgbClr val="FFFFFF"/>
+                    </a:solidFill>
+                  </a:tcPr>
+                </a:tc>
+                <a:tc>
+                  <a:txBody>
+                    <a:bodyPr lIns="114300" tIns="114300" rIns="114300" bIns="114300"/>
+                    <a:lstStyle/>
+                    <a:p>
+                      <a:r>
+                        <a:rPr sz="1800" b="0">
+                          <a:solidFill>
+                            <a:srgbClr val="22362F"/>
+                          </a:solidFill>
+                          <a:latin typeface="Arial"/>
+                          <a:ea typeface="Arial"/>
+                          <a:cs typeface="Arial"/>
+                        </a:rPr>
+                        <a:t>100.00</a:t>
+                      </a:r>
+                    </a:p>
+                  </a:txBody>
+                  <a:tcPr marL="91440" marR="91440" marT="45720" marB="45720" anchor="ctr">
+                    <a:solidFill>
+                      <a:srgbClr val="FFFFFF"/>
+                    </a:solidFill>
+                  </a:tcPr>
+                </a:tc>
+                <a:tc>
+                  <a:txBody>
+                    <a:bodyPr lIns="114300" tIns="114300" rIns="114300" bIns="114300"/>
+                    <a:lstStyle/>
+                    <a:p>
+                      <a:r>
+                        <a:rPr sz="1800" b="0">
+                          <a:solidFill>
+                            <a:srgbClr val="22362F"/>
+                          </a:solidFill>
+                          <a:latin typeface="Arial"/>
+                          <a:ea typeface="Arial"/>
+                          <a:cs typeface="Arial"/>
+                        </a:rPr>
+                        <a:t>100.00</a:t>
+                      </a:r>
+                    </a:p>
+                  </a:txBody>
+                  <a:tcPr marL="91440" marR="91440" marT="45720" marB="45720" anchor="ctr">
+                    <a:solidFill>
+                      <a:srgbClr val="FFFFFF"/>
+                    </a:solidFill>
+                  </a:tcPr>
+                </a:tc>
+              </a:tr>
+            </a:tbl>
+          </a:graphicData>
+        </a:graphic>
+      </p:graphicFrame>
+      <p:sp>
+        <p:nvSpPr>
+          <p:cNvPr id="5" name="">
+            <a:extLst xmlns:a="http://schemas.openxmlformats.org/drawingml/2006/main">
+              <a:ext uri="{FF2B5EF4-FFF2-40B4-BE49-F238E27FC236}">
+                <a16:creationId xmlns:a16="http://schemas.microsoft.com/office/drawing/2014/main" id="{A7935FF3-C3D2-4E6C-B248-606BBFC206A7}"/>
+              </a:ext>
+            </a:extLst>
+          </p:cNvPr>
+          <p:cNvSpPr>
+            <a:spLocks xmlns:a="http://schemas.openxmlformats.org/drawingml/2006/main" noGrp="1"/>
+          </p:cNvSpPr>
+          <p:nvPr/>
+        </p:nvSpPr>
+        <p:spPr>
+          <a:xfrm xmlns:a="http://schemas.openxmlformats.org/drawingml/2006/main">
+            <a:off x="609600" y="5410200"/>
+            <a:ext cx="10972800" cy="400050"/>
+          </a:xfrm>
+          <a:prstGeom xmlns:a="http://schemas.openxmlformats.org/drawingml/2006/main" prst="rect">
+            <a:avLst/>
+          </a:prstGeom>
+          <a:noFill xmlns:a="http://schemas.openxmlformats.org/drawingml/2006/main"/>
+          <a:ln xmlns:a="http://schemas.openxmlformats.org/drawingml/2006/main" w="0">
+            <a:noFill/>
+          </a:ln>
+        </p:spPr>
+        <p:txBody>
+          <a:bodyPr xmlns:a="http://schemas.openxmlformats.org/drawingml/2006/main" wrap="square" lIns="0" tIns="0" rIns="0" bIns="0" anchor="t">
+            <a:noAutofit/>
+          </a:bodyPr>
+          <a:lstStyle xmlns:a="http://schemas.openxmlformats.org/drawingml/2006/main">
+            <a:defPPr>
+              <a:defRPr sz="2100" b="1">
+                <a:solidFill>
+                  <a:srgbClr val="245844"/>
+                </a:solidFill>
+                <a:latin typeface="Arial"/>
+                <a:ea typeface="Arial"/>
+                <a:cs typeface="Arial"/>
+              </a:defRPr>
+            </a:defPPr>
+            <a:lvl1pPr>
+              <a:buNone/>
+              <a:defRPr sz="2100" b="1">
+                <a:solidFill>
+                  <a:srgbClr val="245844"/>
+                </a:solidFill>
+                <a:latin typeface="Arial"/>
+                <a:ea typeface="Arial"/>
+                <a:cs typeface="Arial"/>
+              </a:defRPr>
+            </a:lvl1pPr>
+            <a:lvl2pPr>
+              <a:buNone/>
+              <a:defRPr sz="2100" b="1">
+                <a:solidFill>
+                  <a:srgbClr val="245844"/>
+                </a:solidFill>
+                <a:latin typeface="Arial"/>
+                <a:ea typeface="Arial"/>
+                <a:cs typeface="Arial"/>
+              </a:defRPr>
+            </a:lvl2pPr>
+            <a:lvl3pPr>
+              <a:buNone/>
+              <a:defRPr sz="2100" b="1">
+                <a:solidFill>
+                  <a:srgbClr val="245844"/>
+                </a:solidFill>
+                <a:latin typeface="Arial"/>
+                <a:ea typeface="Arial"/>
+                <a:cs typeface="Arial"/>
+              </a:defRPr>
+            </a:lvl3pPr>
+            <a:lvl4pPr>
+              <a:buNone/>
+              <a:defRPr sz="2100" b="1">
+                <a:solidFill>
+                  <a:srgbClr val="245844"/>
+                </a:solidFill>
+                <a:latin typeface="Arial"/>
+                <a:ea typeface="Arial"/>
+                <a:cs typeface="Arial"/>
+              </a:defRPr>
+            </a:lvl4pPr>
+            <a:lvl5pPr>
+              <a:buNone/>
+              <a:defRPr sz="2100" b="1">
+                <a:solidFill>
+                  <a:srgbClr val="245844"/>
+                </a:solidFill>
+                <a:latin typeface="Arial"/>
+                <a:ea typeface="Arial"/>
+                <a:cs typeface="Arial"/>
+              </a:defRPr>
+            </a:lvl5pPr>
+            <a:lvl6pPr>
+              <a:buNone/>
+              <a:defRPr sz="2100" b="1">
+                <a:solidFill>
+                  <a:srgbClr val="245844"/>
+                </a:solidFill>
+                <a:latin typeface="Arial"/>
+                <a:ea typeface="Arial"/>
+                <a:cs typeface="Arial"/>
+              </a:defRPr>
+            </a:lvl6pPr>
+            <a:lvl7pPr>
+              <a:buNone/>
+              <a:defRPr sz="2100" b="1">
+                <a:solidFill>
+                  <a:srgbClr val="245844"/>
+                </a:solidFill>
+                <a:latin typeface="Arial"/>
+                <a:ea typeface="Arial"/>
+                <a:cs typeface="Arial"/>
+              </a:defRPr>
+            </a:lvl7pPr>
+            <a:lvl8pPr>
+              <a:buNone/>
+              <a:defRPr sz="2100" b="1">
+                <a:solidFill>
+                  <a:srgbClr val="245844"/>
+                </a:solidFill>
+                <a:latin typeface="Arial"/>
+                <a:ea typeface="Arial"/>
+                <a:cs typeface="Arial"/>
+              </a:defRPr>
+            </a:lvl8pPr>
+            <a:lvl9pPr>
+              <a:buNone/>
+              <a:defRPr sz="2100" b="1">
+                <a:solidFill>
+                  <a:srgbClr val="245844"/>
+                </a:solidFill>
+                <a:latin typeface="Arial"/>
+                <a:ea typeface="Arial"/>
+                <a:cs typeface="Arial"/>
+              </a:defRPr>
+            </a:lvl9pPr>
+          </a:lstStyle>
+          <a:p xmlns:a="http://schemas.openxmlformats.org/drawingml/2006/main">
+            <a:pPr>
+              <a:buNone/>
+              <a:defRPr sz="2100" b="1">
+                <a:solidFill>
+                  <a:srgbClr val="245844"/>
+                </a:solidFill>
+                <a:latin typeface="Arial"/>
+                <a:ea typeface="Arial"/>
+                <a:cs typeface="Arial"/>
+              </a:defRPr>
+            </a:pPr>
+            <a:r>
+              <a:rPr sz="2100" b="1">
+                <a:solidFill>
+                  <a:srgbClr val="245844"/>
+                </a:solidFill>
+                <a:latin typeface="Arial"/>
+                <a:ea typeface="Arial"/>
+                <a:cs typeface="Arial"/>
+              </a:rPr>
+              <a:t>Majority baseline: always predicts rust. Accuracy 33.59%, macro-F1 16.76%.</a:t>
+            </a:r>
+          </a:p>
+        </p:txBody>
+      </p:sp>
+      <p:sp>
+        <p:nvSpPr>
+          <p:cNvPr id="6" name="">
+            <a:extLst xmlns:a="http://schemas.openxmlformats.org/drawingml/2006/main">
+              <a:ext uri="{FF2B5EF4-FFF2-40B4-BE49-F238E27FC236}">
+                <a16:creationId xmlns:a16="http://schemas.microsoft.com/office/drawing/2014/main" id="{381A758C-7DD7-408A-8E69-F315335EA77E}"/>
+              </a:ext>
+            </a:extLst>
+          </p:cNvPr>
+          <p:cNvSpPr>
+            <a:spLocks xmlns:a="http://schemas.openxmlformats.org/drawingml/2006/main" noGrp="1"/>
+          </p:cNvSpPr>
+          <p:nvPr/>
+        </p:nvSpPr>
+        <p:spPr>
+          <a:xfrm xmlns:a="http://schemas.openxmlformats.org/drawingml/2006/main">
+            <a:off x="609600" y="6048375"/>
+            <a:ext cx="10477500" cy="552450"/>
+          </a:xfrm>
+          <a:prstGeom xmlns:a="http://schemas.openxmlformats.org/drawingml/2006/main" prst="rect">
+            <a:avLst/>
+          </a:prstGeom>
+          <a:noFill xmlns:a="http://schemas.openxmlformats.org/drawingml/2006/main"/>
+          <a:ln xmlns:a="http://schemas.openxmlformats.org/drawingml/2006/main" w="0">
+            <a:noFill/>
+          </a:ln>
+        </p:spPr>
+        <p:txBody>
+          <a:bodyPr xmlns:a="http://schemas.openxmlformats.org/drawingml/2006/main" wrap="square" lIns="0" tIns="0" rIns="0" bIns="0" anchor="t">
+            <a:noAutofit/>
+          </a:bodyPr>
+          <a:lstStyle xmlns:a="http://schemas.openxmlformats.org/drawingml/2006/main">
+            <a:defPPr>
+              <a:defRPr sz="1725" b="0">
+                <a:solidFill>
+                  <a:srgbClr val="5D6864"/>
+                </a:solidFill>
+                <a:latin typeface="Arial"/>
+                <a:ea typeface="Arial"/>
+                <a:cs typeface="Arial"/>
+              </a:defRPr>
+            </a:defPPr>
+            <a:lvl1pPr>
+              <a:buNone/>
+              <a:defRPr sz="1725" b="0">
+                <a:solidFill>
+                  <a:srgbClr val="5D6864"/>
+                </a:solidFill>
+                <a:latin typeface="Arial"/>
+                <a:ea typeface="Arial"/>
+                <a:cs typeface="Arial"/>
+              </a:defRPr>
+            </a:lvl1pPr>
+            <a:lvl2pPr>
+              <a:buNone/>
+              <a:defRPr sz="1725" b="0">
+                <a:solidFill>
+                  <a:srgbClr val="5D6864"/>
+                </a:solidFill>
+                <a:latin typeface="Arial"/>
+                <a:ea typeface="Arial"/>
+                <a:cs typeface="Arial"/>
+              </a:defRPr>
+            </a:lvl2pPr>
+            <a:lvl3pPr>
+              <a:buNone/>
+              <a:defRPr sz="1725" b="0">
+                <a:solidFill>
+                  <a:srgbClr val="5D6864"/>
+                </a:solidFill>
+                <a:latin typeface="Arial"/>
+                <a:ea typeface="Arial"/>
+                <a:cs typeface="Arial"/>
+              </a:defRPr>
+            </a:lvl3pPr>
+            <a:lvl4pPr>
+              <a:buNone/>
+              <a:defRPr sz="1725" b="0">
+                <a:solidFill>
+                  <a:srgbClr val="5D6864"/>
+                </a:solidFill>
+                <a:latin typeface="Arial"/>
+                <a:ea typeface="Arial"/>
+                <a:cs typeface="Arial"/>
+              </a:defRPr>
+            </a:lvl4pPr>
+            <a:lvl5pPr>
+              <a:buNone/>
+              <a:defRPr sz="1725" b="0">
+                <a:solidFill>
+                  <a:srgbClr val="5D6864"/>
+                </a:solidFill>
+                <a:latin typeface="Arial"/>
+                <a:ea typeface="Arial"/>
+                <a:cs typeface="Arial"/>
+              </a:defRPr>
+            </a:lvl5pPr>
+            <a:lvl6pPr>
+              <a:buNone/>
+              <a:defRPr sz="1725" b="0">
+                <a:solidFill>
+                  <a:srgbClr val="5D6864"/>
+                </a:solidFill>
+                <a:latin typeface="Arial"/>
+                <a:ea typeface="Arial"/>
+                <a:cs typeface="Arial"/>
+              </a:defRPr>
+            </a:lvl6pPr>
+            <a:lvl7pPr>
+              <a:buNone/>
+              <a:defRPr sz="1725" b="0">
+                <a:solidFill>
+                  <a:srgbClr val="5D6864"/>
+                </a:solidFill>
+                <a:latin typeface="Arial"/>
+                <a:ea typeface="Arial"/>
+                <a:cs typeface="Arial"/>
+              </a:defRPr>
+            </a:lvl7pPr>
+            <a:lvl8pPr>
+              <a:buNone/>
+              <a:defRPr sz="1725" b="0">
+                <a:solidFill>
+                  <a:srgbClr val="5D6864"/>
+                </a:solidFill>
+                <a:latin typeface="Arial"/>
+                <a:ea typeface="Arial"/>
+                <a:cs typeface="Arial"/>
+              </a:defRPr>
+            </a:lvl8pPr>
+            <a:lvl9pPr>
+              <a:buNone/>
+              <a:defRPr sz="1725" b="0">
+                <a:solidFill>
+                  <a:srgbClr val="5D6864"/>
+                </a:solidFill>
+                <a:latin typeface="Arial"/>
+                <a:ea typeface="Arial"/>
+                <a:cs typeface="Arial"/>
+              </a:defRPr>
+            </a:lvl9pPr>
+          </a:lstStyle>
+          <a:p xmlns:a="http://schemas.openxmlformats.org/drawingml/2006/main">
+            <a:pPr>
+              <a:buNone/>
+              <a:defRPr sz="1725" b="0">
+                <a:solidFill>
+                  <a:srgbClr val="5D6864"/>
+                </a:solidFill>
+                <a:latin typeface="Arial"/>
+                <a:ea typeface="Arial"/>
+                <a:cs typeface="Arial"/>
+              </a:defRPr>
+            </a:pPr>
+            <a:r>
+              <a:rPr sz="1725" b="0">
+                <a:solidFill>
+                  <a:srgbClr val="5D6864"/>
+                </a:solidFill>
+                <a:latin typeface="Arial"/>
+                <a:ea typeface="Arial"/>
+                <a:cs typeface="Arial"/>
+              </a:rPr>
+              <a:t>Baseline class chosen from training counts. Class support: 43 leaf spot, 43 rust, 42 healthy.</a:t>
+            </a:r>
+          </a:p>
+          <a:p xmlns:a="http://schemas.openxmlformats.org/drawingml/2006/main">
+            <a:pPr>
+              <a:buNone/>
+              <a:defRPr sz="1725" b="0">
+                <a:solidFill>
+                  <a:srgbClr val="5D6864"/>
+                </a:solidFill>
+                <a:latin typeface="Arial"/>
+                <a:ea typeface="Arial"/>
+                <a:cs typeface="Arial"/>
+              </a:defRPr>
+            </a:pPr>
+            <a:r>
+              <a:rPr sz="1725" b="0">
+                <a:solidFill>
+                  <a:srgbClr val="5D6864"/>
+                </a:solidFill>
+                <a:latin typeface="Arial"/>
+                <a:ea typeface="Arial"/>
+                <a:cs typeface="Arial"/>
+              </a:rPr>
+              <a:t>These are one-seed results, not the three-seed averages.</a:t>
+            </a:r>
+          </a:p>
+        </p:txBody>
+      </p:sp>
+    </p:spTree>
+    <p:extLst>
+      <p:ext uri="{BB962C8B-B14F-4D97-AF65-F5344CB8AC3E}">
+        <p14:creationId xmlns:p14="http://schemas.microsoft.com/office/powerpoint/2010/main" val="1892612243"/>
+      </p:ext>
+    </p:extLst>
+  </p:cSld>
+</p:sld>
+</file>
+
+<file path=ppt/slides/slide13.xml><?xml version="1.0" encoding="utf-8"?>
+<p:sld xmlns:p="http://schemas.openxmlformats.org/presentationml/2006/main">
+  <p:cSld>
+    <p:bg>
+      <p:bgPr>
+        <a:solidFill xmlns:a="http://schemas.openxmlformats.org/drawingml/2006/main">
+          <a:srgbClr val="FFFFFF"/>
+        </a:solidFill>
+      </p:bgPr>
+    </p:bg>
+    <p:spTree>
+      <p:nvGrpSpPr>
+        <p:cNvPr id="1" name=""/>
+        <p:cNvGrpSpPr/>
+        <p:nvPr/>
+      </p:nvGrpSpPr>
+      <p:grpSpPr>
+        <a:xfrm xmlns:a="http://schemas.openxmlformats.org/drawingml/2006/main"/>
+      </p:grpSpPr>
+      <p:sp>
+        <p:nvSpPr>
+          <p:cNvPr id="7" name="">
+            <a:extLst xmlns:a="http://schemas.openxmlformats.org/drawingml/2006/main">
+              <a:ext uri="{FF2B5EF4-FFF2-40B4-BE49-F238E27FC236}">
+                <a16:creationId xmlns:a16="http://schemas.microsoft.com/office/drawing/2014/main" id="{43A03CDD-BA11-4C70-834F-1EB1B97C6902}"/>
+              </a:ext>
+            </a:extLst>
+          </p:cNvPr>
+          <p:cNvSpPr>
+            <a:spLocks xmlns:a="http://schemas.openxmlformats.org/drawingml/2006/main" noGrp="1"/>
+          </p:cNvSpPr>
+          <p:nvPr/>
+        </p:nvSpPr>
+        <p:spPr>
+          <a:xfrm xmlns:a="http://schemas.openxmlformats.org/drawingml/2006/main">
+            <a:off x="609600" y="400050"/>
+            <a:ext cx="10810875" cy="1028700"/>
+          </a:xfrm>
+          <a:prstGeom xmlns:a="http://schemas.openxmlformats.org/drawingml/2006/main" prst="rect">
+            <a:avLst/>
+          </a:prstGeom>
+          <a:noFill xmlns:a="http://schemas.openxmlformats.org/drawingml/2006/main"/>
+          <a:ln xmlns:a="http://schemas.openxmlformats.org/drawingml/2006/main" w="0">
+            <a:noFill/>
+          </a:ln>
+        </p:spPr>
+        <p:txBody>
+          <a:bodyPr xmlns:a="http://schemas.openxmlformats.org/drawingml/2006/main" wrap="square" lIns="0" tIns="0" rIns="0" bIns="0" anchor="t">
+            <a:noAutofit/>
+          </a:bodyPr>
+          <a:lstStyle xmlns:a="http://schemas.openxmlformats.org/drawingml/2006/main">
+            <a:defPPr>
+              <a:defRPr sz="3300" b="1">
+                <a:solidFill>
+                  <a:srgbClr val="22362F"/>
+                </a:solidFill>
+                <a:latin typeface="Arial"/>
+                <a:ea typeface="Arial"/>
+                <a:cs typeface="Arial"/>
+              </a:defRPr>
+            </a:defPPr>
+            <a:lvl1pPr>
+              <a:buNone/>
+              <a:defRPr sz="3300" b="1">
+                <a:solidFill>
+                  <a:srgbClr val="22362F"/>
+                </a:solidFill>
+                <a:latin typeface="Arial"/>
+                <a:ea typeface="Arial"/>
+                <a:cs typeface="Arial"/>
+              </a:defRPr>
+            </a:lvl1pPr>
+            <a:lvl2pPr>
+              <a:buNone/>
+              <a:defRPr sz="3300" b="1">
+                <a:solidFill>
+                  <a:srgbClr val="22362F"/>
+                </a:solidFill>
+                <a:latin typeface="Arial"/>
+                <a:ea typeface="Arial"/>
+                <a:cs typeface="Arial"/>
+              </a:defRPr>
+            </a:lvl2pPr>
+            <a:lvl3pPr>
+              <a:buNone/>
+              <a:defRPr sz="3300" b="1">
+                <a:solidFill>
+                  <a:srgbClr val="22362F"/>
+                </a:solidFill>
+                <a:latin typeface="Arial"/>
+                <a:ea typeface="Arial"/>
+                <a:cs typeface="Arial"/>
+              </a:defRPr>
+            </a:lvl3pPr>
+            <a:lvl4pPr>
+              <a:buNone/>
+              <a:defRPr sz="3300" b="1">
+                <a:solidFill>
+                  <a:srgbClr val="22362F"/>
+                </a:solidFill>
+                <a:latin typeface="Arial"/>
+                <a:ea typeface="Arial"/>
+                <a:cs typeface="Arial"/>
+              </a:defRPr>
+            </a:lvl4pPr>
+            <a:lvl5pPr>
+              <a:buNone/>
+              <a:defRPr sz="3300" b="1">
+                <a:solidFill>
+                  <a:srgbClr val="22362F"/>
+                </a:solidFill>
+                <a:latin typeface="Arial"/>
+                <a:ea typeface="Arial"/>
+                <a:cs typeface="Arial"/>
+              </a:defRPr>
+            </a:lvl5pPr>
+            <a:lvl6pPr>
+              <a:buNone/>
+              <a:defRPr sz="3300" b="1">
+                <a:solidFill>
+                  <a:srgbClr val="22362F"/>
+                </a:solidFill>
+                <a:latin typeface="Arial"/>
+                <a:ea typeface="Arial"/>
+                <a:cs typeface="Arial"/>
+              </a:defRPr>
+            </a:lvl6pPr>
+            <a:lvl7pPr>
+              <a:buNone/>
+              <a:defRPr sz="3300" b="1">
+                <a:solidFill>
+                  <a:srgbClr val="22362F"/>
+                </a:solidFill>
+                <a:latin typeface="Arial"/>
+                <a:ea typeface="Arial"/>
+                <a:cs typeface="Arial"/>
+              </a:defRPr>
+            </a:lvl7pPr>
+            <a:lvl8pPr>
+              <a:buNone/>
+              <a:defRPr sz="3300" b="1">
+                <a:solidFill>
+                  <a:srgbClr val="22362F"/>
+                </a:solidFill>
+                <a:latin typeface="Arial"/>
+                <a:ea typeface="Arial"/>
+                <a:cs typeface="Arial"/>
+              </a:defRPr>
+            </a:lvl8pPr>
+            <a:lvl9pPr>
+              <a:buNone/>
+              <a:defRPr sz="3300" b="1">
+                <a:solidFill>
+                  <a:srgbClr val="22362F"/>
+                </a:solidFill>
+                <a:latin typeface="Arial"/>
+                <a:ea typeface="Arial"/>
+                <a:cs typeface="Arial"/>
+              </a:defRPr>
+            </a:lvl9pPr>
+          </a:lstStyle>
+          <a:p xmlns:a="http://schemas.openxmlformats.org/drawingml/2006/main">
+            <a:pPr>
+              <a:buNone/>
+              <a:defRPr sz="3300" b="1">
+                <a:solidFill>
+                  <a:srgbClr val="22362F"/>
+                </a:solidFill>
+                <a:latin typeface="Arial"/>
+                <a:ea typeface="Arial"/>
+                <a:cs typeface="Arial"/>
+              </a:defRPr>
+            </a:pPr>
+            <a:r>
+              <a:rPr sz="3300" b="1">
+                <a:solidFill>
+                  <a:srgbClr val="22362F"/>
+                </a:solidFill>
+                <a:latin typeface="Arial"/>
+                <a:ea typeface="Arial"/>
+                <a:cs typeface="Arial"/>
+              </a:rPr>
+              <a:t>A small check under blur and darkening</a:t>
+            </a:r>
+          </a:p>
+        </p:txBody>
+      </p:sp>
+      <p:sp>
+        <p:nvSpPr>
+          <p:cNvPr id="2" name="">
+            <a:extLst xmlns:a="http://schemas.openxmlformats.org/drawingml/2006/main">
+              <a:ext uri="{FF2B5EF4-FFF2-40B4-BE49-F238E27FC236}">
+                <a16:creationId xmlns:a16="http://schemas.microsoft.com/office/drawing/2014/main" id="{9D2E01D1-19A4-409D-AA17-9C8DD4AEB049}"/>
+              </a:ext>
+            </a:extLst>
+          </p:cNvPr>
+          <p:cNvSpPr>
+            <a:spLocks xmlns:a="http://schemas.openxmlformats.org/drawingml/2006/main" noGrp="1"/>
+          </p:cNvSpPr>
+          <p:nvPr/>
+        </p:nvSpPr>
+        <p:spPr>
+          <a:xfrm xmlns:a="http://schemas.openxmlformats.org/drawingml/2006/main">
+            <a:off x="11144250" y="6381750"/>
+            <a:ext cx="438150" cy="228600"/>
+          </a:xfrm>
+          <a:prstGeom xmlns:a="http://schemas.openxmlformats.org/drawingml/2006/main" prst="rect">
+            <a:avLst/>
+          </a:prstGeom>
+          <a:noFill xmlns:a="http://schemas.openxmlformats.org/drawingml/2006/main"/>
+          <a:ln xmlns:a="http://schemas.openxmlformats.org/drawingml/2006/main" w="0">
+            <a:noFill/>
+          </a:ln>
+        </p:spPr>
+        <p:txBody>
+          <a:bodyPr xmlns:a="http://schemas.openxmlformats.org/drawingml/2006/main" wrap="square" lIns="0" tIns="0" rIns="0" bIns="0" anchor="t">
+            <a:noAutofit/>
+          </a:bodyPr>
+          <a:lstStyle xmlns:a="http://schemas.openxmlformats.org/drawingml/2006/main">
+            <a:defPPr>
+              <a:defRPr sz="1350" b="0">
+                <a:solidFill>
+                  <a:srgbClr val="5D6864"/>
+                </a:solidFill>
+                <a:latin typeface="Arial"/>
+                <a:ea typeface="Arial"/>
+                <a:cs typeface="Arial"/>
+              </a:defRPr>
+            </a:defPPr>
+            <a:lvl1pPr>
+              <a:buNone/>
+              <a:defRPr sz="1350" b="0">
+                <a:solidFill>
+                  <a:srgbClr val="5D6864"/>
+                </a:solidFill>
+                <a:latin typeface="Arial"/>
+                <a:ea typeface="Arial"/>
+                <a:cs typeface="Arial"/>
+              </a:defRPr>
+            </a:lvl1pPr>
+            <a:lvl2pPr>
+              <a:buNone/>
+              <a:defRPr sz="1350" b="0">
+                <a:solidFill>
+                  <a:srgbClr val="5D6864"/>
+                </a:solidFill>
+                <a:latin typeface="Arial"/>
+                <a:ea typeface="Arial"/>
+                <a:cs typeface="Arial"/>
+              </a:defRPr>
+            </a:lvl2pPr>
+            <a:lvl3pPr>
+              <a:buNone/>
+              <a:defRPr sz="1350" b="0">
+                <a:solidFill>
+                  <a:srgbClr val="5D6864"/>
+                </a:solidFill>
+                <a:latin typeface="Arial"/>
+                <a:ea typeface="Arial"/>
+                <a:cs typeface="Arial"/>
+              </a:defRPr>
+            </a:lvl3pPr>
+            <a:lvl4pPr>
+              <a:buNone/>
+              <a:defRPr sz="1350" b="0">
+                <a:solidFill>
+                  <a:srgbClr val="5D6864"/>
+                </a:solidFill>
+                <a:latin typeface="Arial"/>
+                <a:ea typeface="Arial"/>
+                <a:cs typeface="Arial"/>
+              </a:defRPr>
+            </a:lvl4pPr>
+            <a:lvl5pPr>
+              <a:buNone/>
+              <a:defRPr sz="1350" b="0">
+                <a:solidFill>
+                  <a:srgbClr val="5D6864"/>
+                </a:solidFill>
+                <a:latin typeface="Arial"/>
+                <a:ea typeface="Arial"/>
+                <a:cs typeface="Arial"/>
+              </a:defRPr>
+            </a:lvl5pPr>
+            <a:lvl6pPr>
+              <a:buNone/>
+              <a:defRPr sz="1350" b="0">
+                <a:solidFill>
+                  <a:srgbClr val="5D6864"/>
+                </a:solidFill>
+                <a:latin typeface="Arial"/>
+                <a:ea typeface="Arial"/>
+                <a:cs typeface="Arial"/>
+              </a:defRPr>
+            </a:lvl6pPr>
+            <a:lvl7pPr>
+              <a:buNone/>
+              <a:defRPr sz="1350" b="0">
+                <a:solidFill>
+                  <a:srgbClr val="5D6864"/>
+                </a:solidFill>
+                <a:latin typeface="Arial"/>
+                <a:ea typeface="Arial"/>
+                <a:cs typeface="Arial"/>
+              </a:defRPr>
+            </a:lvl7pPr>
+            <a:lvl8pPr>
+              <a:buNone/>
+              <a:defRPr sz="1350" b="0">
+                <a:solidFill>
+                  <a:srgbClr val="5D6864"/>
+                </a:solidFill>
+                <a:latin typeface="Arial"/>
+                <a:ea typeface="Arial"/>
+                <a:cs typeface="Arial"/>
+              </a:defRPr>
+            </a:lvl8pPr>
+            <a:lvl9pPr>
+              <a:buNone/>
+              <a:defRPr sz="1350" b="0">
+                <a:solidFill>
+                  <a:srgbClr val="5D6864"/>
+                </a:solidFill>
+                <a:latin typeface="Arial"/>
+                <a:ea typeface="Arial"/>
+                <a:cs typeface="Arial"/>
+              </a:defRPr>
+            </a:lvl9pPr>
+          </a:lstStyle>
+          <a:p xmlns:a="http://schemas.openxmlformats.org/drawingml/2006/main">
+            <a:pPr>
+              <a:buNone/>
+              <a:defRPr sz="1350" b="0">
+                <a:solidFill>
+                  <a:srgbClr val="5D6864"/>
+                </a:solidFill>
+                <a:latin typeface="Arial"/>
+                <a:ea typeface="Arial"/>
+                <a:cs typeface="Arial"/>
+              </a:defRPr>
+            </a:pPr>
+            <a:r>
+              <a:rPr sz="1350" b="0">
+                <a:solidFill>
+                  <a:srgbClr val="5D6864"/>
+                </a:solidFill>
+                <a:latin typeface="Arial"/>
+                <a:ea typeface="Arial"/>
+                <a:cs typeface="Arial"/>
+              </a:rPr>
+              <a:t>13</a:t>
+            </a:r>
+          </a:p>
+        </p:txBody>
+      </p:sp>
+      <p:sp>
+        <p:nvSpPr>
+          <p:cNvPr id="3" name="">
+            <a:extLst xmlns:a="http://schemas.openxmlformats.org/drawingml/2006/main">
+              <a:ext uri="{FF2B5EF4-FFF2-40B4-BE49-F238E27FC236}">
+                <a16:creationId xmlns:a16="http://schemas.microsoft.com/office/drawing/2014/main" id="{87E2D9A9-4ED1-46EE-9F09-E321600015F3}"/>
+              </a:ext>
+            </a:extLst>
+          </p:cNvPr>
+          <p:cNvSpPr>
+            <a:spLocks xmlns:a="http://schemas.openxmlformats.org/drawingml/2006/main" noGrp="1"/>
+          </p:cNvSpPr>
+          <p:nvPr/>
+        </p:nvSpPr>
+        <p:spPr>
+          <a:xfrm xmlns:a="http://schemas.openxmlformats.org/drawingml/2006/main">
+            <a:off x="609600" y="1066800"/>
+            <a:ext cx="10972800" cy="323850"/>
+          </a:xfrm>
+          <a:prstGeom xmlns:a="http://schemas.openxmlformats.org/drawingml/2006/main" prst="rect">
+            <a:avLst/>
+          </a:prstGeom>
+          <a:noFill xmlns:a="http://schemas.openxmlformats.org/drawingml/2006/main"/>
+          <a:ln xmlns:a="http://schemas.openxmlformats.org/drawingml/2006/main" w="0">
+            <a:noFill/>
+          </a:ln>
+        </p:spPr>
+        <p:txBody>
+          <a:bodyPr xmlns:a="http://schemas.openxmlformats.org/drawingml/2006/main" wrap="square" lIns="0" tIns="0" rIns="0" bIns="0" anchor="t">
+            <a:noAutofit/>
+          </a:bodyPr>
+          <a:lstStyle xmlns:a="http://schemas.openxmlformats.org/drawingml/2006/main">
+            <a:defPPr>
+              <a:defRPr sz="1875" b="0">
+                <a:solidFill>
+                  <a:srgbClr val="5D6864"/>
+                </a:solidFill>
+                <a:latin typeface="Arial"/>
+                <a:ea typeface="Arial"/>
+                <a:cs typeface="Arial"/>
+              </a:defRPr>
+            </a:defPPr>
+            <a:lvl1pPr>
+              <a:buNone/>
+              <a:defRPr sz="1875" b="0">
+                <a:solidFill>
+                  <a:srgbClr val="5D6864"/>
+                </a:solidFill>
+                <a:latin typeface="Arial"/>
+                <a:ea typeface="Arial"/>
+                <a:cs typeface="Arial"/>
+              </a:defRPr>
+            </a:lvl1pPr>
+            <a:lvl2pPr>
+              <a:buNone/>
+              <a:defRPr sz="1875" b="0">
+                <a:solidFill>
+                  <a:srgbClr val="5D6864"/>
+                </a:solidFill>
+                <a:latin typeface="Arial"/>
+                <a:ea typeface="Arial"/>
+                <a:cs typeface="Arial"/>
+              </a:defRPr>
+            </a:lvl2pPr>
+            <a:lvl3pPr>
+              <a:buNone/>
+              <a:defRPr sz="1875" b="0">
+                <a:solidFill>
+                  <a:srgbClr val="5D6864"/>
+                </a:solidFill>
+                <a:latin typeface="Arial"/>
+                <a:ea typeface="Arial"/>
+                <a:cs typeface="Arial"/>
+              </a:defRPr>
+            </a:lvl3pPr>
+            <a:lvl4pPr>
+              <a:buNone/>
+              <a:defRPr sz="1875" b="0">
+                <a:solidFill>
+                  <a:srgbClr val="5D6864"/>
+                </a:solidFill>
+                <a:latin typeface="Arial"/>
+                <a:ea typeface="Arial"/>
+                <a:cs typeface="Arial"/>
+              </a:defRPr>
+            </a:lvl4pPr>
+            <a:lvl5pPr>
+              <a:buNone/>
+              <a:defRPr sz="1875" b="0">
+                <a:solidFill>
+                  <a:srgbClr val="5D6864"/>
+                </a:solidFill>
+                <a:latin typeface="Arial"/>
+                <a:ea typeface="Arial"/>
+                <a:cs typeface="Arial"/>
+              </a:defRPr>
+            </a:lvl5pPr>
+            <a:lvl6pPr>
+              <a:buNone/>
+              <a:defRPr sz="1875" b="0">
+                <a:solidFill>
+                  <a:srgbClr val="5D6864"/>
+                </a:solidFill>
+                <a:latin typeface="Arial"/>
+                <a:ea typeface="Arial"/>
+                <a:cs typeface="Arial"/>
+              </a:defRPr>
+            </a:lvl6pPr>
+            <a:lvl7pPr>
+              <a:buNone/>
+              <a:defRPr sz="1875" b="0">
+                <a:solidFill>
+                  <a:srgbClr val="5D6864"/>
+                </a:solidFill>
+                <a:latin typeface="Arial"/>
+                <a:ea typeface="Arial"/>
+                <a:cs typeface="Arial"/>
+              </a:defRPr>
+            </a:lvl7pPr>
+            <a:lvl8pPr>
+              <a:buNone/>
+              <a:defRPr sz="1875" b="0">
+                <a:solidFill>
+                  <a:srgbClr val="5D6864"/>
+                </a:solidFill>
+                <a:latin typeface="Arial"/>
+                <a:ea typeface="Arial"/>
+                <a:cs typeface="Arial"/>
+              </a:defRPr>
+            </a:lvl8pPr>
+            <a:lvl9pPr>
+              <a:buNone/>
+              <a:defRPr sz="1875" b="0">
+                <a:solidFill>
+                  <a:srgbClr val="5D6864"/>
+                </a:solidFill>
+                <a:latin typeface="Arial"/>
+                <a:ea typeface="Arial"/>
+                <a:cs typeface="Arial"/>
+              </a:defRPr>
+            </a:lvl9pPr>
+          </a:lstStyle>
+          <a:p xmlns:a="http://schemas.openxmlformats.org/drawingml/2006/main">
+            <a:pPr>
+              <a:buNone/>
+              <a:defRPr sz="1875" b="0">
+                <a:solidFill>
+                  <a:srgbClr val="5D6864"/>
+                </a:solidFill>
+                <a:latin typeface="Arial"/>
+                <a:ea typeface="Arial"/>
+                <a:cs typeface="Arial"/>
+              </a:defRPr>
+            </a:pPr>
+            <a:r>
+              <a:rPr sz="1875" b="0">
+                <a:solidFill>
+                  <a:srgbClr val="5D6864"/>
+                </a:solidFill>
+                <a:latin typeface="Arial"/>
+                <a:ea typeface="Arial"/>
+                <a:cs typeface="Arial"/>
+              </a:rPr>
+              <a:t>Partial fine-tuning, reference seed 17, same 128 test images</a:t>
+            </a:r>
+          </a:p>
+        </p:txBody>
+      </p:sp>
+      <p:graphicFrame>
+        <p:nvGraphicFramePr>
+          <p:cNvPr id="4" name="">
+            <a:extLst xmlns:a="http://schemas.openxmlformats.org/drawingml/2006/main">
+              <a:ext uri="{FF2B5EF4-FFF2-40B4-BE49-F238E27FC236}">
+                <a16:creationId xmlns:a16="http://schemas.microsoft.com/office/drawing/2014/main" id="{B21B88CE-4489-4BC2-8774-542AE894C964}"/>
+              </a:ext>
+            </a:extLst>
+          </p:cNvPr>
+          <p:cNvGraphicFramePr/>
+          <p:nvPr/>
+        </p:nvGraphicFramePr>
+        <p:xfrm>
+          <a:off xmlns:a="http://schemas.openxmlformats.org/drawingml/2006/main" x="609600" y="1714500"/>
+          <a:ext xmlns:a="http://schemas.openxmlformats.org/drawingml/2006/main" cx="10972800" cy="2895600"/>
+        </p:xfrm>
+        <a:graphic xmlns:a="http://schemas.openxmlformats.org/drawingml/2006/main">
+          <a:graphicData uri="http://schemas.openxmlformats.org/drawingml/2006/table">
+            <a:tbl>
+              <a:tblPr/>
+              <a:tblGrid>
+                <a:gridCol w="4229100"/>
+                <a:gridCol w="3371850"/>
+                <a:gridCol w="3371850"/>
+              </a:tblGrid>
+              <a:tr h="723900">
+                <a:tc>
+                  <a:txBody>
+                    <a:bodyPr lIns="114300" tIns="114300" rIns="114300" bIns="114300"/>
+                    <a:lstStyle/>
+                    <a:p>
+                      <a:r>
+                        <a:rPr sz="1875" b="1">
+                          <a:solidFill>
+                            <a:srgbClr val="22362F"/>
+                          </a:solidFill>
+                          <a:latin typeface="Arial"/>
+                          <a:ea typeface="Arial"/>
+                          <a:cs typeface="Arial"/>
+                        </a:rPr>
+                        <a:t>Test condition</a:t>
+                      </a:r>
+                    </a:p>
+                  </a:txBody>
+                  <a:tcPr marL="91440" marR="91440" marT="45720" marB="45720" anchor="ctr">
+                    <a:solidFill>
+                      <a:srgbClr val="E8EEEB"/>
+                    </a:solidFill>
+                  </a:tcPr>
+                </a:tc>
+                <a:tc>
+                  <a:txBody>
+                    <a:bodyPr lIns="114300" tIns="114300" rIns="114300" bIns="114300"/>
+                    <a:lstStyle/>
+                    <a:p>
+                      <a:r>
+                        <a:rPr sz="1875" b="1">
+                          <a:solidFill>
+                            <a:srgbClr val="22362F"/>
+                          </a:solidFill>
+                          <a:latin typeface="Arial"/>
+                          <a:ea typeface="Arial"/>
+                          <a:cs typeface="Arial"/>
+                        </a:rPr>
+                        <a:t>DINOv2 macro-F1 (%)</a:t>
+                      </a:r>
+                    </a:p>
+                  </a:txBody>
+                  <a:tcPr marL="91440" marR="91440" marT="45720" marB="45720" anchor="ctr">
+                    <a:solidFill>
+                      <a:srgbClr val="E8EEEB"/>
+                    </a:solidFill>
+                  </a:tcPr>
+                </a:tc>
+                <a:tc>
+                  <a:txBody>
+                    <a:bodyPr lIns="114300" tIns="114300" rIns="114300" bIns="114300"/>
+                    <a:lstStyle/>
+                    <a:p>
+                      <a:r>
+                        <a:rPr sz="1875" b="1">
+                          <a:solidFill>
+                            <a:srgbClr val="22362F"/>
+                          </a:solidFill>
+                          <a:latin typeface="Arial"/>
+                          <a:ea typeface="Arial"/>
+                          <a:cs typeface="Arial"/>
+                        </a:rPr>
+                        <a:t>SigLIP 2 macro-F1 (%)</a:t>
+                      </a:r>
+                    </a:p>
+                  </a:txBody>
+                  <a:tcPr marL="91440" marR="91440" marT="45720" marB="45720" anchor="ctr">
+                    <a:solidFill>
+                      <a:srgbClr val="E8EEEB"/>
+                    </a:solidFill>
+                  </a:tcPr>
+                </a:tc>
+              </a:tr>
+              <a:tr h="723900">
+                <a:tc>
+                  <a:txBody>
+                    <a:bodyPr lIns="114300" tIns="114300" rIns="114300" bIns="114300"/>
+                    <a:lstStyle/>
+                    <a:p>
+                      <a:r>
+                        <a:rPr sz="1875" b="0">
+                          <a:solidFill>
+                            <a:srgbClr val="22362F"/>
+                          </a:solidFill>
+                          <a:latin typeface="Arial"/>
+                          <a:ea typeface="Arial"/>
+                          <a:cs typeface="Arial"/>
+                        </a:rPr>
+                        <a:t>Clean images</a:t>
+                      </a:r>
+                    </a:p>
+                  </a:txBody>
+                  <a:tcPr marL="91440" marR="91440" marT="45720" marB="45720" anchor="ctr">
+                    <a:solidFill>
+                      <a:srgbClr val="FFFFFF"/>
+                    </a:solidFill>
+                  </a:tcPr>
+                </a:tc>
+                <a:tc>
+                  <a:txBody>
+                    <a:bodyPr lIns="114300" tIns="114300" rIns="114300" bIns="114300"/>
+                    <a:lstStyle/>
+                    <a:p>
+                      <a:r>
+                        <a:rPr sz="1875" b="0">
+                          <a:solidFill>
+                            <a:srgbClr val="22362F"/>
+                          </a:solidFill>
+                          <a:latin typeface="Arial"/>
+                          <a:ea typeface="Arial"/>
+                          <a:cs typeface="Arial"/>
+                        </a:rPr>
+                        <a:t>98.45</a:t>
+                      </a:r>
+                    </a:p>
+                  </a:txBody>
+                  <a:tcPr marL="91440" marR="91440" marT="45720" marB="45720" anchor="ctr">
+                    <a:solidFill>
+                      <a:srgbClr val="FFFFFF"/>
+                    </a:solidFill>
+                  </a:tcPr>
+                </a:tc>
+                <a:tc>
+                  <a:txBody>
+                    <a:bodyPr lIns="114300" tIns="114300" rIns="114300" bIns="114300"/>
+                    <a:lstStyle/>
+                    <a:p>
+                      <a:r>
+                        <a:rPr sz="1875" b="0">
+                          <a:solidFill>
+                            <a:srgbClr val="22362F"/>
+                          </a:solidFill>
+                          <a:latin typeface="Arial"/>
+                          <a:ea typeface="Arial"/>
+                          <a:cs typeface="Arial"/>
+                        </a:rPr>
+                        <a:t>97.67</a:t>
+                      </a:r>
+                    </a:p>
+                  </a:txBody>
+                  <a:tcPr marL="91440" marR="91440" marT="45720" marB="45720" anchor="ctr">
+                    <a:solidFill>
+                      <a:srgbClr val="FFFFFF"/>
+                    </a:solidFill>
+                  </a:tcPr>
+                </a:tc>
+              </a:tr>
+              <a:tr h="723900">
+                <a:tc>
+                  <a:txBody>
+                    <a:bodyPr lIns="114300" tIns="114300" rIns="114300" bIns="114300"/>
+                    <a:lstStyle/>
+                    <a:p>
+                      <a:r>
+                        <a:rPr sz="1875" b="0">
+                          <a:solidFill>
+                            <a:srgbClr val="22362F"/>
+                          </a:solidFill>
+                          <a:latin typeface="Arial"/>
+                          <a:ea typeface="Arial"/>
+                          <a:cs typeface="Arial"/>
+                        </a:rPr>
+                        <a:t>Gaussian blur, radius 1</a:t>
+                      </a:r>
+                    </a:p>
+                  </a:txBody>
+                  <a:tcPr marL="91440" marR="91440" marT="45720" marB="45720" anchor="ctr">
+                    <a:solidFill>
+                      <a:srgbClr val="FFFFFF"/>
+                    </a:solidFill>
+                  </a:tcPr>
+                </a:tc>
+                <a:tc>
+                  <a:txBody>
+                    <a:bodyPr lIns="114300" tIns="114300" rIns="114300" bIns="114300"/>
+                    <a:lstStyle/>
+                    <a:p>
+                      <a:r>
+                        <a:rPr sz="1875" b="0">
+                          <a:solidFill>
+                            <a:srgbClr val="22362F"/>
+                          </a:solidFill>
+                          <a:latin typeface="Arial"/>
+                          <a:ea typeface="Arial"/>
+                          <a:cs typeface="Arial"/>
+                        </a:rPr>
+                        <a:t>97.67</a:t>
+                      </a:r>
+                    </a:p>
+                  </a:txBody>
+                  <a:tcPr marL="91440" marR="91440" marT="45720" marB="45720" anchor="ctr">
+                    <a:solidFill>
+                      <a:srgbClr val="FFFFFF"/>
+                    </a:solidFill>
+                  </a:tcPr>
+                </a:tc>
+                <a:tc>
+                  <a:txBody>
+                    <a:bodyPr lIns="114300" tIns="114300" rIns="114300" bIns="114300"/>
+                    <a:lstStyle/>
+                    <a:p>
+                      <a:r>
+                        <a:rPr sz="1875" b="0">
+                          <a:solidFill>
+                            <a:srgbClr val="22362F"/>
+                          </a:solidFill>
+                          <a:latin typeface="Arial"/>
+                          <a:ea typeface="Arial"/>
+                          <a:cs typeface="Arial"/>
+                        </a:rPr>
+                        <a:t>96.07</a:t>
+                      </a:r>
+                    </a:p>
+                  </a:txBody>
+                  <a:tcPr marL="91440" marR="91440" marT="45720" marB="45720" anchor="ctr">
+                    <a:solidFill>
+                      <a:srgbClr val="FFFFFF"/>
+                    </a:solidFill>
+                  </a:tcPr>
+                </a:tc>
+              </a:tr>
+              <a:tr h="723900">
+                <a:tc>
+                  <a:txBody>
+                    <a:bodyPr lIns="114300" tIns="114300" rIns="114300" bIns="114300"/>
+                    <a:lstStyle/>
+                    <a:p>
+                      <a:r>
+                        <a:rPr sz="1875" b="0">
+                          <a:solidFill>
+                            <a:srgbClr val="22362F"/>
+                          </a:solidFill>
+                          <a:latin typeface="Arial"/>
+                          <a:ea typeface="Arial"/>
+                          <a:cs typeface="Arial"/>
+                        </a:rPr>
+                        <a:t>Brightness × 0.7</a:t>
+                      </a:r>
+                    </a:p>
+                  </a:txBody>
+                  <a:tcPr marL="91440" marR="91440" marT="45720" marB="45720" anchor="ctr">
+                    <a:solidFill>
+                      <a:srgbClr val="FFFFFF"/>
+                    </a:solidFill>
+                  </a:tcPr>
+                </a:tc>
+                <a:tc>
+                  <a:txBody>
+                    <a:bodyPr lIns="114300" tIns="114300" rIns="114300" bIns="114300"/>
+                    <a:lstStyle/>
+                    <a:p>
+                      <a:r>
+                        <a:rPr sz="1875" b="0">
+                          <a:solidFill>
+                            <a:srgbClr val="22362F"/>
+                          </a:solidFill>
+                          <a:latin typeface="Arial"/>
+                          <a:ea typeface="Arial"/>
+                          <a:cs typeface="Arial"/>
+                        </a:rPr>
+                        <a:t>98.45</a:t>
+                      </a:r>
+                    </a:p>
+                  </a:txBody>
+                  <a:tcPr marL="91440" marR="91440" marT="45720" marB="45720" anchor="ctr">
+                    <a:solidFill>
+                      <a:srgbClr val="FFFFFF"/>
+                    </a:solidFill>
+                  </a:tcPr>
+                </a:tc>
+                <a:tc>
+                  <a:txBody>
+                    <a:bodyPr lIns="114300" tIns="114300" rIns="114300" bIns="114300"/>
+                    <a:lstStyle/>
+                    <a:p>
+                      <a:r>
+                        <a:rPr sz="1875" b="0">
+                          <a:solidFill>
+                            <a:srgbClr val="22362F"/>
+                          </a:solidFill>
+                          <a:latin typeface="Arial"/>
+                          <a:ea typeface="Arial"/>
+                          <a:cs typeface="Arial"/>
+                        </a:rPr>
+                        <a:t>97.67</a:t>
+                      </a:r>
+                    </a:p>
+                  </a:txBody>
+                  <a:tcPr marL="91440" marR="91440" marT="45720" marB="45720" anchor="ctr">
+                    <a:solidFill>
+                      <a:srgbClr val="FFFFFF"/>
+                    </a:solidFill>
+                  </a:tcPr>
+                </a:tc>
+              </a:tr>
+            </a:tbl>
+          </a:graphicData>
+        </a:graphic>
+      </p:graphicFrame>
+      <p:sp>
+        <p:nvSpPr>
+          <p:cNvPr id="5" name="">
+            <a:extLst xmlns:a="http://schemas.openxmlformats.org/drawingml/2006/main">
+              <a:ext uri="{FF2B5EF4-FFF2-40B4-BE49-F238E27FC236}">
+                <a16:creationId xmlns:a16="http://schemas.microsoft.com/office/drawing/2014/main" id="{D2A3B4DB-33DB-45D6-BDB8-0DDA2183EB1A}"/>
+              </a:ext>
+            </a:extLst>
+          </p:cNvPr>
+          <p:cNvSpPr>
+            <a:spLocks xmlns:a="http://schemas.openxmlformats.org/drawingml/2006/main" noGrp="1"/>
+          </p:cNvSpPr>
+          <p:nvPr/>
+        </p:nvSpPr>
+        <p:spPr>
+          <a:xfrm xmlns:a="http://schemas.openxmlformats.org/drawingml/2006/main">
+            <a:off x="609600" y="5048250"/>
+            <a:ext cx="10972800" cy="419100"/>
+          </a:xfrm>
+          <a:prstGeom xmlns:a="http://schemas.openxmlformats.org/drawingml/2006/main" prst="rect">
+            <a:avLst/>
+          </a:prstGeom>
+          <a:noFill xmlns:a="http://schemas.openxmlformats.org/drawingml/2006/main"/>
+          <a:ln xmlns:a="http://schemas.openxmlformats.org/drawingml/2006/main" w="0">
+            <a:noFill/>
+          </a:ln>
+        </p:spPr>
+        <p:txBody>
+          <a:bodyPr xmlns:a="http://schemas.openxmlformats.org/drawingml/2006/main" wrap="square" lIns="0" tIns="0" rIns="0" bIns="0" anchor="t">
+            <a:noAutofit/>
+          </a:bodyPr>
+          <a:lstStyle xmlns:a="http://schemas.openxmlformats.org/drawingml/2006/main">
+            <a:defPPr>
+              <a:defRPr sz="2325" b="1">
+                <a:solidFill>
+                  <a:srgbClr val="245844"/>
+                </a:solidFill>
+                <a:latin typeface="Arial"/>
+                <a:ea typeface="Arial"/>
+                <a:cs typeface="Arial"/>
+              </a:defRPr>
+            </a:defPPr>
+            <a:lvl1pPr>
+              <a:buNone/>
+              <a:defRPr sz="2325" b="1">
+                <a:solidFill>
+                  <a:srgbClr val="245844"/>
+                </a:solidFill>
+                <a:latin typeface="Arial"/>
+                <a:ea typeface="Arial"/>
+                <a:cs typeface="Arial"/>
+              </a:defRPr>
+            </a:lvl1pPr>
+            <a:lvl2pPr>
+              <a:buNone/>
+              <a:defRPr sz="2325" b="1">
+                <a:solidFill>
+                  <a:srgbClr val="245844"/>
+                </a:solidFill>
+                <a:latin typeface="Arial"/>
+                <a:ea typeface="Arial"/>
+                <a:cs typeface="Arial"/>
+              </a:defRPr>
+            </a:lvl2pPr>
+            <a:lvl3pPr>
+              <a:buNone/>
+              <a:defRPr sz="2325" b="1">
+                <a:solidFill>
+                  <a:srgbClr val="245844"/>
+                </a:solidFill>
+                <a:latin typeface="Arial"/>
+                <a:ea typeface="Arial"/>
+                <a:cs typeface="Arial"/>
+              </a:defRPr>
+            </a:lvl3pPr>
+            <a:lvl4pPr>
+              <a:buNone/>
+              <a:defRPr sz="2325" b="1">
+                <a:solidFill>
+                  <a:srgbClr val="245844"/>
+                </a:solidFill>
+                <a:latin typeface="Arial"/>
+                <a:ea typeface="Arial"/>
+                <a:cs typeface="Arial"/>
+              </a:defRPr>
+            </a:lvl4pPr>
+            <a:lvl5pPr>
+              <a:buNone/>
+              <a:defRPr sz="2325" b="1">
+                <a:solidFill>
+                  <a:srgbClr val="245844"/>
+                </a:solidFill>
+                <a:latin typeface="Arial"/>
+                <a:ea typeface="Arial"/>
+                <a:cs typeface="Arial"/>
+              </a:defRPr>
+            </a:lvl5pPr>
+            <a:lvl6pPr>
+              <a:buNone/>
+              <a:defRPr sz="2325" b="1">
+                <a:solidFill>
+                  <a:srgbClr val="245844"/>
+                </a:solidFill>
+                <a:latin typeface="Arial"/>
+                <a:ea typeface="Arial"/>
+                <a:cs typeface="Arial"/>
+              </a:defRPr>
+            </a:lvl6pPr>
+            <a:lvl7pPr>
+              <a:buNone/>
+              <a:defRPr sz="2325" b="1">
+                <a:solidFill>
+                  <a:srgbClr val="245844"/>
+                </a:solidFill>
+                <a:latin typeface="Arial"/>
+                <a:ea typeface="Arial"/>
+                <a:cs typeface="Arial"/>
+              </a:defRPr>
+            </a:lvl7pPr>
+            <a:lvl8pPr>
+              <a:buNone/>
+              <a:defRPr sz="2325" b="1">
+                <a:solidFill>
+                  <a:srgbClr val="245844"/>
+                </a:solidFill>
+                <a:latin typeface="Arial"/>
+                <a:ea typeface="Arial"/>
+                <a:cs typeface="Arial"/>
+              </a:defRPr>
+            </a:lvl8pPr>
+            <a:lvl9pPr>
+              <a:buNone/>
+              <a:defRPr sz="2325" b="1">
+                <a:solidFill>
+                  <a:srgbClr val="245844"/>
+                </a:solidFill>
+                <a:latin typeface="Arial"/>
+                <a:ea typeface="Arial"/>
+                <a:cs typeface="Arial"/>
+              </a:defRPr>
+            </a:lvl9pPr>
+          </a:lstStyle>
+          <a:p xmlns:a="http://schemas.openxmlformats.org/drawingml/2006/main">
+            <a:pPr>
+              <a:buNone/>
+              <a:defRPr sz="2325" b="1">
+                <a:solidFill>
+                  <a:srgbClr val="245844"/>
+                </a:solidFill>
+                <a:latin typeface="Arial"/>
+                <a:ea typeface="Arial"/>
+                <a:cs typeface="Arial"/>
+              </a:defRPr>
+            </a:pPr>
+            <a:r>
+              <a:rPr sz="2325" b="1">
+                <a:solidFill>
+                  <a:srgbClr val="245844"/>
+                </a:solidFill>
+                <a:latin typeface="Arial"/>
+                <a:ea typeface="Arial"/>
+                <a:cs typeface="Arial"/>
+              </a:rPr>
+              <a:t>Both models lost some F1 under blur.</a:t>
+            </a:r>
+          </a:p>
+        </p:txBody>
+      </p:sp>
+      <p:sp>
+        <p:nvSpPr>
+          <p:cNvPr id="6" name="">
+            <a:extLst xmlns:a="http://schemas.openxmlformats.org/drawingml/2006/main">
+              <a:ext uri="{FF2B5EF4-FFF2-40B4-BE49-F238E27FC236}">
+                <a16:creationId xmlns:a16="http://schemas.microsoft.com/office/drawing/2014/main" id="{F87C585E-2C29-41CA-BD50-BE0BD27FFA12}"/>
+              </a:ext>
+            </a:extLst>
+          </p:cNvPr>
+          <p:cNvSpPr>
+            <a:spLocks xmlns:a="http://schemas.openxmlformats.org/drawingml/2006/main" noGrp="1"/>
+          </p:cNvSpPr>
+          <p:nvPr/>
+        </p:nvSpPr>
+        <p:spPr>
+          <a:xfrm xmlns:a="http://schemas.openxmlformats.org/drawingml/2006/main">
+            <a:off x="609600" y="6048375"/>
+            <a:ext cx="10477500" cy="552450"/>
+          </a:xfrm>
+          <a:prstGeom xmlns:a="http://schemas.openxmlformats.org/drawingml/2006/main" prst="rect">
+            <a:avLst/>
+          </a:prstGeom>
+          <a:noFill xmlns:a="http://schemas.openxmlformats.org/drawingml/2006/main"/>
+          <a:ln xmlns:a="http://schemas.openxmlformats.org/drawingml/2006/main" w="0">
+            <a:noFill/>
+          </a:ln>
+        </p:spPr>
+        <p:txBody>
+          <a:bodyPr xmlns:a="http://schemas.openxmlformats.org/drawingml/2006/main" wrap="square" lIns="0" tIns="0" rIns="0" bIns="0" anchor="t">
+            <a:noAutofit/>
+          </a:bodyPr>
+          <a:lstStyle xmlns:a="http://schemas.openxmlformats.org/drawingml/2006/main">
+            <a:defPPr>
+              <a:defRPr sz="1725" b="0">
+                <a:solidFill>
+                  <a:srgbClr val="5D6864"/>
+                </a:solidFill>
+                <a:latin typeface="Arial"/>
+                <a:ea typeface="Arial"/>
+                <a:cs typeface="Arial"/>
+              </a:defRPr>
+            </a:defPPr>
+            <a:lvl1pPr>
+              <a:buNone/>
+              <a:defRPr sz="1725" b="0">
+                <a:solidFill>
+                  <a:srgbClr val="5D6864"/>
+                </a:solidFill>
+                <a:latin typeface="Arial"/>
+                <a:ea typeface="Arial"/>
+                <a:cs typeface="Arial"/>
+              </a:defRPr>
+            </a:lvl1pPr>
+            <a:lvl2pPr>
+              <a:buNone/>
+              <a:defRPr sz="1725" b="0">
+                <a:solidFill>
+                  <a:srgbClr val="5D6864"/>
+                </a:solidFill>
+                <a:latin typeface="Arial"/>
+                <a:ea typeface="Arial"/>
+                <a:cs typeface="Arial"/>
+              </a:defRPr>
+            </a:lvl2pPr>
+            <a:lvl3pPr>
+              <a:buNone/>
+              <a:defRPr sz="1725" b="0">
+                <a:solidFill>
+                  <a:srgbClr val="5D6864"/>
+                </a:solidFill>
+                <a:latin typeface="Arial"/>
+                <a:ea typeface="Arial"/>
+                <a:cs typeface="Arial"/>
+              </a:defRPr>
+            </a:lvl3pPr>
+            <a:lvl4pPr>
+              <a:buNone/>
+              <a:defRPr sz="1725" b="0">
+                <a:solidFill>
+                  <a:srgbClr val="5D6864"/>
+                </a:solidFill>
+                <a:latin typeface="Arial"/>
+                <a:ea typeface="Arial"/>
+                <a:cs typeface="Arial"/>
+              </a:defRPr>
+            </a:lvl4pPr>
+            <a:lvl5pPr>
+              <a:buNone/>
+              <a:defRPr sz="1725" b="0">
+                <a:solidFill>
+                  <a:srgbClr val="5D6864"/>
+                </a:solidFill>
+                <a:latin typeface="Arial"/>
+                <a:ea typeface="Arial"/>
+                <a:cs typeface="Arial"/>
+              </a:defRPr>
+            </a:lvl5pPr>
+            <a:lvl6pPr>
+              <a:buNone/>
+              <a:defRPr sz="1725" b="0">
+                <a:solidFill>
+                  <a:srgbClr val="5D6864"/>
+                </a:solidFill>
+                <a:latin typeface="Arial"/>
+                <a:ea typeface="Arial"/>
+                <a:cs typeface="Arial"/>
+              </a:defRPr>
+            </a:lvl6pPr>
+            <a:lvl7pPr>
+              <a:buNone/>
+              <a:defRPr sz="1725" b="0">
+                <a:solidFill>
+                  <a:srgbClr val="5D6864"/>
+                </a:solidFill>
+                <a:latin typeface="Arial"/>
+                <a:ea typeface="Arial"/>
+                <a:cs typeface="Arial"/>
+              </a:defRPr>
+            </a:lvl7pPr>
+            <a:lvl8pPr>
+              <a:buNone/>
+              <a:defRPr sz="1725" b="0">
+                <a:solidFill>
+                  <a:srgbClr val="5D6864"/>
+                </a:solidFill>
+                <a:latin typeface="Arial"/>
+                <a:ea typeface="Arial"/>
+                <a:cs typeface="Arial"/>
+              </a:defRPr>
+            </a:lvl8pPr>
+            <a:lvl9pPr>
+              <a:buNone/>
+              <a:defRPr sz="1725" b="0">
+                <a:solidFill>
+                  <a:srgbClr val="5D6864"/>
+                </a:solidFill>
+                <a:latin typeface="Arial"/>
+                <a:ea typeface="Arial"/>
+                <a:cs typeface="Arial"/>
+              </a:defRPr>
+            </a:lvl9pPr>
+          </a:lstStyle>
+          <a:p xmlns:a="http://schemas.openxmlformats.org/drawingml/2006/main">
+            <a:pPr>
+              <a:buNone/>
+              <a:defRPr sz="1725" b="0">
+                <a:solidFill>
+                  <a:srgbClr val="5D6864"/>
+                </a:solidFill>
+                <a:latin typeface="Arial"/>
+                <a:ea typeface="Arial"/>
+                <a:cs typeface="Arial"/>
+              </a:defRPr>
+            </a:pPr>
+            <a:r>
+              <a:rPr sz="1725" b="0">
+                <a:solidFill>
+                  <a:srgbClr val="5D6864"/>
+                </a:solidFill>
+                <a:latin typeface="Arial"/>
+                <a:ea typeface="Arial"/>
+                <a:cs typeface="Arial"/>
+              </a:rPr>
+              <a:t>One synthetic severity per condition. This does not test new farms, devices or seasons.</a:t>
+            </a:r>
+          </a:p>
+        </p:txBody>
+      </p:sp>
+    </p:spTree>
+    <p:extLst>
+      <p:ext uri="{BB962C8B-B14F-4D97-AF65-F5344CB8AC3E}">
+        <p14:creationId xmlns:p14="http://schemas.microsoft.com/office/powerpoint/2010/main" val="46951431"/>
+      </p:ext>
+    </p:extLst>
+  </p:cSld>
+</p:sld>
+</file>
+
+<file path=ppt/slides/slide14.xml><?xml version="1.0" encoding="utf-8"?>
+<p:sld xmlns:p="http://schemas.openxmlformats.org/presentationml/2006/main">
+  <p:cSld>
+    <p:bg>
+      <p:bgPr>
+        <a:solidFill xmlns:a="http://schemas.openxmlformats.org/drawingml/2006/main">
+          <a:srgbClr val="FFFFFF"/>
+        </a:solidFill>
+      </p:bgPr>
+    </p:bg>
+    <p:spTree>
+      <p:nvGrpSpPr>
+        <p:cNvPr id="1" name=""/>
+        <p:cNvGrpSpPr/>
+        <p:nvPr/>
+      </p:nvGrpSpPr>
+      <p:grpSpPr>
+        <a:xfrm xmlns:a="http://schemas.openxmlformats.org/drawingml/2006/main"/>
+      </p:grpSpPr>
+      <p:sp>
+        <p:nvSpPr>
           <p:cNvPr id="12" name="">
             <a:extLst xmlns:a="http://schemas.openxmlformats.org/drawingml/2006/main">
               <a:ext uri="{FF2B5EF4-FFF2-40B4-BE49-F238E27FC236}">
@@ -8602,7 +11665,7 @@
                 <a:ea typeface="Arial"/>
                 <a:cs typeface="Arial"/>
               </a:rPr>
-              <a:t>12</a:t>
+              <a:t>14</a:t>
             </a:r>
           </a:p>
         </p:txBody>
@@ -10585,7 +13648,7 @@
           <p:cNvPr id="3" name="">
             <a:extLst xmlns:a="http://schemas.openxmlformats.org/drawingml/2006/main">
               <a:ext uri="{FF2B5EF4-FFF2-40B4-BE49-F238E27FC236}">
-                <a16:creationId xmlns:a16="http://schemas.microsoft.com/office/drawing/2014/main" id="{60387B6D-33B1-4FED-898B-F684C625CDBA}"/>
+                <a16:creationId xmlns:a16="http://schemas.microsoft.com/office/drawing/2014/main" id="{E22F2883-697D-4498-80DC-FE4271742052}"/>
               </a:ext>
             </a:extLst>
           </p:cNvPr>
@@ -10595,7 +13658,7 @@
           <p:nvPr/>
         </p:nvPicPr>
         <p:blipFill>
-          <a:blip xmlns:r="http://schemas.openxmlformats.org/officeDocument/2006/relationships" xmlns:a="http://schemas.openxmlformats.org/drawingml/2006/main" r:embed="Rb564bdb301654255"/>
+          <a:blip xmlns:r="http://schemas.openxmlformats.org/officeDocument/2006/relationships" xmlns:a="http://schemas.openxmlformats.org/drawingml/2006/main" r:embed="R2eb562a5f91f4ede"/>
           <a:stretch xmlns:a="http://schemas.openxmlformats.org/drawingml/2006/main"/>
         </p:blipFill>
         <p:spPr>
@@ -10781,7 +13844,7 @@
           <p:cNvPr id="5" name="">
             <a:extLst xmlns:a="http://schemas.openxmlformats.org/drawingml/2006/main">
               <a:ext uri="{FF2B5EF4-FFF2-40B4-BE49-F238E27FC236}">
-                <a16:creationId xmlns:a16="http://schemas.microsoft.com/office/drawing/2014/main" id="{8D7227BC-DE61-4EE9-9689-7C229F078E8A}"/>
+                <a16:creationId xmlns:a16="http://schemas.microsoft.com/office/drawing/2014/main" id="{B25D1CFE-E9A6-420F-BAB5-A48DAAE96EF9}"/>
               </a:ext>
             </a:extLst>
           </p:cNvPr>
@@ -10791,7 +13854,7 @@
           <p:nvPr/>
         </p:nvPicPr>
         <p:blipFill>
-          <a:blip xmlns:r="http://schemas.openxmlformats.org/officeDocument/2006/relationships" xmlns:a="http://schemas.openxmlformats.org/drawingml/2006/main" r:embed="R3488bdc89575479b"/>
+          <a:blip xmlns:r="http://schemas.openxmlformats.org/officeDocument/2006/relationships" xmlns:a="http://schemas.openxmlformats.org/drawingml/2006/main" r:embed="R1d0f5cf8d8c34318"/>
           <a:stretch xmlns:a="http://schemas.openxmlformats.org/drawingml/2006/main"/>
         </p:blipFill>
         <p:spPr>
@@ -10977,7 +14040,7 @@
           <p:cNvPr id="7" name="">
             <a:extLst xmlns:a="http://schemas.openxmlformats.org/drawingml/2006/main">
               <a:ext uri="{FF2B5EF4-FFF2-40B4-BE49-F238E27FC236}">
-                <a16:creationId xmlns:a16="http://schemas.microsoft.com/office/drawing/2014/main" id="{03024481-2EEC-4782-A7BA-D4DDB00D275E}"/>
+                <a16:creationId xmlns:a16="http://schemas.microsoft.com/office/drawing/2014/main" id="{1C9B3888-CD77-48FB-82C8-62597AE4203B}"/>
               </a:ext>
             </a:extLst>
           </p:cNvPr>
@@ -10987,7 +14050,7 @@
           <p:nvPr/>
         </p:nvPicPr>
         <p:blipFill>
-          <a:blip xmlns:r="http://schemas.openxmlformats.org/officeDocument/2006/relationships" xmlns:a="http://schemas.openxmlformats.org/drawingml/2006/main" r:embed="R22edbfc17ae84613"/>
+          <a:blip xmlns:r="http://schemas.openxmlformats.org/officeDocument/2006/relationships" xmlns:a="http://schemas.openxmlformats.org/drawingml/2006/main" r:embed="R24166e1ed18f471e"/>
           <a:stretch xmlns:a="http://schemas.openxmlformats.org/drawingml/2006/main"/>
         </p:blipFill>
         <p:spPr>
@@ -11689,7 +14752,7 @@
         <p:spPr>
           <a:xfrm xmlns:a="http://schemas.openxmlformats.org/drawingml/2006/main">
             <a:off x="609600" y="6048375"/>
-            <a:ext cx="10287000" cy="552450"/>
+            <a:ext cx="10477500" cy="552450"/>
           </a:xfrm>
           <a:prstGeom xmlns:a="http://schemas.openxmlformats.org/drawingml/2006/main" prst="rect">
             <a:avLst/>
@@ -11814,6 +14877,30 @@
               </a:defRPr>
             </a:lvl9pPr>
           </a:lstStyle>
+          <a:p xmlns:a="http://schemas.openxmlformats.org/drawingml/2006/main">
+            <a:pPr>
+              <a:buNone/>
+              <a:defRPr sz="1725" b="0">
+                <a:solidFill>
+                  <a:srgbClr val="5D6864"/>
+                </a:solidFill>
+                <a:latin typeface="Arial"/>
+                <a:ea typeface="Arial"/>
+                <a:cs typeface="Arial"/>
+              </a:defRPr>
+            </a:pPr>
+            <a:r>
+              <a:rPr sz="1725" b="0">
+                <a:solidFill>
+                  <a:srgbClr val="5D6864"/>
+                </a:solidFill>
+                <a:latin typeface="Arial"/>
+                <a:ea typeface="Arial"/>
+                <a:cs typeface="Arial"/>
+              </a:rPr>
+              <a:t>Small, expert-labelled field dataset: practical for transfer learning.</a:t>
+            </a:r>
+          </a:p>
           <a:p xmlns:a="http://schemas.openxmlformats.org/drawingml/2006/main">
             <a:pPr>
               <a:buNone/>
@@ -11883,6 +14970,7 @@
               </a:defRPr>
             </a:defPPr>
             <a:lvl1pPr>
+              <a:buNone/>
               <a:defRPr sz="1725" b="0">
                 <a:solidFill>
                   <a:srgbClr val="5D6864"/>
@@ -11893,6 +14981,7 @@
               </a:defRPr>
             </a:lvl1pPr>
             <a:lvl2pPr>
+              <a:buNone/>
               <a:defRPr sz="1725" b="0">
                 <a:solidFill>
                   <a:srgbClr val="5D6864"/>
@@ -11903,6 +14992,7 @@
               </a:defRPr>
             </a:lvl2pPr>
             <a:lvl3pPr>
+              <a:buNone/>
               <a:defRPr sz="1725" b="0">
                 <a:solidFill>
                   <a:srgbClr val="5D6864"/>
@@ -11913,6 +15003,7 @@
               </a:defRPr>
             </a:lvl3pPr>
             <a:lvl4pPr>
+              <a:buNone/>
               <a:defRPr sz="1725" b="0">
                 <a:solidFill>
                   <a:srgbClr val="5D6864"/>
@@ -11923,6 +15014,7 @@
               </a:defRPr>
             </a:lvl4pPr>
             <a:lvl5pPr>
+              <a:buNone/>
               <a:defRPr sz="1725" b="0">
                 <a:solidFill>
                   <a:srgbClr val="5D6864"/>
@@ -11933,6 +15025,7 @@
               </a:defRPr>
             </a:lvl5pPr>
             <a:lvl6pPr>
+              <a:buNone/>
               <a:defRPr sz="1725" b="0">
                 <a:solidFill>
                   <a:srgbClr val="5D6864"/>
@@ -11943,6 +15036,7 @@
               </a:defRPr>
             </a:lvl6pPr>
             <a:lvl7pPr>
+              <a:buNone/>
               <a:defRPr sz="1725" b="0">
                 <a:solidFill>
                   <a:srgbClr val="5D6864"/>
@@ -11953,6 +15047,7 @@
               </a:defRPr>
             </a:lvl7pPr>
             <a:lvl8pPr>
+              <a:buNone/>
               <a:defRPr sz="1725" b="0">
                 <a:solidFill>
                   <a:srgbClr val="5D6864"/>
@@ -11963,6 +15058,7 @@
               </a:defRPr>
             </a:lvl8pPr>
             <a:lvl9pPr>
+              <a:buNone/>
               <a:defRPr sz="1725" b="0">
                 <a:solidFill>
                   <a:srgbClr val="5D6864"/>
@@ -11975,6 +15071,7 @@
           </a:lstStyle>
           <a:p xmlns:a="http://schemas.openxmlformats.org/drawingml/2006/main">
             <a:pPr>
+              <a:buNone/>
               <a:defRPr sz="1725" b="0">
                 <a:solidFill>
                   <a:srgbClr val="5D6864"/>
@@ -12368,7 +15465,7 @@
           <p:cNvPr id="3" name="">
             <a:extLst xmlns:a="http://schemas.openxmlformats.org/drawingml/2006/main">
               <a:ext uri="{FF2B5EF4-FFF2-40B4-BE49-F238E27FC236}">
-                <a16:creationId xmlns:a16="http://schemas.microsoft.com/office/drawing/2014/main" id="{ED48927E-5E93-4FD7-B539-82169634C83E}"/>
+                <a16:creationId xmlns:a16="http://schemas.microsoft.com/office/drawing/2014/main" id="{213BAD8B-02FF-45EE-9FD1-13E1C588120B}"/>
               </a:ext>
             </a:extLst>
           </p:cNvPr>
@@ -13611,7 +16708,7 @@
         <p:spPr>
           <a:xfrm xmlns:a="http://schemas.openxmlformats.org/drawingml/2006/main">
             <a:off x="609600" y="6048375"/>
-            <a:ext cx="10287000" cy="552450"/>
+            <a:ext cx="10572750" cy="552450"/>
           </a:xfrm>
           <a:prstGeom xmlns:a="http://schemas.openxmlformats.org/drawingml/2006/main" prst="rect">
             <a:avLst/>
@@ -13757,7 +16854,7 @@
                 <a:ea typeface="Arial"/>
                 <a:cs typeface="Arial"/>
               </a:rPr>
-              <a:t>Two models × two settings × three seeds = 12 runs.</a:t>
+              <a:t>Published B/16-224 ImageNet zero-shot: SigLIP 2 78.2% versus original SigLIP 76.2%.</a:t>
             </a:r>
           </a:p>
           <a:p xmlns:a="http://schemas.openxmlformats.org/drawingml/2006/main">
@@ -13781,7 +16878,7 @@
                 <a:ea typeface="Arial"/>
                 <a:cs typeface="Arial"/>
               </a:rPr>
-              <a:t>Validation selected each checkpoint. All runs fit a 4 GB GPU.</a:t>
+              <a:t>This motivated selection. Our experiment uses images and supervised labels.</a:t>
             </a:r>
           </a:p>
         </p:txBody>
@@ -13829,6 +16926,7 @@
               </a:defRPr>
             </a:defPPr>
             <a:lvl1pPr>
+              <a:buNone/>
               <a:defRPr sz="2025" b="0">
                 <a:solidFill>
                   <a:srgbClr val="22362F"/>
@@ -13839,6 +16937,7 @@
               </a:defRPr>
             </a:lvl1pPr>
             <a:lvl2pPr>
+              <a:buNone/>
               <a:defRPr sz="2025" b="0">
                 <a:solidFill>
                   <a:srgbClr val="22362F"/>
@@ -13849,6 +16948,7 @@
               </a:defRPr>
             </a:lvl2pPr>
             <a:lvl3pPr>
+              <a:buNone/>
               <a:defRPr sz="2025" b="0">
                 <a:solidFill>
                   <a:srgbClr val="22362F"/>
@@ -13859,6 +16959,7 @@
               </a:defRPr>
             </a:lvl3pPr>
             <a:lvl4pPr>
+              <a:buNone/>
               <a:defRPr sz="2025" b="0">
                 <a:solidFill>
                   <a:srgbClr val="22362F"/>
@@ -13869,6 +16970,7 @@
               </a:defRPr>
             </a:lvl4pPr>
             <a:lvl5pPr>
+              <a:buNone/>
               <a:defRPr sz="2025" b="0">
                 <a:solidFill>
                   <a:srgbClr val="22362F"/>
@@ -13879,6 +16981,7 @@
               </a:defRPr>
             </a:lvl5pPr>
             <a:lvl6pPr>
+              <a:buNone/>
               <a:defRPr sz="2025" b="0">
                 <a:solidFill>
                   <a:srgbClr val="22362F"/>
@@ -13889,6 +16992,7 @@
               </a:defRPr>
             </a:lvl6pPr>
             <a:lvl7pPr>
+              <a:buNone/>
               <a:defRPr sz="2025" b="0">
                 <a:solidFill>
                   <a:srgbClr val="22362F"/>
@@ -13899,6 +17003,7 @@
               </a:defRPr>
             </a:lvl7pPr>
             <a:lvl8pPr>
+              <a:buNone/>
               <a:defRPr sz="2025" b="0">
                 <a:solidFill>
                   <a:srgbClr val="22362F"/>
@@ -13909,6 +17014,7 @@
               </a:defRPr>
             </a:lvl8pPr>
             <a:lvl9pPr>
+              <a:buNone/>
               <a:defRPr sz="2025" b="0">
                 <a:solidFill>
                   <a:srgbClr val="22362F"/>
@@ -13921,6 +17027,7 @@
           </a:lstStyle>
           <a:p xmlns:a="http://schemas.openxmlformats.org/drawingml/2006/main">
             <a:pPr>
+              <a:buNone/>
               <a:defRPr sz="2025" b="0">
                 <a:solidFill>
                   <a:srgbClr val="22362F"/>
@@ -13987,6 +17094,7 @@
               </a:defRPr>
             </a:defPPr>
             <a:lvl1pPr>
+              <a:buNone/>
               <a:defRPr sz="2025" b="0">
                 <a:solidFill>
                   <a:srgbClr val="22362F"/>
@@ -13997,6 +17105,7 @@
               </a:defRPr>
             </a:lvl1pPr>
             <a:lvl2pPr>
+              <a:buNone/>
               <a:defRPr sz="2025" b="0">
                 <a:solidFill>
                   <a:srgbClr val="22362F"/>
@@ -14007,6 +17116,7 @@
               </a:defRPr>
             </a:lvl2pPr>
             <a:lvl3pPr>
+              <a:buNone/>
               <a:defRPr sz="2025" b="0">
                 <a:solidFill>
                   <a:srgbClr val="22362F"/>
@@ -14017,6 +17127,7 @@
               </a:defRPr>
             </a:lvl3pPr>
             <a:lvl4pPr>
+              <a:buNone/>
               <a:defRPr sz="2025" b="0">
                 <a:solidFill>
                   <a:srgbClr val="22362F"/>
@@ -14027,6 +17138,7 @@
               </a:defRPr>
             </a:lvl4pPr>
             <a:lvl5pPr>
+              <a:buNone/>
               <a:defRPr sz="2025" b="0">
                 <a:solidFill>
                   <a:srgbClr val="22362F"/>
@@ -14037,6 +17149,7 @@
               </a:defRPr>
             </a:lvl5pPr>
             <a:lvl6pPr>
+              <a:buNone/>
               <a:defRPr sz="2025" b="0">
                 <a:solidFill>
                   <a:srgbClr val="22362F"/>
@@ -14047,6 +17160,7 @@
               </a:defRPr>
             </a:lvl6pPr>
             <a:lvl7pPr>
+              <a:buNone/>
               <a:defRPr sz="2025" b="0">
                 <a:solidFill>
                   <a:srgbClr val="22362F"/>
@@ -14057,6 +17171,7 @@
               </a:defRPr>
             </a:lvl7pPr>
             <a:lvl8pPr>
+              <a:buNone/>
               <a:defRPr sz="2025" b="0">
                 <a:solidFill>
                   <a:srgbClr val="22362F"/>
@@ -14067,6 +17182,7 @@
               </a:defRPr>
             </a:lvl8pPr>
             <a:lvl9pPr>
+              <a:buNone/>
               <a:defRPr sz="2025" b="0">
                 <a:solidFill>
                   <a:srgbClr val="22362F"/>
@@ -14079,6 +17195,7 @@
           </a:lstStyle>
           <a:p xmlns:a="http://schemas.openxmlformats.org/drawingml/2006/main">
             <a:pPr>
+              <a:buNone/>
               <a:defRPr sz="2025" b="0">
                 <a:solidFill>
                   <a:srgbClr val="22362F"/>
@@ -14098,6 +17215,174 @@
                 <a:cs typeface="Arial"/>
               </a:rPr>
               <a:t>Classifier: uses those values to predict one of three labels.</a:t>
+            </a:r>
+          </a:p>
+        </p:txBody>
+      </p:sp>
+      <p:sp>
+        <p:nvSpPr>
+          <p:cNvPr id="12" name="">
+            <a:extLst xmlns:a="http://schemas.openxmlformats.org/drawingml/2006/main">
+              <a:ext uri="{FF2B5EF4-FFF2-40B4-BE49-F238E27FC236}">
+                <a16:creationId xmlns:a16="http://schemas.microsoft.com/office/drawing/2014/main" id="{7C493F9E-5A60-4ABD-BD0D-BA5D44D04A53}"/>
+              </a:ext>
+            </a:extLst>
+          </p:cNvPr>
+          <p:cNvSpPr>
+            <a:spLocks xmlns:a="http://schemas.openxmlformats.org/drawingml/2006/main" noGrp="1"/>
+          </p:cNvSpPr>
+          <p:nvPr/>
+        </p:nvSpPr>
+        <p:spPr>
+          <a:xfrm xmlns:a="http://schemas.openxmlformats.org/drawingml/2006/main">
+            <a:off x="609600" y="981075"/>
+            <a:ext cx="10972800" cy="276225"/>
+          </a:xfrm>
+          <a:prstGeom xmlns:a="http://schemas.openxmlformats.org/drawingml/2006/main" prst="rect">
+            <a:avLst/>
+          </a:prstGeom>
+          <a:noFill xmlns:a="http://schemas.openxmlformats.org/drawingml/2006/main"/>
+          <a:ln xmlns:a="http://schemas.openxmlformats.org/drawingml/2006/main" w="0">
+            <a:noFill/>
+          </a:ln>
+        </p:spPr>
+        <p:txBody>
+          <a:bodyPr xmlns:a="http://schemas.openxmlformats.org/drawingml/2006/main" wrap="square" lIns="0" tIns="0" rIns="0" bIns="0" anchor="t">
+            <a:noAutofit/>
+          </a:bodyPr>
+          <a:lstStyle xmlns:a="http://schemas.openxmlformats.org/drawingml/2006/main">
+            <a:defPPr>
+              <a:defRPr sz="1725" b="0">
+                <a:solidFill>
+                  <a:srgbClr val="245844"/>
+                </a:solidFill>
+                <a:latin typeface="Arial"/>
+                <a:ea typeface="Arial"/>
+                <a:cs typeface="Arial"/>
+              </a:defRPr>
+            </a:defPPr>
+            <a:lvl1pPr>
+              <a:buNone/>
+              <a:defRPr sz="1725" b="0">
+                <a:solidFill>
+                  <a:srgbClr val="245844"/>
+                </a:solidFill>
+                <a:latin typeface="Arial"/>
+                <a:ea typeface="Arial"/>
+                <a:cs typeface="Arial"/>
+              </a:defRPr>
+            </a:lvl1pPr>
+            <a:lvl2pPr>
+              <a:buNone/>
+              <a:defRPr sz="1725" b="0">
+                <a:solidFill>
+                  <a:srgbClr val="245844"/>
+                </a:solidFill>
+                <a:latin typeface="Arial"/>
+                <a:ea typeface="Arial"/>
+                <a:cs typeface="Arial"/>
+              </a:defRPr>
+            </a:lvl2pPr>
+            <a:lvl3pPr>
+              <a:buNone/>
+              <a:defRPr sz="1725" b="0">
+                <a:solidFill>
+                  <a:srgbClr val="245844"/>
+                </a:solidFill>
+                <a:latin typeface="Arial"/>
+                <a:ea typeface="Arial"/>
+                <a:cs typeface="Arial"/>
+              </a:defRPr>
+            </a:lvl3pPr>
+            <a:lvl4pPr>
+              <a:buNone/>
+              <a:defRPr sz="1725" b="0">
+                <a:solidFill>
+                  <a:srgbClr val="245844"/>
+                </a:solidFill>
+                <a:latin typeface="Arial"/>
+                <a:ea typeface="Arial"/>
+                <a:cs typeface="Arial"/>
+              </a:defRPr>
+            </a:lvl4pPr>
+            <a:lvl5pPr>
+              <a:buNone/>
+              <a:defRPr sz="1725" b="0">
+                <a:solidFill>
+                  <a:srgbClr val="245844"/>
+                </a:solidFill>
+                <a:latin typeface="Arial"/>
+                <a:ea typeface="Arial"/>
+                <a:cs typeface="Arial"/>
+              </a:defRPr>
+            </a:lvl5pPr>
+            <a:lvl6pPr>
+              <a:buNone/>
+              <a:defRPr sz="1725" b="0">
+                <a:solidFill>
+                  <a:srgbClr val="245844"/>
+                </a:solidFill>
+                <a:latin typeface="Arial"/>
+                <a:ea typeface="Arial"/>
+                <a:cs typeface="Arial"/>
+              </a:defRPr>
+            </a:lvl6pPr>
+            <a:lvl7pPr>
+              <a:buNone/>
+              <a:defRPr sz="1725" b="0">
+                <a:solidFill>
+                  <a:srgbClr val="245844"/>
+                </a:solidFill>
+                <a:latin typeface="Arial"/>
+                <a:ea typeface="Arial"/>
+                <a:cs typeface="Arial"/>
+              </a:defRPr>
+            </a:lvl7pPr>
+            <a:lvl8pPr>
+              <a:buNone/>
+              <a:defRPr sz="1725" b="0">
+                <a:solidFill>
+                  <a:srgbClr val="245844"/>
+                </a:solidFill>
+                <a:latin typeface="Arial"/>
+                <a:ea typeface="Arial"/>
+                <a:cs typeface="Arial"/>
+              </a:defRPr>
+            </a:lvl8pPr>
+            <a:lvl9pPr>
+              <a:buNone/>
+              <a:defRPr sz="1725" b="0">
+                <a:solidFill>
+                  <a:srgbClr val="245844"/>
+                </a:solidFill>
+                <a:latin typeface="Arial"/>
+                <a:ea typeface="Arial"/>
+                <a:cs typeface="Arial"/>
+              </a:defRPr>
+            </a:lvl9pPr>
+          </a:lstStyle>
+          <a:p xmlns:a="http://schemas.openxmlformats.org/drawingml/2006/main">
+            <a:pPr>
+              <a:buNone/>
+              <a:defRPr sz="1725" b="0">
+                <a:solidFill>
+                  <a:srgbClr val="245844"/>
+                </a:solidFill>
+                <a:latin typeface="Arial"/>
+                <a:ea typeface="Arial"/>
+                <a:cs typeface="Arial"/>
+              </a:defRPr>
+            </a:pPr>
+            <a:r>
+              <a:rPr sz="1725" b="0">
+                <a:solidFill>
+                  <a:srgbClr val="245844"/>
+                </a:solidFill>
+                <a:latin typeface="Arial"/>
+                <a:ea typeface="Arial"/>
+                <a:cs typeface="Arial"/>
+              </a:rPr>
+              <a:t>Public 2025 model and established baseline. All runs fit a 4 GB GPU.</a:t>
             </a:r>
           </a:p>
         </p:txBody>
@@ -14472,7 +17757,7 @@
           <p:cNvPr id="3" name="Chart">
             <a:extLst xmlns:a="http://schemas.openxmlformats.org/drawingml/2006/main">
               <a:ext uri="{FF2B5EF4-FFF2-40B4-BE49-F238E27FC236}">
-                <a16:creationId xmlns:a16="http://schemas.microsoft.com/office/drawing/2014/main" id="{1E3F439C-A12B-4224-8E3B-33F56A8A587A}"/>
+                <a16:creationId xmlns:a16="http://schemas.microsoft.com/office/drawing/2014/main" id="{8A65B4C0-2076-4A73-974A-A477FAA26379}"/>
               </a:ext>
             </a:extLst>
           </p:cNvPr>
@@ -14485,7 +17770,7 @@
         </p:xfrm>
         <a:graphic xmlns:a="http://schemas.openxmlformats.org/drawingml/2006/main">
           <a:graphicData uri="http://schemas.openxmlformats.org/drawingml/2006/chart">
-            <c:chart xmlns:r="http://schemas.openxmlformats.org/officeDocument/2006/relationships" xmlns:c="http://schemas.openxmlformats.org/drawingml/2006/chart" r:id="Rc0620e2b9c4a42a0"/>
+            <c:chart xmlns:r="http://schemas.openxmlformats.org/officeDocument/2006/relationships" xmlns:c="http://schemas.openxmlformats.org/drawingml/2006/chart" r:id="Rc9339718a9ab45b5"/>
           </a:graphicData>
         </a:graphic>
       </p:graphicFrame>
@@ -15747,7 +19032,7 @@
           <p:cNvPr id="3" name="Chart">
             <a:extLst xmlns:a="http://schemas.openxmlformats.org/drawingml/2006/main">
               <a:ext uri="{FF2B5EF4-FFF2-40B4-BE49-F238E27FC236}">
-                <a16:creationId xmlns:a16="http://schemas.microsoft.com/office/drawing/2014/main" id="{ADCAD6F9-ECD9-426F-8FE4-1277F9294A35}"/>
+                <a16:creationId xmlns:a16="http://schemas.microsoft.com/office/drawing/2014/main" id="{22410109-38EB-496E-9E9A-AA5711BC1DBC}"/>
               </a:ext>
             </a:extLst>
           </p:cNvPr>
@@ -15760,7 +19045,7 @@
         </p:xfrm>
         <a:graphic xmlns:a="http://schemas.openxmlformats.org/drawingml/2006/main">
           <a:graphicData uri="http://schemas.openxmlformats.org/drawingml/2006/chart">
-            <c:chart xmlns:r="http://schemas.openxmlformats.org/officeDocument/2006/relationships" xmlns:c="http://schemas.openxmlformats.org/drawingml/2006/chart" r:id="Rffc8289360ef4249"/>
+            <c:chart xmlns:r="http://schemas.openxmlformats.org/officeDocument/2006/relationships" xmlns:c="http://schemas.openxmlformats.org/drawingml/2006/chart" r:id="Rc92222cea4494a1e"/>
           </a:graphicData>
         </a:graphic>
       </p:graphicFrame>
@@ -16902,7 +20187,7 @@
           <p:cNvPr id="3" name="">
             <a:extLst xmlns:a="http://schemas.openxmlformats.org/drawingml/2006/main">
               <a:ext uri="{FF2B5EF4-FFF2-40B4-BE49-F238E27FC236}">
-                <a16:creationId xmlns:a16="http://schemas.microsoft.com/office/drawing/2014/main" id="{5BB12D8E-FA0D-4920-9420-0F01ED63FBC1}"/>
+                <a16:creationId xmlns:a16="http://schemas.microsoft.com/office/drawing/2014/main" id="{A602E60E-29F2-4B28-8253-AD700EB4995C}"/>
               </a:ext>
             </a:extLst>
           </p:cNvPr>
@@ -16912,7 +20197,7 @@
           <p:nvPr/>
         </p:nvPicPr>
         <p:blipFill>
-          <a:blip xmlns:r="http://schemas.openxmlformats.org/officeDocument/2006/relationships" xmlns:a="http://schemas.openxmlformats.org/drawingml/2006/main" r:embed="Rfe56c96202484e8a"/>
+          <a:blip xmlns:r="http://schemas.openxmlformats.org/officeDocument/2006/relationships" xmlns:a="http://schemas.openxmlformats.org/drawingml/2006/main" r:embed="R49fb02a9ed6e4d24"/>
           <a:stretch xmlns:a="http://schemas.openxmlformats.org/drawingml/2006/main"/>
         </p:blipFill>
         <p:spPr>
@@ -16930,7 +20215,7 @@
           <p:cNvPr id="4" name="">
             <a:extLst xmlns:a="http://schemas.openxmlformats.org/drawingml/2006/main">
               <a:ext uri="{FF2B5EF4-FFF2-40B4-BE49-F238E27FC236}">
-                <a16:creationId xmlns:a16="http://schemas.microsoft.com/office/drawing/2014/main" id="{08FC78DC-8F87-448A-B640-559CDA0865ED}"/>
+                <a16:creationId xmlns:a16="http://schemas.microsoft.com/office/drawing/2014/main" id="{B842FB5B-E0B1-42C9-A66B-1590DEC13D48}"/>
               </a:ext>
             </a:extLst>
           </p:cNvPr>
@@ -16940,7 +20225,7 @@
           <p:nvPr/>
         </p:nvPicPr>
         <p:blipFill>
-          <a:blip xmlns:r="http://schemas.openxmlformats.org/officeDocument/2006/relationships" xmlns:a="http://schemas.openxmlformats.org/drawingml/2006/main" r:embed="R1a4ccddae10d43c0"/>
+          <a:blip xmlns:r="http://schemas.openxmlformats.org/officeDocument/2006/relationships" xmlns:a="http://schemas.openxmlformats.org/drawingml/2006/main" r:embed="R31fbbd44f4be4645"/>
           <a:stretch xmlns:a="http://schemas.openxmlformats.org/drawingml/2006/main"/>
         </p:blipFill>
         <p:spPr>
@@ -19704,7 +22989,7 @@
           <p:cNvPr id="3" name="">
             <a:extLst xmlns:a="http://schemas.openxmlformats.org/drawingml/2006/main">
               <a:ext uri="{FF2B5EF4-FFF2-40B4-BE49-F238E27FC236}">
-                <a16:creationId xmlns:a16="http://schemas.microsoft.com/office/drawing/2014/main" id="{2D06B13C-F5AE-4062-893F-CAE3D9EF0318}"/>
+                <a16:creationId xmlns:a16="http://schemas.microsoft.com/office/drawing/2014/main" id="{C0757B48-5990-4FB5-A68C-6E97F5057158}"/>
               </a:ext>
             </a:extLst>
           </p:cNvPr>
@@ -21435,7 +24720,7 @@
           <p:cNvPr id="4" name="">
             <a:extLst xmlns:a="http://schemas.openxmlformats.org/drawingml/2006/main">
               <a:ext uri="{FF2B5EF4-FFF2-40B4-BE49-F238E27FC236}">
-                <a16:creationId xmlns:a16="http://schemas.microsoft.com/office/drawing/2014/main" id="{4564C09F-4BA4-406D-A719-9721A31D3718}"/>
+                <a16:creationId xmlns:a16="http://schemas.microsoft.com/office/drawing/2014/main" id="{92C9D6AB-E25D-4729-9B3C-AC65EC5312B9}"/>
               </a:ext>
             </a:extLst>
           </p:cNvPr>
@@ -22265,7 +25550,7 @@
           <p:cNvPr id="6" name="">
             <a:extLst xmlns:a="http://schemas.openxmlformats.org/drawingml/2006/main">
               <a:ext uri="{FF2B5EF4-FFF2-40B4-BE49-F238E27FC236}">
-                <a16:creationId xmlns:a16="http://schemas.microsoft.com/office/drawing/2014/main" id="{E2F897FE-BD4D-42A7-B1D2-0FD0250452C5}"/>
+                <a16:creationId xmlns:a16="http://schemas.microsoft.com/office/drawing/2014/main" id="{2ED911F7-C25F-4AC4-B249-3586D01573CA}"/>
               </a:ext>
             </a:extLst>
           </p:cNvPr>

--- a/report/presentation/bean_leaf_presentation.pptx
+++ b/report/presentation/bean_leaf_presentation.pptx
@@ -1,27 +1,28 @@
 
 <file path=ppt/presentation.xml><?xml version="1.0" encoding="utf-8"?>
-<p:presentation xmlns:p="http://schemas.openxmlformats.org/presentationml/2006/main">
+<p:presentation xmlns:p="http://schemas.openxmlformats.org/presentationml/2006/main" xmlns:r="http://schemas.openxmlformats.org/officeDocument/2006/relationships">
   <p:sldMasterIdLst>
-    <p:sldMasterId xmlns:r="http://schemas.openxmlformats.org/officeDocument/2006/relationships" id="2147483648" r:id="R8d1e29fb2610412a"/>
+    <p:sldMasterId id="2147483648" r:id="R8d1e29fb2610412a"/>
   </p:sldMasterIdLst>
   <p:notesMasterIdLst>
-    <p:notesMasterId xmlns:r="http://schemas.openxmlformats.org/officeDocument/2006/relationships" r:id="Raeed584cf18a40c8"/>
+    <p:notesMasterId r:id="Raeed584cf18a40c8"/>
   </p:notesMasterIdLst>
   <p:sldIdLst>
-    <p:sldId xmlns:r="http://schemas.openxmlformats.org/officeDocument/2006/relationships" id="256" r:id="R8c6761a122064e61"/>
-    <p:sldId xmlns:r="http://schemas.openxmlformats.org/officeDocument/2006/relationships" id="257" r:id="R20b70ea2929f4f6a"/>
-    <p:sldId xmlns:r="http://schemas.openxmlformats.org/officeDocument/2006/relationships" id="258" r:id="Rfc47d71c478c472a"/>
-    <p:sldId xmlns:r="http://schemas.openxmlformats.org/officeDocument/2006/relationships" id="259" r:id="R516643924a0c4969"/>
-    <p:sldId xmlns:r="http://schemas.openxmlformats.org/officeDocument/2006/relationships" id="260" r:id="R3c38a85682f54675"/>
-    <p:sldId xmlns:r="http://schemas.openxmlformats.org/officeDocument/2006/relationships" id="261" r:id="R461f2e87ed83426e"/>
-    <p:sldId xmlns:r="http://schemas.openxmlformats.org/officeDocument/2006/relationships" id="262" r:id="Rbc92ec54a8f14f89"/>
-    <p:sldId xmlns:r="http://schemas.openxmlformats.org/officeDocument/2006/relationships" id="263" r:id="Rdc2415126a0640d9"/>
-    <p:sldId xmlns:r="http://schemas.openxmlformats.org/officeDocument/2006/relationships" id="264" r:id="R2e368fee74a24384"/>
-    <p:sldId xmlns:r="http://schemas.openxmlformats.org/officeDocument/2006/relationships" id="265" r:id="Rc3791ca9d4364217"/>
-    <p:sldId xmlns:r="http://schemas.openxmlformats.org/officeDocument/2006/relationships" id="266" r:id="R2cb639a7cdcf425d"/>
-    <p:sldId xmlns:r="http://schemas.openxmlformats.org/officeDocument/2006/relationships" id="267" r:id="R33d6c93197dd41be"/>
-    <p:sldId xmlns:r="http://schemas.openxmlformats.org/officeDocument/2006/relationships" id="268" r:id="Rbb972cc46b4a4a49"/>
-    <p:sldId xmlns:r="http://schemas.openxmlformats.org/officeDocument/2006/relationships" id="269" r:id="Rcae02aa00ffe4546"/>
+    <p:sldId id="256" r:id="R8c6761a122064e61"/>
+    <p:sldId id="257" r:id="R20b70ea2929f4f6a"/>
+    <p:sldId id="258" r:id="Rfc47d71c478c472a"/>
+    <p:sldId id="259" r:id="R516643924a0c4969"/>
+    <p:sldId id="260" r:id="R3c38a85682f54675"/>
+    <p:sldId id="261" r:id="R461f2e87ed83426e"/>
+    <p:sldId id="262" r:id="Rbc92ec54a8f14f89"/>
+    <p:sldId id="263" r:id="Rdc2415126a0640d9"/>
+    <p:sldId id="264" r:id="R2e368fee74a24384"/>
+    <p:sldId id="265" r:id="Rc3791ca9d4364217"/>
+    <p:sldId id="266" r:id="R2cb639a7cdcf425d"/>
+    <p:sldId id="267" r:id="R33d6c93197dd41be"/>
+    <p:sldId id="268" r:id="Rbb972cc46b4a4a49"/>
+    <p:sldId id="269" r:id="Rcae02aa00ffe4546"/>
+    <p:sldId id="270" r:id="rIdRepositorySlide"/>
   </p:sldIdLst>
   <p:sldSz cx="12192000" cy="6858000"/>
   <p:notesSz cx="6858000" cy="9144000"/>
@@ -1035,6 +1036,76 @@
 </p:notes>
 </file>
 
+<file path=ppt/notesSlides/notesSlide15.xml><?xml version="1.0" encoding="utf-8"?>
+<p:notes xmlns:p="http://schemas.openxmlformats.org/presentationml/2006/main">
+  <p:cSld>
+    <p:spTree>
+      <p:nvGrpSpPr>
+        <p:cNvPr id="1" name=""/>
+        <p:cNvGrpSpPr/>
+        <p:nvPr/>
+      </p:nvGrpSpPr>
+      <p:grpSpPr>
+        <a:xfrm xmlns:a="http://schemas.openxmlformats.org/drawingml/2006/main"/>
+      </p:grpSpPr>
+      <p:sp>
+        <p:nvSpPr>
+          <p:cNvPr id="2" name="Slide Image Placeholder 1"/>
+          <p:cNvSpPr>
+            <a:spLocks xmlns:a="http://schemas.openxmlformats.org/drawingml/2006/main" noGrp="1"/>
+          </p:cNvSpPr>
+          <p:nvPr>
+            <p:ph type="sldImg" idx="0"/>
+          </p:nvPr>
+        </p:nvSpPr>
+        <p:spPr/>
+      </p:sp>
+      <p:sp>
+        <p:nvSpPr>
+          <p:cNvPr id="3" name="Notes Placeholder 2"/>
+          <p:cNvSpPr>
+            <a:spLocks xmlns:a="http://schemas.openxmlformats.org/drawingml/2006/main" noGrp="1"/>
+          </p:cNvSpPr>
+          <p:nvPr>
+            <p:ph type="body" idx="1"/>
+          </p:nvPr>
+        </p:nvSpPr>
+        <p:spPr/>
+        <p:txBody>
+          <a:bodyPr xmlns:a="http://schemas.openxmlformats.org/drawingml/2006/main"/>
+          <a:lstStyle xmlns:a="http://schemas.openxmlformats.org/drawingml/2006/main"/>
+          <a:p xmlns:a="http://schemas.openxmlformats.org/drawingml/2006/main">
+            <a:r>
+              <a:t>https://github.com/A1Prep/beans-vit-study-2026</a:t>
+            </a:r>
+          </a:p>
+        </p:txBody>
+      </p:sp>
+      <p:sp>
+        <p:nvSpPr>
+          <p:cNvPr id="4" name="Slide Number Placeholder 3"/>
+          <p:cNvSpPr>
+            <a:spLocks xmlns:a="http://schemas.openxmlformats.org/drawingml/2006/main" noGrp="1"/>
+          </p:cNvSpPr>
+          <p:nvPr>
+            <p:ph type="sldNum" idx="5"/>
+          </p:nvPr>
+        </p:nvSpPr>
+        <p:spPr/>
+        <p:txBody>
+          <a:bodyPr xmlns:a="http://schemas.openxmlformats.org/drawingml/2006/main"/>
+          <a:lstStyle xmlns:a="http://schemas.openxmlformats.org/drawingml/2006/main"/>
+          <a:p xmlns:a="http://schemas.openxmlformats.org/drawingml/2006/main"/>
+        </p:txBody>
+      </p:sp>
+    </p:spTree>
+  </p:cSld>
+  <p:clrMapOvr>
+    <a:masterClrMapping xmlns:a="http://schemas.openxmlformats.org/drawingml/2006/main"/>
+  </p:clrMapOvr>
+</p:notes>
+</file>
+
 <file path=ppt/notesSlides/notesSlide2.xml><?xml version="1.0" encoding="utf-8"?>
 <p:notes xmlns:p="http://schemas.openxmlformats.org/presentationml/2006/main">
   <p:cSld>
@@ -13282,6 +13353,194 @@
     <p:extLst>
       <p:ext uri="{BB962C8B-B14F-4D97-AF65-F5344CB8AC3E}">
         <p14:creationId xmlns:p14="http://schemas.microsoft.com/office/powerpoint/2010/main" val="2061399948"/>
+      </p:ext>
+    </p:extLst>
+  </p:cSld>
+</p:sld>
+</file>
+
+<file path=ppt/slides/slide15.xml><?xml version="1.0" encoding="utf-8"?>
+<p:sld xmlns:p="http://schemas.openxmlformats.org/presentationml/2006/main">
+  <p:cSld>
+    <p:bg>
+      <p:bgPr>
+        <a:solidFill xmlns:a="http://schemas.openxmlformats.org/drawingml/2006/main">
+          <a:srgbClr val="FFFFFF"/>
+        </a:solidFill>
+      </p:bgPr>
+    </p:bg>
+    <p:spTree>
+      <p:nvGrpSpPr>
+        <p:cNvPr id="1" name=""/>
+        <p:cNvGrpSpPr/>
+        <p:nvPr/>
+      </p:nvGrpSpPr>
+      <p:grpSpPr>
+        <a:xfrm xmlns:a="http://schemas.openxmlformats.org/drawingml/2006/main"/>
+      </p:grpSpPr>
+      <p:sp>
+        <p:nvSpPr>
+          <p:cNvPr id="2" name="">
+            <a:extLst xmlns:a="http://schemas.openxmlformats.org/drawingml/2006/main">
+              <a:ext uri="{FF2B5EF4-FFF2-40B4-BE49-F238E27FC236}">
+                <a16:creationId xmlns:a16="http://schemas.microsoft.com/office/drawing/2014/main" id="{9079817D-3185-4803-8D1C-2CBCD231878F}"/>
+              </a:ext>
+            </a:extLst>
+          </p:cNvPr>
+          <p:cNvSpPr>
+            <a:spLocks xmlns:a="http://schemas.openxmlformats.org/drawingml/2006/main" noGrp="1"/>
+          </p:cNvSpPr>
+          <p:nvPr/>
+        </p:nvSpPr>
+        <p:spPr>
+          <a:xfrm xmlns:a="http://schemas.openxmlformats.org/drawingml/2006/main">
+            <a:off x="609600" y="3000375"/>
+            <a:ext cx="10972800" cy="857250"/>
+          </a:xfrm>
+          <a:prstGeom xmlns:a="http://schemas.openxmlformats.org/drawingml/2006/main" prst="rect">
+            <a:avLst/>
+          </a:prstGeom>
+          <a:noFill xmlns:a="http://schemas.openxmlformats.org/drawingml/2006/main"/>
+          <a:ln xmlns:a="http://schemas.openxmlformats.org/drawingml/2006/main" w="0">
+            <a:noFill/>
+          </a:ln>
+        </p:spPr>
+        <p:txBody>
+          <a:bodyPr xmlns:a="http://schemas.openxmlformats.org/drawingml/2006/main" wrap="none" lIns="0" tIns="0" rIns="0" bIns="0" anchor="ctr">
+            <a:noAutofit/>
+          </a:bodyPr>
+          <a:lstStyle xmlns:a="http://schemas.openxmlformats.org/drawingml/2006/main">
+            <a:defPPr algn="ctr">
+              <a:defRPr sz="2700">
+                <a:solidFill>
+                  <a:srgbClr val="245844"/>
+                </a:solidFill>
+                <a:latin typeface="Arial"/>
+                <a:ea typeface="Arial"/>
+                <a:cs typeface="Arial"/>
+              </a:defRPr>
+            </a:defPPr>
+            <a:lvl1pPr algn="ctr">
+              <a:defRPr sz="2700">
+                <a:solidFill>
+                  <a:srgbClr val="245844"/>
+                </a:solidFill>
+                <a:latin typeface="Arial"/>
+                <a:ea typeface="Arial"/>
+                <a:cs typeface="Arial"/>
+              </a:defRPr>
+            </a:lvl1pPr>
+            <a:lvl2pPr algn="ctr">
+              <a:defRPr sz="2700">
+                <a:solidFill>
+                  <a:srgbClr val="245844"/>
+                </a:solidFill>
+                <a:latin typeface="Arial"/>
+                <a:ea typeface="Arial"/>
+                <a:cs typeface="Arial"/>
+              </a:defRPr>
+            </a:lvl2pPr>
+            <a:lvl3pPr algn="ctr">
+              <a:defRPr sz="2700">
+                <a:solidFill>
+                  <a:srgbClr val="245844"/>
+                </a:solidFill>
+                <a:latin typeface="Arial"/>
+                <a:ea typeface="Arial"/>
+                <a:cs typeface="Arial"/>
+              </a:defRPr>
+            </a:lvl3pPr>
+            <a:lvl4pPr algn="ctr">
+              <a:defRPr sz="2700">
+                <a:solidFill>
+                  <a:srgbClr val="245844"/>
+                </a:solidFill>
+                <a:latin typeface="Arial"/>
+                <a:ea typeface="Arial"/>
+                <a:cs typeface="Arial"/>
+              </a:defRPr>
+            </a:lvl4pPr>
+            <a:lvl5pPr algn="ctr">
+              <a:defRPr sz="2700">
+                <a:solidFill>
+                  <a:srgbClr val="245844"/>
+                </a:solidFill>
+                <a:latin typeface="Arial"/>
+                <a:ea typeface="Arial"/>
+                <a:cs typeface="Arial"/>
+              </a:defRPr>
+            </a:lvl5pPr>
+            <a:lvl6pPr algn="ctr">
+              <a:defRPr sz="2700">
+                <a:solidFill>
+                  <a:srgbClr val="245844"/>
+                </a:solidFill>
+                <a:latin typeface="Arial"/>
+                <a:ea typeface="Arial"/>
+                <a:cs typeface="Arial"/>
+              </a:defRPr>
+            </a:lvl6pPr>
+            <a:lvl7pPr algn="ctr">
+              <a:defRPr sz="2700">
+                <a:solidFill>
+                  <a:srgbClr val="245844"/>
+                </a:solidFill>
+                <a:latin typeface="Arial"/>
+                <a:ea typeface="Arial"/>
+                <a:cs typeface="Arial"/>
+              </a:defRPr>
+            </a:lvl7pPr>
+            <a:lvl8pPr algn="ctr">
+              <a:defRPr sz="2700">
+                <a:solidFill>
+                  <a:srgbClr val="245844"/>
+                </a:solidFill>
+                <a:latin typeface="Arial"/>
+                <a:ea typeface="Arial"/>
+                <a:cs typeface="Arial"/>
+              </a:defRPr>
+            </a:lvl8pPr>
+            <a:lvl9pPr algn="ctr">
+              <a:defRPr sz="2700">
+                <a:solidFill>
+                  <a:srgbClr val="245844"/>
+                </a:solidFill>
+                <a:latin typeface="Arial"/>
+                <a:ea typeface="Arial"/>
+                <a:cs typeface="Arial"/>
+              </a:defRPr>
+            </a:lvl9pPr>
+          </a:lstStyle>
+          <a:p xmlns:a="http://schemas.openxmlformats.org/drawingml/2006/main">
+            <a:pPr algn="ctr">
+              <a:defRPr sz="2700">
+                <a:solidFill>
+                  <a:srgbClr val="245844"/>
+                </a:solidFill>
+                <a:latin typeface="Arial"/>
+                <a:ea typeface="Arial"/>
+                <a:cs typeface="Arial"/>
+              </a:defRPr>
+            </a:pPr>
+            <a:r>
+              <a:rPr sz="2700">
+                <a:solidFill>
+                  <a:srgbClr val="245844"/>
+                </a:solidFill>
+                <a:latin typeface="Arial"/>
+                <a:ea typeface="Arial"/>
+                <a:cs typeface="Arial"/>
+                <a:hlinkClick xmlns:r="http://schemas.openxmlformats.org/officeDocument/2006/relationships" r:id="Rf05adace525345c0"/>
+              </a:rPr>
+              <a:t>https://github.com/A1Prep/beans-vit-study-2026</a:t>
+            </a:r>
+          </a:p>
+        </p:txBody>
+      </p:sp>
+    </p:spTree>
+    <p:extLst>
+      <p:ext uri="{BB962C8B-B14F-4D97-AF65-F5344CB8AC3E}">
+        <p14:creationId xmlns:p14="http://schemas.microsoft.com/office/powerpoint/2010/main" val="1117585964"/>
       </p:ext>
     </p:extLst>
   </p:cSld>
